--- a/task21-v2014-intro-ppt/ppt/v9-editable/测试能力成熟度2025-2026演进-v9-全可编辑版.pptx
+++ b/task21-v2014-intro-ppt/ppt/v9-editable/测试能力成熟度2025-2026演进-v9-全可编辑版.pptx
@@ -129,7 +129,7 @@
           <p:cNvPr id="2" name="标题 1">
             <a:extLst>
               <a:ext uri="{FF2B5EF4-FFF2-40B4-BE49-F238E27FC236}">
-                <a16:creationId xmlns:a16="http://schemas.microsoft.com/office/drawing/2014/main" id="{94791FAC-8453-7C06-BF4E-D05612D56CCA}"/>
+                <a16:creationId xmlns:a16="http://schemas.microsoft.com/office/drawing/2014/main" id="{EAFB8D4B-BA61-3A09-6D75-60B069CBC3EE}"/>
               </a:ext>
             </a:extLst>
           </p:cNvPr>
@@ -166,7 +166,7 @@
           <p:cNvPr id="3" name="副标题 2">
             <a:extLst>
               <a:ext uri="{FF2B5EF4-FFF2-40B4-BE49-F238E27FC236}">
-                <a16:creationId xmlns:a16="http://schemas.microsoft.com/office/drawing/2014/main" id="{3D8881C7-97F8-9E6D-D237-BB8FC7573BFA}"/>
+                <a16:creationId xmlns:a16="http://schemas.microsoft.com/office/drawing/2014/main" id="{D4D2B10A-9790-4BB9-E1F4-31AD841FF84B}"/>
               </a:ext>
             </a:extLst>
           </p:cNvPr>
@@ -236,7 +236,7 @@
           <p:cNvPr id="4" name="日期占位符 3">
             <a:extLst>
               <a:ext uri="{FF2B5EF4-FFF2-40B4-BE49-F238E27FC236}">
-                <a16:creationId xmlns:a16="http://schemas.microsoft.com/office/drawing/2014/main" id="{D8E3C0C6-0F06-AD7A-BBB4-5194B2B8D4E2}"/>
+                <a16:creationId xmlns:a16="http://schemas.microsoft.com/office/drawing/2014/main" id="{BA5EC15E-0283-448B-717B-4D42CABF27FE}"/>
               </a:ext>
             </a:extLst>
           </p:cNvPr>
@@ -252,7 +252,7 @@
           <a:bodyPr/>
           <a:lstStyle/>
           <a:p>
-            <a:fld id="{E7EE7F02-A011-48D5-9960-E75B2928CF9E}" type="datetimeFigureOut">
+            <a:fld id="{2FDE9D3F-E143-4602-8078-346190A47E90}" type="datetimeFigureOut">
               <a:rPr lang="zh-CN" altLang="en-US" smtClean="0"/>
               <a:t>2026/9/3</a:t>
             </a:fld>
@@ -265,7 +265,7 @@
           <p:cNvPr id="5" name="页脚占位符 4">
             <a:extLst>
               <a:ext uri="{FF2B5EF4-FFF2-40B4-BE49-F238E27FC236}">
-                <a16:creationId xmlns:a16="http://schemas.microsoft.com/office/drawing/2014/main" id="{F214493D-0C12-2A5B-AA85-2F6220A98164}"/>
+                <a16:creationId xmlns:a16="http://schemas.microsoft.com/office/drawing/2014/main" id="{B1325F92-086E-DD16-72D4-F1BBA5FD6CA5}"/>
               </a:ext>
             </a:extLst>
           </p:cNvPr>
@@ -290,7 +290,7 @@
           <p:cNvPr id="6" name="灯片编号占位符 5">
             <a:extLst>
               <a:ext uri="{FF2B5EF4-FFF2-40B4-BE49-F238E27FC236}">
-                <a16:creationId xmlns:a16="http://schemas.microsoft.com/office/drawing/2014/main" id="{051F1FAB-BA03-AA9A-7FDA-EAF952ED4C85}"/>
+                <a16:creationId xmlns:a16="http://schemas.microsoft.com/office/drawing/2014/main" id="{05E82B95-EB4B-8A55-FF7B-279ADF2A5847}"/>
               </a:ext>
             </a:extLst>
           </p:cNvPr>
@@ -306,7 +306,7 @@
           <a:bodyPr/>
           <a:lstStyle/>
           <a:p>
-            <a:fld id="{E4681510-9358-42F6-A372-452926C289F9}" type="slidenum">
+            <a:fld id="{DCD2ED74-13CD-45B1-AA1C-6BC2C44D28CB}" type="slidenum">
               <a:rPr lang="zh-CN" altLang="en-US" smtClean="0"/>
               <a:t>‹#›</a:t>
             </a:fld>
@@ -317,7 +317,7 @@
     </p:spTree>
     <p:extLst>
       <p:ext uri="{BB962C8B-B14F-4D97-AF65-F5344CB8AC3E}">
-        <p14:creationId xmlns:p14="http://schemas.microsoft.com/office/powerpoint/2010/main" val="663175532"/>
+        <p14:creationId xmlns:p14="http://schemas.microsoft.com/office/powerpoint/2010/main" val="497643700"/>
       </p:ext>
     </p:extLst>
   </p:cSld>
@@ -349,7 +349,7 @@
           <p:cNvPr id="2" name="标题 1">
             <a:extLst>
               <a:ext uri="{FF2B5EF4-FFF2-40B4-BE49-F238E27FC236}">
-                <a16:creationId xmlns:a16="http://schemas.microsoft.com/office/drawing/2014/main" id="{BDFF87DE-32A8-0FAD-DEF5-D47C4BA9E24F}"/>
+                <a16:creationId xmlns:a16="http://schemas.microsoft.com/office/drawing/2014/main" id="{394FEAB4-B5C2-A6DA-8120-D71DD001CBDC}"/>
               </a:ext>
             </a:extLst>
           </p:cNvPr>
@@ -377,7 +377,7 @@
           <p:cNvPr id="3" name="竖排文字占位符 2">
             <a:extLst>
               <a:ext uri="{FF2B5EF4-FFF2-40B4-BE49-F238E27FC236}">
-                <a16:creationId xmlns:a16="http://schemas.microsoft.com/office/drawing/2014/main" id="{A0130303-8B8C-5936-3AAB-664866AF9E01}"/>
+                <a16:creationId xmlns:a16="http://schemas.microsoft.com/office/drawing/2014/main" id="{325410F3-2CEC-D511-19CF-136A896A6428}"/>
               </a:ext>
             </a:extLst>
           </p:cNvPr>
@@ -434,7 +434,7 @@
           <p:cNvPr id="4" name="日期占位符 3">
             <a:extLst>
               <a:ext uri="{FF2B5EF4-FFF2-40B4-BE49-F238E27FC236}">
-                <a16:creationId xmlns:a16="http://schemas.microsoft.com/office/drawing/2014/main" id="{A9293A89-8998-DFB0-D6ED-FE7D5816FB3E}"/>
+                <a16:creationId xmlns:a16="http://schemas.microsoft.com/office/drawing/2014/main" id="{4AADA76D-4409-6296-9661-6916B60F00A2}"/>
               </a:ext>
             </a:extLst>
           </p:cNvPr>
@@ -450,7 +450,7 @@
           <a:bodyPr/>
           <a:lstStyle/>
           <a:p>
-            <a:fld id="{E7EE7F02-A011-48D5-9960-E75B2928CF9E}" type="datetimeFigureOut">
+            <a:fld id="{2FDE9D3F-E143-4602-8078-346190A47E90}" type="datetimeFigureOut">
               <a:rPr lang="zh-CN" altLang="en-US" smtClean="0"/>
               <a:t>2026/9/3</a:t>
             </a:fld>
@@ -463,7 +463,7 @@
           <p:cNvPr id="5" name="页脚占位符 4">
             <a:extLst>
               <a:ext uri="{FF2B5EF4-FFF2-40B4-BE49-F238E27FC236}">
-                <a16:creationId xmlns:a16="http://schemas.microsoft.com/office/drawing/2014/main" id="{91D8453C-CF16-17A4-AAB7-97AC933BA546}"/>
+                <a16:creationId xmlns:a16="http://schemas.microsoft.com/office/drawing/2014/main" id="{A4BF4ACB-8055-B4B7-2BC8-0B9117C66C2C}"/>
               </a:ext>
             </a:extLst>
           </p:cNvPr>
@@ -488,7 +488,7 @@
           <p:cNvPr id="6" name="灯片编号占位符 5">
             <a:extLst>
               <a:ext uri="{FF2B5EF4-FFF2-40B4-BE49-F238E27FC236}">
-                <a16:creationId xmlns:a16="http://schemas.microsoft.com/office/drawing/2014/main" id="{EDD08B2A-E7BE-3D69-83E6-FA093284609B}"/>
+                <a16:creationId xmlns:a16="http://schemas.microsoft.com/office/drawing/2014/main" id="{601A6821-2C0C-47E3-BB97-62E87DD3F76A}"/>
               </a:ext>
             </a:extLst>
           </p:cNvPr>
@@ -504,7 +504,7 @@
           <a:bodyPr/>
           <a:lstStyle/>
           <a:p>
-            <a:fld id="{E4681510-9358-42F6-A372-452926C289F9}" type="slidenum">
+            <a:fld id="{DCD2ED74-13CD-45B1-AA1C-6BC2C44D28CB}" type="slidenum">
               <a:rPr lang="zh-CN" altLang="en-US" smtClean="0"/>
               <a:t>‹#›</a:t>
             </a:fld>
@@ -515,7 +515,7 @@
     </p:spTree>
     <p:extLst>
       <p:ext uri="{BB962C8B-B14F-4D97-AF65-F5344CB8AC3E}">
-        <p14:creationId xmlns:p14="http://schemas.microsoft.com/office/powerpoint/2010/main" val="3498024799"/>
+        <p14:creationId xmlns:p14="http://schemas.microsoft.com/office/powerpoint/2010/main" val="734399179"/>
       </p:ext>
     </p:extLst>
   </p:cSld>
@@ -547,7 +547,7 @@
           <p:cNvPr id="2" name="竖排标题 1">
             <a:extLst>
               <a:ext uri="{FF2B5EF4-FFF2-40B4-BE49-F238E27FC236}">
-                <a16:creationId xmlns:a16="http://schemas.microsoft.com/office/drawing/2014/main" id="{3C8A5D0A-BDFC-9A5F-C9E3-5388C0DFF06A}"/>
+                <a16:creationId xmlns:a16="http://schemas.microsoft.com/office/drawing/2014/main" id="{02C148C2-C21F-6487-C2E5-0D25ADAF4436}"/>
               </a:ext>
             </a:extLst>
           </p:cNvPr>
@@ -580,7 +580,7 @@
           <p:cNvPr id="3" name="竖排文字占位符 2">
             <a:extLst>
               <a:ext uri="{FF2B5EF4-FFF2-40B4-BE49-F238E27FC236}">
-                <a16:creationId xmlns:a16="http://schemas.microsoft.com/office/drawing/2014/main" id="{6C1E1B69-E40C-D08F-5F1B-63B086D85141}"/>
+                <a16:creationId xmlns:a16="http://schemas.microsoft.com/office/drawing/2014/main" id="{D41B4BD1-CCA2-2979-97CA-14B59184FD8A}"/>
               </a:ext>
             </a:extLst>
           </p:cNvPr>
@@ -642,7 +642,7 @@
           <p:cNvPr id="4" name="日期占位符 3">
             <a:extLst>
               <a:ext uri="{FF2B5EF4-FFF2-40B4-BE49-F238E27FC236}">
-                <a16:creationId xmlns:a16="http://schemas.microsoft.com/office/drawing/2014/main" id="{83C1A01D-2B92-7C10-47E0-B23E1F3E41CC}"/>
+                <a16:creationId xmlns:a16="http://schemas.microsoft.com/office/drawing/2014/main" id="{CCEEEF1B-7E23-2A0C-966E-E7C755B375BF}"/>
               </a:ext>
             </a:extLst>
           </p:cNvPr>
@@ -658,7 +658,7 @@
           <a:bodyPr/>
           <a:lstStyle/>
           <a:p>
-            <a:fld id="{E7EE7F02-A011-48D5-9960-E75B2928CF9E}" type="datetimeFigureOut">
+            <a:fld id="{2FDE9D3F-E143-4602-8078-346190A47E90}" type="datetimeFigureOut">
               <a:rPr lang="zh-CN" altLang="en-US" smtClean="0"/>
               <a:t>2026/9/3</a:t>
             </a:fld>
@@ -671,7 +671,7 @@
           <p:cNvPr id="5" name="页脚占位符 4">
             <a:extLst>
               <a:ext uri="{FF2B5EF4-FFF2-40B4-BE49-F238E27FC236}">
-                <a16:creationId xmlns:a16="http://schemas.microsoft.com/office/drawing/2014/main" id="{71B1D790-1E3B-EAC7-066A-211925C3CDEF}"/>
+                <a16:creationId xmlns:a16="http://schemas.microsoft.com/office/drawing/2014/main" id="{141450E7-1B32-48BC-D90B-0A215F3027DD}"/>
               </a:ext>
             </a:extLst>
           </p:cNvPr>
@@ -696,7 +696,7 @@
           <p:cNvPr id="6" name="灯片编号占位符 5">
             <a:extLst>
               <a:ext uri="{FF2B5EF4-FFF2-40B4-BE49-F238E27FC236}">
-                <a16:creationId xmlns:a16="http://schemas.microsoft.com/office/drawing/2014/main" id="{9AB4E375-25D6-55C9-3045-4905A6A21560}"/>
+                <a16:creationId xmlns:a16="http://schemas.microsoft.com/office/drawing/2014/main" id="{4BE6DC28-049C-50EC-DF7B-A414203E755D}"/>
               </a:ext>
             </a:extLst>
           </p:cNvPr>
@@ -712,7 +712,7 @@
           <a:bodyPr/>
           <a:lstStyle/>
           <a:p>
-            <a:fld id="{E4681510-9358-42F6-A372-452926C289F9}" type="slidenum">
+            <a:fld id="{DCD2ED74-13CD-45B1-AA1C-6BC2C44D28CB}" type="slidenum">
               <a:rPr lang="zh-CN" altLang="en-US" smtClean="0"/>
               <a:t>‹#›</a:t>
             </a:fld>
@@ -723,7 +723,7 @@
     </p:spTree>
     <p:extLst>
       <p:ext uri="{BB962C8B-B14F-4D97-AF65-F5344CB8AC3E}">
-        <p14:creationId xmlns:p14="http://schemas.microsoft.com/office/powerpoint/2010/main" val="3642542039"/>
+        <p14:creationId xmlns:p14="http://schemas.microsoft.com/office/powerpoint/2010/main" val="897368540"/>
       </p:ext>
     </p:extLst>
   </p:cSld>
@@ -755,7 +755,7 @@
           <p:cNvPr id="2" name="标题 1">
             <a:extLst>
               <a:ext uri="{FF2B5EF4-FFF2-40B4-BE49-F238E27FC236}">
-                <a16:creationId xmlns:a16="http://schemas.microsoft.com/office/drawing/2014/main" id="{E318010E-2160-A6C0-F3FB-0467DD550020}"/>
+                <a16:creationId xmlns:a16="http://schemas.microsoft.com/office/drawing/2014/main" id="{9DCA80CC-731F-A31D-0BDD-DC7916F2202E}"/>
               </a:ext>
             </a:extLst>
           </p:cNvPr>
@@ -783,7 +783,7 @@
           <p:cNvPr id="3" name="内容占位符 2">
             <a:extLst>
               <a:ext uri="{FF2B5EF4-FFF2-40B4-BE49-F238E27FC236}">
-                <a16:creationId xmlns:a16="http://schemas.microsoft.com/office/drawing/2014/main" id="{380E5BB9-9EFC-53B1-D6DA-AA07A30E494F}"/>
+                <a16:creationId xmlns:a16="http://schemas.microsoft.com/office/drawing/2014/main" id="{BB402D87-58C6-4CC8-96A6-5A25C9D2354C}"/>
               </a:ext>
             </a:extLst>
           </p:cNvPr>
@@ -840,7 +840,7 @@
           <p:cNvPr id="4" name="日期占位符 3">
             <a:extLst>
               <a:ext uri="{FF2B5EF4-FFF2-40B4-BE49-F238E27FC236}">
-                <a16:creationId xmlns:a16="http://schemas.microsoft.com/office/drawing/2014/main" id="{4DC85BF8-CE7B-A24A-39D1-9D94088E68C4}"/>
+                <a16:creationId xmlns:a16="http://schemas.microsoft.com/office/drawing/2014/main" id="{604D72AF-EC22-4AFE-F34B-7516FFFE4593}"/>
               </a:ext>
             </a:extLst>
           </p:cNvPr>
@@ -856,7 +856,7 @@
           <a:bodyPr/>
           <a:lstStyle/>
           <a:p>
-            <a:fld id="{E7EE7F02-A011-48D5-9960-E75B2928CF9E}" type="datetimeFigureOut">
+            <a:fld id="{2FDE9D3F-E143-4602-8078-346190A47E90}" type="datetimeFigureOut">
               <a:rPr lang="zh-CN" altLang="en-US" smtClean="0"/>
               <a:t>2026/9/3</a:t>
             </a:fld>
@@ -869,7 +869,7 @@
           <p:cNvPr id="5" name="页脚占位符 4">
             <a:extLst>
               <a:ext uri="{FF2B5EF4-FFF2-40B4-BE49-F238E27FC236}">
-                <a16:creationId xmlns:a16="http://schemas.microsoft.com/office/drawing/2014/main" id="{CD74315E-5263-8995-AEAC-CF867977EDDA}"/>
+                <a16:creationId xmlns:a16="http://schemas.microsoft.com/office/drawing/2014/main" id="{CF756CE8-DBDE-CE44-0BD1-51F460DD2E84}"/>
               </a:ext>
             </a:extLst>
           </p:cNvPr>
@@ -894,7 +894,7 @@
           <p:cNvPr id="6" name="灯片编号占位符 5">
             <a:extLst>
               <a:ext uri="{FF2B5EF4-FFF2-40B4-BE49-F238E27FC236}">
-                <a16:creationId xmlns:a16="http://schemas.microsoft.com/office/drawing/2014/main" id="{8D8EA9DA-08AD-7B6A-5FB3-6BCBCE5D0F54}"/>
+                <a16:creationId xmlns:a16="http://schemas.microsoft.com/office/drawing/2014/main" id="{7380E878-6EA3-B36C-93B9-4395E0BACA16}"/>
               </a:ext>
             </a:extLst>
           </p:cNvPr>
@@ -910,7 +910,7 @@
           <a:bodyPr/>
           <a:lstStyle/>
           <a:p>
-            <a:fld id="{E4681510-9358-42F6-A372-452926C289F9}" type="slidenum">
+            <a:fld id="{DCD2ED74-13CD-45B1-AA1C-6BC2C44D28CB}" type="slidenum">
               <a:rPr lang="zh-CN" altLang="en-US" smtClean="0"/>
               <a:t>‹#›</a:t>
             </a:fld>
@@ -921,7 +921,7 @@
     </p:spTree>
     <p:extLst>
       <p:ext uri="{BB962C8B-B14F-4D97-AF65-F5344CB8AC3E}">
-        <p14:creationId xmlns:p14="http://schemas.microsoft.com/office/powerpoint/2010/main" val="3672925193"/>
+        <p14:creationId xmlns:p14="http://schemas.microsoft.com/office/powerpoint/2010/main" val="252257129"/>
       </p:ext>
     </p:extLst>
   </p:cSld>
@@ -953,7 +953,7 @@
           <p:cNvPr id="2" name="标题 1">
             <a:extLst>
               <a:ext uri="{FF2B5EF4-FFF2-40B4-BE49-F238E27FC236}">
-                <a16:creationId xmlns:a16="http://schemas.microsoft.com/office/drawing/2014/main" id="{EE861456-12AA-084D-A426-605FF9868F67}"/>
+                <a16:creationId xmlns:a16="http://schemas.microsoft.com/office/drawing/2014/main" id="{02489E1B-A6B8-D790-B40F-0969229C2DE2}"/>
               </a:ext>
             </a:extLst>
           </p:cNvPr>
@@ -990,7 +990,7 @@
           <p:cNvPr id="3" name="文本占位符 2">
             <a:extLst>
               <a:ext uri="{FF2B5EF4-FFF2-40B4-BE49-F238E27FC236}">
-                <a16:creationId xmlns:a16="http://schemas.microsoft.com/office/drawing/2014/main" id="{1E8B0E57-1D63-493E-0588-5D328FE86D21}"/>
+                <a16:creationId xmlns:a16="http://schemas.microsoft.com/office/drawing/2014/main" id="{5C455EAE-C29B-D9F8-4955-4FB8387DA7C8}"/>
               </a:ext>
             </a:extLst>
           </p:cNvPr>
@@ -1115,7 +1115,7 @@
           <p:cNvPr id="4" name="日期占位符 3">
             <a:extLst>
               <a:ext uri="{FF2B5EF4-FFF2-40B4-BE49-F238E27FC236}">
-                <a16:creationId xmlns:a16="http://schemas.microsoft.com/office/drawing/2014/main" id="{AE95EFEA-AA27-6A1C-02E3-1222E983D018}"/>
+                <a16:creationId xmlns:a16="http://schemas.microsoft.com/office/drawing/2014/main" id="{1773253E-18AC-4117-9CAD-6049713EFB77}"/>
               </a:ext>
             </a:extLst>
           </p:cNvPr>
@@ -1131,7 +1131,7 @@
           <a:bodyPr/>
           <a:lstStyle/>
           <a:p>
-            <a:fld id="{E7EE7F02-A011-48D5-9960-E75B2928CF9E}" type="datetimeFigureOut">
+            <a:fld id="{2FDE9D3F-E143-4602-8078-346190A47E90}" type="datetimeFigureOut">
               <a:rPr lang="zh-CN" altLang="en-US" smtClean="0"/>
               <a:t>2026/9/3</a:t>
             </a:fld>
@@ -1144,7 +1144,7 @@
           <p:cNvPr id="5" name="页脚占位符 4">
             <a:extLst>
               <a:ext uri="{FF2B5EF4-FFF2-40B4-BE49-F238E27FC236}">
-                <a16:creationId xmlns:a16="http://schemas.microsoft.com/office/drawing/2014/main" id="{69F8BAD5-A7A0-4C21-0494-40A5C4260893}"/>
+                <a16:creationId xmlns:a16="http://schemas.microsoft.com/office/drawing/2014/main" id="{995D617C-0C6C-D9FE-872B-A13D5B9CCF72}"/>
               </a:ext>
             </a:extLst>
           </p:cNvPr>
@@ -1169,7 +1169,7 @@
           <p:cNvPr id="6" name="灯片编号占位符 5">
             <a:extLst>
               <a:ext uri="{FF2B5EF4-FFF2-40B4-BE49-F238E27FC236}">
-                <a16:creationId xmlns:a16="http://schemas.microsoft.com/office/drawing/2014/main" id="{67A8D7DE-0785-604A-2A61-83B43C4CAE3F}"/>
+                <a16:creationId xmlns:a16="http://schemas.microsoft.com/office/drawing/2014/main" id="{83122D62-2996-6CFF-5FD8-23BF0DE54B82}"/>
               </a:ext>
             </a:extLst>
           </p:cNvPr>
@@ -1185,7 +1185,7 @@
           <a:bodyPr/>
           <a:lstStyle/>
           <a:p>
-            <a:fld id="{E4681510-9358-42F6-A372-452926C289F9}" type="slidenum">
+            <a:fld id="{DCD2ED74-13CD-45B1-AA1C-6BC2C44D28CB}" type="slidenum">
               <a:rPr lang="zh-CN" altLang="en-US" smtClean="0"/>
               <a:t>‹#›</a:t>
             </a:fld>
@@ -1196,7 +1196,7 @@
     </p:spTree>
     <p:extLst>
       <p:ext uri="{BB962C8B-B14F-4D97-AF65-F5344CB8AC3E}">
-        <p14:creationId xmlns:p14="http://schemas.microsoft.com/office/powerpoint/2010/main" val="2524587917"/>
+        <p14:creationId xmlns:p14="http://schemas.microsoft.com/office/powerpoint/2010/main" val="3263970717"/>
       </p:ext>
     </p:extLst>
   </p:cSld>
@@ -1228,7 +1228,7 @@
           <p:cNvPr id="2" name="标题 1">
             <a:extLst>
               <a:ext uri="{FF2B5EF4-FFF2-40B4-BE49-F238E27FC236}">
-                <a16:creationId xmlns:a16="http://schemas.microsoft.com/office/drawing/2014/main" id="{29DBBD86-1E76-C129-AA51-6DDD94BF4848}"/>
+                <a16:creationId xmlns:a16="http://schemas.microsoft.com/office/drawing/2014/main" id="{9A2AB8E5-E1F0-ADAE-C865-DC6C6F78EFE9}"/>
               </a:ext>
             </a:extLst>
           </p:cNvPr>
@@ -1256,7 +1256,7 @@
           <p:cNvPr id="3" name="内容占位符 2">
             <a:extLst>
               <a:ext uri="{FF2B5EF4-FFF2-40B4-BE49-F238E27FC236}">
-                <a16:creationId xmlns:a16="http://schemas.microsoft.com/office/drawing/2014/main" id="{8F2B0A10-8BB3-6CA7-70BB-88447D81E7E9}"/>
+                <a16:creationId xmlns:a16="http://schemas.microsoft.com/office/drawing/2014/main" id="{65D4E322-7497-3112-EB2A-803022697D6C}"/>
               </a:ext>
             </a:extLst>
           </p:cNvPr>
@@ -1318,7 +1318,7 @@
           <p:cNvPr id="4" name="内容占位符 3">
             <a:extLst>
               <a:ext uri="{FF2B5EF4-FFF2-40B4-BE49-F238E27FC236}">
-                <a16:creationId xmlns:a16="http://schemas.microsoft.com/office/drawing/2014/main" id="{E864F7BA-C6F2-8217-3F5A-2C93D22E3291}"/>
+                <a16:creationId xmlns:a16="http://schemas.microsoft.com/office/drawing/2014/main" id="{AEDEDD0F-192A-42D0-6273-192B0D22246D}"/>
               </a:ext>
             </a:extLst>
           </p:cNvPr>
@@ -1380,7 +1380,7 @@
           <p:cNvPr id="5" name="日期占位符 4">
             <a:extLst>
               <a:ext uri="{FF2B5EF4-FFF2-40B4-BE49-F238E27FC236}">
-                <a16:creationId xmlns:a16="http://schemas.microsoft.com/office/drawing/2014/main" id="{DCA838FB-3A03-2EBE-F54C-E2707C828686}"/>
+                <a16:creationId xmlns:a16="http://schemas.microsoft.com/office/drawing/2014/main" id="{3003BAC2-893C-B1D6-0BCC-E4BCD7F587E7}"/>
               </a:ext>
             </a:extLst>
           </p:cNvPr>
@@ -1396,7 +1396,7 @@
           <a:bodyPr/>
           <a:lstStyle/>
           <a:p>
-            <a:fld id="{E7EE7F02-A011-48D5-9960-E75B2928CF9E}" type="datetimeFigureOut">
+            <a:fld id="{2FDE9D3F-E143-4602-8078-346190A47E90}" type="datetimeFigureOut">
               <a:rPr lang="zh-CN" altLang="en-US" smtClean="0"/>
               <a:t>2026/9/3</a:t>
             </a:fld>
@@ -1409,7 +1409,7 @@
           <p:cNvPr id="6" name="页脚占位符 5">
             <a:extLst>
               <a:ext uri="{FF2B5EF4-FFF2-40B4-BE49-F238E27FC236}">
-                <a16:creationId xmlns:a16="http://schemas.microsoft.com/office/drawing/2014/main" id="{EBD7EA70-CA03-0EC8-B9E8-9999E0C7E2C2}"/>
+                <a16:creationId xmlns:a16="http://schemas.microsoft.com/office/drawing/2014/main" id="{8DD35B07-DBA8-5D3F-5DFD-692319D6B556}"/>
               </a:ext>
             </a:extLst>
           </p:cNvPr>
@@ -1434,7 +1434,7 @@
           <p:cNvPr id="7" name="灯片编号占位符 6">
             <a:extLst>
               <a:ext uri="{FF2B5EF4-FFF2-40B4-BE49-F238E27FC236}">
-                <a16:creationId xmlns:a16="http://schemas.microsoft.com/office/drawing/2014/main" id="{FCAC6D7E-5504-56C1-04FA-70E754F489A2}"/>
+                <a16:creationId xmlns:a16="http://schemas.microsoft.com/office/drawing/2014/main" id="{E2DB5DB9-47D0-650A-0BBD-9E658147F073}"/>
               </a:ext>
             </a:extLst>
           </p:cNvPr>
@@ -1450,7 +1450,7 @@
           <a:bodyPr/>
           <a:lstStyle/>
           <a:p>
-            <a:fld id="{E4681510-9358-42F6-A372-452926C289F9}" type="slidenum">
+            <a:fld id="{DCD2ED74-13CD-45B1-AA1C-6BC2C44D28CB}" type="slidenum">
               <a:rPr lang="zh-CN" altLang="en-US" smtClean="0"/>
               <a:t>‹#›</a:t>
             </a:fld>
@@ -1461,7 +1461,7 @@
     </p:spTree>
     <p:extLst>
       <p:ext uri="{BB962C8B-B14F-4D97-AF65-F5344CB8AC3E}">
-        <p14:creationId xmlns:p14="http://schemas.microsoft.com/office/powerpoint/2010/main" val="651963245"/>
+        <p14:creationId xmlns:p14="http://schemas.microsoft.com/office/powerpoint/2010/main" val="2502700938"/>
       </p:ext>
     </p:extLst>
   </p:cSld>
@@ -1493,7 +1493,7 @@
           <p:cNvPr id="2" name="标题 1">
             <a:extLst>
               <a:ext uri="{FF2B5EF4-FFF2-40B4-BE49-F238E27FC236}">
-                <a16:creationId xmlns:a16="http://schemas.microsoft.com/office/drawing/2014/main" id="{C6A62440-FAD8-10E3-D443-ACE2913F7777}"/>
+                <a16:creationId xmlns:a16="http://schemas.microsoft.com/office/drawing/2014/main" id="{75C3A993-9321-BEDD-1F47-8F014BEDC442}"/>
               </a:ext>
             </a:extLst>
           </p:cNvPr>
@@ -1526,7 +1526,7 @@
           <p:cNvPr id="3" name="文本占位符 2">
             <a:extLst>
               <a:ext uri="{FF2B5EF4-FFF2-40B4-BE49-F238E27FC236}">
-                <a16:creationId xmlns:a16="http://schemas.microsoft.com/office/drawing/2014/main" id="{BC3F4DBF-1540-19C5-30D6-64D1A4192C40}"/>
+                <a16:creationId xmlns:a16="http://schemas.microsoft.com/office/drawing/2014/main" id="{74BF5C6F-F636-2F44-F894-83A09307D604}"/>
               </a:ext>
             </a:extLst>
           </p:cNvPr>
@@ -1597,7 +1597,7 @@
           <p:cNvPr id="4" name="内容占位符 3">
             <a:extLst>
               <a:ext uri="{FF2B5EF4-FFF2-40B4-BE49-F238E27FC236}">
-                <a16:creationId xmlns:a16="http://schemas.microsoft.com/office/drawing/2014/main" id="{5BBAC86C-921B-70DB-0383-7A5ECCD8FB7F}"/>
+                <a16:creationId xmlns:a16="http://schemas.microsoft.com/office/drawing/2014/main" id="{FE7A7EF4-B789-02EA-C824-072FFEDF22E4}"/>
               </a:ext>
             </a:extLst>
           </p:cNvPr>
@@ -1659,7 +1659,7 @@
           <p:cNvPr id="5" name="文本占位符 4">
             <a:extLst>
               <a:ext uri="{FF2B5EF4-FFF2-40B4-BE49-F238E27FC236}">
-                <a16:creationId xmlns:a16="http://schemas.microsoft.com/office/drawing/2014/main" id="{1C51C7E8-01B6-238F-6564-FB2AFA4F754E}"/>
+                <a16:creationId xmlns:a16="http://schemas.microsoft.com/office/drawing/2014/main" id="{62FECEC0-859A-27E6-0952-EE48064FA966}"/>
               </a:ext>
             </a:extLst>
           </p:cNvPr>
@@ -1730,7 +1730,7 @@
           <p:cNvPr id="6" name="内容占位符 5">
             <a:extLst>
               <a:ext uri="{FF2B5EF4-FFF2-40B4-BE49-F238E27FC236}">
-                <a16:creationId xmlns:a16="http://schemas.microsoft.com/office/drawing/2014/main" id="{2BFC3A5E-3E4D-DAE0-037A-1E519F17FEE3}"/>
+                <a16:creationId xmlns:a16="http://schemas.microsoft.com/office/drawing/2014/main" id="{2E99BE4F-4B73-2C87-5F17-8A55C0AD66D0}"/>
               </a:ext>
             </a:extLst>
           </p:cNvPr>
@@ -1792,7 +1792,7 @@
           <p:cNvPr id="7" name="日期占位符 6">
             <a:extLst>
               <a:ext uri="{FF2B5EF4-FFF2-40B4-BE49-F238E27FC236}">
-                <a16:creationId xmlns:a16="http://schemas.microsoft.com/office/drawing/2014/main" id="{131C4D91-25E1-62DA-3B1B-B2203814C758}"/>
+                <a16:creationId xmlns:a16="http://schemas.microsoft.com/office/drawing/2014/main" id="{23E2BBC6-CFAC-2811-6F28-A45D69E03D0B}"/>
               </a:ext>
             </a:extLst>
           </p:cNvPr>
@@ -1808,7 +1808,7 @@
           <a:bodyPr/>
           <a:lstStyle/>
           <a:p>
-            <a:fld id="{E7EE7F02-A011-48D5-9960-E75B2928CF9E}" type="datetimeFigureOut">
+            <a:fld id="{2FDE9D3F-E143-4602-8078-346190A47E90}" type="datetimeFigureOut">
               <a:rPr lang="zh-CN" altLang="en-US" smtClean="0"/>
               <a:t>2026/9/3</a:t>
             </a:fld>
@@ -1821,7 +1821,7 @@
           <p:cNvPr id="8" name="页脚占位符 7">
             <a:extLst>
               <a:ext uri="{FF2B5EF4-FFF2-40B4-BE49-F238E27FC236}">
-                <a16:creationId xmlns:a16="http://schemas.microsoft.com/office/drawing/2014/main" id="{3E078547-413F-311C-98D5-256A878C4DDF}"/>
+                <a16:creationId xmlns:a16="http://schemas.microsoft.com/office/drawing/2014/main" id="{178BFA7C-598D-D113-AF45-64240536B13D}"/>
               </a:ext>
             </a:extLst>
           </p:cNvPr>
@@ -1846,7 +1846,7 @@
           <p:cNvPr id="9" name="灯片编号占位符 8">
             <a:extLst>
               <a:ext uri="{FF2B5EF4-FFF2-40B4-BE49-F238E27FC236}">
-                <a16:creationId xmlns:a16="http://schemas.microsoft.com/office/drawing/2014/main" id="{92E93B46-4273-0B47-358B-73FAB4640E9B}"/>
+                <a16:creationId xmlns:a16="http://schemas.microsoft.com/office/drawing/2014/main" id="{2DA5F58F-F9AC-4199-8C28-DC9D422C4D0C}"/>
               </a:ext>
             </a:extLst>
           </p:cNvPr>
@@ -1862,7 +1862,7 @@
           <a:bodyPr/>
           <a:lstStyle/>
           <a:p>
-            <a:fld id="{E4681510-9358-42F6-A372-452926C289F9}" type="slidenum">
+            <a:fld id="{DCD2ED74-13CD-45B1-AA1C-6BC2C44D28CB}" type="slidenum">
               <a:rPr lang="zh-CN" altLang="en-US" smtClean="0"/>
               <a:t>‹#›</a:t>
             </a:fld>
@@ -1873,7 +1873,7 @@
     </p:spTree>
     <p:extLst>
       <p:ext uri="{BB962C8B-B14F-4D97-AF65-F5344CB8AC3E}">
-        <p14:creationId xmlns:p14="http://schemas.microsoft.com/office/powerpoint/2010/main" val="3728128796"/>
+        <p14:creationId xmlns:p14="http://schemas.microsoft.com/office/powerpoint/2010/main" val="1393260347"/>
       </p:ext>
     </p:extLst>
   </p:cSld>
@@ -1905,7 +1905,7 @@
           <p:cNvPr id="2" name="标题 1">
             <a:extLst>
               <a:ext uri="{FF2B5EF4-FFF2-40B4-BE49-F238E27FC236}">
-                <a16:creationId xmlns:a16="http://schemas.microsoft.com/office/drawing/2014/main" id="{5D97D160-25FB-7F47-994D-1CDA0ADF818B}"/>
+                <a16:creationId xmlns:a16="http://schemas.microsoft.com/office/drawing/2014/main" id="{9A6E50FC-1CED-F001-EE91-C5E65C814CE3}"/>
               </a:ext>
             </a:extLst>
           </p:cNvPr>
@@ -1933,7 +1933,7 @@
           <p:cNvPr id="3" name="日期占位符 2">
             <a:extLst>
               <a:ext uri="{FF2B5EF4-FFF2-40B4-BE49-F238E27FC236}">
-                <a16:creationId xmlns:a16="http://schemas.microsoft.com/office/drawing/2014/main" id="{B90AE719-BA7E-07E8-8C6C-D3A455B4AA47}"/>
+                <a16:creationId xmlns:a16="http://schemas.microsoft.com/office/drawing/2014/main" id="{2FB51089-7159-EA7B-7FAD-D541F0488826}"/>
               </a:ext>
             </a:extLst>
           </p:cNvPr>
@@ -1949,7 +1949,7 @@
           <a:bodyPr/>
           <a:lstStyle/>
           <a:p>
-            <a:fld id="{E7EE7F02-A011-48D5-9960-E75B2928CF9E}" type="datetimeFigureOut">
+            <a:fld id="{2FDE9D3F-E143-4602-8078-346190A47E90}" type="datetimeFigureOut">
               <a:rPr lang="zh-CN" altLang="en-US" smtClean="0"/>
               <a:t>2026/9/3</a:t>
             </a:fld>
@@ -1962,7 +1962,7 @@
           <p:cNvPr id="4" name="页脚占位符 3">
             <a:extLst>
               <a:ext uri="{FF2B5EF4-FFF2-40B4-BE49-F238E27FC236}">
-                <a16:creationId xmlns:a16="http://schemas.microsoft.com/office/drawing/2014/main" id="{42ACD3B0-732E-8566-06DC-2099C8944344}"/>
+                <a16:creationId xmlns:a16="http://schemas.microsoft.com/office/drawing/2014/main" id="{9190356A-990D-ECC6-D816-085A8DC410A2}"/>
               </a:ext>
             </a:extLst>
           </p:cNvPr>
@@ -1987,7 +1987,7 @@
           <p:cNvPr id="5" name="灯片编号占位符 4">
             <a:extLst>
               <a:ext uri="{FF2B5EF4-FFF2-40B4-BE49-F238E27FC236}">
-                <a16:creationId xmlns:a16="http://schemas.microsoft.com/office/drawing/2014/main" id="{7FE455CA-9122-8A45-057D-21666606B45C}"/>
+                <a16:creationId xmlns:a16="http://schemas.microsoft.com/office/drawing/2014/main" id="{80F23D54-320E-5478-DDB0-D9E33F607AC5}"/>
               </a:ext>
             </a:extLst>
           </p:cNvPr>
@@ -2003,7 +2003,7 @@
           <a:bodyPr/>
           <a:lstStyle/>
           <a:p>
-            <a:fld id="{E4681510-9358-42F6-A372-452926C289F9}" type="slidenum">
+            <a:fld id="{DCD2ED74-13CD-45B1-AA1C-6BC2C44D28CB}" type="slidenum">
               <a:rPr lang="zh-CN" altLang="en-US" smtClean="0"/>
               <a:t>‹#›</a:t>
             </a:fld>
@@ -2014,7 +2014,7 @@
     </p:spTree>
     <p:extLst>
       <p:ext uri="{BB962C8B-B14F-4D97-AF65-F5344CB8AC3E}">
-        <p14:creationId xmlns:p14="http://schemas.microsoft.com/office/powerpoint/2010/main" val="1843405840"/>
+        <p14:creationId xmlns:p14="http://schemas.microsoft.com/office/powerpoint/2010/main" val="3240359929"/>
       </p:ext>
     </p:extLst>
   </p:cSld>
@@ -2046,7 +2046,7 @@
           <p:cNvPr id="2" name="日期占位符 1">
             <a:extLst>
               <a:ext uri="{FF2B5EF4-FFF2-40B4-BE49-F238E27FC236}">
-                <a16:creationId xmlns:a16="http://schemas.microsoft.com/office/drawing/2014/main" id="{A6ABED67-D7FE-F25F-407A-30708FA36A81}"/>
+                <a16:creationId xmlns:a16="http://schemas.microsoft.com/office/drawing/2014/main" id="{5B721C1E-FB3E-2ED6-1059-0035D66219CE}"/>
               </a:ext>
             </a:extLst>
           </p:cNvPr>
@@ -2062,7 +2062,7 @@
           <a:bodyPr/>
           <a:lstStyle/>
           <a:p>
-            <a:fld id="{E7EE7F02-A011-48D5-9960-E75B2928CF9E}" type="datetimeFigureOut">
+            <a:fld id="{2FDE9D3F-E143-4602-8078-346190A47E90}" type="datetimeFigureOut">
               <a:rPr lang="zh-CN" altLang="en-US" smtClean="0"/>
               <a:t>2026/9/3</a:t>
             </a:fld>
@@ -2075,7 +2075,7 @@
           <p:cNvPr id="3" name="页脚占位符 2">
             <a:extLst>
               <a:ext uri="{FF2B5EF4-FFF2-40B4-BE49-F238E27FC236}">
-                <a16:creationId xmlns:a16="http://schemas.microsoft.com/office/drawing/2014/main" id="{CE3D4ADD-FEB2-D086-7826-AE7ACD49C1FC}"/>
+                <a16:creationId xmlns:a16="http://schemas.microsoft.com/office/drawing/2014/main" id="{EE25A081-F8DF-284C-3EAF-8879D0888C8E}"/>
               </a:ext>
             </a:extLst>
           </p:cNvPr>
@@ -2100,7 +2100,7 @@
           <p:cNvPr id="4" name="灯片编号占位符 3">
             <a:extLst>
               <a:ext uri="{FF2B5EF4-FFF2-40B4-BE49-F238E27FC236}">
-                <a16:creationId xmlns:a16="http://schemas.microsoft.com/office/drawing/2014/main" id="{442497D9-8036-3D84-A0E4-081EA9825A7A}"/>
+                <a16:creationId xmlns:a16="http://schemas.microsoft.com/office/drawing/2014/main" id="{D93445D8-DAAC-92C3-4050-994CE4595D53}"/>
               </a:ext>
             </a:extLst>
           </p:cNvPr>
@@ -2116,7 +2116,7 @@
           <a:bodyPr/>
           <a:lstStyle/>
           <a:p>
-            <a:fld id="{E4681510-9358-42F6-A372-452926C289F9}" type="slidenum">
+            <a:fld id="{DCD2ED74-13CD-45B1-AA1C-6BC2C44D28CB}" type="slidenum">
               <a:rPr lang="zh-CN" altLang="en-US" smtClean="0"/>
               <a:t>‹#›</a:t>
             </a:fld>
@@ -2127,7 +2127,7 @@
     </p:spTree>
     <p:extLst>
       <p:ext uri="{BB962C8B-B14F-4D97-AF65-F5344CB8AC3E}">
-        <p14:creationId xmlns:p14="http://schemas.microsoft.com/office/powerpoint/2010/main" val="4195970323"/>
+        <p14:creationId xmlns:p14="http://schemas.microsoft.com/office/powerpoint/2010/main" val="280781515"/>
       </p:ext>
     </p:extLst>
   </p:cSld>
@@ -2159,7 +2159,7 @@
           <p:cNvPr id="2" name="标题 1">
             <a:extLst>
               <a:ext uri="{FF2B5EF4-FFF2-40B4-BE49-F238E27FC236}">
-                <a16:creationId xmlns:a16="http://schemas.microsoft.com/office/drawing/2014/main" id="{F3006E36-1302-6EFA-7F89-4A58770791B2}"/>
+                <a16:creationId xmlns:a16="http://schemas.microsoft.com/office/drawing/2014/main" id="{23E9F234-DD54-AB63-B64B-0B4C411BB866}"/>
               </a:ext>
             </a:extLst>
           </p:cNvPr>
@@ -2196,7 +2196,7 @@
           <p:cNvPr id="3" name="内容占位符 2">
             <a:extLst>
               <a:ext uri="{FF2B5EF4-FFF2-40B4-BE49-F238E27FC236}">
-                <a16:creationId xmlns:a16="http://schemas.microsoft.com/office/drawing/2014/main" id="{A50E76F8-B8A7-ED00-D5F4-E82A5099387D}"/>
+                <a16:creationId xmlns:a16="http://schemas.microsoft.com/office/drawing/2014/main" id="{6C5D13DA-3A0B-2314-9A11-34885427071B}"/>
               </a:ext>
             </a:extLst>
           </p:cNvPr>
@@ -2286,7 +2286,7 @@
           <p:cNvPr id="4" name="文本占位符 3">
             <a:extLst>
               <a:ext uri="{FF2B5EF4-FFF2-40B4-BE49-F238E27FC236}">
-                <a16:creationId xmlns:a16="http://schemas.microsoft.com/office/drawing/2014/main" id="{71C97324-EFA9-F205-3E08-17463E1810EA}"/>
+                <a16:creationId xmlns:a16="http://schemas.microsoft.com/office/drawing/2014/main" id="{0530A0B2-0BC9-D568-888A-74CFC5902795}"/>
               </a:ext>
             </a:extLst>
           </p:cNvPr>
@@ -2357,7 +2357,7 @@
           <p:cNvPr id="5" name="日期占位符 4">
             <a:extLst>
               <a:ext uri="{FF2B5EF4-FFF2-40B4-BE49-F238E27FC236}">
-                <a16:creationId xmlns:a16="http://schemas.microsoft.com/office/drawing/2014/main" id="{869E9B9F-FB3D-C782-1C01-E476A81A1E31}"/>
+                <a16:creationId xmlns:a16="http://schemas.microsoft.com/office/drawing/2014/main" id="{55AD88EF-0A21-9E73-0563-868B432B31E9}"/>
               </a:ext>
             </a:extLst>
           </p:cNvPr>
@@ -2373,7 +2373,7 @@
           <a:bodyPr/>
           <a:lstStyle/>
           <a:p>
-            <a:fld id="{E7EE7F02-A011-48D5-9960-E75B2928CF9E}" type="datetimeFigureOut">
+            <a:fld id="{2FDE9D3F-E143-4602-8078-346190A47E90}" type="datetimeFigureOut">
               <a:rPr lang="zh-CN" altLang="en-US" smtClean="0"/>
               <a:t>2026/9/3</a:t>
             </a:fld>
@@ -2386,7 +2386,7 @@
           <p:cNvPr id="6" name="页脚占位符 5">
             <a:extLst>
               <a:ext uri="{FF2B5EF4-FFF2-40B4-BE49-F238E27FC236}">
-                <a16:creationId xmlns:a16="http://schemas.microsoft.com/office/drawing/2014/main" id="{6B0A3203-61B7-611E-34CE-13744B1889F7}"/>
+                <a16:creationId xmlns:a16="http://schemas.microsoft.com/office/drawing/2014/main" id="{34D67C82-1BF1-1049-2583-4EDBEB8B127C}"/>
               </a:ext>
             </a:extLst>
           </p:cNvPr>
@@ -2411,7 +2411,7 @@
           <p:cNvPr id="7" name="灯片编号占位符 6">
             <a:extLst>
               <a:ext uri="{FF2B5EF4-FFF2-40B4-BE49-F238E27FC236}">
-                <a16:creationId xmlns:a16="http://schemas.microsoft.com/office/drawing/2014/main" id="{A88422F5-9DF9-68EA-E408-7BCE24C31B0B}"/>
+                <a16:creationId xmlns:a16="http://schemas.microsoft.com/office/drawing/2014/main" id="{4684F68C-A963-8C77-5C21-F7557E80394D}"/>
               </a:ext>
             </a:extLst>
           </p:cNvPr>
@@ -2427,7 +2427,7 @@
           <a:bodyPr/>
           <a:lstStyle/>
           <a:p>
-            <a:fld id="{E4681510-9358-42F6-A372-452926C289F9}" type="slidenum">
+            <a:fld id="{DCD2ED74-13CD-45B1-AA1C-6BC2C44D28CB}" type="slidenum">
               <a:rPr lang="zh-CN" altLang="en-US" smtClean="0"/>
               <a:t>‹#›</a:t>
             </a:fld>
@@ -2438,7 +2438,7 @@
     </p:spTree>
     <p:extLst>
       <p:ext uri="{BB962C8B-B14F-4D97-AF65-F5344CB8AC3E}">
-        <p14:creationId xmlns:p14="http://schemas.microsoft.com/office/powerpoint/2010/main" val="3272152716"/>
+        <p14:creationId xmlns:p14="http://schemas.microsoft.com/office/powerpoint/2010/main" val="1276810374"/>
       </p:ext>
     </p:extLst>
   </p:cSld>
@@ -2470,7 +2470,7 @@
           <p:cNvPr id="2" name="标题 1">
             <a:extLst>
               <a:ext uri="{FF2B5EF4-FFF2-40B4-BE49-F238E27FC236}">
-                <a16:creationId xmlns:a16="http://schemas.microsoft.com/office/drawing/2014/main" id="{E049F405-82BD-B473-63CB-21D34290ED54}"/>
+                <a16:creationId xmlns:a16="http://schemas.microsoft.com/office/drawing/2014/main" id="{1F7BB288-7340-BC66-A4C0-F2850249AF13}"/>
               </a:ext>
             </a:extLst>
           </p:cNvPr>
@@ -2507,7 +2507,7 @@
           <p:cNvPr id="3" name="图片占位符 2">
             <a:extLst>
               <a:ext uri="{FF2B5EF4-FFF2-40B4-BE49-F238E27FC236}">
-                <a16:creationId xmlns:a16="http://schemas.microsoft.com/office/drawing/2014/main" id="{E3363FBA-B5EF-E674-8B55-A4B5F57C8EA0}"/>
+                <a16:creationId xmlns:a16="http://schemas.microsoft.com/office/drawing/2014/main" id="{76756732-FC94-26C6-6C8C-AF6B8AB5C9FA}"/>
               </a:ext>
             </a:extLst>
           </p:cNvPr>
@@ -2574,7 +2574,7 @@
           <p:cNvPr id="4" name="文本占位符 3">
             <a:extLst>
               <a:ext uri="{FF2B5EF4-FFF2-40B4-BE49-F238E27FC236}">
-                <a16:creationId xmlns:a16="http://schemas.microsoft.com/office/drawing/2014/main" id="{21AD5D2B-786B-52E1-0766-DCADEFB407A9}"/>
+                <a16:creationId xmlns:a16="http://schemas.microsoft.com/office/drawing/2014/main" id="{ECEB3E3C-A7D4-A4A9-BDEC-893EC50B25D2}"/>
               </a:ext>
             </a:extLst>
           </p:cNvPr>
@@ -2645,7 +2645,7 @@
           <p:cNvPr id="5" name="日期占位符 4">
             <a:extLst>
               <a:ext uri="{FF2B5EF4-FFF2-40B4-BE49-F238E27FC236}">
-                <a16:creationId xmlns:a16="http://schemas.microsoft.com/office/drawing/2014/main" id="{8BC08C75-94BD-3D10-B164-166878F5D845}"/>
+                <a16:creationId xmlns:a16="http://schemas.microsoft.com/office/drawing/2014/main" id="{16CE0709-5B60-C87F-60AE-DAC88F252230}"/>
               </a:ext>
             </a:extLst>
           </p:cNvPr>
@@ -2661,7 +2661,7 @@
           <a:bodyPr/>
           <a:lstStyle/>
           <a:p>
-            <a:fld id="{E7EE7F02-A011-48D5-9960-E75B2928CF9E}" type="datetimeFigureOut">
+            <a:fld id="{2FDE9D3F-E143-4602-8078-346190A47E90}" type="datetimeFigureOut">
               <a:rPr lang="zh-CN" altLang="en-US" smtClean="0"/>
               <a:t>2026/9/3</a:t>
             </a:fld>
@@ -2674,7 +2674,7 @@
           <p:cNvPr id="6" name="页脚占位符 5">
             <a:extLst>
               <a:ext uri="{FF2B5EF4-FFF2-40B4-BE49-F238E27FC236}">
-                <a16:creationId xmlns:a16="http://schemas.microsoft.com/office/drawing/2014/main" id="{8CC8DAA7-90F6-372D-04E9-2002530FCE71}"/>
+                <a16:creationId xmlns:a16="http://schemas.microsoft.com/office/drawing/2014/main" id="{4329CE88-9029-1CEB-E9A4-7E0EAF9CA2A6}"/>
               </a:ext>
             </a:extLst>
           </p:cNvPr>
@@ -2699,7 +2699,7 @@
           <p:cNvPr id="7" name="灯片编号占位符 6">
             <a:extLst>
               <a:ext uri="{FF2B5EF4-FFF2-40B4-BE49-F238E27FC236}">
-                <a16:creationId xmlns:a16="http://schemas.microsoft.com/office/drawing/2014/main" id="{C080D5B6-83FB-0E52-5F4A-650C0DE688C1}"/>
+                <a16:creationId xmlns:a16="http://schemas.microsoft.com/office/drawing/2014/main" id="{4D4956DB-4E59-7CF5-7BBD-FFFB16052DA8}"/>
               </a:ext>
             </a:extLst>
           </p:cNvPr>
@@ -2715,7 +2715,7 @@
           <a:bodyPr/>
           <a:lstStyle/>
           <a:p>
-            <a:fld id="{E4681510-9358-42F6-A372-452926C289F9}" type="slidenum">
+            <a:fld id="{DCD2ED74-13CD-45B1-AA1C-6BC2C44D28CB}" type="slidenum">
               <a:rPr lang="zh-CN" altLang="en-US" smtClean="0"/>
               <a:t>‹#›</a:t>
             </a:fld>
@@ -2726,7 +2726,7 @@
     </p:spTree>
     <p:extLst>
       <p:ext uri="{BB962C8B-B14F-4D97-AF65-F5344CB8AC3E}">
-        <p14:creationId xmlns:p14="http://schemas.microsoft.com/office/powerpoint/2010/main" val="2693442504"/>
+        <p14:creationId xmlns:p14="http://schemas.microsoft.com/office/powerpoint/2010/main" val="3227533262"/>
       </p:ext>
     </p:extLst>
   </p:cSld>
@@ -2763,7 +2763,7 @@
           <p:cNvPr id="2" name="标题占位符 1">
             <a:extLst>
               <a:ext uri="{FF2B5EF4-FFF2-40B4-BE49-F238E27FC236}">
-                <a16:creationId xmlns:a16="http://schemas.microsoft.com/office/drawing/2014/main" id="{1263280C-D351-835C-7CB3-3C57E3905CE9}"/>
+                <a16:creationId xmlns:a16="http://schemas.microsoft.com/office/drawing/2014/main" id="{1D116335-8FC7-6EAA-5909-1F0E3367D0D6}"/>
               </a:ext>
             </a:extLst>
           </p:cNvPr>
@@ -2801,7 +2801,7 @@
           <p:cNvPr id="3" name="文本占位符 2">
             <a:extLst>
               <a:ext uri="{FF2B5EF4-FFF2-40B4-BE49-F238E27FC236}">
-                <a16:creationId xmlns:a16="http://schemas.microsoft.com/office/drawing/2014/main" id="{F8582B50-0EB6-61D0-82B4-73F53B944921}"/>
+                <a16:creationId xmlns:a16="http://schemas.microsoft.com/office/drawing/2014/main" id="{B74A55A3-B913-6BCE-273D-34FEFE40C833}"/>
               </a:ext>
             </a:extLst>
           </p:cNvPr>
@@ -2868,7 +2868,7 @@
           <p:cNvPr id="4" name="日期占位符 3">
             <a:extLst>
               <a:ext uri="{FF2B5EF4-FFF2-40B4-BE49-F238E27FC236}">
-                <a16:creationId xmlns:a16="http://schemas.microsoft.com/office/drawing/2014/main" id="{39FB7153-D745-B57C-9790-026004ED1E21}"/>
+                <a16:creationId xmlns:a16="http://schemas.microsoft.com/office/drawing/2014/main" id="{13581A1B-ED42-C29B-91B8-3E709FFCE509}"/>
               </a:ext>
             </a:extLst>
           </p:cNvPr>
@@ -2902,7 +2902,7 @@
             </a:lvl1pPr>
           </a:lstStyle>
           <a:p>
-            <a:fld id="{E7EE7F02-A011-48D5-9960-E75B2928CF9E}" type="datetimeFigureOut">
+            <a:fld id="{2FDE9D3F-E143-4602-8078-346190A47E90}" type="datetimeFigureOut">
               <a:rPr lang="zh-CN" altLang="en-US" smtClean="0"/>
               <a:t>2026/9/3</a:t>
             </a:fld>
@@ -2915,7 +2915,7 @@
           <p:cNvPr id="5" name="页脚占位符 4">
             <a:extLst>
               <a:ext uri="{FF2B5EF4-FFF2-40B4-BE49-F238E27FC236}">
-                <a16:creationId xmlns:a16="http://schemas.microsoft.com/office/drawing/2014/main" id="{B5B62910-971B-97FA-B56A-28BABAD03868}"/>
+                <a16:creationId xmlns:a16="http://schemas.microsoft.com/office/drawing/2014/main" id="{189A458F-CBE5-9A3C-216B-942EF3368D75}"/>
               </a:ext>
             </a:extLst>
           </p:cNvPr>
@@ -2958,7 +2958,7 @@
           <p:cNvPr id="6" name="灯片编号占位符 5">
             <a:extLst>
               <a:ext uri="{FF2B5EF4-FFF2-40B4-BE49-F238E27FC236}">
-                <a16:creationId xmlns:a16="http://schemas.microsoft.com/office/drawing/2014/main" id="{2ED3CF11-ADC2-F981-23DC-DFA73FB725E1}"/>
+                <a16:creationId xmlns:a16="http://schemas.microsoft.com/office/drawing/2014/main" id="{06239E80-77AF-705F-4241-33510AAFFDEC}"/>
               </a:ext>
             </a:extLst>
           </p:cNvPr>
@@ -2992,7 +2992,7 @@
             </a:lvl1pPr>
           </a:lstStyle>
           <a:p>
-            <a:fld id="{E4681510-9358-42F6-A372-452926C289F9}" type="slidenum">
+            <a:fld id="{DCD2ED74-13CD-45B1-AA1C-6BC2C44D28CB}" type="slidenum">
               <a:rPr lang="zh-CN" altLang="en-US" smtClean="0"/>
               <a:t>‹#›</a:t>
             </a:fld>
@@ -3003,7 +3003,7 @@
     </p:spTree>
     <p:extLst>
       <p:ext uri="{BB962C8B-B14F-4D97-AF65-F5344CB8AC3E}">
-        <p14:creationId xmlns:p14="http://schemas.microsoft.com/office/powerpoint/2010/main" val="538401794"/>
+        <p14:creationId xmlns:p14="http://schemas.microsoft.com/office/powerpoint/2010/main" val="2200519004"/>
       </p:ext>
     </p:extLst>
   </p:cSld>
@@ -3334,7 +3334,7 @@
           <p:cNvPr id="2" name="accent-left">
             <a:extLst>
               <a:ext uri="{FF2B5EF4-FFF2-40B4-BE49-F238E27FC236}">
-                <a16:creationId xmlns:a16="http://schemas.microsoft.com/office/drawing/2014/main" id="{AA953CCA-B573-4FC7-C50D-427AE417484A}"/>
+                <a16:creationId xmlns:a16="http://schemas.microsoft.com/office/drawing/2014/main" id="{41D14D18-E995-9856-265C-5975AF045F61}"/>
               </a:ext>
             </a:extLst>
           </p:cNvPr>
@@ -3402,7 +3402,7 @@
           <p:cNvPr id="3" name="title">
             <a:extLst>
               <a:ext uri="{FF2B5EF4-FFF2-40B4-BE49-F238E27FC236}">
-                <a16:creationId xmlns:a16="http://schemas.microsoft.com/office/drawing/2014/main" id="{CBDE6C08-2929-BE0E-2AD5-8134B3A6154E}"/>
+                <a16:creationId xmlns:a16="http://schemas.microsoft.com/office/drawing/2014/main" id="{3A059452-EED7-A271-409F-1E9DEE12F38F}"/>
               </a:ext>
             </a:extLst>
           </p:cNvPr>
@@ -3442,7 +3442,7 @@
           <p:cNvPr id="4" name="subtitle">
             <a:extLst>
               <a:ext uri="{FF2B5EF4-FFF2-40B4-BE49-F238E27FC236}">
-                <a16:creationId xmlns:a16="http://schemas.microsoft.com/office/drawing/2014/main" id="{7717FA77-6E86-AE4E-BD9F-085640CEDA69}"/>
+                <a16:creationId xmlns:a16="http://schemas.microsoft.com/office/drawing/2014/main" id="{C71D5282-B9AD-6C79-FE3C-529D7BCCCEF5}"/>
               </a:ext>
             </a:extLst>
           </p:cNvPr>
@@ -3482,7 +3482,7 @@
           <p:cNvPr id="5" name="edition">
             <a:extLst>
               <a:ext uri="{FF2B5EF4-FFF2-40B4-BE49-F238E27FC236}">
-                <a16:creationId xmlns:a16="http://schemas.microsoft.com/office/drawing/2014/main" id="{B4D673B9-2C32-C766-6EB9-E59EC0BDE9B3}"/>
+                <a16:creationId xmlns:a16="http://schemas.microsoft.com/office/drawing/2014/main" id="{BA455885-47DB-9BCF-B463-BA478D3FFBBA}"/>
               </a:ext>
             </a:extLst>
           </p:cNvPr>
@@ -3529,7 +3529,7 @@
           <p:cNvPr id="6" name="topline">
             <a:extLst>
               <a:ext uri="{FF2B5EF4-FFF2-40B4-BE49-F238E27FC236}">
-                <a16:creationId xmlns:a16="http://schemas.microsoft.com/office/drawing/2014/main" id="{74ADCC95-DF7B-E8B4-7DD2-34CB17A8E684}"/>
+                <a16:creationId xmlns:a16="http://schemas.microsoft.com/office/drawing/2014/main" id="{9F0064F7-5CD8-331D-D5AF-04B9FD52E2CF}"/>
               </a:ext>
             </a:extLst>
           </p:cNvPr>
@@ -3570,7 +3570,7 @@
           <p:cNvPr id="7" name="era-old-bar">
             <a:extLst>
               <a:ext uri="{FF2B5EF4-FFF2-40B4-BE49-F238E27FC236}">
-                <a16:creationId xmlns:a16="http://schemas.microsoft.com/office/drawing/2014/main" id="{102112EA-32F2-E3C3-BE15-5A831ED8A4EC}"/>
+                <a16:creationId xmlns:a16="http://schemas.microsoft.com/office/drawing/2014/main" id="{E084C5A5-70E6-BA79-EEC3-3A155C930F05}"/>
               </a:ext>
             </a:extLst>
           </p:cNvPr>
@@ -3638,7 +3638,7 @@
           <p:cNvPr id="8" name="era-old">
             <a:extLst>
               <a:ext uri="{FF2B5EF4-FFF2-40B4-BE49-F238E27FC236}">
-                <a16:creationId xmlns:a16="http://schemas.microsoft.com/office/drawing/2014/main" id="{BBD74402-AD52-4259-52F7-EC9FF00BC193}"/>
+                <a16:creationId xmlns:a16="http://schemas.microsoft.com/office/drawing/2014/main" id="{6E913354-1538-7328-3F2E-B6733E4C5D3D}"/>
               </a:ext>
             </a:extLst>
           </p:cNvPr>
@@ -3706,7 +3706,7 @@
           <p:cNvPr id="9" name="era-old-y">
             <a:extLst>
               <a:ext uri="{FF2B5EF4-FFF2-40B4-BE49-F238E27FC236}">
-                <a16:creationId xmlns:a16="http://schemas.microsoft.com/office/drawing/2014/main" id="{76B47149-AC0C-335E-097A-9C0CB8E89C49}"/>
+                <a16:creationId xmlns:a16="http://schemas.microsoft.com/office/drawing/2014/main" id="{15524C54-77F2-D6FB-D06B-67E7C3C6C504}"/>
               </a:ext>
             </a:extLst>
           </p:cNvPr>
@@ -3715,8 +3715,8 @@
         </p:nvSpPr>
         <p:spPr>
           <a:xfrm>
-            <a:off x="574040" y="787722"/>
-            <a:ext cx="482600" cy="456535"/>
+            <a:off x="548640" y="787722"/>
+            <a:ext cx="346249" cy="194925"/>
           </a:xfrm>
           <a:prstGeom prst="rect">
             <a:avLst/>
@@ -3724,13 +3724,13 @@
           <a:noFill/>
         </p:spPr>
         <p:txBody>
-          <a:bodyPr vert="horz" wrap="square" lIns="25400" tIns="12700" rIns="25400" bIns="12700" rtlCol="0" anchor="ctr">
+          <a:bodyPr vert="horz" wrap="none" lIns="0" tIns="12700" rIns="0" bIns="12700" rtlCol="0" anchor="ctr">
             <a:spAutoFit/>
           </a:bodyPr>
           <a:lstStyle/>
           <a:p>
             <a:r>
-              <a:rPr lang="en-US" altLang="zh-CN" sz="1400" b="1">
+              <a:rPr lang="en-US" altLang="zh-CN" sz="1100" b="1">
                 <a:solidFill>
                   <a:srgbClr val="173650"/>
                 </a:solidFill>
@@ -3738,7 +3738,7 @@
               </a:rPr>
               <a:t>2025</a:t>
             </a:r>
-            <a:endParaRPr lang="zh-CN" altLang="en-US" sz="1400" b="1">
+            <a:endParaRPr lang="zh-CN" altLang="en-US" sz="1100" b="1">
               <a:solidFill>
                 <a:srgbClr val="173650"/>
               </a:solidFill>
@@ -3752,7 +3752,7 @@
           <p:cNvPr id="10" name="era-old-t">
             <a:extLst>
               <a:ext uri="{FF2B5EF4-FFF2-40B4-BE49-F238E27FC236}">
-                <a16:creationId xmlns:a16="http://schemas.microsoft.com/office/drawing/2014/main" id="{9FD8EFA1-230B-51A9-FEC6-548AFD532C34}"/>
+                <a16:creationId xmlns:a16="http://schemas.microsoft.com/office/drawing/2014/main" id="{F859A32F-1BB9-D02F-39DD-500FFFA24D20}"/>
               </a:ext>
             </a:extLst>
           </p:cNvPr>
@@ -3761,8 +3761,8 @@
         </p:nvSpPr>
         <p:spPr>
           <a:xfrm>
-            <a:off x="1031240" y="805180"/>
-            <a:ext cx="4706620" cy="179536"/>
+            <a:off x="1234440" y="805180"/>
+            <a:ext cx="4478020" cy="179536"/>
           </a:xfrm>
           <a:prstGeom prst="rect">
             <a:avLst/>
@@ -3792,7 +3792,7 @@
           <p:cNvPr id="11" name="era-old-s">
             <a:extLst>
               <a:ext uri="{FF2B5EF4-FFF2-40B4-BE49-F238E27FC236}">
-                <a16:creationId xmlns:a16="http://schemas.microsoft.com/office/drawing/2014/main" id="{A87CE05A-8D77-4B07-04E8-6B3EE144AA50}"/>
+                <a16:creationId xmlns:a16="http://schemas.microsoft.com/office/drawing/2014/main" id="{88045DD7-CBAC-EC4D-58B3-2B80038EEFB2}"/>
               </a:ext>
             </a:extLst>
           </p:cNvPr>
@@ -3801,8 +3801,8 @@
         </p:nvSpPr>
         <p:spPr>
           <a:xfrm>
-            <a:off x="1031240" y="1033780"/>
-            <a:ext cx="4706620" cy="117981"/>
+            <a:off x="1234440" y="1033780"/>
+            <a:ext cx="4478020" cy="117981"/>
           </a:xfrm>
           <a:prstGeom prst="rect">
             <a:avLst/>
@@ -3883,7 +3883,7 @@
           <p:cNvPr id="12" name="era-evolve">
             <a:extLst>
               <a:ext uri="{FF2B5EF4-FFF2-40B4-BE49-F238E27FC236}">
-                <a16:creationId xmlns:a16="http://schemas.microsoft.com/office/drawing/2014/main" id="{ADECC3C3-DB84-91A0-9632-1FFF86EB17EA}"/>
+                <a16:creationId xmlns:a16="http://schemas.microsoft.com/office/drawing/2014/main" id="{A4B183F7-08B5-A796-E357-1E3EBEB7B063}"/>
               </a:ext>
             </a:extLst>
           </p:cNvPr>
@@ -3959,7 +3959,7 @@
           <p:cNvPr id="13" name="era-new">
             <a:extLst>
               <a:ext uri="{FF2B5EF4-FFF2-40B4-BE49-F238E27FC236}">
-                <a16:creationId xmlns:a16="http://schemas.microsoft.com/office/drawing/2014/main" id="{6244300B-F8FC-F4A8-F972-4337E160CF24}"/>
+                <a16:creationId xmlns:a16="http://schemas.microsoft.com/office/drawing/2014/main" id="{EE8030EA-14EA-6E03-1891-3FB08B99E681}"/>
               </a:ext>
             </a:extLst>
           </p:cNvPr>
@@ -4027,7 +4027,7 @@
           <p:cNvPr id="14" name="era-new-bar">
             <a:extLst>
               <a:ext uri="{FF2B5EF4-FFF2-40B4-BE49-F238E27FC236}">
-                <a16:creationId xmlns:a16="http://schemas.microsoft.com/office/drawing/2014/main" id="{725114B1-8BB4-D6EE-7665-1079B698B2D1}"/>
+                <a16:creationId xmlns:a16="http://schemas.microsoft.com/office/drawing/2014/main" id="{88746982-0462-E3F1-0774-BA4CA0852E74}"/>
               </a:ext>
             </a:extLst>
           </p:cNvPr>
@@ -4095,7 +4095,7 @@
           <p:cNvPr id="15" name="era-new-y">
             <a:extLst>
               <a:ext uri="{FF2B5EF4-FFF2-40B4-BE49-F238E27FC236}">
-                <a16:creationId xmlns:a16="http://schemas.microsoft.com/office/drawing/2014/main" id="{AA1D419E-ADED-274D-0A4B-0C5CB1C13F5D}"/>
+                <a16:creationId xmlns:a16="http://schemas.microsoft.com/office/drawing/2014/main" id="{5830562D-4C6B-8715-CDD5-D1BCC4CB5339}"/>
               </a:ext>
             </a:extLst>
           </p:cNvPr>
@@ -4104,8 +4104,8 @@
         </p:nvSpPr>
         <p:spPr>
           <a:xfrm>
-            <a:off x="6540500" y="787722"/>
-            <a:ext cx="482600" cy="456535"/>
+            <a:off x="6515100" y="787722"/>
+            <a:ext cx="346249" cy="194925"/>
           </a:xfrm>
           <a:prstGeom prst="rect">
             <a:avLst/>
@@ -4113,13 +4113,13 @@
           <a:noFill/>
         </p:spPr>
         <p:txBody>
-          <a:bodyPr vert="horz" wrap="square" lIns="25400" tIns="12700" rIns="25400" bIns="12700" rtlCol="0" anchor="ctr">
+          <a:bodyPr vert="horz" wrap="none" lIns="0" tIns="12700" rIns="0" bIns="12700" rtlCol="0" anchor="ctr">
             <a:spAutoFit/>
           </a:bodyPr>
           <a:lstStyle/>
           <a:p>
             <a:r>
-              <a:rPr lang="en-US" altLang="zh-CN" sz="1400" b="1">
+              <a:rPr lang="en-US" altLang="zh-CN" sz="1100" b="1">
                 <a:solidFill>
                   <a:srgbClr val="173650"/>
                 </a:solidFill>
@@ -4127,7 +4127,7 @@
               </a:rPr>
               <a:t>2026</a:t>
             </a:r>
-            <a:endParaRPr lang="zh-CN" altLang="en-US" sz="1400" b="1">
+            <a:endParaRPr lang="zh-CN" altLang="en-US" sz="1100" b="1">
               <a:solidFill>
                 <a:srgbClr val="173650"/>
               </a:solidFill>
@@ -4141,7 +4141,7 @@
           <p:cNvPr id="16" name="era-new-t">
             <a:extLst>
               <a:ext uri="{FF2B5EF4-FFF2-40B4-BE49-F238E27FC236}">
-                <a16:creationId xmlns:a16="http://schemas.microsoft.com/office/drawing/2014/main" id="{3201EF92-5899-4F11-7CB1-87A992E00DAE}"/>
+                <a16:creationId xmlns:a16="http://schemas.microsoft.com/office/drawing/2014/main" id="{EB1ECB99-C828-3B4B-4ED4-C7B4C6E2FBEA}"/>
               </a:ext>
             </a:extLst>
           </p:cNvPr>
@@ -4150,8 +4150,8 @@
         </p:nvSpPr>
         <p:spPr>
           <a:xfrm>
-            <a:off x="6997700" y="805180"/>
-            <a:ext cx="4706620" cy="179536"/>
+            <a:off x="7200900" y="805180"/>
+            <a:ext cx="4478020" cy="179536"/>
           </a:xfrm>
           <a:prstGeom prst="rect">
             <a:avLst/>
@@ -4181,7 +4181,7 @@
           <p:cNvPr id="17" name="era-new-s">
             <a:extLst>
               <a:ext uri="{FF2B5EF4-FFF2-40B4-BE49-F238E27FC236}">
-                <a16:creationId xmlns:a16="http://schemas.microsoft.com/office/drawing/2014/main" id="{27BC96DD-C01A-95FC-921C-7291158F72EC}"/>
+                <a16:creationId xmlns:a16="http://schemas.microsoft.com/office/drawing/2014/main" id="{7F64F0E1-B90A-80D3-7D7A-3BDC890C3318}"/>
               </a:ext>
             </a:extLst>
           </p:cNvPr>
@@ -4190,8 +4190,8 @@
         </p:nvSpPr>
         <p:spPr>
           <a:xfrm>
-            <a:off x="6997700" y="1033780"/>
-            <a:ext cx="4706620" cy="117981"/>
+            <a:off x="7200900" y="1033780"/>
+            <a:ext cx="4478020" cy="117981"/>
           </a:xfrm>
           <a:prstGeom prst="rect">
             <a:avLst/>
@@ -4272,7 +4272,7 @@
           <p:cNvPr id="18" name="special-bg">
             <a:extLst>
               <a:ext uri="{FF2B5EF4-FFF2-40B4-BE49-F238E27FC236}">
-                <a16:creationId xmlns:a16="http://schemas.microsoft.com/office/drawing/2014/main" id="{94EF89C2-DDFB-B5D0-9403-E64AE811C5B4}"/>
+                <a16:creationId xmlns:a16="http://schemas.microsoft.com/office/drawing/2014/main" id="{7FB354D3-DBF8-8A39-2700-884AAAD6C9FF}"/>
               </a:ext>
             </a:extLst>
           </p:cNvPr>
@@ -4326,7 +4326,7 @@
           <p:cNvPr id="19" name="special-div">
             <a:extLst>
               <a:ext uri="{FF2B5EF4-FFF2-40B4-BE49-F238E27FC236}">
-                <a16:creationId xmlns:a16="http://schemas.microsoft.com/office/drawing/2014/main" id="{B69FB8F5-A2BE-34B4-E4CE-4987C119FD86}"/>
+                <a16:creationId xmlns:a16="http://schemas.microsoft.com/office/drawing/2014/main" id="{F175D0B3-DE4F-B99C-2737-4749E81FD81D}"/>
               </a:ext>
             </a:extLst>
           </p:cNvPr>
@@ -4394,7 +4394,7 @@
           <p:cNvPr id="20" name="special-title">
             <a:extLst>
               <a:ext uri="{FF2B5EF4-FFF2-40B4-BE49-F238E27FC236}">
-                <a16:creationId xmlns:a16="http://schemas.microsoft.com/office/drawing/2014/main" id="{CD31CD14-7012-E1F8-FA2C-65DE6DD7BDE0}"/>
+                <a16:creationId xmlns:a16="http://schemas.microsoft.com/office/drawing/2014/main" id="{33F315B3-0CEC-902B-207B-327CB95F03A0}"/>
               </a:ext>
             </a:extLst>
           </p:cNvPr>
@@ -4434,7 +4434,7 @@
           <p:cNvPr id="21" name="special-desc">
             <a:extLst>
               <a:ext uri="{FF2B5EF4-FFF2-40B4-BE49-F238E27FC236}">
-                <a16:creationId xmlns:a16="http://schemas.microsoft.com/office/drawing/2014/main" id="{F9CA1196-8D0C-97E4-016D-12C3EEDDB3D9}"/>
+                <a16:creationId xmlns:a16="http://schemas.microsoft.com/office/drawing/2014/main" id="{6557D10F-F647-108B-79EA-EC24A8471CBD}"/>
               </a:ext>
             </a:extLst>
           </p:cNvPr>
@@ -4474,7 +4474,7 @@
           <p:cNvPr id="22" name="role1-bg">
             <a:extLst>
               <a:ext uri="{FF2B5EF4-FFF2-40B4-BE49-F238E27FC236}">
-                <a16:creationId xmlns:a16="http://schemas.microsoft.com/office/drawing/2014/main" id="{8D53BDA9-C0AD-C83B-7A37-B52350C6F0AA}"/>
+                <a16:creationId xmlns:a16="http://schemas.microsoft.com/office/drawing/2014/main" id="{480D1A17-72A6-096A-0D8B-A73B5D34B440}"/>
               </a:ext>
             </a:extLst>
           </p:cNvPr>
@@ -4542,7 +4542,7 @@
           <p:cNvPr id="23" name="role1-top">
             <a:extLst>
               <a:ext uri="{FF2B5EF4-FFF2-40B4-BE49-F238E27FC236}">
-                <a16:creationId xmlns:a16="http://schemas.microsoft.com/office/drawing/2014/main" id="{0BDE81D5-62D8-E30B-15D5-41AD1A37147F}"/>
+                <a16:creationId xmlns:a16="http://schemas.microsoft.com/office/drawing/2014/main" id="{9FA1C28B-209F-0AFE-C4CE-F6C8C7511934}"/>
               </a:ext>
             </a:extLst>
           </p:cNvPr>
@@ -4610,7 +4610,7 @@
           <p:cNvPr id="24" name="role1-ico1">
             <a:extLst>
               <a:ext uri="{FF2B5EF4-FFF2-40B4-BE49-F238E27FC236}">
-                <a16:creationId xmlns:a16="http://schemas.microsoft.com/office/drawing/2014/main" id="{CD40254B-7913-F0C9-8389-12CF50F61286}"/>
+                <a16:creationId xmlns:a16="http://schemas.microsoft.com/office/drawing/2014/main" id="{4ADDEBBF-D115-52D7-91C1-DCBB6CEFB76B}"/>
               </a:ext>
             </a:extLst>
           </p:cNvPr>
@@ -4619,14 +4619,14 @@
         </p:nvSpPr>
         <p:spPr>
           <a:xfrm>
-            <a:off x="2161540" y="1399540"/>
-            <a:ext cx="127000" cy="127000"/>
+            <a:off x="2174240" y="1424940"/>
+            <a:ext cx="88900" cy="88900"/>
           </a:xfrm>
           <a:prstGeom prst="ellipse">
             <a:avLst/>
           </a:prstGeom>
           <a:noFill/>
-          <a:ln w="13970" cap="flat" cmpd="sng" algn="ctr">
+          <a:ln w="11430" cap="flat" cmpd="sng" algn="ctr">
             <a:solidFill>
               <a:srgbClr val="506C78"/>
             </a:solidFill>
@@ -4671,10 +4671,10 @@
       </p:sp>
       <p:sp>
         <p:nvSpPr>
-          <p:cNvPr id="25" name="role1-ico2">
-            <a:extLst>
-              <a:ext uri="{FF2B5EF4-FFF2-40B4-BE49-F238E27FC236}">
-                <a16:creationId xmlns:a16="http://schemas.microsoft.com/office/drawing/2014/main" id="{21848F88-4AB2-04BA-64CF-359F411253A6}"/>
+          <p:cNvPr id="25" name="role1-ico3">
+            <a:extLst>
+              <a:ext uri="{FF2B5EF4-FFF2-40B4-BE49-F238E27FC236}">
+                <a16:creationId xmlns:a16="http://schemas.microsoft.com/office/drawing/2014/main" id="{D7EDC036-A97C-C0FF-EF65-FD67085B9EA8}"/>
               </a:ext>
             </a:extLst>
           </p:cNvPr>
@@ -4683,14 +4683,14 @@
         </p:nvSpPr>
         <p:spPr>
           <a:xfrm>
-            <a:off x="2263140" y="1424940"/>
-            <a:ext cx="101600" cy="101600"/>
-          </a:xfrm>
-          <a:prstGeom prst="ellipse">
+            <a:off x="2174240" y="1539240"/>
+            <a:ext cx="152400" cy="63500"/>
+          </a:xfrm>
+          <a:prstGeom prst="roundRect">
             <a:avLst/>
           </a:prstGeom>
           <a:noFill/>
-          <a:ln w="13970" cap="flat" cmpd="sng" algn="ctr">
+          <a:ln w="11430" cap="flat" cmpd="sng" algn="ctr">
             <a:solidFill>
               <a:srgbClr val="506C78"/>
             </a:solidFill>
@@ -4735,74 +4735,10 @@
       </p:sp>
       <p:sp>
         <p:nvSpPr>
-          <p:cNvPr id="26" name="role1-ico3">
-            <a:extLst>
-              <a:ext uri="{FF2B5EF4-FFF2-40B4-BE49-F238E27FC236}">
-                <a16:creationId xmlns:a16="http://schemas.microsoft.com/office/drawing/2014/main" id="{B11285F3-3975-C58A-9F1F-DBE43386BA0D}"/>
-              </a:ext>
-            </a:extLst>
-          </p:cNvPr>
-          <p:cNvSpPr/>
-          <p:nvPr/>
-        </p:nvSpPr>
-        <p:spPr>
-          <a:xfrm>
-            <a:off x="2161540" y="1551940"/>
-            <a:ext cx="203200" cy="101600"/>
-          </a:xfrm>
-          <a:prstGeom prst="roundRect">
-            <a:avLst/>
-          </a:prstGeom>
-          <a:noFill/>
-          <a:ln w="13970" cap="flat" cmpd="sng" algn="ctr">
-            <a:solidFill>
-              <a:srgbClr val="506C78"/>
-            </a:solidFill>
-            <a:prstDash val="solid"/>
-            <a:miter lim="800000"/>
-          </a:ln>
-          <a:effectLst/>
-          <a:extLst>
-            <a:ext uri="{909E8E84-426E-40DD-AFC4-6F175D3DCCD1}">
-              <a14:hiddenFill xmlns:a14="http://schemas.microsoft.com/office/drawing/2010/main">
-                <a:solidFill>
-                  <a:schemeClr val="accent1"/>
-                </a:solidFill>
-              </a14:hiddenFill>
-            </a:ext>
-          </a:extLst>
-        </p:spPr>
-        <p:style>
-          <a:lnRef idx="2">
-            <a:schemeClr val="accent1">
-              <a:shade val="15000"/>
-            </a:schemeClr>
-          </a:lnRef>
-          <a:fillRef idx="1">
-            <a:schemeClr val="accent1"/>
-          </a:fillRef>
-          <a:effectRef idx="0">
-            <a:schemeClr val="accent1"/>
-          </a:effectRef>
-          <a:fontRef idx="minor">
-            <a:schemeClr val="lt1"/>
-          </a:fontRef>
-        </p:style>
-        <p:txBody>
-          <a:bodyPr rtlCol="0" anchor="ctr"/>
-          <a:lstStyle/>
-          <a:p>
-            <a:pPr algn="ctr"/>
-            <a:endParaRPr lang="zh-CN" altLang="en-US"/>
-          </a:p>
-        </p:txBody>
-      </p:sp>
-      <p:sp>
-        <p:nvSpPr>
-          <p:cNvPr id="27" name="role1-t">
-            <a:extLst>
-              <a:ext uri="{FF2B5EF4-FFF2-40B4-BE49-F238E27FC236}">
-                <a16:creationId xmlns:a16="http://schemas.microsoft.com/office/drawing/2014/main" id="{25CA07A6-2F25-CE65-93E7-BC671E99D5C1}"/>
+          <p:cNvPr id="26" name="role1-t">
+            <a:extLst>
+              <a:ext uri="{FF2B5EF4-FFF2-40B4-BE49-F238E27FC236}">
+                <a16:creationId xmlns:a16="http://schemas.microsoft.com/office/drawing/2014/main" id="{86ECF5C1-B744-6D0F-5048-9D62D6988F32}"/>
               </a:ext>
             </a:extLst>
           </p:cNvPr>
@@ -4811,8 +4747,8 @@
         </p:nvSpPr>
         <p:spPr>
           <a:xfrm>
-            <a:off x="2440940" y="1323340"/>
-            <a:ext cx="2782993" cy="133370"/>
+            <a:off x="2364740" y="1323340"/>
+            <a:ext cx="2859193" cy="117981"/>
           </a:xfrm>
           <a:prstGeom prst="rect">
             <a:avLst/>
@@ -4826,7 +4762,7 @@
           <a:lstStyle/>
           <a:p>
             <a:r>
-              <a:rPr lang="zh-CN" altLang="en-US" sz="700" b="1">
+              <a:rPr lang="zh-CN" altLang="en-US" sz="600" b="1">
                 <a:solidFill>
                   <a:srgbClr val="294858"/>
                 </a:solidFill>
@@ -4835,7 +4771,7 @@
               <a:t>科组 </a:t>
             </a:r>
             <a:r>
-              <a:rPr lang="en-US" altLang="zh-CN" sz="700" b="1">
+              <a:rPr lang="en-US" altLang="zh-CN" sz="600" b="1">
                 <a:solidFill>
                   <a:srgbClr val="294858"/>
                 </a:solidFill>
@@ -4844,7 +4780,7 @@
               <a:t>/ </a:t>
             </a:r>
             <a:r>
-              <a:rPr lang="zh-CN" altLang="en-US" sz="700" b="1">
+              <a:rPr lang="zh-CN" altLang="en-US" sz="600" b="1">
                 <a:solidFill>
                   <a:srgbClr val="294858"/>
                 </a:solidFill>
@@ -4857,10 +4793,10 @@
       </p:sp>
       <p:sp>
         <p:nvSpPr>
-          <p:cNvPr id="28" name="role1-p">
-            <a:extLst>
-              <a:ext uri="{FF2B5EF4-FFF2-40B4-BE49-F238E27FC236}">
-                <a16:creationId xmlns:a16="http://schemas.microsoft.com/office/drawing/2014/main" id="{A9F3EC31-ED2C-F4DE-8DF3-C77A0E436CA3}"/>
+          <p:cNvPr id="27" name="role1-p">
+            <a:extLst>
+              <a:ext uri="{FF2B5EF4-FFF2-40B4-BE49-F238E27FC236}">
+                <a16:creationId xmlns:a16="http://schemas.microsoft.com/office/drawing/2014/main" id="{E55FFC3C-CE0D-DB34-3B61-BD8703136C6E}"/>
               </a:ext>
             </a:extLst>
           </p:cNvPr>
@@ -4869,8 +4805,8 @@
         </p:nvSpPr>
         <p:spPr>
           <a:xfrm>
-            <a:off x="2440940" y="1501140"/>
-            <a:ext cx="2782993" cy="117981"/>
+            <a:off x="2364740" y="1475740"/>
+            <a:ext cx="2859193" cy="117981"/>
           </a:xfrm>
           <a:prstGeom prst="rect">
             <a:avLst/>
@@ -4897,10 +4833,10 @@
       </p:sp>
       <p:sp>
         <p:nvSpPr>
-          <p:cNvPr id="29" name="role2-bg">
-            <a:extLst>
-              <a:ext uri="{FF2B5EF4-FFF2-40B4-BE49-F238E27FC236}">
-                <a16:creationId xmlns:a16="http://schemas.microsoft.com/office/drawing/2014/main" id="{788CB1E6-741D-E6E6-388B-D9E9072CE36B}"/>
+          <p:cNvPr id="28" name="role2-bg">
+            <a:extLst>
+              <a:ext uri="{FF2B5EF4-FFF2-40B4-BE49-F238E27FC236}">
+                <a16:creationId xmlns:a16="http://schemas.microsoft.com/office/drawing/2014/main" id="{EDE16C8A-CE67-1178-C882-D2A90689BDAA}"/>
               </a:ext>
             </a:extLst>
           </p:cNvPr>
@@ -4965,10 +4901,10 @@
       </p:sp>
       <p:sp>
         <p:nvSpPr>
-          <p:cNvPr id="30" name="role2-top">
-            <a:extLst>
-              <a:ext uri="{FF2B5EF4-FFF2-40B4-BE49-F238E27FC236}">
-                <a16:creationId xmlns:a16="http://schemas.microsoft.com/office/drawing/2014/main" id="{E677D587-21A5-7F06-F2B1-B634FB40F873}"/>
+          <p:cNvPr id="29" name="role2-top">
+            <a:extLst>
+              <a:ext uri="{FF2B5EF4-FFF2-40B4-BE49-F238E27FC236}">
+                <a16:creationId xmlns:a16="http://schemas.microsoft.com/office/drawing/2014/main" id="{5AFBD9B6-5489-B5B8-AF10-7AF1C70722AF}"/>
               </a:ext>
             </a:extLst>
           </p:cNvPr>
@@ -5033,10 +4969,10 @@
       </p:sp>
       <p:sp>
         <p:nvSpPr>
-          <p:cNvPr id="31" name="role2-ico1">
-            <a:extLst>
-              <a:ext uri="{FF2B5EF4-FFF2-40B4-BE49-F238E27FC236}">
-                <a16:creationId xmlns:a16="http://schemas.microsoft.com/office/drawing/2014/main" id="{ED228CE4-B916-45EA-9E1C-4C38ED7A8689}"/>
+          <p:cNvPr id="30" name="role2-ico1">
+            <a:extLst>
+              <a:ext uri="{FF2B5EF4-FFF2-40B4-BE49-F238E27FC236}">
+                <a16:creationId xmlns:a16="http://schemas.microsoft.com/office/drawing/2014/main" id="{39ADBE24-6923-D062-37C1-03EDE5E88694}"/>
               </a:ext>
             </a:extLst>
           </p:cNvPr>
@@ -5045,14 +4981,14 @@
         </p:nvSpPr>
         <p:spPr>
           <a:xfrm>
-            <a:off x="5401733" y="1399540"/>
-            <a:ext cx="127000" cy="127000"/>
+            <a:off x="5414433" y="1424940"/>
+            <a:ext cx="88900" cy="88900"/>
           </a:xfrm>
           <a:prstGeom prst="ellipse">
             <a:avLst/>
           </a:prstGeom>
           <a:noFill/>
-          <a:ln w="13970" cap="flat" cmpd="sng" algn="ctr">
+          <a:ln w="11430" cap="flat" cmpd="sng" algn="ctr">
             <a:solidFill>
               <a:srgbClr val="506C78"/>
             </a:solidFill>
@@ -5097,10 +5033,10 @@
       </p:sp>
       <p:sp>
         <p:nvSpPr>
-          <p:cNvPr id="32" name="role2-ico2">
-            <a:extLst>
-              <a:ext uri="{FF2B5EF4-FFF2-40B4-BE49-F238E27FC236}">
-                <a16:creationId xmlns:a16="http://schemas.microsoft.com/office/drawing/2014/main" id="{AF595AF8-6E20-BFEA-5B66-E3A3967A7DA0}"/>
+          <p:cNvPr id="31" name="role2-ico3">
+            <a:extLst>
+              <a:ext uri="{FF2B5EF4-FFF2-40B4-BE49-F238E27FC236}">
+                <a16:creationId xmlns:a16="http://schemas.microsoft.com/office/drawing/2014/main" id="{217B655C-DC9C-AAE1-F700-52DC32C32219}"/>
               </a:ext>
             </a:extLst>
           </p:cNvPr>
@@ -5109,14 +5045,14 @@
         </p:nvSpPr>
         <p:spPr>
           <a:xfrm>
-            <a:off x="5503333" y="1424940"/>
-            <a:ext cx="101600" cy="101600"/>
-          </a:xfrm>
-          <a:prstGeom prst="ellipse">
+            <a:off x="5414433" y="1539240"/>
+            <a:ext cx="152400" cy="63500"/>
+          </a:xfrm>
+          <a:prstGeom prst="roundRect">
             <a:avLst/>
           </a:prstGeom>
           <a:noFill/>
-          <a:ln w="13970" cap="flat" cmpd="sng" algn="ctr">
+          <a:ln w="11430" cap="flat" cmpd="sng" algn="ctr">
             <a:solidFill>
               <a:srgbClr val="506C78"/>
             </a:solidFill>
@@ -5161,74 +5097,10 @@
       </p:sp>
       <p:sp>
         <p:nvSpPr>
-          <p:cNvPr id="33" name="role2-ico3">
-            <a:extLst>
-              <a:ext uri="{FF2B5EF4-FFF2-40B4-BE49-F238E27FC236}">
-                <a16:creationId xmlns:a16="http://schemas.microsoft.com/office/drawing/2014/main" id="{C389D04F-881B-CCF0-05B0-F5FC19758C25}"/>
-              </a:ext>
-            </a:extLst>
-          </p:cNvPr>
-          <p:cNvSpPr/>
-          <p:nvPr/>
-        </p:nvSpPr>
-        <p:spPr>
-          <a:xfrm>
-            <a:off x="5401733" y="1551940"/>
-            <a:ext cx="203200" cy="101600"/>
-          </a:xfrm>
-          <a:prstGeom prst="roundRect">
-            <a:avLst/>
-          </a:prstGeom>
-          <a:noFill/>
-          <a:ln w="13970" cap="flat" cmpd="sng" algn="ctr">
-            <a:solidFill>
-              <a:srgbClr val="506C78"/>
-            </a:solidFill>
-            <a:prstDash val="solid"/>
-            <a:miter lim="800000"/>
-          </a:ln>
-          <a:effectLst/>
-          <a:extLst>
-            <a:ext uri="{909E8E84-426E-40DD-AFC4-6F175D3DCCD1}">
-              <a14:hiddenFill xmlns:a14="http://schemas.microsoft.com/office/drawing/2010/main">
-                <a:solidFill>
-                  <a:schemeClr val="accent1"/>
-                </a:solidFill>
-              </a14:hiddenFill>
-            </a:ext>
-          </a:extLst>
-        </p:spPr>
-        <p:style>
-          <a:lnRef idx="2">
-            <a:schemeClr val="accent1">
-              <a:shade val="15000"/>
-            </a:schemeClr>
-          </a:lnRef>
-          <a:fillRef idx="1">
-            <a:schemeClr val="accent1"/>
-          </a:fillRef>
-          <a:effectRef idx="0">
-            <a:schemeClr val="accent1"/>
-          </a:effectRef>
-          <a:fontRef idx="minor">
-            <a:schemeClr val="lt1"/>
-          </a:fontRef>
-        </p:style>
-        <p:txBody>
-          <a:bodyPr rtlCol="0" anchor="ctr"/>
-          <a:lstStyle/>
-          <a:p>
-            <a:pPr algn="ctr"/>
-            <a:endParaRPr lang="zh-CN" altLang="en-US"/>
-          </a:p>
-        </p:txBody>
-      </p:sp>
-      <p:sp>
-        <p:nvSpPr>
-          <p:cNvPr id="34" name="role2-t">
-            <a:extLst>
-              <a:ext uri="{FF2B5EF4-FFF2-40B4-BE49-F238E27FC236}">
-                <a16:creationId xmlns:a16="http://schemas.microsoft.com/office/drawing/2014/main" id="{AFB0C615-3B1D-B161-FAFC-8BA8139C71A2}"/>
+          <p:cNvPr id="32" name="role2-t">
+            <a:extLst>
+              <a:ext uri="{FF2B5EF4-FFF2-40B4-BE49-F238E27FC236}">
+                <a16:creationId xmlns:a16="http://schemas.microsoft.com/office/drawing/2014/main" id="{AC7C8D6A-6E1D-430E-AE12-ED8C4C41D3C1}"/>
               </a:ext>
             </a:extLst>
           </p:cNvPr>
@@ -5237,8 +5109,8 @@
         </p:nvSpPr>
         <p:spPr>
           <a:xfrm>
-            <a:off x="5681133" y="1323340"/>
-            <a:ext cx="2782993" cy="133370"/>
+            <a:off x="5604933" y="1323340"/>
+            <a:ext cx="2859193" cy="117981"/>
           </a:xfrm>
           <a:prstGeom prst="rect">
             <a:avLst/>
@@ -5252,7 +5124,7 @@
           <a:lstStyle/>
           <a:p>
             <a:r>
-              <a:rPr lang="zh-CN" altLang="en-US" sz="700" b="1">
+              <a:rPr lang="zh-CN" altLang="en-US" sz="600" b="1">
                 <a:solidFill>
                   <a:srgbClr val="294858"/>
                 </a:solidFill>
@@ -5261,7 +5133,7 @@
               <a:t>能力 </a:t>
             </a:r>
             <a:r>
-              <a:rPr lang="en-US" altLang="zh-CN" sz="700" b="1">
+              <a:rPr lang="en-US" altLang="zh-CN" sz="600" b="1">
                 <a:solidFill>
                   <a:srgbClr val="294858"/>
                 </a:solidFill>
@@ -5269,7 +5141,7 @@
               </a:rPr>
               <a:t>Owner</a:t>
             </a:r>
-            <a:endParaRPr lang="zh-CN" altLang="en-US" sz="700" b="1">
+            <a:endParaRPr lang="zh-CN" altLang="en-US" sz="600" b="1">
               <a:solidFill>
                 <a:srgbClr val="294858"/>
               </a:solidFill>
@@ -5280,10 +5152,10 @@
       </p:sp>
       <p:sp>
         <p:nvSpPr>
-          <p:cNvPr id="35" name="role2-p">
-            <a:extLst>
-              <a:ext uri="{FF2B5EF4-FFF2-40B4-BE49-F238E27FC236}">
-                <a16:creationId xmlns:a16="http://schemas.microsoft.com/office/drawing/2014/main" id="{15D63338-CD84-80F7-1D73-7E3ED2329F52}"/>
+          <p:cNvPr id="33" name="role2-p">
+            <a:extLst>
+              <a:ext uri="{FF2B5EF4-FFF2-40B4-BE49-F238E27FC236}">
+                <a16:creationId xmlns:a16="http://schemas.microsoft.com/office/drawing/2014/main" id="{2F0D0A05-C3F7-7D46-3B48-4019524AC366}"/>
               </a:ext>
             </a:extLst>
           </p:cNvPr>
@@ -5292,8 +5164,8 @@
         </p:nvSpPr>
         <p:spPr>
           <a:xfrm>
-            <a:off x="5681133" y="1501140"/>
-            <a:ext cx="2782993" cy="117981"/>
+            <a:off x="5604933" y="1475740"/>
+            <a:ext cx="2859193" cy="117981"/>
           </a:xfrm>
           <a:prstGeom prst="rect">
             <a:avLst/>
@@ -5338,10 +5210,10 @@
       </p:sp>
       <p:sp>
         <p:nvSpPr>
-          <p:cNvPr id="36" name="role3-bg">
-            <a:extLst>
-              <a:ext uri="{FF2B5EF4-FFF2-40B4-BE49-F238E27FC236}">
-                <a16:creationId xmlns:a16="http://schemas.microsoft.com/office/drawing/2014/main" id="{DEB43275-45B8-E9FB-E4FF-32B5DA953D2E}"/>
+          <p:cNvPr id="34" name="role3-bg">
+            <a:extLst>
+              <a:ext uri="{FF2B5EF4-FFF2-40B4-BE49-F238E27FC236}">
+                <a16:creationId xmlns:a16="http://schemas.microsoft.com/office/drawing/2014/main" id="{CA5C645D-CC87-01DA-AB54-4D5E8EDF575F}"/>
               </a:ext>
             </a:extLst>
           </p:cNvPr>
@@ -5406,10 +5278,10 @@
       </p:sp>
       <p:sp>
         <p:nvSpPr>
-          <p:cNvPr id="37" name="role3-top">
-            <a:extLst>
-              <a:ext uri="{FF2B5EF4-FFF2-40B4-BE49-F238E27FC236}">
-                <a16:creationId xmlns:a16="http://schemas.microsoft.com/office/drawing/2014/main" id="{88D47A94-A004-5A4E-BE01-8A1523248D68}"/>
+          <p:cNvPr id="35" name="role3-top">
+            <a:extLst>
+              <a:ext uri="{FF2B5EF4-FFF2-40B4-BE49-F238E27FC236}">
+                <a16:creationId xmlns:a16="http://schemas.microsoft.com/office/drawing/2014/main" id="{3D46191B-0596-861B-D0E6-CF9C8C47C73F}"/>
               </a:ext>
             </a:extLst>
           </p:cNvPr>
@@ -5474,10 +5346,10 @@
       </p:sp>
       <p:sp>
         <p:nvSpPr>
-          <p:cNvPr id="38" name="role3-ico1">
-            <a:extLst>
-              <a:ext uri="{FF2B5EF4-FFF2-40B4-BE49-F238E27FC236}">
-                <a16:creationId xmlns:a16="http://schemas.microsoft.com/office/drawing/2014/main" id="{CE491DE0-DC7D-29B5-375F-E5870D0BE1BC}"/>
+          <p:cNvPr id="36" name="role3-ico1">
+            <a:extLst>
+              <a:ext uri="{FF2B5EF4-FFF2-40B4-BE49-F238E27FC236}">
+                <a16:creationId xmlns:a16="http://schemas.microsoft.com/office/drawing/2014/main" id="{563EE510-0B65-6B2F-878D-DF2F145C8140}"/>
               </a:ext>
             </a:extLst>
           </p:cNvPr>
@@ -5486,14 +5358,14 @@
         </p:nvSpPr>
         <p:spPr>
           <a:xfrm>
-            <a:off x="8641927" y="1399540"/>
-            <a:ext cx="127000" cy="127000"/>
+            <a:off x="8654627" y="1424940"/>
+            <a:ext cx="88900" cy="88900"/>
           </a:xfrm>
           <a:prstGeom prst="ellipse">
             <a:avLst/>
           </a:prstGeom>
           <a:noFill/>
-          <a:ln w="13970" cap="flat" cmpd="sng" algn="ctr">
+          <a:ln w="11430" cap="flat" cmpd="sng" algn="ctr">
             <a:solidFill>
               <a:srgbClr val="506C78"/>
             </a:solidFill>
@@ -5538,10 +5410,10 @@
       </p:sp>
       <p:sp>
         <p:nvSpPr>
-          <p:cNvPr id="39" name="role3-ico2">
-            <a:extLst>
-              <a:ext uri="{FF2B5EF4-FFF2-40B4-BE49-F238E27FC236}">
-                <a16:creationId xmlns:a16="http://schemas.microsoft.com/office/drawing/2014/main" id="{60F4235F-A35F-7756-399A-AA1C4CC23686}"/>
+          <p:cNvPr id="37" name="role3-ico3">
+            <a:extLst>
+              <a:ext uri="{FF2B5EF4-FFF2-40B4-BE49-F238E27FC236}">
+                <a16:creationId xmlns:a16="http://schemas.microsoft.com/office/drawing/2014/main" id="{420E43CB-9E27-F249-B5F9-03A97D96CF52}"/>
               </a:ext>
             </a:extLst>
           </p:cNvPr>
@@ -5550,14 +5422,14 @@
         </p:nvSpPr>
         <p:spPr>
           <a:xfrm>
-            <a:off x="8743527" y="1424940"/>
-            <a:ext cx="101600" cy="101600"/>
-          </a:xfrm>
-          <a:prstGeom prst="ellipse">
+            <a:off x="8654627" y="1539240"/>
+            <a:ext cx="152400" cy="63500"/>
+          </a:xfrm>
+          <a:prstGeom prst="roundRect">
             <a:avLst/>
           </a:prstGeom>
           <a:noFill/>
-          <a:ln w="13970" cap="flat" cmpd="sng" algn="ctr">
+          <a:ln w="11430" cap="flat" cmpd="sng" algn="ctr">
             <a:solidFill>
               <a:srgbClr val="506C78"/>
             </a:solidFill>
@@ -5602,74 +5474,10 @@
       </p:sp>
       <p:sp>
         <p:nvSpPr>
-          <p:cNvPr id="40" name="role3-ico3">
-            <a:extLst>
-              <a:ext uri="{FF2B5EF4-FFF2-40B4-BE49-F238E27FC236}">
-                <a16:creationId xmlns:a16="http://schemas.microsoft.com/office/drawing/2014/main" id="{C1372CA9-1297-75AB-6F1A-91A24C8A6032}"/>
-              </a:ext>
-            </a:extLst>
-          </p:cNvPr>
-          <p:cNvSpPr/>
-          <p:nvPr/>
-        </p:nvSpPr>
-        <p:spPr>
-          <a:xfrm>
-            <a:off x="8641927" y="1551940"/>
-            <a:ext cx="203200" cy="101600"/>
-          </a:xfrm>
-          <a:prstGeom prst="roundRect">
-            <a:avLst/>
-          </a:prstGeom>
-          <a:noFill/>
-          <a:ln w="13970" cap="flat" cmpd="sng" algn="ctr">
-            <a:solidFill>
-              <a:srgbClr val="506C78"/>
-            </a:solidFill>
-            <a:prstDash val="solid"/>
-            <a:miter lim="800000"/>
-          </a:ln>
-          <a:effectLst/>
-          <a:extLst>
-            <a:ext uri="{909E8E84-426E-40DD-AFC4-6F175D3DCCD1}">
-              <a14:hiddenFill xmlns:a14="http://schemas.microsoft.com/office/drawing/2010/main">
-                <a:solidFill>
-                  <a:schemeClr val="accent1"/>
-                </a:solidFill>
-              </a14:hiddenFill>
-            </a:ext>
-          </a:extLst>
-        </p:spPr>
-        <p:style>
-          <a:lnRef idx="2">
-            <a:schemeClr val="accent1">
-              <a:shade val="15000"/>
-            </a:schemeClr>
-          </a:lnRef>
-          <a:fillRef idx="1">
-            <a:schemeClr val="accent1"/>
-          </a:fillRef>
-          <a:effectRef idx="0">
-            <a:schemeClr val="accent1"/>
-          </a:effectRef>
-          <a:fontRef idx="minor">
-            <a:schemeClr val="lt1"/>
-          </a:fontRef>
-        </p:style>
-        <p:txBody>
-          <a:bodyPr rtlCol="0" anchor="ctr"/>
-          <a:lstStyle/>
-          <a:p>
-            <a:pPr algn="ctr"/>
-            <a:endParaRPr lang="zh-CN" altLang="en-US"/>
-          </a:p>
-        </p:txBody>
-      </p:sp>
-      <p:sp>
-        <p:nvSpPr>
-          <p:cNvPr id="41" name="role3-t">
-            <a:extLst>
-              <a:ext uri="{FF2B5EF4-FFF2-40B4-BE49-F238E27FC236}">
-                <a16:creationId xmlns:a16="http://schemas.microsoft.com/office/drawing/2014/main" id="{BA56FC48-24D4-B328-57F9-46C2184CD015}"/>
+          <p:cNvPr id="38" name="role3-t">
+            <a:extLst>
+              <a:ext uri="{FF2B5EF4-FFF2-40B4-BE49-F238E27FC236}">
+                <a16:creationId xmlns:a16="http://schemas.microsoft.com/office/drawing/2014/main" id="{2727D7FF-15B1-8BBE-9C1A-41A023817F59}"/>
               </a:ext>
             </a:extLst>
           </p:cNvPr>
@@ -5678,8 +5486,8 @@
         </p:nvSpPr>
         <p:spPr>
           <a:xfrm>
-            <a:off x="8921327" y="1323340"/>
-            <a:ext cx="2782993" cy="133370"/>
+            <a:off x="8845127" y="1323340"/>
+            <a:ext cx="2859193" cy="117981"/>
           </a:xfrm>
           <a:prstGeom prst="rect">
             <a:avLst/>
@@ -5693,7 +5501,7 @@
           <a:lstStyle/>
           <a:p>
             <a:r>
-              <a:rPr lang="zh-CN" altLang="en-US" sz="700" b="1">
+              <a:rPr lang="zh-CN" altLang="en-US" sz="600" b="1">
                 <a:solidFill>
                   <a:srgbClr val="294858"/>
                 </a:solidFill>
@@ -5706,10 +5514,10 @@
       </p:sp>
       <p:sp>
         <p:nvSpPr>
-          <p:cNvPr id="42" name="role3-p">
-            <a:extLst>
-              <a:ext uri="{FF2B5EF4-FFF2-40B4-BE49-F238E27FC236}">
-                <a16:creationId xmlns:a16="http://schemas.microsoft.com/office/drawing/2014/main" id="{002358F2-DBD5-7896-F6C2-2810C60806FC}"/>
+          <p:cNvPr id="39" name="role3-p">
+            <a:extLst>
+              <a:ext uri="{FF2B5EF4-FFF2-40B4-BE49-F238E27FC236}">
+                <a16:creationId xmlns:a16="http://schemas.microsoft.com/office/drawing/2014/main" id="{F140DCB6-28A4-6884-AEE4-B58B1FB8FA8C}"/>
               </a:ext>
             </a:extLst>
           </p:cNvPr>
@@ -5718,8 +5526,8 @@
         </p:nvSpPr>
         <p:spPr>
           <a:xfrm>
-            <a:off x="8921327" y="1501140"/>
-            <a:ext cx="2782993" cy="117981"/>
+            <a:off x="8845127" y="1475740"/>
+            <a:ext cx="2859193" cy="117981"/>
           </a:xfrm>
           <a:prstGeom prst="rect">
             <a:avLst/>
@@ -5746,10 +5554,10 @@
       </p:sp>
       <p:sp>
         <p:nvSpPr>
-          <p:cNvPr id="43" name="m-corner">
-            <a:extLst>
-              <a:ext uri="{FF2B5EF4-FFF2-40B4-BE49-F238E27FC236}">
-                <a16:creationId xmlns:a16="http://schemas.microsoft.com/office/drawing/2014/main" id="{56E818A4-FC1F-0639-8FEB-604EBB32F713}"/>
+          <p:cNvPr id="40" name="m-corner">
+            <a:extLst>
+              <a:ext uri="{FF2B5EF4-FFF2-40B4-BE49-F238E27FC236}">
+                <a16:creationId xmlns:a16="http://schemas.microsoft.com/office/drawing/2014/main" id="{9B74243B-F376-FAB2-4AEB-404375012938}"/>
               </a:ext>
             </a:extLst>
           </p:cNvPr>
@@ -5814,10 +5622,10 @@
       </p:sp>
       <p:sp>
         <p:nvSpPr>
-          <p:cNvPr id="44" name="m-head-old">
-            <a:extLst>
-              <a:ext uri="{FF2B5EF4-FFF2-40B4-BE49-F238E27FC236}">
-                <a16:creationId xmlns:a16="http://schemas.microsoft.com/office/drawing/2014/main" id="{26B9C911-012F-EDC3-FFB5-E7AEB584C724}"/>
+          <p:cNvPr id="41" name="m-head-old">
+            <a:extLst>
+              <a:ext uri="{FF2B5EF4-FFF2-40B4-BE49-F238E27FC236}">
+                <a16:creationId xmlns:a16="http://schemas.microsoft.com/office/drawing/2014/main" id="{2B5FED99-76CE-34CC-814A-2365DB4FD222}"/>
               </a:ext>
             </a:extLst>
           </p:cNvPr>
@@ -5882,10 +5690,10 @@
       </p:sp>
       <p:sp>
         <p:nvSpPr>
-          <p:cNvPr id="45" name="m-head-old-t">
-            <a:extLst>
-              <a:ext uri="{FF2B5EF4-FFF2-40B4-BE49-F238E27FC236}">
-                <a16:creationId xmlns:a16="http://schemas.microsoft.com/office/drawing/2014/main" id="{EE2FBA09-4E03-B03A-B41C-6E9ED7874812}"/>
+          <p:cNvPr id="42" name="m-head-old-t">
+            <a:extLst>
+              <a:ext uri="{FF2B5EF4-FFF2-40B4-BE49-F238E27FC236}">
+                <a16:creationId xmlns:a16="http://schemas.microsoft.com/office/drawing/2014/main" id="{92DFB7F1-FF6B-DBBD-97BD-4FB1A5216513}"/>
               </a:ext>
             </a:extLst>
           </p:cNvPr>
@@ -5931,10 +5739,10 @@
       </p:sp>
       <p:sp>
         <p:nvSpPr>
-          <p:cNvPr id="46" name="m-head-new">
-            <a:extLst>
-              <a:ext uri="{FF2B5EF4-FFF2-40B4-BE49-F238E27FC236}">
-                <a16:creationId xmlns:a16="http://schemas.microsoft.com/office/drawing/2014/main" id="{5EF9170B-D160-DDBD-58C9-64BDD43BBCE2}"/>
+          <p:cNvPr id="43" name="m-head-new">
+            <a:extLst>
+              <a:ext uri="{FF2B5EF4-FFF2-40B4-BE49-F238E27FC236}">
+                <a16:creationId xmlns:a16="http://schemas.microsoft.com/office/drawing/2014/main" id="{494D7D94-55CB-F58F-AF12-1E6ECC449240}"/>
               </a:ext>
             </a:extLst>
           </p:cNvPr>
@@ -5999,10 +5807,10 @@
       </p:sp>
       <p:sp>
         <p:nvSpPr>
-          <p:cNvPr id="47" name="m-head-new-t">
-            <a:extLst>
-              <a:ext uri="{FF2B5EF4-FFF2-40B4-BE49-F238E27FC236}">
-                <a16:creationId xmlns:a16="http://schemas.microsoft.com/office/drawing/2014/main" id="{D8BC4995-84DD-3E93-01D8-F6E8BA3A9176}"/>
+          <p:cNvPr id="44" name="m-head-new-t">
+            <a:extLst>
+              <a:ext uri="{FF2B5EF4-FFF2-40B4-BE49-F238E27FC236}">
+                <a16:creationId xmlns:a16="http://schemas.microsoft.com/office/drawing/2014/main" id="{1040118F-1544-B53B-9976-032894E591AA}"/>
               </a:ext>
             </a:extLst>
           </p:cNvPr>
@@ -6048,10 +5856,10 @@
       </p:sp>
       <p:sp>
         <p:nvSpPr>
-          <p:cNvPr id="48" name="lab-design-bg">
-            <a:extLst>
-              <a:ext uri="{FF2B5EF4-FFF2-40B4-BE49-F238E27FC236}">
-                <a16:creationId xmlns:a16="http://schemas.microsoft.com/office/drawing/2014/main" id="{96C3E6BC-8E57-A1EF-8284-B1D45C4975A6}"/>
+          <p:cNvPr id="45" name="lab-design-bg">
+            <a:extLst>
+              <a:ext uri="{FF2B5EF4-FFF2-40B4-BE49-F238E27FC236}">
+                <a16:creationId xmlns:a16="http://schemas.microsoft.com/office/drawing/2014/main" id="{A9084498-FF6A-AC50-6EC8-09FDCA7BEA3F}"/>
               </a:ext>
             </a:extLst>
           </p:cNvPr>
@@ -6116,10 +5924,10 @@
       </p:sp>
       <p:sp>
         <p:nvSpPr>
-          <p:cNvPr id="49" name="lab-design-t">
-            <a:extLst>
-              <a:ext uri="{FF2B5EF4-FFF2-40B4-BE49-F238E27FC236}">
-                <a16:creationId xmlns:a16="http://schemas.microsoft.com/office/drawing/2014/main" id="{05C777A7-3C6C-F9BB-0577-A7DCB1659641}"/>
+          <p:cNvPr id="46" name="lab-design-t">
+            <a:extLst>
+              <a:ext uri="{FF2B5EF4-FFF2-40B4-BE49-F238E27FC236}">
+                <a16:creationId xmlns:a16="http://schemas.microsoft.com/office/drawing/2014/main" id="{DEB32749-17CC-2283-4C5A-FB2CDF6591CF}"/>
               </a:ext>
             </a:extLst>
           </p:cNvPr>
@@ -6156,10 +5964,10 @@
       </p:sp>
       <p:sp>
         <p:nvSpPr>
-          <p:cNvPr id="50" name="lab-design-s">
-            <a:extLst>
-              <a:ext uri="{FF2B5EF4-FFF2-40B4-BE49-F238E27FC236}">
-                <a16:creationId xmlns:a16="http://schemas.microsoft.com/office/drawing/2014/main" id="{FC357CDF-B152-A6F7-539E-1D6DB27846B0}"/>
+          <p:cNvPr id="47" name="lab-design-s">
+            <a:extLst>
+              <a:ext uri="{FF2B5EF4-FFF2-40B4-BE49-F238E27FC236}">
+                <a16:creationId xmlns:a16="http://schemas.microsoft.com/office/drawing/2014/main" id="{9936A3B0-344E-67B2-2B7A-9DB6559C0EFF}"/>
               </a:ext>
             </a:extLst>
           </p:cNvPr>
@@ -6196,10 +6004,10 @@
       </p:sp>
       <p:sp>
         <p:nvSpPr>
-          <p:cNvPr id="51" name="lab-ops-bg">
-            <a:extLst>
-              <a:ext uri="{FF2B5EF4-FFF2-40B4-BE49-F238E27FC236}">
-                <a16:creationId xmlns:a16="http://schemas.microsoft.com/office/drawing/2014/main" id="{B82C9559-7693-F01B-A09E-523CE996E69F}"/>
+          <p:cNvPr id="48" name="lab-ops-bg">
+            <a:extLst>
+              <a:ext uri="{FF2B5EF4-FFF2-40B4-BE49-F238E27FC236}">
+                <a16:creationId xmlns:a16="http://schemas.microsoft.com/office/drawing/2014/main" id="{BF46AB20-C12C-A08D-3B3C-74D7182CFEB0}"/>
               </a:ext>
             </a:extLst>
           </p:cNvPr>
@@ -6264,10 +6072,10 @@
       </p:sp>
       <p:sp>
         <p:nvSpPr>
-          <p:cNvPr id="52" name="lab-ops-t">
-            <a:extLst>
-              <a:ext uri="{FF2B5EF4-FFF2-40B4-BE49-F238E27FC236}">
-                <a16:creationId xmlns:a16="http://schemas.microsoft.com/office/drawing/2014/main" id="{9B4517F3-03E4-8EDE-6D6C-AA3DB496CBFE}"/>
+          <p:cNvPr id="49" name="lab-ops-t">
+            <a:extLst>
+              <a:ext uri="{FF2B5EF4-FFF2-40B4-BE49-F238E27FC236}">
+                <a16:creationId xmlns:a16="http://schemas.microsoft.com/office/drawing/2014/main" id="{E8CB646C-852C-C3B6-78D4-C09EB18C6DBE}"/>
               </a:ext>
             </a:extLst>
           </p:cNvPr>
@@ -6304,10 +6112,10 @@
       </p:sp>
       <p:sp>
         <p:nvSpPr>
-          <p:cNvPr id="53" name="lab-ops-s">
-            <a:extLst>
-              <a:ext uri="{FF2B5EF4-FFF2-40B4-BE49-F238E27FC236}">
-                <a16:creationId xmlns:a16="http://schemas.microsoft.com/office/drawing/2014/main" id="{B80C71A5-C70E-3E3C-6C49-975366D50B69}"/>
+          <p:cNvPr id="50" name="lab-ops-s">
+            <a:extLst>
+              <a:ext uri="{FF2B5EF4-FFF2-40B4-BE49-F238E27FC236}">
+                <a16:creationId xmlns:a16="http://schemas.microsoft.com/office/drawing/2014/main" id="{035EE2EC-12E8-12D8-38EC-EBF981C8820F}"/>
               </a:ext>
             </a:extLst>
           </p:cNvPr>
@@ -6344,10 +6152,10 @@
       </p:sp>
       <p:sp>
         <p:nvSpPr>
-          <p:cNvPr id="54" name="lab-val-bg">
-            <a:extLst>
-              <a:ext uri="{FF2B5EF4-FFF2-40B4-BE49-F238E27FC236}">
-                <a16:creationId xmlns:a16="http://schemas.microsoft.com/office/drawing/2014/main" id="{5283AB27-F77E-E548-C468-F199708EA7E8}"/>
+          <p:cNvPr id="51" name="lab-val-bg">
+            <a:extLst>
+              <a:ext uri="{FF2B5EF4-FFF2-40B4-BE49-F238E27FC236}">
+                <a16:creationId xmlns:a16="http://schemas.microsoft.com/office/drawing/2014/main" id="{52F1F617-B98F-F8F6-246E-8261850BEE1A}"/>
               </a:ext>
             </a:extLst>
           </p:cNvPr>
@@ -6412,10 +6220,10 @@
       </p:sp>
       <p:sp>
         <p:nvSpPr>
-          <p:cNvPr id="55" name="lab-val-t">
-            <a:extLst>
-              <a:ext uri="{FF2B5EF4-FFF2-40B4-BE49-F238E27FC236}">
-                <a16:creationId xmlns:a16="http://schemas.microsoft.com/office/drawing/2014/main" id="{23A55B22-0E71-BDBF-FE01-173620A0B4DD}"/>
+          <p:cNvPr id="52" name="lab-val-t">
+            <a:extLst>
+              <a:ext uri="{FF2B5EF4-FFF2-40B4-BE49-F238E27FC236}">
+                <a16:creationId xmlns:a16="http://schemas.microsoft.com/office/drawing/2014/main" id="{E14323A9-6D88-CA5E-3390-77355ADB1B09}"/>
               </a:ext>
             </a:extLst>
           </p:cNvPr>
@@ -6452,10 +6260,10 @@
       </p:sp>
       <p:sp>
         <p:nvSpPr>
-          <p:cNvPr id="56" name="lab-val-s">
-            <a:extLst>
-              <a:ext uri="{FF2B5EF4-FFF2-40B4-BE49-F238E27FC236}">
-                <a16:creationId xmlns:a16="http://schemas.microsoft.com/office/drawing/2014/main" id="{955CEBCA-46B1-E678-F68E-D544CFA59758}"/>
+          <p:cNvPr id="53" name="lab-val-s">
+            <a:extLst>
+              <a:ext uri="{FF2B5EF4-FFF2-40B4-BE49-F238E27FC236}">
+                <a16:creationId xmlns:a16="http://schemas.microsoft.com/office/drawing/2014/main" id="{FD2A78B6-4D57-8926-EF91-520285CCD388}"/>
               </a:ext>
             </a:extLst>
           </p:cNvPr>
@@ -6492,10 +6300,10 @@
       </p:sp>
       <p:sp>
         <p:nvSpPr>
-          <p:cNvPr id="57" name="cell-d-old">
-            <a:extLst>
-              <a:ext uri="{FF2B5EF4-FFF2-40B4-BE49-F238E27FC236}">
-                <a16:creationId xmlns:a16="http://schemas.microsoft.com/office/drawing/2014/main" id="{59E5D61E-7065-4DDD-B6FA-FE9D9E648B48}"/>
+          <p:cNvPr id="54" name="cell-d-old">
+            <a:extLst>
+              <a:ext uri="{FF2B5EF4-FFF2-40B4-BE49-F238E27FC236}">
+                <a16:creationId xmlns:a16="http://schemas.microsoft.com/office/drawing/2014/main" id="{93A6EF83-5C4D-2853-8719-DB5FAB7E34EB}"/>
               </a:ext>
             </a:extLst>
           </p:cNvPr>
@@ -6546,10 +6354,10 @@
       </p:sp>
       <p:sp>
         <p:nvSpPr>
-          <p:cNvPr id="58" name="mod-d0">
-            <a:extLst>
-              <a:ext uri="{FF2B5EF4-FFF2-40B4-BE49-F238E27FC236}">
-                <a16:creationId xmlns:a16="http://schemas.microsoft.com/office/drawing/2014/main" id="{8B22A585-C029-38CD-B477-79780803E438}"/>
+          <p:cNvPr id="55" name="mod-d0">
+            <a:extLst>
+              <a:ext uri="{FF2B5EF4-FFF2-40B4-BE49-F238E27FC236}">
+                <a16:creationId xmlns:a16="http://schemas.microsoft.com/office/drawing/2014/main" id="{601233E1-3406-A1CD-B292-D510A8FD7A18}"/>
               </a:ext>
             </a:extLst>
           </p:cNvPr>
@@ -6614,10 +6422,10 @@
       </p:sp>
       <p:sp>
         <p:nvSpPr>
-          <p:cNvPr id="59" name="mod-d0-top">
-            <a:extLst>
-              <a:ext uri="{FF2B5EF4-FFF2-40B4-BE49-F238E27FC236}">
-                <a16:creationId xmlns:a16="http://schemas.microsoft.com/office/drawing/2014/main" id="{9E962645-4B64-1877-7444-9C3D254A4353}"/>
+          <p:cNvPr id="56" name="mod-d0-top">
+            <a:extLst>
+              <a:ext uri="{FF2B5EF4-FFF2-40B4-BE49-F238E27FC236}">
+                <a16:creationId xmlns:a16="http://schemas.microsoft.com/office/drawing/2014/main" id="{3F19A7F0-E22B-3D9D-44D3-39788341EA61}"/>
               </a:ext>
             </a:extLst>
           </p:cNvPr>
@@ -6682,10 +6490,10 @@
       </p:sp>
       <p:sp>
         <p:nvSpPr>
-          <p:cNvPr id="60" name="mod-d0-t">
-            <a:extLst>
-              <a:ext uri="{FF2B5EF4-FFF2-40B4-BE49-F238E27FC236}">
-                <a16:creationId xmlns:a16="http://schemas.microsoft.com/office/drawing/2014/main" id="{65C9590F-A1A6-DDFB-2E8B-BFE73FE8E908}"/>
+          <p:cNvPr id="57" name="mod-d0-t">
+            <a:extLst>
+              <a:ext uri="{FF2B5EF4-FFF2-40B4-BE49-F238E27FC236}">
+                <a16:creationId xmlns:a16="http://schemas.microsoft.com/office/drawing/2014/main" id="{8DC6CFA2-62F1-17F4-29BE-72E14980C210}"/>
               </a:ext>
             </a:extLst>
           </p:cNvPr>
@@ -6723,10 +6531,10 @@
       </p:sp>
       <p:sp>
         <p:nvSpPr>
-          <p:cNvPr id="61" name="mod-d0-s">
-            <a:extLst>
-              <a:ext uri="{FF2B5EF4-FFF2-40B4-BE49-F238E27FC236}">
-                <a16:creationId xmlns:a16="http://schemas.microsoft.com/office/drawing/2014/main" id="{3A86D075-523E-30CC-2F39-F4103DF21121}"/>
+          <p:cNvPr id="58" name="mod-d0-s">
+            <a:extLst>
+              <a:ext uri="{FF2B5EF4-FFF2-40B4-BE49-F238E27FC236}">
+                <a16:creationId xmlns:a16="http://schemas.microsoft.com/office/drawing/2014/main" id="{563F63C5-1314-4964-AD2D-6E60C9DE4792}"/>
               </a:ext>
             </a:extLst>
           </p:cNvPr>
@@ -6764,10 +6572,10 @@
       </p:sp>
       <p:sp>
         <p:nvSpPr>
-          <p:cNvPr id="62" name="mod-d1">
-            <a:extLst>
-              <a:ext uri="{FF2B5EF4-FFF2-40B4-BE49-F238E27FC236}">
-                <a16:creationId xmlns:a16="http://schemas.microsoft.com/office/drawing/2014/main" id="{A58BEC3B-B876-A644-F710-167CAEE0BC74}"/>
+          <p:cNvPr id="59" name="mod-d1">
+            <a:extLst>
+              <a:ext uri="{FF2B5EF4-FFF2-40B4-BE49-F238E27FC236}">
+                <a16:creationId xmlns:a16="http://schemas.microsoft.com/office/drawing/2014/main" id="{A0270288-18F5-B058-02C1-F53E8977A290}"/>
               </a:ext>
             </a:extLst>
           </p:cNvPr>
@@ -6832,10 +6640,10 @@
       </p:sp>
       <p:sp>
         <p:nvSpPr>
-          <p:cNvPr id="63" name="mod-d1-top">
-            <a:extLst>
-              <a:ext uri="{FF2B5EF4-FFF2-40B4-BE49-F238E27FC236}">
-                <a16:creationId xmlns:a16="http://schemas.microsoft.com/office/drawing/2014/main" id="{4FF15BC2-452D-63D7-869B-16F0E2DA9510}"/>
+          <p:cNvPr id="60" name="mod-d1-top">
+            <a:extLst>
+              <a:ext uri="{FF2B5EF4-FFF2-40B4-BE49-F238E27FC236}">
+                <a16:creationId xmlns:a16="http://schemas.microsoft.com/office/drawing/2014/main" id="{406FF9AD-1BF4-E27C-12D9-3AD6F9FD0D7C}"/>
               </a:ext>
             </a:extLst>
           </p:cNvPr>
@@ -6900,10 +6708,10 @@
       </p:sp>
       <p:sp>
         <p:nvSpPr>
-          <p:cNvPr id="64" name="mod-d1-t">
-            <a:extLst>
-              <a:ext uri="{FF2B5EF4-FFF2-40B4-BE49-F238E27FC236}">
-                <a16:creationId xmlns:a16="http://schemas.microsoft.com/office/drawing/2014/main" id="{E8621B56-558D-CD58-DBE3-36DEB20CEC77}"/>
+          <p:cNvPr id="61" name="mod-d1-t">
+            <a:extLst>
+              <a:ext uri="{FF2B5EF4-FFF2-40B4-BE49-F238E27FC236}">
+                <a16:creationId xmlns:a16="http://schemas.microsoft.com/office/drawing/2014/main" id="{09C0E160-34A0-1746-761D-FE73D1319872}"/>
               </a:ext>
             </a:extLst>
           </p:cNvPr>
@@ -6941,10 +6749,10 @@
       </p:sp>
       <p:sp>
         <p:nvSpPr>
-          <p:cNvPr id="65" name="mod-d1-s">
-            <a:extLst>
-              <a:ext uri="{FF2B5EF4-FFF2-40B4-BE49-F238E27FC236}">
-                <a16:creationId xmlns:a16="http://schemas.microsoft.com/office/drawing/2014/main" id="{E5A9F137-4352-E150-E7C0-FD560D0E2A88}"/>
+          <p:cNvPr id="62" name="mod-d1-s">
+            <a:extLst>
+              <a:ext uri="{FF2B5EF4-FFF2-40B4-BE49-F238E27FC236}">
+                <a16:creationId xmlns:a16="http://schemas.microsoft.com/office/drawing/2014/main" id="{EE04A0F1-3CF8-2749-DDFA-917DB2E0BD28}"/>
               </a:ext>
             </a:extLst>
           </p:cNvPr>
@@ -6982,10 +6790,10 @@
       </p:sp>
       <p:sp>
         <p:nvSpPr>
-          <p:cNvPr id="66" name="mod-d2">
-            <a:extLst>
-              <a:ext uri="{FF2B5EF4-FFF2-40B4-BE49-F238E27FC236}">
-                <a16:creationId xmlns:a16="http://schemas.microsoft.com/office/drawing/2014/main" id="{183AA230-7DDF-A745-0DFD-0BCEBC1D2703}"/>
+          <p:cNvPr id="63" name="mod-d2">
+            <a:extLst>
+              <a:ext uri="{FF2B5EF4-FFF2-40B4-BE49-F238E27FC236}">
+                <a16:creationId xmlns:a16="http://schemas.microsoft.com/office/drawing/2014/main" id="{7AEB4D4E-9A62-74BC-D41C-E77E5A37C87B}"/>
               </a:ext>
             </a:extLst>
           </p:cNvPr>
@@ -7050,10 +6858,10 @@
       </p:sp>
       <p:sp>
         <p:nvSpPr>
-          <p:cNvPr id="67" name="mod-d2-top">
-            <a:extLst>
-              <a:ext uri="{FF2B5EF4-FFF2-40B4-BE49-F238E27FC236}">
-                <a16:creationId xmlns:a16="http://schemas.microsoft.com/office/drawing/2014/main" id="{40B57518-675F-A215-FB97-CE79E92C6CD9}"/>
+          <p:cNvPr id="64" name="mod-d2-top">
+            <a:extLst>
+              <a:ext uri="{FF2B5EF4-FFF2-40B4-BE49-F238E27FC236}">
+                <a16:creationId xmlns:a16="http://schemas.microsoft.com/office/drawing/2014/main" id="{C827B2CF-C781-5BD4-3F2C-E574EF8C1C05}"/>
               </a:ext>
             </a:extLst>
           </p:cNvPr>
@@ -7118,10 +6926,10 @@
       </p:sp>
       <p:sp>
         <p:nvSpPr>
-          <p:cNvPr id="68" name="mod-d2-t">
-            <a:extLst>
-              <a:ext uri="{FF2B5EF4-FFF2-40B4-BE49-F238E27FC236}">
-                <a16:creationId xmlns:a16="http://schemas.microsoft.com/office/drawing/2014/main" id="{A91337A4-621E-7EDB-9CA6-05C591FEF68B}"/>
+          <p:cNvPr id="65" name="mod-d2-t">
+            <a:extLst>
+              <a:ext uri="{FF2B5EF4-FFF2-40B4-BE49-F238E27FC236}">
+                <a16:creationId xmlns:a16="http://schemas.microsoft.com/office/drawing/2014/main" id="{69FDBB51-5180-0AFB-0C2B-2D093CB573FE}"/>
               </a:ext>
             </a:extLst>
           </p:cNvPr>
@@ -7159,10 +6967,10 @@
       </p:sp>
       <p:sp>
         <p:nvSpPr>
-          <p:cNvPr id="69" name="mod-d2-s">
-            <a:extLst>
-              <a:ext uri="{FF2B5EF4-FFF2-40B4-BE49-F238E27FC236}">
-                <a16:creationId xmlns:a16="http://schemas.microsoft.com/office/drawing/2014/main" id="{F41942C3-AAB2-2C15-0303-EBFE8637F897}"/>
+          <p:cNvPr id="66" name="mod-d2-s">
+            <a:extLst>
+              <a:ext uri="{FF2B5EF4-FFF2-40B4-BE49-F238E27FC236}">
+                <a16:creationId xmlns:a16="http://schemas.microsoft.com/office/drawing/2014/main" id="{150262B2-6B03-9627-A0A7-75F320AD7E0A}"/>
               </a:ext>
             </a:extLst>
           </p:cNvPr>
@@ -7200,10 +7008,10 @@
       </p:sp>
       <p:sp>
         <p:nvSpPr>
-          <p:cNvPr id="70" name="cell-d-new">
-            <a:extLst>
-              <a:ext uri="{FF2B5EF4-FFF2-40B4-BE49-F238E27FC236}">
-                <a16:creationId xmlns:a16="http://schemas.microsoft.com/office/drawing/2014/main" id="{05F75EE7-B8F5-AB76-0716-FA2E0EAEF230}"/>
+          <p:cNvPr id="67" name="cell-d-new">
+            <a:extLst>
+              <a:ext uri="{FF2B5EF4-FFF2-40B4-BE49-F238E27FC236}">
+                <a16:creationId xmlns:a16="http://schemas.microsoft.com/office/drawing/2014/main" id="{33E5EE5F-2833-1A10-0416-995311BA3058}"/>
               </a:ext>
             </a:extLst>
           </p:cNvPr>
@@ -7254,10 +7062,10 @@
       </p:sp>
       <p:sp>
         <p:nvSpPr>
-          <p:cNvPr id="71" name="owner-flow">
-            <a:extLst>
-              <a:ext uri="{FF2B5EF4-FFF2-40B4-BE49-F238E27FC236}">
-                <a16:creationId xmlns:a16="http://schemas.microsoft.com/office/drawing/2014/main" id="{2C7D0388-6A9B-140E-17C7-749539C742BD}"/>
+          <p:cNvPr id="68" name="owner-flow">
+            <a:extLst>
+              <a:ext uri="{FF2B5EF4-FFF2-40B4-BE49-F238E27FC236}">
+                <a16:creationId xmlns:a16="http://schemas.microsoft.com/office/drawing/2014/main" id="{CE7DF9DC-C536-583E-DE90-F82C41464AEE}"/>
               </a:ext>
             </a:extLst>
           </p:cNvPr>
@@ -7266,8 +7074,8 @@
         </p:nvSpPr>
         <p:spPr>
           <a:xfrm>
-            <a:off x="5781040" y="2235200"/>
-            <a:ext cx="1796128" cy="464820"/>
+            <a:off x="5781040" y="2209800"/>
+            <a:ext cx="1796128" cy="487680"/>
           </a:xfrm>
           <a:prstGeom prst="rect">
             <a:avLst/>
@@ -7322,10 +7130,10 @@
       </p:sp>
       <p:sp>
         <p:nvSpPr>
-          <p:cNvPr id="72" name="owner-flow-top">
-            <a:extLst>
-              <a:ext uri="{FF2B5EF4-FFF2-40B4-BE49-F238E27FC236}">
-                <a16:creationId xmlns:a16="http://schemas.microsoft.com/office/drawing/2014/main" id="{7E249A9A-2721-DBAD-E3AA-76B832817F5D}"/>
+          <p:cNvPr id="69" name="owner-flow-top">
+            <a:extLst>
+              <a:ext uri="{FF2B5EF4-FFF2-40B4-BE49-F238E27FC236}">
+                <a16:creationId xmlns:a16="http://schemas.microsoft.com/office/drawing/2014/main" id="{AC559248-873A-4243-C982-42F98A7DA078}"/>
               </a:ext>
             </a:extLst>
           </p:cNvPr>
@@ -7334,7 +7142,7 @@
         </p:nvSpPr>
         <p:spPr>
           <a:xfrm>
-            <a:off x="5781040" y="2235200"/>
+            <a:off x="5781040" y="2209800"/>
             <a:ext cx="1796128" cy="25400"/>
           </a:xfrm>
           <a:prstGeom prst="rect">
@@ -7390,74 +7198,10 @@
       </p:sp>
       <p:sp>
         <p:nvSpPr>
-          <p:cNvPr id="73" name="owner-ico">
-            <a:extLst>
-              <a:ext uri="{FF2B5EF4-FFF2-40B4-BE49-F238E27FC236}">
-                <a16:creationId xmlns:a16="http://schemas.microsoft.com/office/drawing/2014/main" id="{EA3C7D47-D7F5-FF43-1E4C-93804A0F909F}"/>
-              </a:ext>
-            </a:extLst>
-          </p:cNvPr>
-          <p:cNvSpPr/>
-          <p:nvPr/>
-        </p:nvSpPr>
-        <p:spPr>
-          <a:xfrm>
-            <a:off x="5882640" y="2336800"/>
-            <a:ext cx="177800" cy="177800"/>
-          </a:xfrm>
-          <a:prstGeom prst="ellipse">
-            <a:avLst/>
-          </a:prstGeom>
-          <a:noFill/>
-          <a:ln w="13970" cap="flat" cmpd="sng" algn="ctr">
-            <a:solidFill>
-              <a:srgbClr val="16837A"/>
-            </a:solidFill>
-            <a:prstDash val="solid"/>
-            <a:miter lim="800000"/>
-          </a:ln>
-          <a:effectLst/>
-          <a:extLst>
-            <a:ext uri="{909E8E84-426E-40DD-AFC4-6F175D3DCCD1}">
-              <a14:hiddenFill xmlns:a14="http://schemas.microsoft.com/office/drawing/2010/main">
-                <a:solidFill>
-                  <a:schemeClr val="accent1"/>
-                </a:solidFill>
-              </a14:hiddenFill>
-            </a:ext>
-          </a:extLst>
-        </p:spPr>
-        <p:style>
-          <a:lnRef idx="2">
-            <a:schemeClr val="accent1">
-              <a:shade val="15000"/>
-            </a:schemeClr>
-          </a:lnRef>
-          <a:fillRef idx="1">
-            <a:schemeClr val="accent1"/>
-          </a:fillRef>
-          <a:effectRef idx="0">
-            <a:schemeClr val="accent1"/>
-          </a:effectRef>
-          <a:fontRef idx="minor">
-            <a:schemeClr val="lt1"/>
-          </a:fontRef>
-        </p:style>
-        <p:txBody>
-          <a:bodyPr rtlCol="0" anchor="ctr"/>
-          <a:lstStyle/>
-          <a:p>
-            <a:pPr algn="ctr"/>
-            <a:endParaRPr lang="zh-CN" altLang="en-US"/>
-          </a:p>
-        </p:txBody>
-      </p:sp>
-      <p:sp>
-        <p:nvSpPr>
-          <p:cNvPr id="74" name="owner-src">
-            <a:extLst>
-              <a:ext uri="{FF2B5EF4-FFF2-40B4-BE49-F238E27FC236}">
-                <a16:creationId xmlns:a16="http://schemas.microsoft.com/office/drawing/2014/main" id="{13DBC751-D84A-FE57-22EC-38AE65B6B0FE}"/>
+          <p:cNvPr id="70" name="owner-src">
+            <a:extLst>
+              <a:ext uri="{FF2B5EF4-FFF2-40B4-BE49-F238E27FC236}">
+                <a16:creationId xmlns:a16="http://schemas.microsoft.com/office/drawing/2014/main" id="{0966E6F4-796E-657E-696D-672CD1A108AD}"/>
               </a:ext>
             </a:extLst>
           </p:cNvPr>
@@ -7466,8 +7210,8 @@
         </p:nvSpPr>
         <p:spPr>
           <a:xfrm>
-            <a:off x="5781040" y="2540000"/>
-            <a:ext cx="508000" cy="117981"/>
+            <a:off x="5819140" y="2235200"/>
+            <a:ext cx="1719928" cy="117981"/>
           </a:xfrm>
           <a:prstGeom prst="rect">
             <a:avLst/>
@@ -7480,7 +7224,6 @@
           </a:bodyPr>
           <a:lstStyle/>
           <a:p>
-            <a:pPr algn="ctr"/>
             <a:r>
               <a:rPr lang="zh-CN" altLang="en-US" sz="600" b="1">
                 <a:solidFill>
@@ -7510,51 +7253,10 @@
       </p:sp>
       <p:sp>
         <p:nvSpPr>
-          <p:cNvPr id="75" name="owner-dist">
-            <a:extLst>
-              <a:ext uri="{FF2B5EF4-FFF2-40B4-BE49-F238E27FC236}">
-                <a16:creationId xmlns:a16="http://schemas.microsoft.com/office/drawing/2014/main" id="{58697DF0-56FA-30A1-7727-F4258E50655F}"/>
-              </a:ext>
-            </a:extLst>
-          </p:cNvPr>
-          <p:cNvSpPr txBox="1"/>
-          <p:nvPr/>
-        </p:nvSpPr>
-        <p:spPr>
-          <a:xfrm>
-            <a:off x="6289040" y="2260600"/>
-            <a:ext cx="1237327" cy="117981"/>
-          </a:xfrm>
-          <a:prstGeom prst="rect">
-            <a:avLst/>
-          </a:prstGeom>
-          <a:noFill/>
-        </p:spPr>
-        <p:txBody>
-          <a:bodyPr vert="horz" wrap="square" lIns="25400" tIns="12700" rIns="25400" bIns="12700" rtlCol="0" anchor="t">
-            <a:spAutoFit/>
-          </a:bodyPr>
-          <a:lstStyle/>
-          <a:p>
-            <a:pPr algn="ctr"/>
-            <a:r>
-              <a:rPr lang="zh-CN" altLang="en-US" sz="600">
-                <a:solidFill>
-                  <a:srgbClr val="61747E"/>
-                </a:solidFill>
-                <a:latin typeface="Microsoft YaHei" panose="020B0503020204020204" pitchFamily="34" charset="-122"/>
-              </a:rPr>
-              <a:t>统一设计评估维度能力</a:t>
-            </a:r>
-          </a:p>
-        </p:txBody>
-      </p:sp>
-      <p:sp>
-        <p:nvSpPr>
-          <p:cNvPr id="76" name="dim0">
-            <a:extLst>
-              <a:ext uri="{FF2B5EF4-FFF2-40B4-BE49-F238E27FC236}">
-                <a16:creationId xmlns:a16="http://schemas.microsoft.com/office/drawing/2014/main" id="{D5159A47-1842-8919-47EC-99233B44E8D5}"/>
+          <p:cNvPr id="71" name="dim0">
+            <a:extLst>
+              <a:ext uri="{FF2B5EF4-FFF2-40B4-BE49-F238E27FC236}">
+                <a16:creationId xmlns:a16="http://schemas.microsoft.com/office/drawing/2014/main" id="{5B1FC437-6804-55D9-80BC-F2FA59557B9D}"/>
               </a:ext>
             </a:extLst>
           </p:cNvPr>
@@ -7563,8 +7265,8 @@
         </p:nvSpPr>
         <p:spPr>
           <a:xfrm>
-            <a:off x="6314440" y="2438400"/>
-            <a:ext cx="218256" cy="127000"/>
+            <a:off x="5831840" y="2400300"/>
+            <a:ext cx="319856" cy="165100"/>
           </a:xfrm>
           <a:prstGeom prst="rect">
             <a:avLst/>
@@ -7619,10 +7321,10 @@
       </p:sp>
       <p:sp>
         <p:nvSpPr>
-          <p:cNvPr id="77" name="dim0-b">
-            <a:extLst>
-              <a:ext uri="{FF2B5EF4-FFF2-40B4-BE49-F238E27FC236}">
-                <a16:creationId xmlns:a16="http://schemas.microsoft.com/office/drawing/2014/main" id="{3307316C-F88C-49F9-276E-20F37680D210}"/>
+          <p:cNvPr id="72" name="dim0-b">
+            <a:extLst>
+              <a:ext uri="{FF2B5EF4-FFF2-40B4-BE49-F238E27FC236}">
+                <a16:creationId xmlns:a16="http://schemas.microsoft.com/office/drawing/2014/main" id="{30DBC579-47E6-7160-5C80-ABF64179FD85}"/>
               </a:ext>
             </a:extLst>
           </p:cNvPr>
@@ -7631,8 +7333,8 @@
         </p:nvSpPr>
         <p:spPr>
           <a:xfrm>
-            <a:off x="6314440" y="2540000"/>
-            <a:ext cx="218256" cy="15240"/>
+            <a:off x="5831840" y="2540000"/>
+            <a:ext cx="319856" cy="15240"/>
           </a:xfrm>
           <a:prstGeom prst="rect">
             <a:avLst/>
@@ -7687,10 +7389,10 @@
       </p:sp>
       <p:sp>
         <p:nvSpPr>
-          <p:cNvPr id="78" name="dim0-t">
-            <a:extLst>
-              <a:ext uri="{FF2B5EF4-FFF2-40B4-BE49-F238E27FC236}">
-                <a16:creationId xmlns:a16="http://schemas.microsoft.com/office/drawing/2014/main" id="{D8CC17A2-54F7-51FB-D6B3-86C0C3B14DCA}"/>
+          <p:cNvPr id="73" name="dim0-t">
+            <a:extLst>
+              <a:ext uri="{FF2B5EF4-FFF2-40B4-BE49-F238E27FC236}">
+                <a16:creationId xmlns:a16="http://schemas.microsoft.com/office/drawing/2014/main" id="{2F5B9B3B-9F89-A3CC-0068-7DFAF6A7FE2D}"/>
               </a:ext>
             </a:extLst>
           </p:cNvPr>
@@ -7699,8 +7401,8 @@
         </p:nvSpPr>
         <p:spPr>
           <a:xfrm>
-            <a:off x="6314440" y="2505208"/>
-            <a:ext cx="218256" cy="117981"/>
+            <a:off x="5831840" y="2479808"/>
+            <a:ext cx="319856" cy="117981"/>
           </a:xfrm>
           <a:prstGeom prst="rect">
             <a:avLst/>
@@ -7728,10 +7430,10 @@
       </p:sp>
       <p:sp>
         <p:nvSpPr>
-          <p:cNvPr id="79" name="dim1">
-            <a:extLst>
-              <a:ext uri="{FF2B5EF4-FFF2-40B4-BE49-F238E27FC236}">
-                <a16:creationId xmlns:a16="http://schemas.microsoft.com/office/drawing/2014/main" id="{E5BECD7F-214A-B5E0-087F-A211C97D2C7E}"/>
+          <p:cNvPr id="74" name="dim1">
+            <a:extLst>
+              <a:ext uri="{FF2B5EF4-FFF2-40B4-BE49-F238E27FC236}">
+                <a16:creationId xmlns:a16="http://schemas.microsoft.com/office/drawing/2014/main" id="{ED08DC91-CDC7-5ABA-E2DC-9FF86CBE3DE9}"/>
               </a:ext>
             </a:extLst>
           </p:cNvPr>
@@ -7740,8 +7442,8 @@
         </p:nvSpPr>
         <p:spPr>
           <a:xfrm>
-            <a:off x="6551746" y="2438400"/>
-            <a:ext cx="218255" cy="127000"/>
+            <a:off x="6170746" y="2400300"/>
+            <a:ext cx="319855" cy="165100"/>
           </a:xfrm>
           <a:prstGeom prst="rect">
             <a:avLst/>
@@ -7796,10 +7498,10 @@
       </p:sp>
       <p:sp>
         <p:nvSpPr>
-          <p:cNvPr id="80" name="dim1-b">
-            <a:extLst>
-              <a:ext uri="{FF2B5EF4-FFF2-40B4-BE49-F238E27FC236}">
-                <a16:creationId xmlns:a16="http://schemas.microsoft.com/office/drawing/2014/main" id="{3291B98B-F7F6-095C-9786-F716BDF1289A}"/>
+          <p:cNvPr id="75" name="dim1-b">
+            <a:extLst>
+              <a:ext uri="{FF2B5EF4-FFF2-40B4-BE49-F238E27FC236}">
+                <a16:creationId xmlns:a16="http://schemas.microsoft.com/office/drawing/2014/main" id="{782F2A61-885C-4F47-0CB5-FC263C753FBD}"/>
               </a:ext>
             </a:extLst>
           </p:cNvPr>
@@ -7808,8 +7510,8 @@
         </p:nvSpPr>
         <p:spPr>
           <a:xfrm>
-            <a:off x="6551746" y="2540000"/>
-            <a:ext cx="218255" cy="15240"/>
+            <a:off x="6170746" y="2540000"/>
+            <a:ext cx="319855" cy="15240"/>
           </a:xfrm>
           <a:prstGeom prst="rect">
             <a:avLst/>
@@ -7864,10 +7566,10 @@
       </p:sp>
       <p:sp>
         <p:nvSpPr>
-          <p:cNvPr id="81" name="dim1-t">
-            <a:extLst>
-              <a:ext uri="{FF2B5EF4-FFF2-40B4-BE49-F238E27FC236}">
-                <a16:creationId xmlns:a16="http://schemas.microsoft.com/office/drawing/2014/main" id="{F6610DF7-0393-3F24-F66E-546AEB3A90C2}"/>
+          <p:cNvPr id="76" name="dim1-t">
+            <a:extLst>
+              <a:ext uri="{FF2B5EF4-FFF2-40B4-BE49-F238E27FC236}">
+                <a16:creationId xmlns:a16="http://schemas.microsoft.com/office/drawing/2014/main" id="{579CB910-3166-2CC8-7E71-35AA9E46BB78}"/>
               </a:ext>
             </a:extLst>
           </p:cNvPr>
@@ -7876,8 +7578,8 @@
         </p:nvSpPr>
         <p:spPr>
           <a:xfrm>
-            <a:off x="6551746" y="2505208"/>
-            <a:ext cx="218256" cy="117981"/>
+            <a:off x="6170746" y="2479808"/>
+            <a:ext cx="319856" cy="117981"/>
           </a:xfrm>
           <a:prstGeom prst="rect">
             <a:avLst/>
@@ -7905,10 +7607,10 @@
       </p:sp>
       <p:sp>
         <p:nvSpPr>
-          <p:cNvPr id="82" name="dim2">
-            <a:extLst>
-              <a:ext uri="{FF2B5EF4-FFF2-40B4-BE49-F238E27FC236}">
-                <a16:creationId xmlns:a16="http://schemas.microsoft.com/office/drawing/2014/main" id="{496FCB3A-DC72-5DD7-B80C-347E9029E842}"/>
+          <p:cNvPr id="77" name="dim2">
+            <a:extLst>
+              <a:ext uri="{FF2B5EF4-FFF2-40B4-BE49-F238E27FC236}">
+                <a16:creationId xmlns:a16="http://schemas.microsoft.com/office/drawing/2014/main" id="{89092EE3-843B-78F1-6B72-8B8439281B0F}"/>
               </a:ext>
             </a:extLst>
           </p:cNvPr>
@@ -7917,8 +7619,8 @@
         </p:nvSpPr>
         <p:spPr>
           <a:xfrm>
-            <a:off x="6789051" y="2438400"/>
-            <a:ext cx="218256" cy="127000"/>
+            <a:off x="6509651" y="2400300"/>
+            <a:ext cx="319856" cy="165100"/>
           </a:xfrm>
           <a:prstGeom prst="rect">
             <a:avLst/>
@@ -7973,10 +7675,10 @@
       </p:sp>
       <p:sp>
         <p:nvSpPr>
-          <p:cNvPr id="83" name="dim2-b">
-            <a:extLst>
-              <a:ext uri="{FF2B5EF4-FFF2-40B4-BE49-F238E27FC236}">
-                <a16:creationId xmlns:a16="http://schemas.microsoft.com/office/drawing/2014/main" id="{0B7B973D-AF58-42B4-2F17-45DF7AC13D18}"/>
+          <p:cNvPr id="78" name="dim2-b">
+            <a:extLst>
+              <a:ext uri="{FF2B5EF4-FFF2-40B4-BE49-F238E27FC236}">
+                <a16:creationId xmlns:a16="http://schemas.microsoft.com/office/drawing/2014/main" id="{48351B57-9966-068E-5B6D-5E52E19F8CE4}"/>
               </a:ext>
             </a:extLst>
           </p:cNvPr>
@@ -7985,8 +7687,8 @@
         </p:nvSpPr>
         <p:spPr>
           <a:xfrm>
-            <a:off x="6789051" y="2540000"/>
-            <a:ext cx="218256" cy="15240"/>
+            <a:off x="6509651" y="2540000"/>
+            <a:ext cx="319856" cy="15240"/>
           </a:xfrm>
           <a:prstGeom prst="rect">
             <a:avLst/>
@@ -8041,10 +7743,10 @@
       </p:sp>
       <p:sp>
         <p:nvSpPr>
-          <p:cNvPr id="84" name="dim2-t">
-            <a:extLst>
-              <a:ext uri="{FF2B5EF4-FFF2-40B4-BE49-F238E27FC236}">
-                <a16:creationId xmlns:a16="http://schemas.microsoft.com/office/drawing/2014/main" id="{5FA0AAEB-9FE2-0287-3E1A-9351AF9238AA}"/>
+          <p:cNvPr id="79" name="dim2-t">
+            <a:extLst>
+              <a:ext uri="{FF2B5EF4-FFF2-40B4-BE49-F238E27FC236}">
+                <a16:creationId xmlns:a16="http://schemas.microsoft.com/office/drawing/2014/main" id="{76B3C190-C312-EDFB-9785-EEAFDC60E350}"/>
               </a:ext>
             </a:extLst>
           </p:cNvPr>
@@ -8053,8 +7755,8 @@
         </p:nvSpPr>
         <p:spPr>
           <a:xfrm>
-            <a:off x="6789051" y="2505208"/>
-            <a:ext cx="218256" cy="117981"/>
+            <a:off x="6509651" y="2479808"/>
+            <a:ext cx="319856" cy="117981"/>
           </a:xfrm>
           <a:prstGeom prst="rect">
             <a:avLst/>
@@ -8082,10 +7784,10 @@
       </p:sp>
       <p:sp>
         <p:nvSpPr>
-          <p:cNvPr id="85" name="dim3">
-            <a:extLst>
-              <a:ext uri="{FF2B5EF4-FFF2-40B4-BE49-F238E27FC236}">
-                <a16:creationId xmlns:a16="http://schemas.microsoft.com/office/drawing/2014/main" id="{0FAB9B3B-3601-4653-2977-35DA96128808}"/>
+          <p:cNvPr id="80" name="dim3">
+            <a:extLst>
+              <a:ext uri="{FF2B5EF4-FFF2-40B4-BE49-F238E27FC236}">
+                <a16:creationId xmlns:a16="http://schemas.microsoft.com/office/drawing/2014/main" id="{8FE3285E-8909-FF0E-D893-C19D07C82E79}"/>
               </a:ext>
             </a:extLst>
           </p:cNvPr>
@@ -8094,8 +7796,8 @@
         </p:nvSpPr>
         <p:spPr>
           <a:xfrm>
-            <a:off x="7026356" y="2438400"/>
-            <a:ext cx="218256" cy="127000"/>
+            <a:off x="6848556" y="2400300"/>
+            <a:ext cx="319856" cy="165100"/>
           </a:xfrm>
           <a:prstGeom prst="rect">
             <a:avLst/>
@@ -8150,10 +7852,10 @@
       </p:sp>
       <p:sp>
         <p:nvSpPr>
-          <p:cNvPr id="86" name="dim3-b">
-            <a:extLst>
-              <a:ext uri="{FF2B5EF4-FFF2-40B4-BE49-F238E27FC236}">
-                <a16:creationId xmlns:a16="http://schemas.microsoft.com/office/drawing/2014/main" id="{F14CC298-C932-4B4F-5E86-EB113969A21F}"/>
+          <p:cNvPr id="81" name="dim3-b">
+            <a:extLst>
+              <a:ext uri="{FF2B5EF4-FFF2-40B4-BE49-F238E27FC236}">
+                <a16:creationId xmlns:a16="http://schemas.microsoft.com/office/drawing/2014/main" id="{41E09390-8F14-6AA4-2744-6FA99C708A21}"/>
               </a:ext>
             </a:extLst>
           </p:cNvPr>
@@ -8162,8 +7864,8 @@
         </p:nvSpPr>
         <p:spPr>
           <a:xfrm>
-            <a:off x="7026356" y="2540000"/>
-            <a:ext cx="218256" cy="15240"/>
+            <a:off x="6848556" y="2540000"/>
+            <a:ext cx="319856" cy="15240"/>
           </a:xfrm>
           <a:prstGeom prst="rect">
             <a:avLst/>
@@ -8218,10 +7920,10 @@
       </p:sp>
       <p:sp>
         <p:nvSpPr>
-          <p:cNvPr id="87" name="dim3-t">
-            <a:extLst>
-              <a:ext uri="{FF2B5EF4-FFF2-40B4-BE49-F238E27FC236}">
-                <a16:creationId xmlns:a16="http://schemas.microsoft.com/office/drawing/2014/main" id="{FEDCAA3E-FAE0-A0DF-BC22-8B593404B530}"/>
+          <p:cNvPr id="82" name="dim3-t">
+            <a:extLst>
+              <a:ext uri="{FF2B5EF4-FFF2-40B4-BE49-F238E27FC236}">
+                <a16:creationId xmlns:a16="http://schemas.microsoft.com/office/drawing/2014/main" id="{395FB4BA-9660-DE15-F884-32649F58FDDB}"/>
               </a:ext>
             </a:extLst>
           </p:cNvPr>
@@ -8230,8 +7932,8 @@
         </p:nvSpPr>
         <p:spPr>
           <a:xfrm>
-            <a:off x="7026356" y="2505208"/>
-            <a:ext cx="218256" cy="117981"/>
+            <a:off x="6848556" y="2479808"/>
+            <a:ext cx="319856" cy="117981"/>
           </a:xfrm>
           <a:prstGeom prst="rect">
             <a:avLst/>
@@ -8259,10 +7961,10 @@
       </p:sp>
       <p:sp>
         <p:nvSpPr>
-          <p:cNvPr id="88" name="dim4">
-            <a:extLst>
-              <a:ext uri="{FF2B5EF4-FFF2-40B4-BE49-F238E27FC236}">
-                <a16:creationId xmlns:a16="http://schemas.microsoft.com/office/drawing/2014/main" id="{8E6D35D6-E52E-39BC-1B86-5F98D4D08620}"/>
+          <p:cNvPr id="83" name="dim4">
+            <a:extLst>
+              <a:ext uri="{FF2B5EF4-FFF2-40B4-BE49-F238E27FC236}">
+                <a16:creationId xmlns:a16="http://schemas.microsoft.com/office/drawing/2014/main" id="{2778E1E6-DDEC-5FED-386A-40E1D2371B67}"/>
               </a:ext>
             </a:extLst>
           </p:cNvPr>
@@ -8271,8 +7973,8 @@
         </p:nvSpPr>
         <p:spPr>
           <a:xfrm>
-            <a:off x="7263662" y="2438400"/>
-            <a:ext cx="218256" cy="127000"/>
+            <a:off x="7187462" y="2400300"/>
+            <a:ext cx="319856" cy="165100"/>
           </a:xfrm>
           <a:prstGeom prst="rect">
             <a:avLst/>
@@ -8327,10 +8029,10 @@
       </p:sp>
       <p:sp>
         <p:nvSpPr>
-          <p:cNvPr id="89" name="dim4-b">
-            <a:extLst>
-              <a:ext uri="{FF2B5EF4-FFF2-40B4-BE49-F238E27FC236}">
-                <a16:creationId xmlns:a16="http://schemas.microsoft.com/office/drawing/2014/main" id="{1DAE6D73-472F-2705-2DA7-F9FA51972C68}"/>
+          <p:cNvPr id="84" name="dim4-b">
+            <a:extLst>
+              <a:ext uri="{FF2B5EF4-FFF2-40B4-BE49-F238E27FC236}">
+                <a16:creationId xmlns:a16="http://schemas.microsoft.com/office/drawing/2014/main" id="{D271B869-C217-24BD-B21A-D80F6BDDFDB3}"/>
               </a:ext>
             </a:extLst>
           </p:cNvPr>
@@ -8339,8 +8041,8 @@
         </p:nvSpPr>
         <p:spPr>
           <a:xfrm>
-            <a:off x="7263662" y="2540000"/>
-            <a:ext cx="218256" cy="15240"/>
+            <a:off x="7187462" y="2540000"/>
+            <a:ext cx="319856" cy="15240"/>
           </a:xfrm>
           <a:prstGeom prst="rect">
             <a:avLst/>
@@ -8395,10 +8097,10 @@
       </p:sp>
       <p:sp>
         <p:nvSpPr>
-          <p:cNvPr id="90" name="dim4-t">
-            <a:extLst>
-              <a:ext uri="{FF2B5EF4-FFF2-40B4-BE49-F238E27FC236}">
-                <a16:creationId xmlns:a16="http://schemas.microsoft.com/office/drawing/2014/main" id="{B4B4DF21-A158-61B0-C386-619259D71B25}"/>
+          <p:cNvPr id="85" name="dim4-t">
+            <a:extLst>
+              <a:ext uri="{FF2B5EF4-FFF2-40B4-BE49-F238E27FC236}">
+                <a16:creationId xmlns:a16="http://schemas.microsoft.com/office/drawing/2014/main" id="{2EDE99CA-5EED-052E-EC3C-1B23F030266A}"/>
               </a:ext>
             </a:extLst>
           </p:cNvPr>
@@ -8407,8 +8109,8 @@
         </p:nvSpPr>
         <p:spPr>
           <a:xfrm>
-            <a:off x="7263662" y="2505208"/>
-            <a:ext cx="218256" cy="210314"/>
+            <a:off x="7187462" y="2525974"/>
+            <a:ext cx="319856" cy="117981"/>
           </a:xfrm>
           <a:prstGeom prst="rect">
             <a:avLst/>
@@ -8436,10 +8138,10 @@
       </p:sp>
       <p:sp>
         <p:nvSpPr>
-          <p:cNvPr id="91" name="owner-teams">
-            <a:extLst>
-              <a:ext uri="{FF2B5EF4-FFF2-40B4-BE49-F238E27FC236}">
-                <a16:creationId xmlns:a16="http://schemas.microsoft.com/office/drawing/2014/main" id="{BC1AA61F-B375-2697-95B4-DA4F6C7D1F4F}"/>
+          <p:cNvPr id="86" name="owner-teams">
+            <a:extLst>
+              <a:ext uri="{FF2B5EF4-FFF2-40B4-BE49-F238E27FC236}">
+                <a16:creationId xmlns:a16="http://schemas.microsoft.com/office/drawing/2014/main" id="{EBEB25FE-45CA-D7A6-44E8-C2BB27084E07}"/>
               </a:ext>
             </a:extLst>
           </p:cNvPr>
@@ -8448,8 +8150,8 @@
         </p:nvSpPr>
         <p:spPr>
           <a:xfrm>
-            <a:off x="6289040" y="2616200"/>
-            <a:ext cx="1237327" cy="117981"/>
+            <a:off x="5819140" y="2590800"/>
+            <a:ext cx="1719928" cy="117981"/>
           </a:xfrm>
           <a:prstGeom prst="rect">
             <a:avLst/>
@@ -8462,7 +8164,6 @@
           </a:bodyPr>
           <a:lstStyle/>
           <a:p>
-            <a:pPr algn="ctr"/>
             <a:r>
               <a:rPr lang="zh-CN" altLang="en-US" sz="600" b="1">
                 <a:solidFill>
@@ -8477,10 +8178,10 @@
       </p:sp>
       <p:sp>
         <p:nvSpPr>
-          <p:cNvPr id="92" name="domains-bg">
-            <a:extLst>
-              <a:ext uri="{FF2B5EF4-FFF2-40B4-BE49-F238E27FC236}">
-                <a16:creationId xmlns:a16="http://schemas.microsoft.com/office/drawing/2014/main" id="{0C55F258-4DF6-E65A-C289-2F1E545BCD45}"/>
+          <p:cNvPr id="87" name="domains-bg">
+            <a:extLst>
+              <a:ext uri="{FF2B5EF4-FFF2-40B4-BE49-F238E27FC236}">
+                <a16:creationId xmlns:a16="http://schemas.microsoft.com/office/drawing/2014/main" id="{08C09905-65CB-3AE4-5A22-543749B505DC}"/>
               </a:ext>
             </a:extLst>
           </p:cNvPr>
@@ -8545,10 +8246,10 @@
       </p:sp>
       <p:sp>
         <p:nvSpPr>
-          <p:cNvPr id="93" name="domains-top">
-            <a:extLst>
-              <a:ext uri="{FF2B5EF4-FFF2-40B4-BE49-F238E27FC236}">
-                <a16:creationId xmlns:a16="http://schemas.microsoft.com/office/drawing/2014/main" id="{0887AA89-DBE7-BE7C-D8D2-0EEA5C4F0173}"/>
+          <p:cNvPr id="88" name="domains-top">
+            <a:extLst>
+              <a:ext uri="{FF2B5EF4-FFF2-40B4-BE49-F238E27FC236}">
+                <a16:creationId xmlns:a16="http://schemas.microsoft.com/office/drawing/2014/main" id="{F8B6224E-BFE2-48E7-0CFC-1FA2F9FCDA8E}"/>
               </a:ext>
             </a:extLst>
           </p:cNvPr>
@@ -8613,10 +8314,10 @@
       </p:sp>
       <p:sp>
         <p:nvSpPr>
-          <p:cNvPr id="94" name="domains-cap">
-            <a:extLst>
-              <a:ext uri="{FF2B5EF4-FFF2-40B4-BE49-F238E27FC236}">
-                <a16:creationId xmlns:a16="http://schemas.microsoft.com/office/drawing/2014/main" id="{72C203C7-F992-E97D-01E2-ADE978D9D754}"/>
+          <p:cNvPr id="89" name="domains-cap">
+            <a:extLst>
+              <a:ext uri="{FF2B5EF4-FFF2-40B4-BE49-F238E27FC236}">
+                <a16:creationId xmlns:a16="http://schemas.microsoft.com/office/drawing/2014/main" id="{7C15D23A-920A-FA50-06BB-B053C0A3946C}"/>
               </a:ext>
             </a:extLst>
           </p:cNvPr>
@@ -8672,10 +8373,10 @@
       </p:sp>
       <p:sp>
         <p:nvSpPr>
-          <p:cNvPr id="95" name="dom0">
-            <a:extLst>
-              <a:ext uri="{FF2B5EF4-FFF2-40B4-BE49-F238E27FC236}">
-                <a16:creationId xmlns:a16="http://schemas.microsoft.com/office/drawing/2014/main" id="{92DD0DFA-3FE2-2745-6E87-82A3FB368237}"/>
+          <p:cNvPr id="90" name="dom0">
+            <a:extLst>
+              <a:ext uri="{FF2B5EF4-FFF2-40B4-BE49-F238E27FC236}">
+                <a16:creationId xmlns:a16="http://schemas.microsoft.com/office/drawing/2014/main" id="{CC20D0A4-2DD3-40D8-B688-8EAACC522B67}"/>
               </a:ext>
             </a:extLst>
           </p:cNvPr>
@@ -8740,10 +8441,10 @@
       </p:sp>
       <p:sp>
         <p:nvSpPr>
-          <p:cNvPr id="96" name="dom0-t">
-            <a:extLst>
-              <a:ext uri="{FF2B5EF4-FFF2-40B4-BE49-F238E27FC236}">
-                <a16:creationId xmlns:a16="http://schemas.microsoft.com/office/drawing/2014/main" id="{B0C7463D-35F9-992F-37B5-81F7C7B8CF02}"/>
+          <p:cNvPr id="91" name="dom0-t">
+            <a:extLst>
+              <a:ext uri="{FF2B5EF4-FFF2-40B4-BE49-F238E27FC236}">
+                <a16:creationId xmlns:a16="http://schemas.microsoft.com/office/drawing/2014/main" id="{5E29A3E5-64B7-2A8E-70B4-DC7C01C219A2}"/>
               </a:ext>
             </a:extLst>
           </p:cNvPr>
@@ -8781,10 +8482,10 @@
       </p:sp>
       <p:sp>
         <p:nvSpPr>
-          <p:cNvPr id="97" name="dom1">
-            <a:extLst>
-              <a:ext uri="{FF2B5EF4-FFF2-40B4-BE49-F238E27FC236}">
-                <a16:creationId xmlns:a16="http://schemas.microsoft.com/office/drawing/2014/main" id="{24D75180-2927-9774-834A-B9120A07B31D}"/>
+          <p:cNvPr id="92" name="dom1">
+            <a:extLst>
+              <a:ext uri="{FF2B5EF4-FFF2-40B4-BE49-F238E27FC236}">
+                <a16:creationId xmlns:a16="http://schemas.microsoft.com/office/drawing/2014/main" id="{6DDD1885-68A1-1A85-C61E-54821B2F0CFB}"/>
               </a:ext>
             </a:extLst>
           </p:cNvPr>
@@ -8849,10 +8550,10 @@
       </p:sp>
       <p:sp>
         <p:nvSpPr>
-          <p:cNvPr id="98" name="dom1-t">
-            <a:extLst>
-              <a:ext uri="{FF2B5EF4-FFF2-40B4-BE49-F238E27FC236}">
-                <a16:creationId xmlns:a16="http://schemas.microsoft.com/office/drawing/2014/main" id="{16D956DE-F75A-68EB-7F1B-BEF2AFFAFA3E}"/>
+          <p:cNvPr id="93" name="dom1-t">
+            <a:extLst>
+              <a:ext uri="{FF2B5EF4-FFF2-40B4-BE49-F238E27FC236}">
+                <a16:creationId xmlns:a16="http://schemas.microsoft.com/office/drawing/2014/main" id="{3E69247B-5FAC-93DB-DAAF-D078C890C372}"/>
               </a:ext>
             </a:extLst>
           </p:cNvPr>
@@ -8890,10 +8591,10 @@
       </p:sp>
       <p:sp>
         <p:nvSpPr>
-          <p:cNvPr id="99" name="dom2">
-            <a:extLst>
-              <a:ext uri="{FF2B5EF4-FFF2-40B4-BE49-F238E27FC236}">
-                <a16:creationId xmlns:a16="http://schemas.microsoft.com/office/drawing/2014/main" id="{FA64D992-7DF7-2213-8570-DDCFF4862D07}"/>
+          <p:cNvPr id="94" name="dom2">
+            <a:extLst>
+              <a:ext uri="{FF2B5EF4-FFF2-40B4-BE49-F238E27FC236}">
+                <a16:creationId xmlns:a16="http://schemas.microsoft.com/office/drawing/2014/main" id="{480C129E-4311-DE5F-CC4D-73FDC05E9E5E}"/>
               </a:ext>
             </a:extLst>
           </p:cNvPr>
@@ -8958,10 +8659,10 @@
       </p:sp>
       <p:sp>
         <p:nvSpPr>
-          <p:cNvPr id="100" name="dom2-t">
-            <a:extLst>
-              <a:ext uri="{FF2B5EF4-FFF2-40B4-BE49-F238E27FC236}">
-                <a16:creationId xmlns:a16="http://schemas.microsoft.com/office/drawing/2014/main" id="{B04F1ACC-CBB0-809F-FC70-D6ACDEC496D5}"/>
+          <p:cNvPr id="95" name="dom2-t">
+            <a:extLst>
+              <a:ext uri="{FF2B5EF4-FFF2-40B4-BE49-F238E27FC236}">
+                <a16:creationId xmlns:a16="http://schemas.microsoft.com/office/drawing/2014/main" id="{60765929-1BB3-8741-58A3-489C2EF384C6}"/>
               </a:ext>
             </a:extLst>
           </p:cNvPr>
@@ -8999,10 +8700,10 @@
       </p:sp>
       <p:sp>
         <p:nvSpPr>
-          <p:cNvPr id="101" name="dom3">
-            <a:extLst>
-              <a:ext uri="{FF2B5EF4-FFF2-40B4-BE49-F238E27FC236}">
-                <a16:creationId xmlns:a16="http://schemas.microsoft.com/office/drawing/2014/main" id="{D66A2F73-FA66-E8C1-4543-1407D5D333CD}"/>
+          <p:cNvPr id="96" name="dom3">
+            <a:extLst>
+              <a:ext uri="{FF2B5EF4-FFF2-40B4-BE49-F238E27FC236}">
+                <a16:creationId xmlns:a16="http://schemas.microsoft.com/office/drawing/2014/main" id="{390C8B18-33BD-B8DE-5C44-FC16E41AD6A9}"/>
               </a:ext>
             </a:extLst>
           </p:cNvPr>
@@ -9067,10 +8768,10 @@
       </p:sp>
       <p:sp>
         <p:nvSpPr>
-          <p:cNvPr id="102" name="dom3-t">
-            <a:extLst>
-              <a:ext uri="{FF2B5EF4-FFF2-40B4-BE49-F238E27FC236}">
-                <a16:creationId xmlns:a16="http://schemas.microsoft.com/office/drawing/2014/main" id="{3BE68E15-D4EC-B534-7FAD-085217F3F732}"/>
+          <p:cNvPr id="97" name="dom3-t">
+            <a:extLst>
+              <a:ext uri="{FF2B5EF4-FFF2-40B4-BE49-F238E27FC236}">
+                <a16:creationId xmlns:a16="http://schemas.microsoft.com/office/drawing/2014/main" id="{E039F5B7-B633-3F4C-6F8B-D715E197410B}"/>
               </a:ext>
             </a:extLst>
           </p:cNvPr>
@@ -9114,10 +8815,10 @@
       </p:sp>
       <p:sp>
         <p:nvSpPr>
-          <p:cNvPr id="103" name="dom4">
-            <a:extLst>
-              <a:ext uri="{FF2B5EF4-FFF2-40B4-BE49-F238E27FC236}">
-                <a16:creationId xmlns:a16="http://schemas.microsoft.com/office/drawing/2014/main" id="{1CA60B10-575C-2913-A13D-AA126805D2B7}"/>
+          <p:cNvPr id="98" name="dom4">
+            <a:extLst>
+              <a:ext uri="{FF2B5EF4-FFF2-40B4-BE49-F238E27FC236}">
+                <a16:creationId xmlns:a16="http://schemas.microsoft.com/office/drawing/2014/main" id="{8C0866AC-978D-28CD-3221-0B97544B9543}"/>
               </a:ext>
             </a:extLst>
           </p:cNvPr>
@@ -9182,10 +8883,10 @@
       </p:sp>
       <p:sp>
         <p:nvSpPr>
-          <p:cNvPr id="104" name="dom4-t">
-            <a:extLst>
-              <a:ext uri="{FF2B5EF4-FFF2-40B4-BE49-F238E27FC236}">
-                <a16:creationId xmlns:a16="http://schemas.microsoft.com/office/drawing/2014/main" id="{B02D89C8-73B3-7AB1-7E90-27325EA149ED}"/>
+          <p:cNvPr id="99" name="dom4-t">
+            <a:extLst>
+              <a:ext uri="{FF2B5EF4-FFF2-40B4-BE49-F238E27FC236}">
+                <a16:creationId xmlns:a16="http://schemas.microsoft.com/office/drawing/2014/main" id="{429353C2-337B-5FFC-6805-E02F6AD59086}"/>
               </a:ext>
             </a:extLst>
           </p:cNvPr>
@@ -9223,10 +8924,10 @@
       </p:sp>
       <p:sp>
         <p:nvSpPr>
-          <p:cNvPr id="105" name="dom5">
-            <a:extLst>
-              <a:ext uri="{FF2B5EF4-FFF2-40B4-BE49-F238E27FC236}">
-                <a16:creationId xmlns:a16="http://schemas.microsoft.com/office/drawing/2014/main" id="{0CEEF79F-429E-8322-AF08-4FF1470FEE40}"/>
+          <p:cNvPr id="100" name="dom5">
+            <a:extLst>
+              <a:ext uri="{FF2B5EF4-FFF2-40B4-BE49-F238E27FC236}">
+                <a16:creationId xmlns:a16="http://schemas.microsoft.com/office/drawing/2014/main" id="{36EC43E2-9C15-84B4-5DC5-EDE5072E698D}"/>
               </a:ext>
             </a:extLst>
           </p:cNvPr>
@@ -9291,10 +8992,10 @@
       </p:sp>
       <p:sp>
         <p:nvSpPr>
-          <p:cNvPr id="106" name="dom5-t">
-            <a:extLst>
-              <a:ext uri="{FF2B5EF4-FFF2-40B4-BE49-F238E27FC236}">
-                <a16:creationId xmlns:a16="http://schemas.microsoft.com/office/drawing/2014/main" id="{15EF267C-0BDE-7BD4-FE12-987DF0F9D593}"/>
+          <p:cNvPr id="101" name="dom5-t">
+            <a:extLst>
+              <a:ext uri="{FF2B5EF4-FFF2-40B4-BE49-F238E27FC236}">
+                <a16:creationId xmlns:a16="http://schemas.microsoft.com/office/drawing/2014/main" id="{0CAB1484-E807-0D03-4FDE-1C879C0F18C5}"/>
               </a:ext>
             </a:extLst>
           </p:cNvPr>
@@ -9332,10 +9033,10 @@
       </p:sp>
       <p:sp>
         <p:nvSpPr>
-          <p:cNvPr id="107" name="target-flow">
-            <a:extLst>
-              <a:ext uri="{FF2B5EF4-FFF2-40B4-BE49-F238E27FC236}">
-                <a16:creationId xmlns:a16="http://schemas.microsoft.com/office/drawing/2014/main" id="{4F3E055B-6866-5DFC-20A0-81B79E21E2C0}"/>
+          <p:cNvPr id="102" name="target-flow">
+            <a:extLst>
+              <a:ext uri="{FF2B5EF4-FFF2-40B4-BE49-F238E27FC236}">
+                <a16:creationId xmlns:a16="http://schemas.microsoft.com/office/drawing/2014/main" id="{4D7851BC-86D5-ADE6-69A7-800C28959C1B}"/>
               </a:ext>
             </a:extLst>
           </p:cNvPr>
@@ -9400,10 +9101,10 @@
       </p:sp>
       <p:sp>
         <p:nvSpPr>
-          <p:cNvPr id="108" name="target-top">
-            <a:extLst>
-              <a:ext uri="{FF2B5EF4-FFF2-40B4-BE49-F238E27FC236}">
-                <a16:creationId xmlns:a16="http://schemas.microsoft.com/office/drawing/2014/main" id="{7890101C-DD26-06BB-6B5E-6F8E298AAE00}"/>
+          <p:cNvPr id="103" name="target-top">
+            <a:extLst>
+              <a:ext uri="{FF2B5EF4-FFF2-40B4-BE49-F238E27FC236}">
+                <a16:creationId xmlns:a16="http://schemas.microsoft.com/office/drawing/2014/main" id="{417360B6-F3F9-43DC-667D-5F8FD6CC27EF}"/>
               </a:ext>
             </a:extLst>
           </p:cNvPr>
@@ -9468,10 +9169,10 @@
       </p:sp>
       <p:sp>
         <p:nvSpPr>
-          <p:cNvPr id="109" name="target-cap">
-            <a:extLst>
-              <a:ext uri="{FF2B5EF4-FFF2-40B4-BE49-F238E27FC236}">
-                <a16:creationId xmlns:a16="http://schemas.microsoft.com/office/drawing/2014/main" id="{9BFB7219-589B-C2E5-942B-3C595401CCD9}"/>
+          <p:cNvPr id="104" name="target-cap">
+            <a:extLst>
+              <a:ext uri="{FF2B5EF4-FFF2-40B4-BE49-F238E27FC236}">
+                <a16:creationId xmlns:a16="http://schemas.microsoft.com/office/drawing/2014/main" id="{DBB1C7BD-33FE-49D0-B1BA-2DB4F8F0985C}"/>
               </a:ext>
             </a:extLst>
           </p:cNvPr>
@@ -9527,10 +9228,10 @@
       </p:sp>
       <p:sp>
         <p:nvSpPr>
-          <p:cNvPr id="110" name="scene1">
-            <a:extLst>
-              <a:ext uri="{FF2B5EF4-FFF2-40B4-BE49-F238E27FC236}">
-                <a16:creationId xmlns:a16="http://schemas.microsoft.com/office/drawing/2014/main" id="{B54FF08D-4740-3C34-ADF0-3AB6C78FE02C}"/>
+          <p:cNvPr id="105" name="scene1">
+            <a:extLst>
+              <a:ext uri="{FF2B5EF4-FFF2-40B4-BE49-F238E27FC236}">
+                <a16:creationId xmlns:a16="http://schemas.microsoft.com/office/drawing/2014/main" id="{75C3D61B-14E9-8EC7-96B1-782B2CE92610}"/>
               </a:ext>
             </a:extLst>
           </p:cNvPr>
@@ -9595,10 +9296,10 @@
       </p:sp>
       <p:sp>
         <p:nvSpPr>
-          <p:cNvPr id="111" name="scene1-tbar">
-            <a:extLst>
-              <a:ext uri="{FF2B5EF4-FFF2-40B4-BE49-F238E27FC236}">
-                <a16:creationId xmlns:a16="http://schemas.microsoft.com/office/drawing/2014/main" id="{F4289CAD-8416-862F-A052-FA0952F7AC7D}"/>
+          <p:cNvPr id="106" name="scene1-tbar">
+            <a:extLst>
+              <a:ext uri="{FF2B5EF4-FFF2-40B4-BE49-F238E27FC236}">
+                <a16:creationId xmlns:a16="http://schemas.microsoft.com/office/drawing/2014/main" id="{147B628B-2857-D10B-9AB1-099FBBFA035E}"/>
               </a:ext>
             </a:extLst>
           </p:cNvPr>
@@ -9663,10 +9364,10 @@
       </p:sp>
       <p:sp>
         <p:nvSpPr>
-          <p:cNvPr id="112" name="scene1-t">
-            <a:extLst>
-              <a:ext uri="{FF2B5EF4-FFF2-40B4-BE49-F238E27FC236}">
-                <a16:creationId xmlns:a16="http://schemas.microsoft.com/office/drawing/2014/main" id="{FF9EEF51-0BA6-C2A4-E611-16E3DF6E21E2}"/>
+          <p:cNvPr id="107" name="scene1-t">
+            <a:extLst>
+              <a:ext uri="{FF2B5EF4-FFF2-40B4-BE49-F238E27FC236}">
+                <a16:creationId xmlns:a16="http://schemas.microsoft.com/office/drawing/2014/main" id="{8277711E-6E5B-09D9-149A-CA8E92BE36E4}"/>
               </a:ext>
             </a:extLst>
           </p:cNvPr>
@@ -9703,10 +9404,10 @@
       </p:sp>
       <p:sp>
         <p:nvSpPr>
-          <p:cNvPr id="113" name="scene1-g">
-            <a:extLst>
-              <a:ext uri="{FF2B5EF4-FFF2-40B4-BE49-F238E27FC236}">
-                <a16:creationId xmlns:a16="http://schemas.microsoft.com/office/drawing/2014/main" id="{F9AA5CDE-8CB4-2FEB-CC1B-449FF7EBA29E}"/>
+          <p:cNvPr id="108" name="scene1-g">
+            <a:extLst>
+              <a:ext uri="{FF2B5EF4-FFF2-40B4-BE49-F238E27FC236}">
+                <a16:creationId xmlns:a16="http://schemas.microsoft.com/office/drawing/2014/main" id="{39753902-2DCB-E7B7-A78A-BA5570616F07}"/>
               </a:ext>
             </a:extLst>
           </p:cNvPr>
@@ -9761,10 +9462,10 @@
       </p:sp>
       <p:sp>
         <p:nvSpPr>
-          <p:cNvPr id="114" name="scene2">
-            <a:extLst>
-              <a:ext uri="{FF2B5EF4-FFF2-40B4-BE49-F238E27FC236}">
-                <a16:creationId xmlns:a16="http://schemas.microsoft.com/office/drawing/2014/main" id="{684240F0-9586-FD0F-FBC7-3393CE59A088}"/>
+          <p:cNvPr id="109" name="scene2">
+            <a:extLst>
+              <a:ext uri="{FF2B5EF4-FFF2-40B4-BE49-F238E27FC236}">
+                <a16:creationId xmlns:a16="http://schemas.microsoft.com/office/drawing/2014/main" id="{2ABBA9FB-4BBB-E44B-9F66-61D19D168BDD}"/>
               </a:ext>
             </a:extLst>
           </p:cNvPr>
@@ -9829,10 +9530,10 @@
       </p:sp>
       <p:sp>
         <p:nvSpPr>
-          <p:cNvPr id="115" name="scene2-tbar">
-            <a:extLst>
-              <a:ext uri="{FF2B5EF4-FFF2-40B4-BE49-F238E27FC236}">
-                <a16:creationId xmlns:a16="http://schemas.microsoft.com/office/drawing/2014/main" id="{2123811F-02FC-99A1-4995-7B106396F308}"/>
+          <p:cNvPr id="110" name="scene2-tbar">
+            <a:extLst>
+              <a:ext uri="{FF2B5EF4-FFF2-40B4-BE49-F238E27FC236}">
+                <a16:creationId xmlns:a16="http://schemas.microsoft.com/office/drawing/2014/main" id="{F8F898B0-8F31-9E68-7093-B026A77D84C5}"/>
               </a:ext>
             </a:extLst>
           </p:cNvPr>
@@ -9897,10 +9598,10 @@
       </p:sp>
       <p:sp>
         <p:nvSpPr>
-          <p:cNvPr id="116" name="scene2-t">
-            <a:extLst>
-              <a:ext uri="{FF2B5EF4-FFF2-40B4-BE49-F238E27FC236}">
-                <a16:creationId xmlns:a16="http://schemas.microsoft.com/office/drawing/2014/main" id="{06B66936-48A1-B6D4-F743-AE31B302DC1C}"/>
+          <p:cNvPr id="111" name="scene2-t">
+            <a:extLst>
+              <a:ext uri="{FF2B5EF4-FFF2-40B4-BE49-F238E27FC236}">
+                <a16:creationId xmlns:a16="http://schemas.microsoft.com/office/drawing/2014/main" id="{3781AD29-E714-09BB-134B-30E9133728EC}"/>
               </a:ext>
             </a:extLst>
           </p:cNvPr>
@@ -9937,10 +9638,10 @@
       </p:sp>
       <p:sp>
         <p:nvSpPr>
-          <p:cNvPr id="117" name="scene2-g">
-            <a:extLst>
-              <a:ext uri="{FF2B5EF4-FFF2-40B4-BE49-F238E27FC236}">
-                <a16:creationId xmlns:a16="http://schemas.microsoft.com/office/drawing/2014/main" id="{3964103E-2B0D-41A3-B375-AAA9FFBCCE14}"/>
+          <p:cNvPr id="112" name="scene2-g">
+            <a:extLst>
+              <a:ext uri="{FF2B5EF4-FFF2-40B4-BE49-F238E27FC236}">
+                <a16:creationId xmlns:a16="http://schemas.microsoft.com/office/drawing/2014/main" id="{3ABA5313-3B98-E32B-D2AF-A6A59CA619F0}"/>
               </a:ext>
             </a:extLst>
           </p:cNvPr>
@@ -9995,10 +9696,10 @@
       </p:sp>
       <p:sp>
         <p:nvSpPr>
-          <p:cNvPr id="118" name="p1m0">
-            <a:extLst>
-              <a:ext uri="{FF2B5EF4-FFF2-40B4-BE49-F238E27FC236}">
-                <a16:creationId xmlns:a16="http://schemas.microsoft.com/office/drawing/2014/main" id="{4D9ACC2C-1ABC-7BBB-8E66-AB5B583B0DEB}"/>
+          <p:cNvPr id="113" name="p1m0">
+            <a:extLst>
+              <a:ext uri="{FF2B5EF4-FFF2-40B4-BE49-F238E27FC236}">
+                <a16:creationId xmlns:a16="http://schemas.microsoft.com/office/drawing/2014/main" id="{7C996EAA-7D50-6DA2-4240-832C7752F49D}"/>
               </a:ext>
             </a:extLst>
           </p:cNvPr>
@@ -10063,10 +9764,10 @@
       </p:sp>
       <p:sp>
         <p:nvSpPr>
-          <p:cNvPr id="119" name="p2m0">
-            <a:extLst>
-              <a:ext uri="{FF2B5EF4-FFF2-40B4-BE49-F238E27FC236}">
-                <a16:creationId xmlns:a16="http://schemas.microsoft.com/office/drawing/2014/main" id="{9A544296-98F3-A484-1B5E-49AE360CCB9A}"/>
+          <p:cNvPr id="114" name="p2m0">
+            <a:extLst>
+              <a:ext uri="{FF2B5EF4-FFF2-40B4-BE49-F238E27FC236}">
+                <a16:creationId xmlns:a16="http://schemas.microsoft.com/office/drawing/2014/main" id="{5E0B48AE-174F-25E6-3761-2C0D35222C81}"/>
               </a:ext>
             </a:extLst>
           </p:cNvPr>
@@ -10131,10 +9832,10 @@
       </p:sp>
       <p:sp>
         <p:nvSpPr>
-          <p:cNvPr id="120" name="p1m1">
-            <a:extLst>
-              <a:ext uri="{FF2B5EF4-FFF2-40B4-BE49-F238E27FC236}">
-                <a16:creationId xmlns:a16="http://schemas.microsoft.com/office/drawing/2014/main" id="{F055A7F0-BB2D-5C1F-AABE-97B817151BE8}"/>
+          <p:cNvPr id="115" name="p1m1">
+            <a:extLst>
+              <a:ext uri="{FF2B5EF4-FFF2-40B4-BE49-F238E27FC236}">
+                <a16:creationId xmlns:a16="http://schemas.microsoft.com/office/drawing/2014/main" id="{245EE7D7-E00B-14AA-D100-54A51901F2DF}"/>
               </a:ext>
             </a:extLst>
           </p:cNvPr>
@@ -10199,10 +9900,10 @@
       </p:sp>
       <p:sp>
         <p:nvSpPr>
-          <p:cNvPr id="121" name="p2m1">
-            <a:extLst>
-              <a:ext uri="{FF2B5EF4-FFF2-40B4-BE49-F238E27FC236}">
-                <a16:creationId xmlns:a16="http://schemas.microsoft.com/office/drawing/2014/main" id="{A70C1A9C-A56A-4A9A-74B6-FEC8F5D67590}"/>
+          <p:cNvPr id="116" name="p2m1">
+            <a:extLst>
+              <a:ext uri="{FF2B5EF4-FFF2-40B4-BE49-F238E27FC236}">
+                <a16:creationId xmlns:a16="http://schemas.microsoft.com/office/drawing/2014/main" id="{1DD96A0A-3361-6FC9-A067-9D351626435A}"/>
               </a:ext>
             </a:extLst>
           </p:cNvPr>
@@ -10267,10 +9968,10 @@
       </p:sp>
       <p:sp>
         <p:nvSpPr>
-          <p:cNvPr id="122" name="p1m2">
-            <a:extLst>
-              <a:ext uri="{FF2B5EF4-FFF2-40B4-BE49-F238E27FC236}">
-                <a16:creationId xmlns:a16="http://schemas.microsoft.com/office/drawing/2014/main" id="{D0FDC77E-0F75-B65D-3AC8-71682078FB78}"/>
+          <p:cNvPr id="117" name="p1m2">
+            <a:extLst>
+              <a:ext uri="{FF2B5EF4-FFF2-40B4-BE49-F238E27FC236}">
+                <a16:creationId xmlns:a16="http://schemas.microsoft.com/office/drawing/2014/main" id="{A67AB558-CBF3-77DF-75D0-04009F26ACED}"/>
               </a:ext>
             </a:extLst>
           </p:cNvPr>
@@ -10335,10 +10036,10 @@
       </p:sp>
       <p:sp>
         <p:nvSpPr>
-          <p:cNvPr id="123" name="p2m2">
-            <a:extLst>
-              <a:ext uri="{FF2B5EF4-FFF2-40B4-BE49-F238E27FC236}">
-                <a16:creationId xmlns:a16="http://schemas.microsoft.com/office/drawing/2014/main" id="{4AD1AF9D-C334-EE1B-E912-B25A6B360B25}"/>
+          <p:cNvPr id="118" name="p2m2">
+            <a:extLst>
+              <a:ext uri="{FF2B5EF4-FFF2-40B4-BE49-F238E27FC236}">
+                <a16:creationId xmlns:a16="http://schemas.microsoft.com/office/drawing/2014/main" id="{397FE501-2633-F737-69ED-31500A7513C7}"/>
               </a:ext>
             </a:extLst>
           </p:cNvPr>
@@ -10403,10 +10104,10 @@
       </p:sp>
       <p:sp>
         <p:nvSpPr>
-          <p:cNvPr id="124" name="p1m3">
-            <a:extLst>
-              <a:ext uri="{FF2B5EF4-FFF2-40B4-BE49-F238E27FC236}">
-                <a16:creationId xmlns:a16="http://schemas.microsoft.com/office/drawing/2014/main" id="{7993E3C4-75FD-EB1A-8CCC-0278CCD844D4}"/>
+          <p:cNvPr id="119" name="p1m3">
+            <a:extLst>
+              <a:ext uri="{FF2B5EF4-FFF2-40B4-BE49-F238E27FC236}">
+                <a16:creationId xmlns:a16="http://schemas.microsoft.com/office/drawing/2014/main" id="{AEFAE446-7A61-DE54-28F3-7138CF9455A4}"/>
               </a:ext>
             </a:extLst>
           </p:cNvPr>
@@ -10471,10 +10172,10 @@
       </p:sp>
       <p:sp>
         <p:nvSpPr>
-          <p:cNvPr id="125" name="p2m3">
-            <a:extLst>
-              <a:ext uri="{FF2B5EF4-FFF2-40B4-BE49-F238E27FC236}">
-                <a16:creationId xmlns:a16="http://schemas.microsoft.com/office/drawing/2014/main" id="{DB9FB7DB-54FB-A508-5760-7B1BA9B89334}"/>
+          <p:cNvPr id="120" name="p2m3">
+            <a:extLst>
+              <a:ext uri="{FF2B5EF4-FFF2-40B4-BE49-F238E27FC236}">
+                <a16:creationId xmlns:a16="http://schemas.microsoft.com/office/drawing/2014/main" id="{F88A9120-1196-2F3D-DA74-793703AEFF40}"/>
               </a:ext>
             </a:extLst>
           </p:cNvPr>
@@ -10539,10 +10240,10 @@
       </p:sp>
       <p:sp>
         <p:nvSpPr>
-          <p:cNvPr id="126" name="cell-o-old">
-            <a:extLst>
-              <a:ext uri="{FF2B5EF4-FFF2-40B4-BE49-F238E27FC236}">
-                <a16:creationId xmlns:a16="http://schemas.microsoft.com/office/drawing/2014/main" id="{D54B9E57-8CEF-7360-EC1E-09CA1CA8F935}"/>
+          <p:cNvPr id="121" name="cell-o-old">
+            <a:extLst>
+              <a:ext uri="{FF2B5EF4-FFF2-40B4-BE49-F238E27FC236}">
+                <a16:creationId xmlns:a16="http://schemas.microsoft.com/office/drawing/2014/main" id="{93F200F6-A271-FAF8-C916-C758B2BA2EDE}"/>
               </a:ext>
             </a:extLst>
           </p:cNvPr>
@@ -10593,10 +10294,10 @@
       </p:sp>
       <p:sp>
         <p:nvSpPr>
-          <p:cNvPr id="127" name="op-old0">
-            <a:extLst>
-              <a:ext uri="{FF2B5EF4-FFF2-40B4-BE49-F238E27FC236}">
-                <a16:creationId xmlns:a16="http://schemas.microsoft.com/office/drawing/2014/main" id="{665A818A-5C95-6003-D8FA-8797D8B80D87}"/>
+          <p:cNvPr id="122" name="op-old0">
+            <a:extLst>
+              <a:ext uri="{FF2B5EF4-FFF2-40B4-BE49-F238E27FC236}">
+                <a16:creationId xmlns:a16="http://schemas.microsoft.com/office/drawing/2014/main" id="{2DE26820-6989-C569-1988-D3BC9BA42067}"/>
               </a:ext>
             </a:extLst>
           </p:cNvPr>
@@ -10661,10 +10362,10 @@
       </p:sp>
       <p:sp>
         <p:nvSpPr>
-          <p:cNvPr id="128" name="op-old0-ico">
-            <a:extLst>
-              <a:ext uri="{FF2B5EF4-FFF2-40B4-BE49-F238E27FC236}">
-                <a16:creationId xmlns:a16="http://schemas.microsoft.com/office/drawing/2014/main" id="{1C0FFBCD-3230-51B0-D193-9D71ED70BFE1}"/>
+          <p:cNvPr id="123" name="op-old0-ico">
+            <a:extLst>
+              <a:ext uri="{FF2B5EF4-FFF2-40B4-BE49-F238E27FC236}">
+                <a16:creationId xmlns:a16="http://schemas.microsoft.com/office/drawing/2014/main" id="{2E4E52F2-EA2F-4D26-8F65-C5D51996A977}"/>
               </a:ext>
             </a:extLst>
           </p:cNvPr>
@@ -10729,10 +10430,10 @@
       </p:sp>
       <p:sp>
         <p:nvSpPr>
-          <p:cNvPr id="129" name="op-old0-t">
-            <a:extLst>
-              <a:ext uri="{FF2B5EF4-FFF2-40B4-BE49-F238E27FC236}">
-                <a16:creationId xmlns:a16="http://schemas.microsoft.com/office/drawing/2014/main" id="{206415BB-E091-ED8D-7162-76E13DCFD12D}"/>
+          <p:cNvPr id="124" name="op-old0-t">
+            <a:extLst>
+              <a:ext uri="{FF2B5EF4-FFF2-40B4-BE49-F238E27FC236}">
+                <a16:creationId xmlns:a16="http://schemas.microsoft.com/office/drawing/2014/main" id="{CEA2B9D8-7CA2-DCFC-5ACF-28804D0C4BE9}"/>
               </a:ext>
             </a:extLst>
           </p:cNvPr>
@@ -10769,10 +10470,10 @@
       </p:sp>
       <p:sp>
         <p:nvSpPr>
-          <p:cNvPr id="130" name="op-old0-s">
-            <a:extLst>
-              <a:ext uri="{FF2B5EF4-FFF2-40B4-BE49-F238E27FC236}">
-                <a16:creationId xmlns:a16="http://schemas.microsoft.com/office/drawing/2014/main" id="{77D3C71E-62B5-3FA6-04A5-FB0DFD2B881F}"/>
+          <p:cNvPr id="125" name="op-old0-s">
+            <a:extLst>
+              <a:ext uri="{FF2B5EF4-FFF2-40B4-BE49-F238E27FC236}">
+                <a16:creationId xmlns:a16="http://schemas.microsoft.com/office/drawing/2014/main" id="{D2C7F117-3D02-1A7F-5897-B767F868EEA5}"/>
               </a:ext>
             </a:extLst>
           </p:cNvPr>
@@ -10809,10 +10510,10 @@
       </p:sp>
       <p:sp>
         <p:nvSpPr>
-          <p:cNvPr id="131" name="op-old1">
-            <a:extLst>
-              <a:ext uri="{FF2B5EF4-FFF2-40B4-BE49-F238E27FC236}">
-                <a16:creationId xmlns:a16="http://schemas.microsoft.com/office/drawing/2014/main" id="{3D4EDA15-7533-2C2E-9579-C07F0DD1327D}"/>
+          <p:cNvPr id="126" name="op-old1">
+            <a:extLst>
+              <a:ext uri="{FF2B5EF4-FFF2-40B4-BE49-F238E27FC236}">
+                <a16:creationId xmlns:a16="http://schemas.microsoft.com/office/drawing/2014/main" id="{5E429B39-9402-7999-0747-637FAF8BC42D}"/>
               </a:ext>
             </a:extLst>
           </p:cNvPr>
@@ -10877,10 +10578,10 @@
       </p:sp>
       <p:sp>
         <p:nvSpPr>
-          <p:cNvPr id="132" name="op-old1-ico">
-            <a:extLst>
-              <a:ext uri="{FF2B5EF4-FFF2-40B4-BE49-F238E27FC236}">
-                <a16:creationId xmlns:a16="http://schemas.microsoft.com/office/drawing/2014/main" id="{A8DE7E25-BF76-D325-ECF3-3A7547E88BC8}"/>
+          <p:cNvPr id="127" name="op-old1-ico">
+            <a:extLst>
+              <a:ext uri="{FF2B5EF4-FFF2-40B4-BE49-F238E27FC236}">
+                <a16:creationId xmlns:a16="http://schemas.microsoft.com/office/drawing/2014/main" id="{F47A38CB-840B-7FDC-F0AF-852462037285}"/>
               </a:ext>
             </a:extLst>
           </p:cNvPr>
@@ -10945,10 +10646,10 @@
       </p:sp>
       <p:sp>
         <p:nvSpPr>
-          <p:cNvPr id="133" name="op-old1-t">
-            <a:extLst>
-              <a:ext uri="{FF2B5EF4-FFF2-40B4-BE49-F238E27FC236}">
-                <a16:creationId xmlns:a16="http://schemas.microsoft.com/office/drawing/2014/main" id="{904B723E-B0D7-2634-1DB2-ABCD28162A99}"/>
+          <p:cNvPr id="128" name="op-old1-t">
+            <a:extLst>
+              <a:ext uri="{FF2B5EF4-FFF2-40B4-BE49-F238E27FC236}">
+                <a16:creationId xmlns:a16="http://schemas.microsoft.com/office/drawing/2014/main" id="{58209477-F8B0-080C-8608-4DC7C65AD013}"/>
               </a:ext>
             </a:extLst>
           </p:cNvPr>
@@ -10985,10 +10686,10 @@
       </p:sp>
       <p:sp>
         <p:nvSpPr>
-          <p:cNvPr id="134" name="op-old1-s">
-            <a:extLst>
-              <a:ext uri="{FF2B5EF4-FFF2-40B4-BE49-F238E27FC236}">
-                <a16:creationId xmlns:a16="http://schemas.microsoft.com/office/drawing/2014/main" id="{1D64E3AB-97B9-1F06-C941-DD71C71088B0}"/>
+          <p:cNvPr id="129" name="op-old1-s">
+            <a:extLst>
+              <a:ext uri="{FF2B5EF4-FFF2-40B4-BE49-F238E27FC236}">
+                <a16:creationId xmlns:a16="http://schemas.microsoft.com/office/drawing/2014/main" id="{12988564-EFC8-70BD-7896-CC8CC92068C7}"/>
               </a:ext>
             </a:extLst>
           </p:cNvPr>
@@ -11025,10 +10726,10 @@
       </p:sp>
       <p:sp>
         <p:nvSpPr>
-          <p:cNvPr id="135" name="op-old2">
-            <a:extLst>
-              <a:ext uri="{FF2B5EF4-FFF2-40B4-BE49-F238E27FC236}">
-                <a16:creationId xmlns:a16="http://schemas.microsoft.com/office/drawing/2014/main" id="{8C4113B3-EE9A-323D-0792-4C94F6FF2F40}"/>
+          <p:cNvPr id="130" name="op-old2">
+            <a:extLst>
+              <a:ext uri="{FF2B5EF4-FFF2-40B4-BE49-F238E27FC236}">
+                <a16:creationId xmlns:a16="http://schemas.microsoft.com/office/drawing/2014/main" id="{A4729304-608E-37DD-C93D-B350E3CB7C62}"/>
               </a:ext>
             </a:extLst>
           </p:cNvPr>
@@ -11093,10 +10794,10 @@
       </p:sp>
       <p:sp>
         <p:nvSpPr>
-          <p:cNvPr id="136" name="op-old2-ico">
-            <a:extLst>
-              <a:ext uri="{FF2B5EF4-FFF2-40B4-BE49-F238E27FC236}">
-                <a16:creationId xmlns:a16="http://schemas.microsoft.com/office/drawing/2014/main" id="{62278059-40F5-56ED-3A97-7E145F91806A}"/>
+          <p:cNvPr id="131" name="op-old2-ico">
+            <a:extLst>
+              <a:ext uri="{FF2B5EF4-FFF2-40B4-BE49-F238E27FC236}">
+                <a16:creationId xmlns:a16="http://schemas.microsoft.com/office/drawing/2014/main" id="{D43CDCC7-41E4-CD1C-2889-3F66A5B08840}"/>
               </a:ext>
             </a:extLst>
           </p:cNvPr>
@@ -11161,10 +10862,10 @@
       </p:sp>
       <p:sp>
         <p:nvSpPr>
-          <p:cNvPr id="137" name="op-old2-t">
-            <a:extLst>
-              <a:ext uri="{FF2B5EF4-FFF2-40B4-BE49-F238E27FC236}">
-                <a16:creationId xmlns:a16="http://schemas.microsoft.com/office/drawing/2014/main" id="{47497AD5-81DA-C1E4-2093-E61D138D3265}"/>
+          <p:cNvPr id="132" name="op-old2-t">
+            <a:extLst>
+              <a:ext uri="{FF2B5EF4-FFF2-40B4-BE49-F238E27FC236}">
+                <a16:creationId xmlns:a16="http://schemas.microsoft.com/office/drawing/2014/main" id="{CE9AF6D1-9DA6-2424-BC4E-9D573E9B22C9}"/>
               </a:ext>
             </a:extLst>
           </p:cNvPr>
@@ -11201,10 +10902,10 @@
       </p:sp>
       <p:sp>
         <p:nvSpPr>
-          <p:cNvPr id="138" name="op-old2-s">
-            <a:extLst>
-              <a:ext uri="{FF2B5EF4-FFF2-40B4-BE49-F238E27FC236}">
-                <a16:creationId xmlns:a16="http://schemas.microsoft.com/office/drawing/2014/main" id="{483066B6-A9AF-69AF-8D8E-44D25BC1C474}"/>
+          <p:cNvPr id="133" name="op-old2-s">
+            <a:extLst>
+              <a:ext uri="{FF2B5EF4-FFF2-40B4-BE49-F238E27FC236}">
+                <a16:creationId xmlns:a16="http://schemas.microsoft.com/office/drawing/2014/main" id="{E6B64D1C-B303-F19F-D3D0-5C3CFCB6E500}"/>
               </a:ext>
             </a:extLst>
           </p:cNvPr>
@@ -11241,10 +10942,10 @@
       </p:sp>
       <p:sp>
         <p:nvSpPr>
-          <p:cNvPr id="139" name="cell-o-new">
-            <a:extLst>
-              <a:ext uri="{FF2B5EF4-FFF2-40B4-BE49-F238E27FC236}">
-                <a16:creationId xmlns:a16="http://schemas.microsoft.com/office/drawing/2014/main" id="{A2B6066B-7554-11B4-97ED-EA2099FDE13B}"/>
+          <p:cNvPr id="134" name="cell-o-new">
+            <a:extLst>
+              <a:ext uri="{FF2B5EF4-FFF2-40B4-BE49-F238E27FC236}">
+                <a16:creationId xmlns:a16="http://schemas.microsoft.com/office/drawing/2014/main" id="{6E0A468E-7BFB-B408-F6AA-7F401D6DD972}"/>
               </a:ext>
             </a:extLst>
           </p:cNvPr>
@@ -11295,10 +10996,10 @@
       </p:sp>
       <p:sp>
         <p:nvSpPr>
-          <p:cNvPr id="140" name="op-new0">
-            <a:extLst>
-              <a:ext uri="{FF2B5EF4-FFF2-40B4-BE49-F238E27FC236}">
-                <a16:creationId xmlns:a16="http://schemas.microsoft.com/office/drawing/2014/main" id="{F2574E6B-AEA2-9F7B-7CD5-3EA6FC0B5E37}"/>
+          <p:cNvPr id="135" name="op-new0">
+            <a:extLst>
+              <a:ext uri="{FF2B5EF4-FFF2-40B4-BE49-F238E27FC236}">
+                <a16:creationId xmlns:a16="http://schemas.microsoft.com/office/drawing/2014/main" id="{BB461D32-6882-ABC6-9EE2-A68291BB0654}"/>
               </a:ext>
             </a:extLst>
           </p:cNvPr>
@@ -11363,10 +11064,10 @@
       </p:sp>
       <p:sp>
         <p:nvSpPr>
-          <p:cNvPr id="141" name="op-new0-ico">
-            <a:extLst>
-              <a:ext uri="{FF2B5EF4-FFF2-40B4-BE49-F238E27FC236}">
-                <a16:creationId xmlns:a16="http://schemas.microsoft.com/office/drawing/2014/main" id="{7FE48ECB-BE33-6C20-231C-C12801FA1FC7}"/>
+          <p:cNvPr id="136" name="op-new0-ico">
+            <a:extLst>
+              <a:ext uri="{FF2B5EF4-FFF2-40B4-BE49-F238E27FC236}">
+                <a16:creationId xmlns:a16="http://schemas.microsoft.com/office/drawing/2014/main" id="{7D1B99D1-80CB-16F7-56BE-780010655756}"/>
               </a:ext>
             </a:extLst>
           </p:cNvPr>
@@ -11439,10 +11140,10 @@
       </p:sp>
       <p:sp>
         <p:nvSpPr>
-          <p:cNvPr id="142" name="op-new0-t">
-            <a:extLst>
-              <a:ext uri="{FF2B5EF4-FFF2-40B4-BE49-F238E27FC236}">
-                <a16:creationId xmlns:a16="http://schemas.microsoft.com/office/drawing/2014/main" id="{013A498C-4570-98F6-46B3-2FEFE7032FE8}"/>
+          <p:cNvPr id="137" name="op-new0-t">
+            <a:extLst>
+              <a:ext uri="{FF2B5EF4-FFF2-40B4-BE49-F238E27FC236}">
+                <a16:creationId xmlns:a16="http://schemas.microsoft.com/office/drawing/2014/main" id="{00D728F5-8603-7132-71D9-C8958039CA03}"/>
               </a:ext>
             </a:extLst>
           </p:cNvPr>
@@ -11479,10 +11180,10 @@
       </p:sp>
       <p:sp>
         <p:nvSpPr>
-          <p:cNvPr id="143" name="op-new0-s">
-            <a:extLst>
-              <a:ext uri="{FF2B5EF4-FFF2-40B4-BE49-F238E27FC236}">
-                <a16:creationId xmlns:a16="http://schemas.microsoft.com/office/drawing/2014/main" id="{D95D7466-EF43-6A3C-2082-2357824F5121}"/>
+          <p:cNvPr id="138" name="op-new0-s">
+            <a:extLst>
+              <a:ext uri="{FF2B5EF4-FFF2-40B4-BE49-F238E27FC236}">
+                <a16:creationId xmlns:a16="http://schemas.microsoft.com/office/drawing/2014/main" id="{471BB1DE-045C-E864-FEC2-EF8E1803B55A}"/>
               </a:ext>
             </a:extLst>
           </p:cNvPr>
@@ -11519,10 +11220,10 @@
       </p:sp>
       <p:sp>
         <p:nvSpPr>
-          <p:cNvPr id="144" name="op-new1">
-            <a:extLst>
-              <a:ext uri="{FF2B5EF4-FFF2-40B4-BE49-F238E27FC236}">
-                <a16:creationId xmlns:a16="http://schemas.microsoft.com/office/drawing/2014/main" id="{9DE451CA-4B3C-EB31-B203-965D08EB708B}"/>
+          <p:cNvPr id="139" name="op-new1">
+            <a:extLst>
+              <a:ext uri="{FF2B5EF4-FFF2-40B4-BE49-F238E27FC236}">
+                <a16:creationId xmlns:a16="http://schemas.microsoft.com/office/drawing/2014/main" id="{CE80861E-5B5A-DB29-949F-18A9F8D4397D}"/>
               </a:ext>
             </a:extLst>
           </p:cNvPr>
@@ -11587,10 +11288,10 @@
       </p:sp>
       <p:sp>
         <p:nvSpPr>
-          <p:cNvPr id="145" name="op-new1-ico">
-            <a:extLst>
-              <a:ext uri="{FF2B5EF4-FFF2-40B4-BE49-F238E27FC236}">
-                <a16:creationId xmlns:a16="http://schemas.microsoft.com/office/drawing/2014/main" id="{81BEAD98-1363-2419-FD6A-C6660DAA8D04}"/>
+          <p:cNvPr id="140" name="op-new1-ico">
+            <a:extLst>
+              <a:ext uri="{FF2B5EF4-FFF2-40B4-BE49-F238E27FC236}">
+                <a16:creationId xmlns:a16="http://schemas.microsoft.com/office/drawing/2014/main" id="{05261DFA-1B27-6ADB-EE09-DFDC23F24AA5}"/>
               </a:ext>
             </a:extLst>
           </p:cNvPr>
@@ -11663,10 +11364,10 @@
       </p:sp>
       <p:sp>
         <p:nvSpPr>
-          <p:cNvPr id="146" name="op-new1-t">
-            <a:extLst>
-              <a:ext uri="{FF2B5EF4-FFF2-40B4-BE49-F238E27FC236}">
-                <a16:creationId xmlns:a16="http://schemas.microsoft.com/office/drawing/2014/main" id="{305F60F7-8CD0-9358-8501-865CBF6B1DF6}"/>
+          <p:cNvPr id="141" name="op-new1-t">
+            <a:extLst>
+              <a:ext uri="{FF2B5EF4-FFF2-40B4-BE49-F238E27FC236}">
+                <a16:creationId xmlns:a16="http://schemas.microsoft.com/office/drawing/2014/main" id="{BF700F3F-302F-39C9-DEAD-87D13AD79DDB}"/>
               </a:ext>
             </a:extLst>
           </p:cNvPr>
@@ -11703,10 +11404,10 @@
       </p:sp>
       <p:sp>
         <p:nvSpPr>
-          <p:cNvPr id="147" name="op-new1-s">
-            <a:extLst>
-              <a:ext uri="{FF2B5EF4-FFF2-40B4-BE49-F238E27FC236}">
-                <a16:creationId xmlns:a16="http://schemas.microsoft.com/office/drawing/2014/main" id="{3AAF0270-C45E-A9AB-0CBA-E55B343D1A90}"/>
+          <p:cNvPr id="142" name="op-new1-s">
+            <a:extLst>
+              <a:ext uri="{FF2B5EF4-FFF2-40B4-BE49-F238E27FC236}">
+                <a16:creationId xmlns:a16="http://schemas.microsoft.com/office/drawing/2014/main" id="{068A9849-519E-898E-F7CE-0964765FA9BF}"/>
               </a:ext>
             </a:extLst>
           </p:cNvPr>
@@ -11743,10 +11444,10 @@
       </p:sp>
       <p:sp>
         <p:nvSpPr>
-          <p:cNvPr id="148" name="op-new2">
-            <a:extLst>
-              <a:ext uri="{FF2B5EF4-FFF2-40B4-BE49-F238E27FC236}">
-                <a16:creationId xmlns:a16="http://schemas.microsoft.com/office/drawing/2014/main" id="{414D278D-01C3-1C95-2CD8-A9B502D97A83}"/>
+          <p:cNvPr id="143" name="op-new2">
+            <a:extLst>
+              <a:ext uri="{FF2B5EF4-FFF2-40B4-BE49-F238E27FC236}">
+                <a16:creationId xmlns:a16="http://schemas.microsoft.com/office/drawing/2014/main" id="{E8CF986E-4004-3388-71A0-0469B366FA40}"/>
               </a:ext>
             </a:extLst>
           </p:cNvPr>
@@ -11811,10 +11512,10 @@
       </p:sp>
       <p:sp>
         <p:nvSpPr>
-          <p:cNvPr id="149" name="op-new2-ico">
-            <a:extLst>
-              <a:ext uri="{FF2B5EF4-FFF2-40B4-BE49-F238E27FC236}">
-                <a16:creationId xmlns:a16="http://schemas.microsoft.com/office/drawing/2014/main" id="{3A65A4B2-4169-E357-CDD0-CC1985D309F1}"/>
+          <p:cNvPr id="144" name="op-new2-ico">
+            <a:extLst>
+              <a:ext uri="{FF2B5EF4-FFF2-40B4-BE49-F238E27FC236}">
+                <a16:creationId xmlns:a16="http://schemas.microsoft.com/office/drawing/2014/main" id="{7E336ACC-8DC3-B99E-63C9-D8389F432BEB}"/>
               </a:ext>
             </a:extLst>
           </p:cNvPr>
@@ -11887,10 +11588,10 @@
       </p:sp>
       <p:sp>
         <p:nvSpPr>
-          <p:cNvPr id="150" name="op-new2-t">
-            <a:extLst>
-              <a:ext uri="{FF2B5EF4-FFF2-40B4-BE49-F238E27FC236}">
-                <a16:creationId xmlns:a16="http://schemas.microsoft.com/office/drawing/2014/main" id="{41CD82A1-8324-8ED9-1F1C-43FF24C680B0}"/>
+          <p:cNvPr id="145" name="op-new2-t">
+            <a:extLst>
+              <a:ext uri="{FF2B5EF4-FFF2-40B4-BE49-F238E27FC236}">
+                <a16:creationId xmlns:a16="http://schemas.microsoft.com/office/drawing/2014/main" id="{D16E5C8D-2DDD-7DEA-41AB-055F9E29C5F3}"/>
               </a:ext>
             </a:extLst>
           </p:cNvPr>
@@ -11927,10 +11628,10 @@
       </p:sp>
       <p:sp>
         <p:nvSpPr>
-          <p:cNvPr id="151" name="op-new2-s">
-            <a:extLst>
-              <a:ext uri="{FF2B5EF4-FFF2-40B4-BE49-F238E27FC236}">
-                <a16:creationId xmlns:a16="http://schemas.microsoft.com/office/drawing/2014/main" id="{F5C233F6-9593-9E77-0EEF-4F9F5DDF49F2}"/>
+          <p:cNvPr id="146" name="op-new2-s">
+            <a:extLst>
+              <a:ext uri="{FF2B5EF4-FFF2-40B4-BE49-F238E27FC236}">
+                <a16:creationId xmlns:a16="http://schemas.microsoft.com/office/drawing/2014/main" id="{549C69DB-DCDB-E66A-93AE-CDF591C06967}"/>
               </a:ext>
             </a:extLst>
           </p:cNvPr>
@@ -11967,10 +11668,10 @@
       </p:sp>
       <p:sp>
         <p:nvSpPr>
-          <p:cNvPr id="152" name="cell-v-old">
-            <a:extLst>
-              <a:ext uri="{FF2B5EF4-FFF2-40B4-BE49-F238E27FC236}">
-                <a16:creationId xmlns:a16="http://schemas.microsoft.com/office/drawing/2014/main" id="{E44ECB6D-7220-F43F-26E9-CC9191CCFBA8}"/>
+          <p:cNvPr id="147" name="cell-v-old">
+            <a:extLst>
+              <a:ext uri="{FF2B5EF4-FFF2-40B4-BE49-F238E27FC236}">
+                <a16:creationId xmlns:a16="http://schemas.microsoft.com/office/drawing/2014/main" id="{045D4A4F-961A-06E2-12E1-3577546FAD75}"/>
               </a:ext>
             </a:extLst>
           </p:cNvPr>
@@ -12021,10 +11722,10 @@
       </p:sp>
       <p:sp>
         <p:nvSpPr>
-          <p:cNvPr id="153" name="vold0">
-            <a:extLst>
-              <a:ext uri="{FF2B5EF4-FFF2-40B4-BE49-F238E27FC236}">
-                <a16:creationId xmlns:a16="http://schemas.microsoft.com/office/drawing/2014/main" id="{F04780B8-4D05-7B27-95C9-7945040E7828}"/>
+          <p:cNvPr id="148" name="vold0">
+            <a:extLst>
+              <a:ext uri="{FF2B5EF4-FFF2-40B4-BE49-F238E27FC236}">
+                <a16:creationId xmlns:a16="http://schemas.microsoft.com/office/drawing/2014/main" id="{315AE98C-41D2-CBEA-B6BF-2071E85D7E44}"/>
               </a:ext>
             </a:extLst>
           </p:cNvPr>
@@ -12089,10 +11790,10 @@
       </p:sp>
       <p:sp>
         <p:nvSpPr>
-          <p:cNvPr id="154" name="vold0-top">
-            <a:extLst>
-              <a:ext uri="{FF2B5EF4-FFF2-40B4-BE49-F238E27FC236}">
-                <a16:creationId xmlns:a16="http://schemas.microsoft.com/office/drawing/2014/main" id="{18F56C95-4486-1EE6-4B5E-ABA596F01539}"/>
+          <p:cNvPr id="149" name="vold0-top">
+            <a:extLst>
+              <a:ext uri="{FF2B5EF4-FFF2-40B4-BE49-F238E27FC236}">
+                <a16:creationId xmlns:a16="http://schemas.microsoft.com/office/drawing/2014/main" id="{BE36ECB7-C4BB-0D3D-D0D8-D6CD7B7A624A}"/>
               </a:ext>
             </a:extLst>
           </p:cNvPr>
@@ -12157,10 +11858,10 @@
       </p:sp>
       <p:sp>
         <p:nvSpPr>
-          <p:cNvPr id="155" name="vold0-t">
-            <a:extLst>
-              <a:ext uri="{FF2B5EF4-FFF2-40B4-BE49-F238E27FC236}">
-                <a16:creationId xmlns:a16="http://schemas.microsoft.com/office/drawing/2014/main" id="{546E323E-03AB-4FFF-2C44-9918BAD3BE4F}"/>
+          <p:cNvPr id="150" name="vold0-t">
+            <a:extLst>
+              <a:ext uri="{FF2B5EF4-FFF2-40B4-BE49-F238E27FC236}">
+                <a16:creationId xmlns:a16="http://schemas.microsoft.com/office/drawing/2014/main" id="{D5AB2B49-3FB4-0A65-8B34-6AE4E87E9BF5}"/>
               </a:ext>
             </a:extLst>
           </p:cNvPr>
@@ -12207,10 +11908,10 @@
       </p:sp>
       <p:sp>
         <p:nvSpPr>
-          <p:cNvPr id="156" name="vold0-s">
-            <a:extLst>
-              <a:ext uri="{FF2B5EF4-FFF2-40B4-BE49-F238E27FC236}">
-                <a16:creationId xmlns:a16="http://schemas.microsoft.com/office/drawing/2014/main" id="{D33D36CA-84C1-E67C-873E-88EF253A1DB4}"/>
+          <p:cNvPr id="151" name="vold0-s">
+            <a:extLst>
+              <a:ext uri="{FF2B5EF4-FFF2-40B4-BE49-F238E27FC236}">
+                <a16:creationId xmlns:a16="http://schemas.microsoft.com/office/drawing/2014/main" id="{A5AC4C25-7927-7BD0-0F76-433C3937A138}"/>
               </a:ext>
             </a:extLst>
           </p:cNvPr>
@@ -12248,10 +11949,10 @@
       </p:sp>
       <p:sp>
         <p:nvSpPr>
-          <p:cNvPr id="157" name="vold1">
-            <a:extLst>
-              <a:ext uri="{FF2B5EF4-FFF2-40B4-BE49-F238E27FC236}">
-                <a16:creationId xmlns:a16="http://schemas.microsoft.com/office/drawing/2014/main" id="{9C29AA16-19E6-95D4-23E7-C24C362D5B31}"/>
+          <p:cNvPr id="152" name="vold1">
+            <a:extLst>
+              <a:ext uri="{FF2B5EF4-FFF2-40B4-BE49-F238E27FC236}">
+                <a16:creationId xmlns:a16="http://schemas.microsoft.com/office/drawing/2014/main" id="{7BA9056D-B40B-5D81-C47C-96A0C2E91F4F}"/>
               </a:ext>
             </a:extLst>
           </p:cNvPr>
@@ -12316,10 +12017,10 @@
       </p:sp>
       <p:sp>
         <p:nvSpPr>
-          <p:cNvPr id="158" name="vold1-top">
-            <a:extLst>
-              <a:ext uri="{FF2B5EF4-FFF2-40B4-BE49-F238E27FC236}">
-                <a16:creationId xmlns:a16="http://schemas.microsoft.com/office/drawing/2014/main" id="{06CAB4B2-DA7A-7F15-F9FB-4B2252771786}"/>
+          <p:cNvPr id="153" name="vold1-top">
+            <a:extLst>
+              <a:ext uri="{FF2B5EF4-FFF2-40B4-BE49-F238E27FC236}">
+                <a16:creationId xmlns:a16="http://schemas.microsoft.com/office/drawing/2014/main" id="{A75E4673-E2F0-665B-F916-87059675D68F}"/>
               </a:ext>
             </a:extLst>
           </p:cNvPr>
@@ -12384,10 +12085,10 @@
       </p:sp>
       <p:sp>
         <p:nvSpPr>
-          <p:cNvPr id="159" name="vold1-t">
-            <a:extLst>
-              <a:ext uri="{FF2B5EF4-FFF2-40B4-BE49-F238E27FC236}">
-                <a16:creationId xmlns:a16="http://schemas.microsoft.com/office/drawing/2014/main" id="{50609634-2C10-8EB0-C9AD-93DBD9771B8B}"/>
+          <p:cNvPr id="154" name="vold1-t">
+            <a:extLst>
+              <a:ext uri="{FF2B5EF4-FFF2-40B4-BE49-F238E27FC236}">
+                <a16:creationId xmlns:a16="http://schemas.microsoft.com/office/drawing/2014/main" id="{E8965947-B9F1-9754-2845-406FCB2DC121}"/>
               </a:ext>
             </a:extLst>
           </p:cNvPr>
@@ -12434,10 +12135,10 @@
       </p:sp>
       <p:sp>
         <p:nvSpPr>
-          <p:cNvPr id="160" name="vold1-s">
-            <a:extLst>
-              <a:ext uri="{FF2B5EF4-FFF2-40B4-BE49-F238E27FC236}">
-                <a16:creationId xmlns:a16="http://schemas.microsoft.com/office/drawing/2014/main" id="{EEC090EF-CA0A-D4B9-7DEE-BC1157DBE96F}"/>
+          <p:cNvPr id="155" name="vold1-s">
+            <a:extLst>
+              <a:ext uri="{FF2B5EF4-FFF2-40B4-BE49-F238E27FC236}">
+                <a16:creationId xmlns:a16="http://schemas.microsoft.com/office/drawing/2014/main" id="{B7A27CD4-037A-80DF-F54B-9855A6D64E1F}"/>
               </a:ext>
             </a:extLst>
           </p:cNvPr>
@@ -12475,10 +12176,10 @@
       </p:sp>
       <p:sp>
         <p:nvSpPr>
-          <p:cNvPr id="161" name="vold2">
-            <a:extLst>
-              <a:ext uri="{FF2B5EF4-FFF2-40B4-BE49-F238E27FC236}">
-                <a16:creationId xmlns:a16="http://schemas.microsoft.com/office/drawing/2014/main" id="{9E3BB2BB-05CE-1B63-1485-4AA9C87C3A57}"/>
+          <p:cNvPr id="156" name="vold2">
+            <a:extLst>
+              <a:ext uri="{FF2B5EF4-FFF2-40B4-BE49-F238E27FC236}">
+                <a16:creationId xmlns:a16="http://schemas.microsoft.com/office/drawing/2014/main" id="{AAF44D94-B733-0685-54D6-839956404194}"/>
               </a:ext>
             </a:extLst>
           </p:cNvPr>
@@ -12543,10 +12244,10 @@
       </p:sp>
       <p:sp>
         <p:nvSpPr>
-          <p:cNvPr id="162" name="vold2-top">
-            <a:extLst>
-              <a:ext uri="{FF2B5EF4-FFF2-40B4-BE49-F238E27FC236}">
-                <a16:creationId xmlns:a16="http://schemas.microsoft.com/office/drawing/2014/main" id="{C84825F5-A450-4E89-68B6-B579CD9E942E}"/>
+          <p:cNvPr id="157" name="vold2-top">
+            <a:extLst>
+              <a:ext uri="{FF2B5EF4-FFF2-40B4-BE49-F238E27FC236}">
+                <a16:creationId xmlns:a16="http://schemas.microsoft.com/office/drawing/2014/main" id="{7721E145-87F8-C7BC-AFC1-7C074B5265EA}"/>
               </a:ext>
             </a:extLst>
           </p:cNvPr>
@@ -12611,10 +12312,10 @@
       </p:sp>
       <p:sp>
         <p:nvSpPr>
-          <p:cNvPr id="163" name="vold2-t">
-            <a:extLst>
-              <a:ext uri="{FF2B5EF4-FFF2-40B4-BE49-F238E27FC236}">
-                <a16:creationId xmlns:a16="http://schemas.microsoft.com/office/drawing/2014/main" id="{8063AAAD-CDA2-7614-36A7-B262313DA5EA}"/>
+          <p:cNvPr id="158" name="vold2-t">
+            <a:extLst>
+              <a:ext uri="{FF2B5EF4-FFF2-40B4-BE49-F238E27FC236}">
+                <a16:creationId xmlns:a16="http://schemas.microsoft.com/office/drawing/2014/main" id="{B5787C82-D3CC-01E8-42DF-FD083111B68A}"/>
               </a:ext>
             </a:extLst>
           </p:cNvPr>
@@ -12652,10 +12353,10 @@
       </p:sp>
       <p:sp>
         <p:nvSpPr>
-          <p:cNvPr id="164" name="vold2-s">
-            <a:extLst>
-              <a:ext uri="{FF2B5EF4-FFF2-40B4-BE49-F238E27FC236}">
-                <a16:creationId xmlns:a16="http://schemas.microsoft.com/office/drawing/2014/main" id="{56B3A1F1-2DBA-5772-6B19-6D52659BDEBB}"/>
+          <p:cNvPr id="159" name="vold2-s">
+            <a:extLst>
+              <a:ext uri="{FF2B5EF4-FFF2-40B4-BE49-F238E27FC236}">
+                <a16:creationId xmlns:a16="http://schemas.microsoft.com/office/drawing/2014/main" id="{76423E48-8AB5-E29E-84AE-CFBCAFAE3D87}"/>
               </a:ext>
             </a:extLst>
           </p:cNvPr>
@@ -12693,10 +12394,10 @@
       </p:sp>
       <p:sp>
         <p:nvSpPr>
-          <p:cNvPr id="165" name="cell-v-new">
-            <a:extLst>
-              <a:ext uri="{FF2B5EF4-FFF2-40B4-BE49-F238E27FC236}">
-                <a16:creationId xmlns:a16="http://schemas.microsoft.com/office/drawing/2014/main" id="{1C581C41-4064-EE8C-94EE-B621F463D5EA}"/>
+          <p:cNvPr id="160" name="cell-v-new">
+            <a:extLst>
+              <a:ext uri="{FF2B5EF4-FFF2-40B4-BE49-F238E27FC236}">
+                <a16:creationId xmlns:a16="http://schemas.microsoft.com/office/drawing/2014/main" id="{7AC5C18C-BC41-D14B-2F76-C6C253815021}"/>
               </a:ext>
             </a:extLst>
           </p:cNvPr>
@@ -12747,10 +12448,10 @@
       </p:sp>
       <p:sp>
         <p:nvSpPr>
-          <p:cNvPr id="166" name="goal-box">
-            <a:extLst>
-              <a:ext uri="{FF2B5EF4-FFF2-40B4-BE49-F238E27FC236}">
-                <a16:creationId xmlns:a16="http://schemas.microsoft.com/office/drawing/2014/main" id="{A79E4909-6786-D5D6-90E3-EC8CC709E9BF}"/>
+          <p:cNvPr id="161" name="goal-box">
+            <a:extLst>
+              <a:ext uri="{FF2B5EF4-FFF2-40B4-BE49-F238E27FC236}">
+                <a16:creationId xmlns:a16="http://schemas.microsoft.com/office/drawing/2014/main" id="{84622624-3E9F-A1DC-4388-279EFED74DAE}"/>
               </a:ext>
             </a:extLst>
           </p:cNvPr>
@@ -12811,10 +12512,10 @@
       </p:sp>
       <p:sp>
         <p:nvSpPr>
-          <p:cNvPr id="167" name="goal-cap">
-            <a:extLst>
-              <a:ext uri="{FF2B5EF4-FFF2-40B4-BE49-F238E27FC236}">
-                <a16:creationId xmlns:a16="http://schemas.microsoft.com/office/drawing/2014/main" id="{B0B434BC-E862-B0EB-715F-E19A75822B4D}"/>
+          <p:cNvPr id="162" name="goal-cap">
+            <a:extLst>
+              <a:ext uri="{FF2B5EF4-FFF2-40B4-BE49-F238E27FC236}">
+                <a16:creationId xmlns:a16="http://schemas.microsoft.com/office/drawing/2014/main" id="{C2D1630C-9EB8-D221-1A08-23D62AAA56ED}"/>
               </a:ext>
             </a:extLst>
           </p:cNvPr>
@@ -12869,10 +12570,10 @@
       </p:sp>
       <p:sp>
         <p:nvSpPr>
-          <p:cNvPr id="168" name="step0">
-            <a:extLst>
-              <a:ext uri="{FF2B5EF4-FFF2-40B4-BE49-F238E27FC236}">
-                <a16:creationId xmlns:a16="http://schemas.microsoft.com/office/drawing/2014/main" id="{1DA1B07C-2376-93B1-E6EE-75B7D48506CC}"/>
+          <p:cNvPr id="163" name="step0">
+            <a:extLst>
+              <a:ext uri="{FF2B5EF4-FFF2-40B4-BE49-F238E27FC236}">
+                <a16:creationId xmlns:a16="http://schemas.microsoft.com/office/drawing/2014/main" id="{E7D79E37-C106-6C54-B4D9-94C4D9DAC4EE}"/>
               </a:ext>
             </a:extLst>
           </p:cNvPr>
@@ -12972,10 +12673,10 @@
       </p:sp>
       <p:sp>
         <p:nvSpPr>
-          <p:cNvPr id="169" name="step1">
-            <a:extLst>
-              <a:ext uri="{FF2B5EF4-FFF2-40B4-BE49-F238E27FC236}">
-                <a16:creationId xmlns:a16="http://schemas.microsoft.com/office/drawing/2014/main" id="{C604E18B-C0A5-0968-E676-18F08599E032}"/>
+          <p:cNvPr id="164" name="step1">
+            <a:extLst>
+              <a:ext uri="{FF2B5EF4-FFF2-40B4-BE49-F238E27FC236}">
+                <a16:creationId xmlns:a16="http://schemas.microsoft.com/office/drawing/2014/main" id="{FFF80428-5F35-2B3B-5877-F311404A30DD}"/>
               </a:ext>
             </a:extLst>
           </p:cNvPr>
@@ -13075,10 +12776,10 @@
       </p:sp>
       <p:sp>
         <p:nvSpPr>
-          <p:cNvPr id="170" name="step2">
-            <a:extLst>
-              <a:ext uri="{FF2B5EF4-FFF2-40B4-BE49-F238E27FC236}">
-                <a16:creationId xmlns:a16="http://schemas.microsoft.com/office/drawing/2014/main" id="{4B12ED30-8176-C534-10B0-4F5FD15827C4}"/>
+          <p:cNvPr id="165" name="step2">
+            <a:extLst>
+              <a:ext uri="{FF2B5EF4-FFF2-40B4-BE49-F238E27FC236}">
+                <a16:creationId xmlns:a16="http://schemas.microsoft.com/office/drawing/2014/main" id="{E8250867-5A72-B351-9F90-B6653F7B6994}"/>
               </a:ext>
             </a:extLst>
           </p:cNvPr>
@@ -13193,10 +12894,10 @@
       </p:sp>
       <p:sp>
         <p:nvSpPr>
-          <p:cNvPr id="171" name="out0">
-            <a:extLst>
-              <a:ext uri="{FF2B5EF4-FFF2-40B4-BE49-F238E27FC236}">
-                <a16:creationId xmlns:a16="http://schemas.microsoft.com/office/drawing/2014/main" id="{819C6599-40DC-2FD0-E0E3-654DC96CB655}"/>
+          <p:cNvPr id="166" name="out0">
+            <a:extLst>
+              <a:ext uri="{FF2B5EF4-FFF2-40B4-BE49-F238E27FC236}">
+                <a16:creationId xmlns:a16="http://schemas.microsoft.com/office/drawing/2014/main" id="{4AAA5EDA-BF25-C819-FF36-54F15925EC32}"/>
               </a:ext>
             </a:extLst>
           </p:cNvPr>
@@ -13261,10 +12962,10 @@
       </p:sp>
       <p:sp>
         <p:nvSpPr>
-          <p:cNvPr id="172" name="out0-top">
-            <a:extLst>
-              <a:ext uri="{FF2B5EF4-FFF2-40B4-BE49-F238E27FC236}">
-                <a16:creationId xmlns:a16="http://schemas.microsoft.com/office/drawing/2014/main" id="{4AA66A48-4677-6D55-42F6-B80FA8D530E8}"/>
+          <p:cNvPr id="167" name="out0-top">
+            <a:extLst>
+              <a:ext uri="{FF2B5EF4-FFF2-40B4-BE49-F238E27FC236}">
+                <a16:creationId xmlns:a16="http://schemas.microsoft.com/office/drawing/2014/main" id="{285AF781-B724-26FB-4AE7-E85DE4D3B957}"/>
               </a:ext>
             </a:extLst>
           </p:cNvPr>
@@ -13329,10 +13030,10 @@
       </p:sp>
       <p:sp>
         <p:nvSpPr>
-          <p:cNvPr id="173" name="out0-t">
-            <a:extLst>
-              <a:ext uri="{FF2B5EF4-FFF2-40B4-BE49-F238E27FC236}">
-                <a16:creationId xmlns:a16="http://schemas.microsoft.com/office/drawing/2014/main" id="{19FF64BE-BC96-7D13-A9BD-5C6DDDBC272B}"/>
+          <p:cNvPr id="168" name="out0-t">
+            <a:extLst>
+              <a:ext uri="{FF2B5EF4-FFF2-40B4-BE49-F238E27FC236}">
+                <a16:creationId xmlns:a16="http://schemas.microsoft.com/office/drawing/2014/main" id="{52054D48-1E71-62E3-A0F5-99DA378BA1AA}"/>
               </a:ext>
             </a:extLst>
           </p:cNvPr>
@@ -13369,10 +13070,10 @@
       </p:sp>
       <p:sp>
         <p:nvSpPr>
-          <p:cNvPr id="174" name="out0-s">
-            <a:extLst>
-              <a:ext uri="{FF2B5EF4-FFF2-40B4-BE49-F238E27FC236}">
-                <a16:creationId xmlns:a16="http://schemas.microsoft.com/office/drawing/2014/main" id="{B696D827-B77D-40DF-C516-6284F28E48AF}"/>
+          <p:cNvPr id="169" name="out0-s">
+            <a:extLst>
+              <a:ext uri="{FF2B5EF4-FFF2-40B4-BE49-F238E27FC236}">
+                <a16:creationId xmlns:a16="http://schemas.microsoft.com/office/drawing/2014/main" id="{AF8E312E-0715-D3B9-F63D-8A9CB3D4F34C}"/>
               </a:ext>
             </a:extLst>
           </p:cNvPr>
@@ -13409,10 +13110,10 @@
       </p:sp>
       <p:sp>
         <p:nvSpPr>
-          <p:cNvPr id="175" name="out1">
-            <a:extLst>
-              <a:ext uri="{FF2B5EF4-FFF2-40B4-BE49-F238E27FC236}">
-                <a16:creationId xmlns:a16="http://schemas.microsoft.com/office/drawing/2014/main" id="{94C8774C-0ED5-4976-CAFD-33170EFD3FD5}"/>
+          <p:cNvPr id="170" name="out1">
+            <a:extLst>
+              <a:ext uri="{FF2B5EF4-FFF2-40B4-BE49-F238E27FC236}">
+                <a16:creationId xmlns:a16="http://schemas.microsoft.com/office/drawing/2014/main" id="{79572978-B8F6-2C95-A358-E50D515A54A8}"/>
               </a:ext>
             </a:extLst>
           </p:cNvPr>
@@ -13477,10 +13178,10 @@
       </p:sp>
       <p:sp>
         <p:nvSpPr>
-          <p:cNvPr id="176" name="out1-top">
-            <a:extLst>
-              <a:ext uri="{FF2B5EF4-FFF2-40B4-BE49-F238E27FC236}">
-                <a16:creationId xmlns:a16="http://schemas.microsoft.com/office/drawing/2014/main" id="{7A6B3B06-E516-4C93-402E-1062BD8FD077}"/>
+          <p:cNvPr id="171" name="out1-top">
+            <a:extLst>
+              <a:ext uri="{FF2B5EF4-FFF2-40B4-BE49-F238E27FC236}">
+                <a16:creationId xmlns:a16="http://schemas.microsoft.com/office/drawing/2014/main" id="{B262AD3E-E58D-3DD8-030B-29FE7B5FA183}"/>
               </a:ext>
             </a:extLst>
           </p:cNvPr>
@@ -13545,10 +13246,10 @@
       </p:sp>
       <p:sp>
         <p:nvSpPr>
-          <p:cNvPr id="177" name="out1-t">
-            <a:extLst>
-              <a:ext uri="{FF2B5EF4-FFF2-40B4-BE49-F238E27FC236}">
-                <a16:creationId xmlns:a16="http://schemas.microsoft.com/office/drawing/2014/main" id="{DFA6D136-CA01-B39F-EE28-2428C69BA3FC}"/>
+          <p:cNvPr id="172" name="out1-t">
+            <a:extLst>
+              <a:ext uri="{FF2B5EF4-FFF2-40B4-BE49-F238E27FC236}">
+                <a16:creationId xmlns:a16="http://schemas.microsoft.com/office/drawing/2014/main" id="{3E888D32-940A-F895-DD04-507478BE7750}"/>
               </a:ext>
             </a:extLst>
           </p:cNvPr>
@@ -13585,10 +13286,10 @@
       </p:sp>
       <p:sp>
         <p:nvSpPr>
-          <p:cNvPr id="178" name="out1-s">
-            <a:extLst>
-              <a:ext uri="{FF2B5EF4-FFF2-40B4-BE49-F238E27FC236}">
-                <a16:creationId xmlns:a16="http://schemas.microsoft.com/office/drawing/2014/main" id="{1D1F2469-A2E6-D569-8258-078654E37F6B}"/>
+          <p:cNvPr id="173" name="out1-s">
+            <a:extLst>
+              <a:ext uri="{FF2B5EF4-FFF2-40B4-BE49-F238E27FC236}">
+                <a16:creationId xmlns:a16="http://schemas.microsoft.com/office/drawing/2014/main" id="{D6820A85-8E90-280A-6626-82261139D3FF}"/>
               </a:ext>
             </a:extLst>
           </p:cNvPr>
@@ -13625,10 +13326,10 @@
       </p:sp>
       <p:sp>
         <p:nvSpPr>
-          <p:cNvPr id="179" name="out2">
-            <a:extLst>
-              <a:ext uri="{FF2B5EF4-FFF2-40B4-BE49-F238E27FC236}">
-                <a16:creationId xmlns:a16="http://schemas.microsoft.com/office/drawing/2014/main" id="{F3B5F77C-61BD-C693-EC8A-C30AC2FB6E1C}"/>
+          <p:cNvPr id="174" name="out2">
+            <a:extLst>
+              <a:ext uri="{FF2B5EF4-FFF2-40B4-BE49-F238E27FC236}">
+                <a16:creationId xmlns:a16="http://schemas.microsoft.com/office/drawing/2014/main" id="{E63CBD22-9C39-B1E8-FBB1-16D51EB1A0A3}"/>
               </a:ext>
             </a:extLst>
           </p:cNvPr>
@@ -13693,10 +13394,10 @@
       </p:sp>
       <p:sp>
         <p:nvSpPr>
-          <p:cNvPr id="180" name="out2-top">
-            <a:extLst>
-              <a:ext uri="{FF2B5EF4-FFF2-40B4-BE49-F238E27FC236}">
-                <a16:creationId xmlns:a16="http://schemas.microsoft.com/office/drawing/2014/main" id="{7CB1B2B8-C360-E8FC-1D02-355DEFE7766A}"/>
+          <p:cNvPr id="175" name="out2-top">
+            <a:extLst>
+              <a:ext uri="{FF2B5EF4-FFF2-40B4-BE49-F238E27FC236}">
+                <a16:creationId xmlns:a16="http://schemas.microsoft.com/office/drawing/2014/main" id="{2CA28AC7-2D90-52C8-BA60-919485AB878D}"/>
               </a:ext>
             </a:extLst>
           </p:cNvPr>
@@ -13761,10 +13462,10 @@
       </p:sp>
       <p:sp>
         <p:nvSpPr>
-          <p:cNvPr id="181" name="out2-t">
-            <a:extLst>
-              <a:ext uri="{FF2B5EF4-FFF2-40B4-BE49-F238E27FC236}">
-                <a16:creationId xmlns:a16="http://schemas.microsoft.com/office/drawing/2014/main" id="{7758DEA0-4EF3-D545-A763-71A6B5D70AB6}"/>
+          <p:cNvPr id="176" name="out2-t">
+            <a:extLst>
+              <a:ext uri="{FF2B5EF4-FFF2-40B4-BE49-F238E27FC236}">
+                <a16:creationId xmlns:a16="http://schemas.microsoft.com/office/drawing/2014/main" id="{52E1DFC1-51C2-4295-0330-DFFCE5525476}"/>
               </a:ext>
             </a:extLst>
           </p:cNvPr>
@@ -13801,10 +13502,10 @@
       </p:sp>
       <p:sp>
         <p:nvSpPr>
-          <p:cNvPr id="182" name="out2-s">
-            <a:extLst>
-              <a:ext uri="{FF2B5EF4-FFF2-40B4-BE49-F238E27FC236}">
-                <a16:creationId xmlns:a16="http://schemas.microsoft.com/office/drawing/2014/main" id="{AC3DC064-F1E2-AE88-E7F2-AD46435FBC3E}"/>
+          <p:cNvPr id="177" name="out2-s">
+            <a:extLst>
+              <a:ext uri="{FF2B5EF4-FFF2-40B4-BE49-F238E27FC236}">
+                <a16:creationId xmlns:a16="http://schemas.microsoft.com/office/drawing/2014/main" id="{6C18D499-0F9D-BB5E-6705-38CEF6B6A0E4}"/>
               </a:ext>
             </a:extLst>
           </p:cNvPr>
@@ -13841,10 +13542,10 @@
       </p:sp>
       <p:sp>
         <p:nvSpPr>
-          <p:cNvPr id="183" name="ex-bg">
-            <a:extLst>
-              <a:ext uri="{FF2B5EF4-FFF2-40B4-BE49-F238E27FC236}">
-                <a16:creationId xmlns:a16="http://schemas.microsoft.com/office/drawing/2014/main" id="{969F35CD-9FFF-F779-F97E-0679207F54B1}"/>
+          <p:cNvPr id="178" name="ex-bg">
+            <a:extLst>
+              <a:ext uri="{FF2B5EF4-FFF2-40B4-BE49-F238E27FC236}">
+                <a16:creationId xmlns:a16="http://schemas.microsoft.com/office/drawing/2014/main" id="{22437479-B935-339B-134B-F823A3E17F71}"/>
               </a:ext>
             </a:extLst>
           </p:cNvPr>
@@ -13909,10 +13610,10 @@
       </p:sp>
       <p:sp>
         <p:nvSpPr>
-          <p:cNvPr id="184" name="ex-top">
-            <a:extLst>
-              <a:ext uri="{FF2B5EF4-FFF2-40B4-BE49-F238E27FC236}">
-                <a16:creationId xmlns:a16="http://schemas.microsoft.com/office/drawing/2014/main" id="{74062370-75C7-734B-B455-62F8DFFC8FD1}"/>
+          <p:cNvPr id="179" name="ex-top">
+            <a:extLst>
+              <a:ext uri="{FF2B5EF4-FFF2-40B4-BE49-F238E27FC236}">
+                <a16:creationId xmlns:a16="http://schemas.microsoft.com/office/drawing/2014/main" id="{35F19F55-7D63-FC2E-7F64-8D871F7B267B}"/>
               </a:ext>
             </a:extLst>
           </p:cNvPr>
@@ -13977,10 +13678,10 @@
       </p:sp>
       <p:sp>
         <p:nvSpPr>
-          <p:cNvPr id="185" name="ex-head">
-            <a:extLst>
-              <a:ext uri="{FF2B5EF4-FFF2-40B4-BE49-F238E27FC236}">
-                <a16:creationId xmlns:a16="http://schemas.microsoft.com/office/drawing/2014/main" id="{CE895815-1EBB-6764-598C-0781B4EE72D2}"/>
+          <p:cNvPr id="180" name="ex-head">
+            <a:extLst>
+              <a:ext uri="{FF2B5EF4-FFF2-40B4-BE49-F238E27FC236}">
+                <a16:creationId xmlns:a16="http://schemas.microsoft.com/office/drawing/2014/main" id="{F2D2322E-453C-93CE-7E6F-22EDF65DB0F6}"/>
               </a:ext>
             </a:extLst>
           </p:cNvPr>
@@ -14017,10 +13718,10 @@
       </p:sp>
       <p:cxnSp>
         <p:nvCxnSpPr>
-          <p:cNvPr id="186" name="ex-div">
-            <a:extLst>
-              <a:ext uri="{FF2B5EF4-FFF2-40B4-BE49-F238E27FC236}">
-                <a16:creationId xmlns:a16="http://schemas.microsoft.com/office/drawing/2014/main" id="{861FBB02-C45E-71A3-1DF5-5EA5A5A430F8}"/>
+          <p:cNvPr id="181" name="ex-div">
+            <a:extLst>
+              <a:ext uri="{FF2B5EF4-FFF2-40B4-BE49-F238E27FC236}">
+                <a16:creationId xmlns:a16="http://schemas.microsoft.com/office/drawing/2014/main" id="{6852B8DA-AE62-D347-5EA0-1358DF2BEA50}"/>
               </a:ext>
             </a:extLst>
           </p:cNvPr>
@@ -14058,10 +13759,10 @@
       </p:cxnSp>
       <p:sp>
         <p:nvSpPr>
-          <p:cNvPr id="187" name="panel0">
-            <a:extLst>
-              <a:ext uri="{FF2B5EF4-FFF2-40B4-BE49-F238E27FC236}">
-                <a16:creationId xmlns:a16="http://schemas.microsoft.com/office/drawing/2014/main" id="{CB116386-C24D-2C83-EFD1-8657C7D13C53}"/>
+          <p:cNvPr id="182" name="panel0">
+            <a:extLst>
+              <a:ext uri="{FF2B5EF4-FFF2-40B4-BE49-F238E27FC236}">
+                <a16:creationId xmlns:a16="http://schemas.microsoft.com/office/drawing/2014/main" id="{632B5448-86AB-79FA-07F5-A608E6E4560F}"/>
               </a:ext>
             </a:extLst>
           </p:cNvPr>
@@ -14126,10 +13827,10 @@
       </p:sp>
       <p:sp>
         <p:nvSpPr>
-          <p:cNvPr id="188" name="panel0-top">
-            <a:extLst>
-              <a:ext uri="{FF2B5EF4-FFF2-40B4-BE49-F238E27FC236}">
-                <a16:creationId xmlns:a16="http://schemas.microsoft.com/office/drawing/2014/main" id="{8229829D-6021-A691-4E90-A8115672405D}"/>
+          <p:cNvPr id="183" name="panel0-top">
+            <a:extLst>
+              <a:ext uri="{FF2B5EF4-FFF2-40B4-BE49-F238E27FC236}">
+                <a16:creationId xmlns:a16="http://schemas.microsoft.com/office/drawing/2014/main" id="{7118CA07-549D-B196-BB2D-FE052DC4FD74}"/>
               </a:ext>
             </a:extLst>
           </p:cNvPr>
@@ -14194,10 +13895,10 @@
       </p:sp>
       <p:sp>
         <p:nvSpPr>
-          <p:cNvPr id="189" name="panel0-h">
-            <a:extLst>
-              <a:ext uri="{FF2B5EF4-FFF2-40B4-BE49-F238E27FC236}">
-                <a16:creationId xmlns:a16="http://schemas.microsoft.com/office/drawing/2014/main" id="{AF4C4D8A-3F50-D1D5-3CD9-77372679AE97}"/>
+          <p:cNvPr id="184" name="panel0-h">
+            <a:extLst>
+              <a:ext uri="{FF2B5EF4-FFF2-40B4-BE49-F238E27FC236}">
+                <a16:creationId xmlns:a16="http://schemas.microsoft.com/office/drawing/2014/main" id="{08D1D112-CF9B-D988-3089-5E1765B54B80}"/>
               </a:ext>
             </a:extLst>
           </p:cNvPr>
@@ -14252,10 +13953,10 @@
       </p:sp>
       <p:sp>
         <p:nvSpPr>
-          <p:cNvPr id="190" name="panel0-s">
-            <a:extLst>
-              <a:ext uri="{FF2B5EF4-FFF2-40B4-BE49-F238E27FC236}">
-                <a16:creationId xmlns:a16="http://schemas.microsoft.com/office/drawing/2014/main" id="{82C2B4DF-1184-3098-5AC5-2833DEA3D0F6}"/>
+          <p:cNvPr id="185" name="panel0-s">
+            <a:extLst>
+              <a:ext uri="{FF2B5EF4-FFF2-40B4-BE49-F238E27FC236}">
+                <a16:creationId xmlns:a16="http://schemas.microsoft.com/office/drawing/2014/main" id="{CC3F368A-D602-FA9B-11BD-39447A80B3C8}"/>
               </a:ext>
             </a:extLst>
           </p:cNvPr>
@@ -14307,10 +14008,10 @@
       </p:sp>
       <p:sp>
         <p:nvSpPr>
-          <p:cNvPr id="191" name="panel1">
-            <a:extLst>
-              <a:ext uri="{FF2B5EF4-FFF2-40B4-BE49-F238E27FC236}">
-                <a16:creationId xmlns:a16="http://schemas.microsoft.com/office/drawing/2014/main" id="{2EC47B8D-CDA0-98AC-CD33-1B89CAA961B1}"/>
+          <p:cNvPr id="186" name="panel1">
+            <a:extLst>
+              <a:ext uri="{FF2B5EF4-FFF2-40B4-BE49-F238E27FC236}">
+                <a16:creationId xmlns:a16="http://schemas.microsoft.com/office/drawing/2014/main" id="{6DFC2EF8-A6F7-E7B1-B221-43C18F660EE2}"/>
               </a:ext>
             </a:extLst>
           </p:cNvPr>
@@ -14375,10 +14076,10 @@
       </p:sp>
       <p:sp>
         <p:nvSpPr>
-          <p:cNvPr id="192" name="panel1-top">
-            <a:extLst>
-              <a:ext uri="{FF2B5EF4-FFF2-40B4-BE49-F238E27FC236}">
-                <a16:creationId xmlns:a16="http://schemas.microsoft.com/office/drawing/2014/main" id="{F7369343-C0A0-5A6B-C823-21C80280F489}"/>
+          <p:cNvPr id="187" name="panel1-top">
+            <a:extLst>
+              <a:ext uri="{FF2B5EF4-FFF2-40B4-BE49-F238E27FC236}">
+                <a16:creationId xmlns:a16="http://schemas.microsoft.com/office/drawing/2014/main" id="{EF2B91C4-8F11-8B3D-C0C0-A40D60E002A8}"/>
               </a:ext>
             </a:extLst>
           </p:cNvPr>
@@ -14443,10 +14144,10 @@
       </p:sp>
       <p:sp>
         <p:nvSpPr>
-          <p:cNvPr id="193" name="panel1-h">
-            <a:extLst>
-              <a:ext uri="{FF2B5EF4-FFF2-40B4-BE49-F238E27FC236}">
-                <a16:creationId xmlns:a16="http://schemas.microsoft.com/office/drawing/2014/main" id="{16A7CF2F-8DC5-4CB2-10E1-EF06F23DA6F7}"/>
+          <p:cNvPr id="188" name="panel1-h">
+            <a:extLst>
+              <a:ext uri="{FF2B5EF4-FFF2-40B4-BE49-F238E27FC236}">
+                <a16:creationId xmlns:a16="http://schemas.microsoft.com/office/drawing/2014/main" id="{A055FABE-51E1-D2AC-9F79-9514CE76A9C2}"/>
               </a:ext>
             </a:extLst>
           </p:cNvPr>
@@ -14501,10 +14202,10 @@
       </p:sp>
       <p:sp>
         <p:nvSpPr>
-          <p:cNvPr id="194" name="panel1-s">
-            <a:extLst>
-              <a:ext uri="{FF2B5EF4-FFF2-40B4-BE49-F238E27FC236}">
-                <a16:creationId xmlns:a16="http://schemas.microsoft.com/office/drawing/2014/main" id="{3E056AEB-C063-D291-0D6E-03BD61DAE0C0}"/>
+          <p:cNvPr id="189" name="panel1-s">
+            <a:extLst>
+              <a:ext uri="{FF2B5EF4-FFF2-40B4-BE49-F238E27FC236}">
+                <a16:creationId xmlns:a16="http://schemas.microsoft.com/office/drawing/2014/main" id="{95CFD5EB-60E1-1803-0ABD-56C8C20751B9}"/>
               </a:ext>
             </a:extLst>
           </p:cNvPr>
@@ -14541,10 +14242,10 @@
       </p:sp>
       <p:sp>
         <p:nvSpPr>
-          <p:cNvPr id="195" name="panel2">
-            <a:extLst>
-              <a:ext uri="{FF2B5EF4-FFF2-40B4-BE49-F238E27FC236}">
-                <a16:creationId xmlns:a16="http://schemas.microsoft.com/office/drawing/2014/main" id="{BCE05F28-02D1-1ACC-6403-B86E0CC52428}"/>
+          <p:cNvPr id="190" name="panel2">
+            <a:extLst>
+              <a:ext uri="{FF2B5EF4-FFF2-40B4-BE49-F238E27FC236}">
+                <a16:creationId xmlns:a16="http://schemas.microsoft.com/office/drawing/2014/main" id="{BDE2A904-8E77-9977-44FB-9A6092AC8428}"/>
               </a:ext>
             </a:extLst>
           </p:cNvPr>
@@ -14609,10 +14310,10 @@
       </p:sp>
       <p:sp>
         <p:nvSpPr>
-          <p:cNvPr id="196" name="panel2-top">
-            <a:extLst>
-              <a:ext uri="{FF2B5EF4-FFF2-40B4-BE49-F238E27FC236}">
-                <a16:creationId xmlns:a16="http://schemas.microsoft.com/office/drawing/2014/main" id="{2FFD71A9-85C4-9955-2E4C-C909C1C9B678}"/>
+          <p:cNvPr id="191" name="panel2-top">
+            <a:extLst>
+              <a:ext uri="{FF2B5EF4-FFF2-40B4-BE49-F238E27FC236}">
+                <a16:creationId xmlns:a16="http://schemas.microsoft.com/office/drawing/2014/main" id="{7D1431E8-17AE-1D55-745F-E22DBE4B516C}"/>
               </a:ext>
             </a:extLst>
           </p:cNvPr>
@@ -14677,10 +14378,10 @@
       </p:sp>
       <p:sp>
         <p:nvSpPr>
-          <p:cNvPr id="197" name="panel2-h">
-            <a:extLst>
-              <a:ext uri="{FF2B5EF4-FFF2-40B4-BE49-F238E27FC236}">
-                <a16:creationId xmlns:a16="http://schemas.microsoft.com/office/drawing/2014/main" id="{59A67ECE-4CD6-4108-A6BB-CAB32E2BD107}"/>
+          <p:cNvPr id="192" name="panel2-h">
+            <a:extLst>
+              <a:ext uri="{FF2B5EF4-FFF2-40B4-BE49-F238E27FC236}">
+                <a16:creationId xmlns:a16="http://schemas.microsoft.com/office/drawing/2014/main" id="{46F385AC-7C4C-E561-5586-C3DF633B878B}"/>
               </a:ext>
             </a:extLst>
           </p:cNvPr>
@@ -14735,10 +14436,10 @@
       </p:sp>
       <p:sp>
         <p:nvSpPr>
-          <p:cNvPr id="198" name="panel2-s">
-            <a:extLst>
-              <a:ext uri="{FF2B5EF4-FFF2-40B4-BE49-F238E27FC236}">
-                <a16:creationId xmlns:a16="http://schemas.microsoft.com/office/drawing/2014/main" id="{73626E4D-6FF5-C9DC-66B4-9097D4203F17}"/>
+          <p:cNvPr id="193" name="panel2-s">
+            <a:extLst>
+              <a:ext uri="{FF2B5EF4-FFF2-40B4-BE49-F238E27FC236}">
+                <a16:creationId xmlns:a16="http://schemas.microsoft.com/office/drawing/2014/main" id="{92B25684-7904-9A10-2FB2-7C84EFA72C86}"/>
               </a:ext>
             </a:extLst>
           </p:cNvPr>
@@ -14775,10 +14476,10 @@
       </p:sp>
       <p:sp>
         <p:nvSpPr>
-          <p:cNvPr id="199" name="panel3">
-            <a:extLst>
-              <a:ext uri="{FF2B5EF4-FFF2-40B4-BE49-F238E27FC236}">
-                <a16:creationId xmlns:a16="http://schemas.microsoft.com/office/drawing/2014/main" id="{69EE09A5-7187-4E4F-50F3-A8B56F4D2C13}"/>
+          <p:cNvPr id="194" name="panel3">
+            <a:extLst>
+              <a:ext uri="{FF2B5EF4-FFF2-40B4-BE49-F238E27FC236}">
+                <a16:creationId xmlns:a16="http://schemas.microsoft.com/office/drawing/2014/main" id="{DF884916-E34A-E9DA-4F31-B982AF7D64F7}"/>
               </a:ext>
             </a:extLst>
           </p:cNvPr>
@@ -14843,10 +14544,10 @@
       </p:sp>
       <p:sp>
         <p:nvSpPr>
-          <p:cNvPr id="200" name="panel3-top">
-            <a:extLst>
-              <a:ext uri="{FF2B5EF4-FFF2-40B4-BE49-F238E27FC236}">
-                <a16:creationId xmlns:a16="http://schemas.microsoft.com/office/drawing/2014/main" id="{F5FC0D68-55F2-C5A5-DC9A-06218F2B1155}"/>
+          <p:cNvPr id="195" name="panel3-top">
+            <a:extLst>
+              <a:ext uri="{FF2B5EF4-FFF2-40B4-BE49-F238E27FC236}">
+                <a16:creationId xmlns:a16="http://schemas.microsoft.com/office/drawing/2014/main" id="{2A58010F-9732-DA84-B909-BE1B038ACDF4}"/>
               </a:ext>
             </a:extLst>
           </p:cNvPr>
@@ -14911,10 +14612,10 @@
       </p:sp>
       <p:sp>
         <p:nvSpPr>
-          <p:cNvPr id="201" name="panel3-h">
-            <a:extLst>
-              <a:ext uri="{FF2B5EF4-FFF2-40B4-BE49-F238E27FC236}">
-                <a16:creationId xmlns:a16="http://schemas.microsoft.com/office/drawing/2014/main" id="{1C616FBD-4D91-8563-02EC-D673077EFFAF}"/>
+          <p:cNvPr id="196" name="panel3-h">
+            <a:extLst>
+              <a:ext uri="{FF2B5EF4-FFF2-40B4-BE49-F238E27FC236}">
+                <a16:creationId xmlns:a16="http://schemas.microsoft.com/office/drawing/2014/main" id="{AE6418DC-F9FA-6277-246D-D6BA063243F2}"/>
               </a:ext>
             </a:extLst>
           </p:cNvPr>
@@ -15002,10 +14703,10 @@
       </p:sp>
       <p:sp>
         <p:nvSpPr>
-          <p:cNvPr id="202" name="radar-outer">
-            <a:extLst>
-              <a:ext uri="{FF2B5EF4-FFF2-40B4-BE49-F238E27FC236}">
-                <a16:creationId xmlns:a16="http://schemas.microsoft.com/office/drawing/2014/main" id="{09A75BCC-92A0-B294-78AE-8FEEB2D82D04}"/>
+          <p:cNvPr id="197" name="radar-outer">
+            <a:extLst>
+              <a:ext uri="{FF2B5EF4-FFF2-40B4-BE49-F238E27FC236}">
+                <a16:creationId xmlns:a16="http://schemas.microsoft.com/office/drawing/2014/main" id="{4634C318-351F-A136-2852-E0A8FA9ADEA6}"/>
               </a:ext>
             </a:extLst>
           </p:cNvPr>
@@ -15014,8 +14715,8 @@
         </p:nvSpPr>
         <p:spPr>
           <a:xfrm>
-            <a:off x="762000" y="5110480"/>
-            <a:ext cx="1135381" cy="1089661"/>
+            <a:off x="1263943" y="5147521"/>
+            <a:ext cx="931595" cy="949118"/>
           </a:xfrm>
           <a:custGeom>
             <a:avLst/>
@@ -15024,21 +14725,21 @@
             <a:cxnLst/>
             <a:rect l="0" t="0" r="0" b="0"/>
             <a:pathLst>
-              <a:path w="1135381" h="1089661">
+              <a:path w="931595" h="949118">
                 <a:moveTo>
-                  <a:pt x="563880" y="0"/>
+                  <a:pt x="462671" y="0"/>
                 </a:moveTo>
                 <a:lnTo>
-                  <a:pt x="1135380" y="411480"/>
+                  <a:pt x="931594" y="358408"/>
                 </a:lnTo>
                 <a:lnTo>
-                  <a:pt x="914400" y="1089660"/>
+                  <a:pt x="750277" y="949117"/>
                 </a:lnTo>
                 <a:lnTo>
-                  <a:pt x="213360" y="1089660"/>
+                  <a:pt x="175065" y="949117"/>
                 </a:lnTo>
                 <a:lnTo>
-                  <a:pt x="0" y="411480"/>
+                  <a:pt x="0" y="358408"/>
                 </a:lnTo>
                 <a:close/>
               </a:path>
@@ -15090,10 +14791,10 @@
       </p:sp>
       <p:sp>
         <p:nvSpPr>
-          <p:cNvPr id="203" name="radar-inner">
-            <a:extLst>
-              <a:ext uri="{FF2B5EF4-FFF2-40B4-BE49-F238E27FC236}">
-                <a16:creationId xmlns:a16="http://schemas.microsoft.com/office/drawing/2014/main" id="{2D5231B4-69BE-B267-24B0-3CC58BB4A753}"/>
+          <p:cNvPr id="198" name="radar-inner">
+            <a:extLst>
+              <a:ext uri="{FF2B5EF4-FFF2-40B4-BE49-F238E27FC236}">
+                <a16:creationId xmlns:a16="http://schemas.microsoft.com/office/drawing/2014/main" id="{AB92BF2D-D36E-8FD4-9478-A614080E4228}"/>
               </a:ext>
             </a:extLst>
           </p:cNvPr>
@@ -15102,8 +14803,8 @@
         </p:nvSpPr>
         <p:spPr>
           <a:xfrm>
-            <a:off x="1082040" y="5415280"/>
-            <a:ext cx="480061" cy="457201"/>
+            <a:off x="1526540" y="5413008"/>
+            <a:ext cx="393896" cy="398232"/>
           </a:xfrm>
           <a:custGeom>
             <a:avLst/>
@@ -15112,21 +14813,21 @@
             <a:cxnLst/>
             <a:rect l="0" t="0" r="0" b="0"/>
             <a:pathLst>
-              <a:path w="480061" h="457201">
+              <a:path w="393896" h="398232">
                 <a:moveTo>
-                  <a:pt x="243840" y="0"/>
+                  <a:pt x="200074" y="0"/>
                 </a:moveTo>
                 <a:lnTo>
-                  <a:pt x="480060" y="167640"/>
+                  <a:pt x="393895" y="146018"/>
                 </a:lnTo>
                 <a:lnTo>
-                  <a:pt x="396240" y="457200"/>
+                  <a:pt x="325120" y="398231"/>
                 </a:lnTo>
                 <a:lnTo>
-                  <a:pt x="91440" y="457200"/>
+                  <a:pt x="75028" y="398231"/>
                 </a:lnTo>
                 <a:lnTo>
-                  <a:pt x="0" y="167640"/>
+                  <a:pt x="0" y="146018"/>
                 </a:lnTo>
                 <a:close/>
               </a:path>
@@ -15178,10 +14879,10 @@
       </p:sp>
       <p:sp>
         <p:nvSpPr>
-          <p:cNvPr id="204" name="radar-gold">
-            <a:extLst>
-              <a:ext uri="{FF2B5EF4-FFF2-40B4-BE49-F238E27FC236}">
-                <a16:creationId xmlns:a16="http://schemas.microsoft.com/office/drawing/2014/main" id="{9D8683D8-8663-D4D4-D0F9-98CB83DA3BFA}"/>
+          <p:cNvPr id="199" name="radar-gold">
+            <a:extLst>
+              <a:ext uri="{FF2B5EF4-FFF2-40B4-BE49-F238E27FC236}">
+                <a16:creationId xmlns:a16="http://schemas.microsoft.com/office/drawing/2014/main" id="{BC90443A-4190-87A6-8C2F-9799012368DA}"/>
               </a:ext>
             </a:extLst>
           </p:cNvPr>
@@ -15190,8 +14891,8 @@
         </p:nvSpPr>
         <p:spPr>
           <a:xfrm>
-            <a:off x="922020" y="5262880"/>
-            <a:ext cx="807721" cy="777241"/>
+            <a:off x="1395242" y="5280264"/>
+            <a:ext cx="662745" cy="676994"/>
           </a:xfrm>
           <a:custGeom>
             <a:avLst/>
@@ -15200,21 +14901,21 @@
             <a:cxnLst/>
             <a:rect l="0" t="0" r="0" b="0"/>
             <a:pathLst>
-              <a:path w="807721" h="777241">
+              <a:path w="662745" h="676994">
                 <a:moveTo>
-                  <a:pt x="403860" y="0"/>
+                  <a:pt x="331372" y="0"/>
                 </a:moveTo>
                 <a:lnTo>
-                  <a:pt x="807720" y="289560"/>
+                  <a:pt x="662744" y="252213"/>
                 </a:lnTo>
                 <a:lnTo>
-                  <a:pt x="655320" y="777240"/>
+                  <a:pt x="537698" y="676993"/>
                 </a:lnTo>
                 <a:lnTo>
-                  <a:pt x="152400" y="777240"/>
+                  <a:pt x="125046" y="676993"/>
                 </a:lnTo>
                 <a:lnTo>
-                  <a:pt x="0" y="289560"/>
+                  <a:pt x="0" y="252213"/>
                 </a:lnTo>
                 <a:close/>
               </a:path>
@@ -15266,10 +14967,10 @@
       </p:sp>
       <p:cxnSp>
         <p:nvCxnSpPr>
-          <p:cNvPr id="205" name="radar-spk0">
-            <a:extLst>
-              <a:ext uri="{FF2B5EF4-FFF2-40B4-BE49-F238E27FC236}">
-                <a16:creationId xmlns:a16="http://schemas.microsoft.com/office/drawing/2014/main" id="{8BA9C06D-581A-A5DE-11B3-26FF41B0056F}"/>
+          <p:cNvPr id="200" name="radar-spk0">
+            <a:extLst>
+              <a:ext uri="{FF2B5EF4-FFF2-40B4-BE49-F238E27FC236}">
+                <a16:creationId xmlns:a16="http://schemas.microsoft.com/office/drawing/2014/main" id="{646BB2E9-016E-6D86-3BCF-B601FA89E994}"/>
               </a:ext>
             </a:extLst>
           </p:cNvPr>
@@ -15278,8 +14979,8 @@
         </p:nvCxnSpPr>
         <p:spPr>
           <a:xfrm flipV="1">
-            <a:off x="1325880" y="5110480"/>
-            <a:ext cx="0" cy="586740"/>
+            <a:off x="1726614" y="5147521"/>
+            <a:ext cx="0" cy="511063"/>
           </a:xfrm>
           <a:prstGeom prst="line">
             <a:avLst/>
@@ -15307,10 +15008,10 @@
       </p:cxnSp>
       <p:cxnSp>
         <p:nvCxnSpPr>
-          <p:cNvPr id="206" name="radar-spk1">
-            <a:extLst>
-              <a:ext uri="{FF2B5EF4-FFF2-40B4-BE49-F238E27FC236}">
-                <a16:creationId xmlns:a16="http://schemas.microsoft.com/office/drawing/2014/main" id="{385D5E8C-BF00-D9BD-E657-E7F3BC7BCE08}"/>
+          <p:cNvPr id="201" name="radar-spk1">
+            <a:extLst>
+              <a:ext uri="{FF2B5EF4-FFF2-40B4-BE49-F238E27FC236}">
+                <a16:creationId xmlns:a16="http://schemas.microsoft.com/office/drawing/2014/main" id="{B34E10D8-0F65-7183-43C3-4284A98D1243}"/>
               </a:ext>
             </a:extLst>
           </p:cNvPr>
@@ -15319,8 +15020,8 @@
         </p:nvCxnSpPr>
         <p:spPr>
           <a:xfrm flipV="1">
-            <a:off x="1325880" y="5521960"/>
-            <a:ext cx="571500" cy="175260"/>
+            <a:off x="1726614" y="5505929"/>
+            <a:ext cx="468923" cy="152655"/>
           </a:xfrm>
           <a:prstGeom prst="line">
             <a:avLst/>
@@ -15348,10 +15049,10 @@
       </p:cxnSp>
       <p:cxnSp>
         <p:nvCxnSpPr>
-          <p:cNvPr id="207" name="radar-spk2">
-            <a:extLst>
-              <a:ext uri="{FF2B5EF4-FFF2-40B4-BE49-F238E27FC236}">
-                <a16:creationId xmlns:a16="http://schemas.microsoft.com/office/drawing/2014/main" id="{22D8AD2E-E6AD-69BB-13BE-FC3CBA7F8585}"/>
+          <p:cNvPr id="202" name="radar-spk2">
+            <a:extLst>
+              <a:ext uri="{FF2B5EF4-FFF2-40B4-BE49-F238E27FC236}">
+                <a16:creationId xmlns:a16="http://schemas.microsoft.com/office/drawing/2014/main" id="{272A5ABA-7B2A-D9C4-04AB-35763A4309B4}"/>
               </a:ext>
             </a:extLst>
           </p:cNvPr>
@@ -15360,8 +15061,8 @@
         </p:nvCxnSpPr>
         <p:spPr>
           <a:xfrm>
-            <a:off x="1325880" y="5697220"/>
-            <a:ext cx="350520" cy="502920"/>
+            <a:off x="1726614" y="5658584"/>
+            <a:ext cx="287606" cy="438054"/>
           </a:xfrm>
           <a:prstGeom prst="line">
             <a:avLst/>
@@ -15389,10 +15090,10 @@
       </p:cxnSp>
       <p:cxnSp>
         <p:nvCxnSpPr>
-          <p:cNvPr id="208" name="radar-spk3">
-            <a:extLst>
-              <a:ext uri="{FF2B5EF4-FFF2-40B4-BE49-F238E27FC236}">
-                <a16:creationId xmlns:a16="http://schemas.microsoft.com/office/drawing/2014/main" id="{D04C062E-9DF8-93F6-7A0E-53B8826CE717}"/>
+          <p:cNvPr id="203" name="radar-spk3">
+            <a:extLst>
+              <a:ext uri="{FF2B5EF4-FFF2-40B4-BE49-F238E27FC236}">
+                <a16:creationId xmlns:a16="http://schemas.microsoft.com/office/drawing/2014/main" id="{E488F809-44A6-1027-0C6C-F1E0946DBF7C}"/>
               </a:ext>
             </a:extLst>
           </p:cNvPr>
@@ -15401,8 +15102,8 @@
         </p:nvCxnSpPr>
         <p:spPr>
           <a:xfrm flipH="1">
-            <a:off x="975360" y="5697220"/>
-            <a:ext cx="350520" cy="502920"/>
+            <a:off x="1439008" y="5658584"/>
+            <a:ext cx="287606" cy="438054"/>
           </a:xfrm>
           <a:prstGeom prst="line">
             <a:avLst/>
@@ -15430,10 +15131,10 @@
       </p:cxnSp>
       <p:cxnSp>
         <p:nvCxnSpPr>
-          <p:cNvPr id="209" name="radar-spk4">
-            <a:extLst>
-              <a:ext uri="{FF2B5EF4-FFF2-40B4-BE49-F238E27FC236}">
-                <a16:creationId xmlns:a16="http://schemas.microsoft.com/office/drawing/2014/main" id="{623995BD-93AA-C9A9-8423-591A12A0ECDC}"/>
+          <p:cNvPr id="204" name="radar-spk4">
+            <a:extLst>
+              <a:ext uri="{FF2B5EF4-FFF2-40B4-BE49-F238E27FC236}">
+                <a16:creationId xmlns:a16="http://schemas.microsoft.com/office/drawing/2014/main" id="{A0B1E722-7CF0-EC50-3752-0FE8A8E2A706}"/>
               </a:ext>
             </a:extLst>
           </p:cNvPr>
@@ -15442,8 +15143,8 @@
         </p:nvCxnSpPr>
         <p:spPr>
           <a:xfrm flipH="1" flipV="1">
-            <a:off x="762000" y="5521960"/>
-            <a:ext cx="563880" cy="175260"/>
+            <a:off x="1263943" y="5505929"/>
+            <a:ext cx="462671" cy="152655"/>
           </a:xfrm>
           <a:prstGeom prst="line">
             <a:avLst/>
@@ -15471,10 +15172,10 @@
       </p:cxnSp>
       <p:sp>
         <p:nvSpPr>
-          <p:cNvPr id="210" name="radar-data">
-            <a:extLst>
-              <a:ext uri="{FF2B5EF4-FFF2-40B4-BE49-F238E27FC236}">
-                <a16:creationId xmlns:a16="http://schemas.microsoft.com/office/drawing/2014/main" id="{EFBCF7D2-B8F7-5450-9625-F035B3FB7274}"/>
+          <p:cNvPr id="205" name="radar-data">
+            <a:extLst>
+              <a:ext uri="{FF2B5EF4-FFF2-40B4-BE49-F238E27FC236}">
+                <a16:creationId xmlns:a16="http://schemas.microsoft.com/office/drawing/2014/main" id="{3133210D-4310-933A-6C7B-767DC435C4ED}"/>
               </a:ext>
             </a:extLst>
           </p:cNvPr>
@@ -15483,8 +15184,8 @@
         </p:nvSpPr>
         <p:spPr>
           <a:xfrm>
-            <a:off x="891540" y="5209540"/>
-            <a:ext cx="784861" cy="883921"/>
+            <a:off x="1370232" y="5233804"/>
+            <a:ext cx="643989" cy="769915"/>
           </a:xfrm>
           <a:custGeom>
             <a:avLst/>
@@ -15493,21 +15194,21 @@
             <a:cxnLst/>
             <a:rect l="0" t="0" r="0" b="0"/>
             <a:pathLst>
-              <a:path w="784861" h="883921">
+              <a:path w="643989" h="769915">
                 <a:moveTo>
-                  <a:pt x="434340" y="0"/>
+                  <a:pt x="356382" y="0"/>
                 </a:moveTo>
                 <a:lnTo>
-                  <a:pt x="784860" y="365760"/>
+                  <a:pt x="643988" y="318585"/>
                 </a:lnTo>
                 <a:lnTo>
-                  <a:pt x="716280" y="883920"/>
+                  <a:pt x="587717" y="769914"/>
                 </a:lnTo>
                 <a:lnTo>
-                  <a:pt x="220980" y="800100"/>
+                  <a:pt x="181317" y="696905"/>
                 </a:lnTo>
                 <a:lnTo>
-                  <a:pt x="0" y="365760"/>
+                  <a:pt x="0" y="318585"/>
                 </a:lnTo>
                 <a:close/>
               </a:path>
@@ -15551,10 +15252,10 @@
       </p:sp>
       <p:sp>
         <p:nvSpPr>
-          <p:cNvPr id="211" name="radar-pt0">
-            <a:extLst>
-              <a:ext uri="{FF2B5EF4-FFF2-40B4-BE49-F238E27FC236}">
-                <a16:creationId xmlns:a16="http://schemas.microsoft.com/office/drawing/2014/main" id="{55C9EC22-1614-4C73-CC29-9CA7C95A5697}"/>
+          <p:cNvPr id="206" name="radar-pt0">
+            <a:extLst>
+              <a:ext uri="{FF2B5EF4-FFF2-40B4-BE49-F238E27FC236}">
+                <a16:creationId xmlns:a16="http://schemas.microsoft.com/office/drawing/2014/main" id="{47DF4158-78CE-8A45-30D7-3C861BA64F1F}"/>
               </a:ext>
             </a:extLst>
           </p:cNvPr>
@@ -15563,7 +15264,7 @@
         </p:nvSpPr>
         <p:spPr>
           <a:xfrm>
-            <a:off x="1303020" y="5186680"/>
+            <a:off x="1703754" y="5210944"/>
             <a:ext cx="45720" cy="45720"/>
           </a:xfrm>
           <a:prstGeom prst="ellipse">
@@ -15619,10 +15320,10 @@
       </p:sp>
       <p:sp>
         <p:nvSpPr>
-          <p:cNvPr id="212" name="radar-pt1">
-            <a:extLst>
-              <a:ext uri="{FF2B5EF4-FFF2-40B4-BE49-F238E27FC236}">
-                <a16:creationId xmlns:a16="http://schemas.microsoft.com/office/drawing/2014/main" id="{FB948FDA-721C-D469-00B6-5398A11FB09C}"/>
+          <p:cNvPr id="207" name="radar-pt1">
+            <a:extLst>
+              <a:ext uri="{FF2B5EF4-FFF2-40B4-BE49-F238E27FC236}">
+                <a16:creationId xmlns:a16="http://schemas.microsoft.com/office/drawing/2014/main" id="{667A990E-43BD-15D5-FD53-8E414706B7C7}"/>
               </a:ext>
             </a:extLst>
           </p:cNvPr>
@@ -15631,7 +15332,7 @@
         </p:nvSpPr>
         <p:spPr>
           <a:xfrm>
-            <a:off x="1653540" y="5552440"/>
+            <a:off x="1991360" y="5529529"/>
             <a:ext cx="45720" cy="45720"/>
           </a:xfrm>
           <a:prstGeom prst="ellipse">
@@ -15687,10 +15388,10 @@
       </p:sp>
       <p:sp>
         <p:nvSpPr>
-          <p:cNvPr id="213" name="radar-pt2">
-            <a:extLst>
-              <a:ext uri="{FF2B5EF4-FFF2-40B4-BE49-F238E27FC236}">
-                <a16:creationId xmlns:a16="http://schemas.microsoft.com/office/drawing/2014/main" id="{ACEE322E-1392-6B53-F5C9-E01958BDE4BB}"/>
+          <p:cNvPr id="208" name="radar-pt2">
+            <a:extLst>
+              <a:ext uri="{FF2B5EF4-FFF2-40B4-BE49-F238E27FC236}">
+                <a16:creationId xmlns:a16="http://schemas.microsoft.com/office/drawing/2014/main" id="{C90AF284-F842-FC3D-CCA9-E5BC5939B71C}"/>
               </a:ext>
             </a:extLst>
           </p:cNvPr>
@@ -15699,7 +15400,7 @@
         </p:nvSpPr>
         <p:spPr>
           <a:xfrm>
-            <a:off x="1584960" y="6070600"/>
+            <a:off x="1935089" y="5980857"/>
             <a:ext cx="45720" cy="45720"/>
           </a:xfrm>
           <a:prstGeom prst="ellipse">
@@ -15755,10 +15456,10 @@
       </p:sp>
       <p:sp>
         <p:nvSpPr>
-          <p:cNvPr id="214" name="radar-pt3">
-            <a:extLst>
-              <a:ext uri="{FF2B5EF4-FFF2-40B4-BE49-F238E27FC236}">
-                <a16:creationId xmlns:a16="http://schemas.microsoft.com/office/drawing/2014/main" id="{875AB5A0-0B0C-9A38-8A95-0DFB56398654}"/>
+          <p:cNvPr id="209" name="radar-pt3">
+            <a:extLst>
+              <a:ext uri="{FF2B5EF4-FFF2-40B4-BE49-F238E27FC236}">
+                <a16:creationId xmlns:a16="http://schemas.microsoft.com/office/drawing/2014/main" id="{4C0263BC-2267-A945-0D21-C27F05048796}"/>
               </a:ext>
             </a:extLst>
           </p:cNvPr>
@@ -15767,7 +15468,7 @@
         </p:nvSpPr>
         <p:spPr>
           <a:xfrm>
-            <a:off x="1089660" y="5986780"/>
+            <a:off x="1528689" y="5907849"/>
             <a:ext cx="45720" cy="45720"/>
           </a:xfrm>
           <a:prstGeom prst="ellipse">
@@ -15823,10 +15524,10 @@
       </p:sp>
       <p:sp>
         <p:nvSpPr>
-          <p:cNvPr id="215" name="radar-pt4">
-            <a:extLst>
-              <a:ext uri="{FF2B5EF4-FFF2-40B4-BE49-F238E27FC236}">
-                <a16:creationId xmlns:a16="http://schemas.microsoft.com/office/drawing/2014/main" id="{7CEC2776-3E26-E8EA-E90E-04251DA951E9}"/>
+          <p:cNvPr id="210" name="radar-pt4">
+            <a:extLst>
+              <a:ext uri="{FF2B5EF4-FFF2-40B4-BE49-F238E27FC236}">
+                <a16:creationId xmlns:a16="http://schemas.microsoft.com/office/drawing/2014/main" id="{2117E563-CCD2-D9BC-F6D9-B6D146DC326C}"/>
               </a:ext>
             </a:extLst>
           </p:cNvPr>
@@ -15835,7 +15536,7 @@
         </p:nvSpPr>
         <p:spPr>
           <a:xfrm>
-            <a:off x="868680" y="5552440"/>
+            <a:off x="1347372" y="5529529"/>
             <a:ext cx="45720" cy="45720"/>
           </a:xfrm>
           <a:prstGeom prst="ellipse">
@@ -15891,10 +15592,10 @@
       </p:sp>
       <p:sp>
         <p:nvSpPr>
-          <p:cNvPr id="216" name="radar-l1">
-            <a:extLst>
-              <a:ext uri="{FF2B5EF4-FFF2-40B4-BE49-F238E27FC236}">
-                <a16:creationId xmlns:a16="http://schemas.microsoft.com/office/drawing/2014/main" id="{64C83EC9-B42F-13C9-1580-A9F8E26BE604}"/>
+          <p:cNvPr id="211" name="radar-l1">
+            <a:extLst>
+              <a:ext uri="{FF2B5EF4-FFF2-40B4-BE49-F238E27FC236}">
+                <a16:creationId xmlns:a16="http://schemas.microsoft.com/office/drawing/2014/main" id="{66E59B82-D677-DFD0-433A-0EB9154F71ED}"/>
               </a:ext>
             </a:extLst>
           </p:cNvPr>
@@ -15903,8 +15604,8 @@
         </p:nvSpPr>
         <p:spPr>
           <a:xfrm>
-            <a:off x="1094740" y="4978400"/>
-            <a:ext cx="635000" cy="117981"/>
+            <a:off x="1399540" y="4927600"/>
+            <a:ext cx="711200" cy="117981"/>
           </a:xfrm>
           <a:prstGeom prst="rect">
             <a:avLst/>
@@ -15947,10 +15648,10 @@
       </p:sp>
       <p:sp>
         <p:nvSpPr>
-          <p:cNvPr id="217" name="radar-l2">
-            <a:extLst>
-              <a:ext uri="{FF2B5EF4-FFF2-40B4-BE49-F238E27FC236}">
-                <a16:creationId xmlns:a16="http://schemas.microsoft.com/office/drawing/2014/main" id="{BB091000-BE43-E229-6120-F26588689165}"/>
+          <p:cNvPr id="212" name="radar-l2">
+            <a:extLst>
+              <a:ext uri="{FF2B5EF4-FFF2-40B4-BE49-F238E27FC236}">
+                <a16:creationId xmlns:a16="http://schemas.microsoft.com/office/drawing/2014/main" id="{E3BB591C-405E-E416-8738-1E560131AE40}"/>
               </a:ext>
             </a:extLst>
           </p:cNvPr>
@@ -15959,8 +15660,8 @@
         </p:nvSpPr>
         <p:spPr>
           <a:xfrm>
-            <a:off x="1793240" y="5448300"/>
-            <a:ext cx="508000" cy="117981"/>
+            <a:off x="2288540" y="5359400"/>
+            <a:ext cx="660400" cy="117981"/>
           </a:xfrm>
           <a:prstGeom prst="rect">
             <a:avLst/>
@@ -16002,10 +15703,10 @@
       </p:sp>
       <p:sp>
         <p:nvSpPr>
-          <p:cNvPr id="218" name="radar-l3">
-            <a:extLst>
-              <a:ext uri="{FF2B5EF4-FFF2-40B4-BE49-F238E27FC236}">
-                <a16:creationId xmlns:a16="http://schemas.microsoft.com/office/drawing/2014/main" id="{96BBC71D-C822-0244-990C-A4C1620FE31A}"/>
+          <p:cNvPr id="213" name="radar-l3">
+            <a:extLst>
+              <a:ext uri="{FF2B5EF4-FFF2-40B4-BE49-F238E27FC236}">
+                <a16:creationId xmlns:a16="http://schemas.microsoft.com/office/drawing/2014/main" id="{47871A65-0E3E-65D9-E0FC-77E51C324AE6}"/>
               </a:ext>
             </a:extLst>
           </p:cNvPr>
@@ -16014,8 +15715,8 @@
         </p:nvSpPr>
         <p:spPr>
           <a:xfrm>
-            <a:off x="1475740" y="6273800"/>
-            <a:ext cx="635000" cy="117981"/>
+            <a:off x="1704340" y="6350000"/>
+            <a:ext cx="711200" cy="117981"/>
           </a:xfrm>
           <a:prstGeom prst="rect">
             <a:avLst/>
@@ -16057,10 +15758,10 @@
       </p:sp>
       <p:sp>
         <p:nvSpPr>
-          <p:cNvPr id="219" name="radar-l4">
-            <a:extLst>
-              <a:ext uri="{FF2B5EF4-FFF2-40B4-BE49-F238E27FC236}">
-                <a16:creationId xmlns:a16="http://schemas.microsoft.com/office/drawing/2014/main" id="{9299B5F7-A4C9-117B-F52B-DFA31CD7DAC3}"/>
+          <p:cNvPr id="214" name="radar-l4">
+            <a:extLst>
+              <a:ext uri="{FF2B5EF4-FFF2-40B4-BE49-F238E27FC236}">
+                <a16:creationId xmlns:a16="http://schemas.microsoft.com/office/drawing/2014/main" id="{3D6C3587-4909-2B39-E617-36D80F0FE136}"/>
               </a:ext>
             </a:extLst>
           </p:cNvPr>
@@ -16069,8 +15770,8 @@
         </p:nvSpPr>
         <p:spPr>
           <a:xfrm>
-            <a:off x="586740" y="6273800"/>
-            <a:ext cx="508000" cy="117981"/>
+            <a:off x="586740" y="6350000"/>
+            <a:ext cx="660400" cy="117981"/>
           </a:xfrm>
           <a:prstGeom prst="rect">
             <a:avLst/>
@@ -16083,7 +15784,6 @@
           </a:bodyPr>
           <a:lstStyle/>
           <a:p>
-            <a:pPr algn="r"/>
             <a:r>
               <a:rPr lang="zh-CN" altLang="en-US" sz="600">
                 <a:solidFill>
@@ -16113,10 +15813,10 @@
       </p:sp>
       <p:sp>
         <p:nvSpPr>
-          <p:cNvPr id="220" name="radar-l5">
-            <a:extLst>
-              <a:ext uri="{FF2B5EF4-FFF2-40B4-BE49-F238E27FC236}">
-                <a16:creationId xmlns:a16="http://schemas.microsoft.com/office/drawing/2014/main" id="{55EA35C6-D368-FE83-2C9F-C9CEF7F0A637}"/>
+          <p:cNvPr id="215" name="radar-l5">
+            <a:extLst>
+              <a:ext uri="{FF2B5EF4-FFF2-40B4-BE49-F238E27FC236}">
+                <a16:creationId xmlns:a16="http://schemas.microsoft.com/office/drawing/2014/main" id="{1D527D8C-8101-2D0E-A8E7-83BBD60070A7}"/>
               </a:ext>
             </a:extLst>
           </p:cNvPr>
@@ -16125,8 +15825,8 @@
         </p:nvSpPr>
         <p:spPr>
           <a:xfrm>
-            <a:off x="561340" y="5448300"/>
-            <a:ext cx="381000" cy="210314"/>
+            <a:off x="586740" y="5359400"/>
+            <a:ext cx="533400" cy="117981"/>
           </a:xfrm>
           <a:prstGeom prst="rect">
             <a:avLst/>
@@ -16139,7 +15839,6 @@
           </a:bodyPr>
           <a:lstStyle/>
           <a:p>
-            <a:pPr algn="r"/>
             <a:r>
               <a:rPr lang="zh-CN" altLang="en-US" sz="600">
                 <a:solidFill>
@@ -16169,10 +15868,10 @@
       </p:sp>
       <p:sp>
         <p:nvSpPr>
-          <p:cNvPr id="221" name="radar-tgt">
-            <a:extLst>
-              <a:ext uri="{FF2B5EF4-FFF2-40B4-BE49-F238E27FC236}">
-                <a16:creationId xmlns:a16="http://schemas.microsoft.com/office/drawing/2014/main" id="{05FE1072-EBAC-49EA-412D-4EE6A840AD97}"/>
+          <p:cNvPr id="216" name="radar-tgt">
+            <a:extLst>
+              <a:ext uri="{FF2B5EF4-FFF2-40B4-BE49-F238E27FC236}">
+                <a16:creationId xmlns:a16="http://schemas.microsoft.com/office/drawing/2014/main" id="{EF39AD3B-F23D-FF27-0C1A-8F11AFB2F903}"/>
               </a:ext>
             </a:extLst>
           </p:cNvPr>
@@ -16181,8 +15880,8 @@
         </p:nvSpPr>
         <p:spPr>
           <a:xfrm>
-            <a:off x="1323340" y="5283200"/>
-            <a:ext cx="457200" cy="117981"/>
+            <a:off x="1475740" y="5257800"/>
+            <a:ext cx="508000" cy="117981"/>
           </a:xfrm>
           <a:prstGeom prst="rect">
             <a:avLst/>
@@ -16224,10 +15923,10 @@
       </p:sp>
       <p:sp>
         <p:nvSpPr>
-          <p:cNvPr id="222" name="diag0-b">
-            <a:extLst>
-              <a:ext uri="{FF2B5EF4-FFF2-40B4-BE49-F238E27FC236}">
-                <a16:creationId xmlns:a16="http://schemas.microsoft.com/office/drawing/2014/main" id="{A51789F0-D6C1-7086-AEFD-8A1762E13180}"/>
+          <p:cNvPr id="217" name="diag0-b">
+            <a:extLst>
+              <a:ext uri="{FF2B5EF4-FFF2-40B4-BE49-F238E27FC236}">
+                <a16:creationId xmlns:a16="http://schemas.microsoft.com/office/drawing/2014/main" id="{BE3F30DA-E0AC-FA76-9122-9F6A2B4C4876}"/>
               </a:ext>
             </a:extLst>
           </p:cNvPr>
@@ -16236,8 +15935,8 @@
         </p:nvSpPr>
         <p:spPr>
           <a:xfrm>
-            <a:off x="2098040" y="5037142"/>
-            <a:ext cx="355600" cy="117981"/>
+            <a:off x="2440940" y="5134108"/>
+            <a:ext cx="304800" cy="117981"/>
           </a:xfrm>
           <a:prstGeom prst="rect">
             <a:avLst/>
@@ -16264,10 +15963,10 @@
       </p:sp>
       <p:sp>
         <p:nvSpPr>
-          <p:cNvPr id="223" name="diag0-s">
-            <a:extLst>
-              <a:ext uri="{FF2B5EF4-FFF2-40B4-BE49-F238E27FC236}">
-                <a16:creationId xmlns:a16="http://schemas.microsoft.com/office/drawing/2014/main" id="{C2FA86A6-E2B5-DE49-9946-4D41D857AF74}"/>
+          <p:cNvPr id="218" name="diag0-s">
+            <a:extLst>
+              <a:ext uri="{FF2B5EF4-FFF2-40B4-BE49-F238E27FC236}">
+                <a16:creationId xmlns:a16="http://schemas.microsoft.com/office/drawing/2014/main" id="{FC3C6499-98E2-F8D1-A7AF-CE99320808C6}"/>
               </a:ext>
             </a:extLst>
           </p:cNvPr>
@@ -16276,8 +15975,8 @@
         </p:nvSpPr>
         <p:spPr>
           <a:xfrm>
-            <a:off x="2453640" y="5037142"/>
-            <a:ext cx="889000" cy="117981"/>
+            <a:off x="2745740" y="5087942"/>
+            <a:ext cx="596900" cy="210314"/>
           </a:xfrm>
           <a:prstGeom prst="rect">
             <a:avLst/>
@@ -16313,10 +16012,10 @@
       </p:sp>
       <p:cxnSp>
         <p:nvCxnSpPr>
-          <p:cNvPr id="224" name="diag-line0">
-            <a:extLst>
-              <a:ext uri="{FF2B5EF4-FFF2-40B4-BE49-F238E27FC236}">
-                <a16:creationId xmlns:a16="http://schemas.microsoft.com/office/drawing/2014/main" id="{FD1425FC-4D3E-59DE-B33D-9EA23D153AD8}"/>
+          <p:cNvPr id="219" name="diag-line0">
+            <a:extLst>
+              <a:ext uri="{FF2B5EF4-FFF2-40B4-BE49-F238E27FC236}">
+                <a16:creationId xmlns:a16="http://schemas.microsoft.com/office/drawing/2014/main" id="{A246C389-FDBD-359A-4517-25423E9812CA}"/>
               </a:ext>
             </a:extLst>
           </p:cNvPr>
@@ -16325,8 +16024,8 @@
         </p:nvCxnSpPr>
         <p:spPr>
           <a:xfrm>
-            <a:off x="2098040" y="5382895"/>
-            <a:ext cx="1219200" cy="0"/>
+            <a:off x="2440940" y="5384800"/>
+            <a:ext cx="876300" cy="0"/>
           </a:xfrm>
           <a:prstGeom prst="line">
             <a:avLst/>
@@ -16354,10 +16053,10 @@
       </p:cxnSp>
       <p:sp>
         <p:nvSpPr>
-          <p:cNvPr id="225" name="diag1-b">
-            <a:extLst>
-              <a:ext uri="{FF2B5EF4-FFF2-40B4-BE49-F238E27FC236}">
-                <a16:creationId xmlns:a16="http://schemas.microsoft.com/office/drawing/2014/main" id="{7CD96294-EC81-F767-8B8A-8D9D61FBD5AB}"/>
+          <p:cNvPr id="220" name="diag1-b">
+            <a:extLst>
+              <a:ext uri="{FF2B5EF4-FFF2-40B4-BE49-F238E27FC236}">
+                <a16:creationId xmlns:a16="http://schemas.microsoft.com/office/drawing/2014/main" id="{250213FB-807D-5322-9A7D-82566F419B1C}"/>
               </a:ext>
             </a:extLst>
           </p:cNvPr>
@@ -16366,8 +16065,8 @@
         </p:nvSpPr>
         <p:spPr>
           <a:xfrm>
-            <a:off x="2098040" y="5416237"/>
-            <a:ext cx="355600" cy="117981"/>
+            <a:off x="2440940" y="5464308"/>
+            <a:ext cx="304800" cy="117981"/>
           </a:xfrm>
           <a:prstGeom prst="rect">
             <a:avLst/>
@@ -16394,10 +16093,10 @@
       </p:sp>
       <p:sp>
         <p:nvSpPr>
-          <p:cNvPr id="226" name="diag1-s">
-            <a:extLst>
-              <a:ext uri="{FF2B5EF4-FFF2-40B4-BE49-F238E27FC236}">
-                <a16:creationId xmlns:a16="http://schemas.microsoft.com/office/drawing/2014/main" id="{99E6FABD-B9AD-187D-1E7F-712291C56C34}"/>
+          <p:cNvPr id="221" name="diag1-s">
+            <a:extLst>
+              <a:ext uri="{FF2B5EF4-FFF2-40B4-BE49-F238E27FC236}">
+                <a16:creationId xmlns:a16="http://schemas.microsoft.com/office/drawing/2014/main" id="{BB41421D-D19D-3478-2123-9DB2C993001B}"/>
               </a:ext>
             </a:extLst>
           </p:cNvPr>
@@ -16406,8 +16105,8 @@
         </p:nvSpPr>
         <p:spPr>
           <a:xfrm>
-            <a:off x="2453640" y="5416237"/>
-            <a:ext cx="889000" cy="117981"/>
+            <a:off x="2745740" y="5418142"/>
+            <a:ext cx="596900" cy="210314"/>
           </a:xfrm>
           <a:prstGeom prst="rect">
             <a:avLst/>
@@ -16434,10 +16133,10 @@
       </p:sp>
       <p:cxnSp>
         <p:nvCxnSpPr>
-          <p:cNvPr id="227" name="diag-line1">
-            <a:extLst>
-              <a:ext uri="{FF2B5EF4-FFF2-40B4-BE49-F238E27FC236}">
-                <a16:creationId xmlns:a16="http://schemas.microsoft.com/office/drawing/2014/main" id="{04CB7BE3-F1F9-352B-78BF-73563EFC4B2F}"/>
+          <p:cNvPr id="222" name="diag-line1">
+            <a:extLst>
+              <a:ext uri="{FF2B5EF4-FFF2-40B4-BE49-F238E27FC236}">
+                <a16:creationId xmlns:a16="http://schemas.microsoft.com/office/drawing/2014/main" id="{C3001182-4EB9-E0A8-CDFC-F6A2CC8B4EA5}"/>
               </a:ext>
             </a:extLst>
           </p:cNvPr>
@@ -16446,8 +16145,8 @@
         </p:nvCxnSpPr>
         <p:spPr>
           <a:xfrm>
-            <a:off x="2098040" y="5761990"/>
-            <a:ext cx="1219200" cy="0"/>
+            <a:off x="2440940" y="5715000"/>
+            <a:ext cx="876300" cy="0"/>
           </a:xfrm>
           <a:prstGeom prst="line">
             <a:avLst/>
@@ -16475,10 +16174,10 @@
       </p:cxnSp>
       <p:sp>
         <p:nvSpPr>
-          <p:cNvPr id="228" name="diag2-b">
-            <a:extLst>
-              <a:ext uri="{FF2B5EF4-FFF2-40B4-BE49-F238E27FC236}">
-                <a16:creationId xmlns:a16="http://schemas.microsoft.com/office/drawing/2014/main" id="{39E60956-4ED8-018F-BBA8-401D9F8BEC81}"/>
+          <p:cNvPr id="223" name="diag2-b">
+            <a:extLst>
+              <a:ext uri="{FF2B5EF4-FFF2-40B4-BE49-F238E27FC236}">
+                <a16:creationId xmlns:a16="http://schemas.microsoft.com/office/drawing/2014/main" id="{F9DDB4DB-37ED-0C3E-C8CA-FE42DE553429}"/>
               </a:ext>
             </a:extLst>
           </p:cNvPr>
@@ -16487,8 +16186,8 @@
         </p:nvSpPr>
         <p:spPr>
           <a:xfrm>
-            <a:off x="2098040" y="5795332"/>
-            <a:ext cx="355600" cy="117981"/>
+            <a:off x="2440940" y="5794508"/>
+            <a:ext cx="304800" cy="117981"/>
           </a:xfrm>
           <a:prstGeom prst="rect">
             <a:avLst/>
@@ -16515,10 +16214,10 @@
       </p:sp>
       <p:sp>
         <p:nvSpPr>
-          <p:cNvPr id="229" name="diag2-s">
-            <a:extLst>
-              <a:ext uri="{FF2B5EF4-FFF2-40B4-BE49-F238E27FC236}">
-                <a16:creationId xmlns:a16="http://schemas.microsoft.com/office/drawing/2014/main" id="{F6433517-93C4-6448-2658-642F0CC66C00}"/>
+          <p:cNvPr id="224" name="diag2-s">
+            <a:extLst>
+              <a:ext uri="{FF2B5EF4-FFF2-40B4-BE49-F238E27FC236}">
+                <a16:creationId xmlns:a16="http://schemas.microsoft.com/office/drawing/2014/main" id="{A7A4DF19-5E80-7D85-E58E-CAFFF8F2F208}"/>
               </a:ext>
             </a:extLst>
           </p:cNvPr>
@@ -16527,8 +16226,8 @@
         </p:nvSpPr>
         <p:spPr>
           <a:xfrm>
-            <a:off x="2453640" y="5841498"/>
-            <a:ext cx="889000" cy="117981"/>
+            <a:off x="2745740" y="5748342"/>
+            <a:ext cx="596900" cy="210314"/>
           </a:xfrm>
           <a:prstGeom prst="rect">
             <a:avLst/>
@@ -16588,10 +16287,10 @@
       </p:sp>
       <p:cxnSp>
         <p:nvCxnSpPr>
-          <p:cNvPr id="230" name="diag-line2">
-            <a:extLst>
-              <a:ext uri="{FF2B5EF4-FFF2-40B4-BE49-F238E27FC236}">
-                <a16:creationId xmlns:a16="http://schemas.microsoft.com/office/drawing/2014/main" id="{B1A8A51F-063A-35C7-70DD-561854DD75AC}"/>
+          <p:cNvPr id="225" name="diag-line2">
+            <a:extLst>
+              <a:ext uri="{FF2B5EF4-FFF2-40B4-BE49-F238E27FC236}">
+                <a16:creationId xmlns:a16="http://schemas.microsoft.com/office/drawing/2014/main" id="{182758CC-3939-E9FF-30F3-070D9FFC2870}"/>
               </a:ext>
             </a:extLst>
           </p:cNvPr>
@@ -16600,8 +16299,8 @@
         </p:nvCxnSpPr>
         <p:spPr>
           <a:xfrm>
-            <a:off x="2098040" y="6141085"/>
-            <a:ext cx="1219200" cy="0"/>
+            <a:off x="2440940" y="6045200"/>
+            <a:ext cx="876300" cy="0"/>
           </a:xfrm>
           <a:prstGeom prst="line">
             <a:avLst/>
@@ -16629,10 +16328,10 @@
       </p:cxnSp>
       <p:sp>
         <p:nvSpPr>
-          <p:cNvPr id="231" name="diag3-b">
-            <a:extLst>
-              <a:ext uri="{FF2B5EF4-FFF2-40B4-BE49-F238E27FC236}">
-                <a16:creationId xmlns:a16="http://schemas.microsoft.com/office/drawing/2014/main" id="{ABDD1BFF-DD00-F983-5E78-622F1A321E58}"/>
+          <p:cNvPr id="226" name="diag3-b">
+            <a:extLst>
+              <a:ext uri="{FF2B5EF4-FFF2-40B4-BE49-F238E27FC236}">
+                <a16:creationId xmlns:a16="http://schemas.microsoft.com/office/drawing/2014/main" id="{9D089106-25FC-3FB0-20FF-42D516A0B527}"/>
               </a:ext>
             </a:extLst>
           </p:cNvPr>
@@ -16641,8 +16340,8 @@
         </p:nvSpPr>
         <p:spPr>
           <a:xfrm>
-            <a:off x="2098040" y="6220593"/>
-            <a:ext cx="355600" cy="117981"/>
+            <a:off x="2440940" y="6170874"/>
+            <a:ext cx="304800" cy="117981"/>
           </a:xfrm>
           <a:prstGeom prst="rect">
             <a:avLst/>
@@ -16669,10 +16368,10 @@
       </p:sp>
       <p:sp>
         <p:nvSpPr>
-          <p:cNvPr id="232" name="diag3-s">
-            <a:extLst>
-              <a:ext uri="{FF2B5EF4-FFF2-40B4-BE49-F238E27FC236}">
-                <a16:creationId xmlns:a16="http://schemas.microsoft.com/office/drawing/2014/main" id="{07B3C13A-784C-97C4-AD7D-4B09F7469AAE}"/>
+          <p:cNvPr id="227" name="diag3-s">
+            <a:extLst>
+              <a:ext uri="{FF2B5EF4-FFF2-40B4-BE49-F238E27FC236}">
+                <a16:creationId xmlns:a16="http://schemas.microsoft.com/office/drawing/2014/main" id="{81D83333-CAC2-B64E-8EED-5A759353828C}"/>
               </a:ext>
             </a:extLst>
           </p:cNvPr>
@@ -16681,8 +16380,8 @@
         </p:nvSpPr>
         <p:spPr>
           <a:xfrm>
-            <a:off x="2453640" y="6220593"/>
-            <a:ext cx="889000" cy="117981"/>
+            <a:off x="2745740" y="6078542"/>
+            <a:ext cx="596900" cy="210314"/>
           </a:xfrm>
           <a:prstGeom prst="rect">
             <a:avLst/>
@@ -16718,10 +16417,10 @@
       </p:sp>
       <p:sp>
         <p:nvSpPr>
-          <p:cNvPr id="233" name="dept-leg1">
-            <a:extLst>
-              <a:ext uri="{FF2B5EF4-FFF2-40B4-BE49-F238E27FC236}">
-                <a16:creationId xmlns:a16="http://schemas.microsoft.com/office/drawing/2014/main" id="{228F7C76-76DD-7BB7-A08E-E9FF2C03EF63}"/>
+          <p:cNvPr id="228" name="dept-leg1">
+            <a:extLst>
+              <a:ext uri="{FF2B5EF4-FFF2-40B4-BE49-F238E27FC236}">
+                <a16:creationId xmlns:a16="http://schemas.microsoft.com/office/drawing/2014/main" id="{ED9595EE-CC82-5309-EA39-C2DBD3A66BD5}"/>
               </a:ext>
             </a:extLst>
           </p:cNvPr>
@@ -16773,10 +16472,10 @@
       </p:sp>
       <p:sp>
         <p:nvSpPr>
-          <p:cNvPr id="234" name="dept-leg1k">
-            <a:extLst>
-              <a:ext uri="{FF2B5EF4-FFF2-40B4-BE49-F238E27FC236}">
-                <a16:creationId xmlns:a16="http://schemas.microsoft.com/office/drawing/2014/main" id="{7C46D5E2-D08D-0E8B-59FD-8F027CF362B2}"/>
+          <p:cNvPr id="229" name="dept-leg1k">
+            <a:extLst>
+              <a:ext uri="{FF2B5EF4-FFF2-40B4-BE49-F238E27FC236}">
+                <a16:creationId xmlns:a16="http://schemas.microsoft.com/office/drawing/2014/main" id="{AA30F445-440D-ED0D-7EA3-1C044CF74F64}"/>
               </a:ext>
             </a:extLst>
           </p:cNvPr>
@@ -16841,10 +16540,10 @@
       </p:sp>
       <p:sp>
         <p:nvSpPr>
-          <p:cNvPr id="235" name="dept-leg2">
-            <a:extLst>
-              <a:ext uri="{FF2B5EF4-FFF2-40B4-BE49-F238E27FC236}">
-                <a16:creationId xmlns:a16="http://schemas.microsoft.com/office/drawing/2014/main" id="{BDDF9AED-C0F9-25F8-EA94-1CA9CF88B43D}"/>
+          <p:cNvPr id="230" name="dept-leg2">
+            <a:extLst>
+              <a:ext uri="{FF2B5EF4-FFF2-40B4-BE49-F238E27FC236}">
+                <a16:creationId xmlns:a16="http://schemas.microsoft.com/office/drawing/2014/main" id="{EB9BB1E7-FE5F-11BC-DF0B-0D3EAE68D58A}"/>
               </a:ext>
             </a:extLst>
           </p:cNvPr>
@@ -16896,10 +16595,10 @@
       </p:sp>
       <p:sp>
         <p:nvSpPr>
-          <p:cNvPr id="236" name="dept-leg2k">
-            <a:extLst>
-              <a:ext uri="{FF2B5EF4-FFF2-40B4-BE49-F238E27FC236}">
-                <a16:creationId xmlns:a16="http://schemas.microsoft.com/office/drawing/2014/main" id="{7A7EACD8-4ABE-1F91-D46E-B94DBFDAC2D2}"/>
+          <p:cNvPr id="231" name="dept-leg2k">
+            <a:extLst>
+              <a:ext uri="{FF2B5EF4-FFF2-40B4-BE49-F238E27FC236}">
+                <a16:creationId xmlns:a16="http://schemas.microsoft.com/office/drawing/2014/main" id="{72F6AB04-A314-5533-0A8B-FC8E157E6225}"/>
               </a:ext>
             </a:extLst>
           </p:cNvPr>
@@ -16964,10 +16663,10 @@
       </p:sp>
       <p:sp>
         <p:nvSpPr>
-          <p:cNvPr id="237" name="dept-plot">
-            <a:extLst>
-              <a:ext uri="{FF2B5EF4-FFF2-40B4-BE49-F238E27FC236}">
-                <a16:creationId xmlns:a16="http://schemas.microsoft.com/office/drawing/2014/main" id="{29608E45-379F-9F66-2501-DDA37DB1E42D}"/>
+          <p:cNvPr id="232" name="dept-plot">
+            <a:extLst>
+              <a:ext uri="{FF2B5EF4-FFF2-40B4-BE49-F238E27FC236}">
+                <a16:creationId xmlns:a16="http://schemas.microsoft.com/office/drawing/2014/main" id="{7A237282-7C76-327D-0CE9-9A3F0ED78150}"/>
               </a:ext>
             </a:extLst>
           </p:cNvPr>
@@ -17028,10 +16727,10 @@
       </p:sp>
       <p:cxnSp>
         <p:nvCxnSpPr>
-          <p:cNvPr id="238" name="dept-g1">
-            <a:extLst>
-              <a:ext uri="{FF2B5EF4-FFF2-40B4-BE49-F238E27FC236}">
-                <a16:creationId xmlns:a16="http://schemas.microsoft.com/office/drawing/2014/main" id="{0F781061-5735-6EA4-744B-BC33C1C14762}"/>
+          <p:cNvPr id="233" name="dept-g1">
+            <a:extLst>
+              <a:ext uri="{FF2B5EF4-FFF2-40B4-BE49-F238E27FC236}">
+                <a16:creationId xmlns:a16="http://schemas.microsoft.com/office/drawing/2014/main" id="{35FD8F4F-9523-D21C-C7E8-C0B2555C1F9A}"/>
               </a:ext>
             </a:extLst>
           </p:cNvPr>
@@ -17069,10 +16768,10 @@
       </p:cxnSp>
       <p:cxnSp>
         <p:nvCxnSpPr>
-          <p:cNvPr id="239" name="dept-g2">
-            <a:extLst>
-              <a:ext uri="{FF2B5EF4-FFF2-40B4-BE49-F238E27FC236}">
-                <a16:creationId xmlns:a16="http://schemas.microsoft.com/office/drawing/2014/main" id="{62142676-00BC-6AD7-81F3-9A85BF4F180B}"/>
+          <p:cNvPr id="234" name="dept-g2">
+            <a:extLst>
+              <a:ext uri="{FF2B5EF4-FFF2-40B4-BE49-F238E27FC236}">
+                <a16:creationId xmlns:a16="http://schemas.microsoft.com/office/drawing/2014/main" id="{B29161BB-AEAE-E198-5E3F-CA4D9BF3F85F}"/>
               </a:ext>
             </a:extLst>
           </p:cNvPr>
@@ -17110,10 +16809,10 @@
       </p:cxnSp>
       <p:cxnSp>
         <p:nvCxnSpPr>
-          <p:cNvPr id="240" name="dept-g3">
-            <a:extLst>
-              <a:ext uri="{FF2B5EF4-FFF2-40B4-BE49-F238E27FC236}">
-                <a16:creationId xmlns:a16="http://schemas.microsoft.com/office/drawing/2014/main" id="{161B9FA2-2EC5-E8DB-FCFD-9BF0F7E2F1A2}"/>
+          <p:cNvPr id="235" name="dept-g3">
+            <a:extLst>
+              <a:ext uri="{FF2B5EF4-FFF2-40B4-BE49-F238E27FC236}">
+                <a16:creationId xmlns:a16="http://schemas.microsoft.com/office/drawing/2014/main" id="{7C5AB329-FE30-CD8F-8561-8CE81B17AB33}"/>
               </a:ext>
             </a:extLst>
           </p:cNvPr>
@@ -17151,10 +16850,10 @@
       </p:cxnSp>
       <p:sp>
         <p:nvSpPr>
-          <p:cNvPr id="241" name="dept-a4">
-            <a:extLst>
-              <a:ext uri="{FF2B5EF4-FFF2-40B4-BE49-F238E27FC236}">
-                <a16:creationId xmlns:a16="http://schemas.microsoft.com/office/drawing/2014/main" id="{6A726C21-8F40-D1FB-42B2-269AE0C6FDB4}"/>
+          <p:cNvPr id="236" name="dept-a4">
+            <a:extLst>
+              <a:ext uri="{FF2B5EF4-FFF2-40B4-BE49-F238E27FC236}">
+                <a16:creationId xmlns:a16="http://schemas.microsoft.com/office/drawing/2014/main" id="{54FF17CC-9EFC-0FF5-5EEC-746B4263D970}"/>
               </a:ext>
             </a:extLst>
           </p:cNvPr>
@@ -17198,10 +16897,10 @@
       </p:sp>
       <p:sp>
         <p:nvSpPr>
-          <p:cNvPr id="242" name="dept-a3">
-            <a:extLst>
-              <a:ext uri="{FF2B5EF4-FFF2-40B4-BE49-F238E27FC236}">
-                <a16:creationId xmlns:a16="http://schemas.microsoft.com/office/drawing/2014/main" id="{49A71C4C-4FAC-6827-A882-61A3E98A7954}"/>
+          <p:cNvPr id="237" name="dept-a3">
+            <a:extLst>
+              <a:ext uri="{FF2B5EF4-FFF2-40B4-BE49-F238E27FC236}">
+                <a16:creationId xmlns:a16="http://schemas.microsoft.com/office/drawing/2014/main" id="{C098BA39-400E-C1FC-279A-6E79DF7C3B48}"/>
               </a:ext>
             </a:extLst>
           </p:cNvPr>
@@ -17245,10 +16944,10 @@
       </p:sp>
       <p:sp>
         <p:nvSpPr>
-          <p:cNvPr id="243" name="dept-a2">
-            <a:extLst>
-              <a:ext uri="{FF2B5EF4-FFF2-40B4-BE49-F238E27FC236}">
-                <a16:creationId xmlns:a16="http://schemas.microsoft.com/office/drawing/2014/main" id="{84DE9E2F-2586-76C5-2C76-3B4EB9D48CA1}"/>
+          <p:cNvPr id="238" name="dept-a2">
+            <a:extLst>
+              <a:ext uri="{FF2B5EF4-FFF2-40B4-BE49-F238E27FC236}">
+                <a16:creationId xmlns:a16="http://schemas.microsoft.com/office/drawing/2014/main" id="{DA23E881-4C26-A7CA-0E9A-6C47200F38BD}"/>
               </a:ext>
             </a:extLst>
           </p:cNvPr>
@@ -17292,10 +16991,10 @@
       </p:sp>
       <p:sp>
         <p:nvSpPr>
-          <p:cNvPr id="244" name="dept-a1">
-            <a:extLst>
-              <a:ext uri="{FF2B5EF4-FFF2-40B4-BE49-F238E27FC236}">
-                <a16:creationId xmlns:a16="http://schemas.microsoft.com/office/drawing/2014/main" id="{2C62E8FA-6153-3580-A30E-9736C2E606FA}"/>
+          <p:cNvPr id="239" name="dept-a1">
+            <a:extLst>
+              <a:ext uri="{FF2B5EF4-FFF2-40B4-BE49-F238E27FC236}">
+                <a16:creationId xmlns:a16="http://schemas.microsoft.com/office/drawing/2014/main" id="{6F2D7AB1-524A-5885-C002-F333BAC636A5}"/>
               </a:ext>
             </a:extLst>
           </p:cNvPr>
@@ -17339,10 +17038,10 @@
       </p:sp>
       <p:sp>
         <p:nvSpPr>
-          <p:cNvPr id="245" name="dept-a0">
-            <a:extLst>
-              <a:ext uri="{FF2B5EF4-FFF2-40B4-BE49-F238E27FC236}">
-                <a16:creationId xmlns:a16="http://schemas.microsoft.com/office/drawing/2014/main" id="{1EE39CBC-8B88-B884-04F0-F7A67393D546}"/>
+          <p:cNvPr id="240" name="dept-a0">
+            <a:extLst>
+              <a:ext uri="{FF2B5EF4-FFF2-40B4-BE49-F238E27FC236}">
+                <a16:creationId xmlns:a16="http://schemas.microsoft.com/office/drawing/2014/main" id="{DEC568B2-2CFD-E80B-8286-CB29B5DE25ED}"/>
               </a:ext>
             </a:extLst>
           </p:cNvPr>
@@ -17386,10 +17085,10 @@
       </p:sp>
       <p:cxnSp>
         <p:nvCxnSpPr>
-          <p:cNvPr id="246" name="dept-tline">
-            <a:extLst>
-              <a:ext uri="{FF2B5EF4-FFF2-40B4-BE49-F238E27FC236}">
-                <a16:creationId xmlns:a16="http://schemas.microsoft.com/office/drawing/2014/main" id="{3878822E-E550-C22D-32EF-22FEAF08D8D5}"/>
+          <p:cNvPr id="241" name="dept-tline">
+            <a:extLst>
+              <a:ext uri="{FF2B5EF4-FFF2-40B4-BE49-F238E27FC236}">
+                <a16:creationId xmlns:a16="http://schemas.microsoft.com/office/drawing/2014/main" id="{2B34C63F-B9CC-2065-75AD-338A988F413D}"/>
               </a:ext>
             </a:extLst>
           </p:cNvPr>
@@ -17427,10 +17126,10 @@
       </p:cxnSp>
       <p:sp>
         <p:nvSpPr>
-          <p:cNvPr id="247" name="dept-tlab">
-            <a:extLst>
-              <a:ext uri="{FF2B5EF4-FFF2-40B4-BE49-F238E27FC236}">
-                <a16:creationId xmlns:a16="http://schemas.microsoft.com/office/drawing/2014/main" id="{EB88EBFD-6363-7527-1564-961FFDA6DFED}"/>
+          <p:cNvPr id="242" name="dept-tlab">
+            <a:extLst>
+              <a:ext uri="{FF2B5EF4-FFF2-40B4-BE49-F238E27FC236}">
+                <a16:creationId xmlns:a16="http://schemas.microsoft.com/office/drawing/2014/main" id="{0FB00B9F-0FFB-4115-27F2-0EC4ADAB5315}"/>
               </a:ext>
             </a:extLst>
           </p:cNvPr>
@@ -17474,10 +17173,10 @@
       </p:sp>
       <p:cxnSp>
         <p:nvCxnSpPr>
-          <p:cNvPr id="248" name="dept-aline">
-            <a:extLst>
-              <a:ext uri="{FF2B5EF4-FFF2-40B4-BE49-F238E27FC236}">
-                <a16:creationId xmlns:a16="http://schemas.microsoft.com/office/drawing/2014/main" id="{090CE7B6-BBC9-B8C0-9526-F981AEC17ADC}"/>
+          <p:cNvPr id="243" name="dept-aline">
+            <a:extLst>
+              <a:ext uri="{FF2B5EF4-FFF2-40B4-BE49-F238E27FC236}">
+                <a16:creationId xmlns:a16="http://schemas.microsoft.com/office/drawing/2014/main" id="{6297936C-5B86-11DA-6925-B6199F596053}"/>
               </a:ext>
             </a:extLst>
           </p:cNvPr>
@@ -17515,10 +17214,10 @@
       </p:cxnSp>
       <p:sp>
         <p:nvSpPr>
-          <p:cNvPr id="249" name="dept-alab">
-            <a:extLst>
-              <a:ext uri="{FF2B5EF4-FFF2-40B4-BE49-F238E27FC236}">
-                <a16:creationId xmlns:a16="http://schemas.microsoft.com/office/drawing/2014/main" id="{B1C38845-D73B-30F1-7A4A-C569AEADC57F}"/>
+          <p:cNvPr id="244" name="dept-alab">
+            <a:extLst>
+              <a:ext uri="{FF2B5EF4-FFF2-40B4-BE49-F238E27FC236}">
+                <a16:creationId xmlns:a16="http://schemas.microsoft.com/office/drawing/2014/main" id="{1A218CD5-AE96-A0BD-6A35-FCAA61BB3425}"/>
               </a:ext>
             </a:extLst>
           </p:cNvPr>
@@ -17561,10 +17260,10 @@
       </p:sp>
       <p:sp>
         <p:nvSpPr>
-          <p:cNvPr id="250" name="bar0">
-            <a:extLst>
-              <a:ext uri="{FF2B5EF4-FFF2-40B4-BE49-F238E27FC236}">
-                <a16:creationId xmlns:a16="http://schemas.microsoft.com/office/drawing/2014/main" id="{2E6324DE-E9DB-984C-499E-D625F4E445F9}"/>
+          <p:cNvPr id="245" name="bar0">
+            <a:extLst>
+              <a:ext uri="{FF2B5EF4-FFF2-40B4-BE49-F238E27FC236}">
+                <a16:creationId xmlns:a16="http://schemas.microsoft.com/office/drawing/2014/main" id="{9A1B7112-BA6E-4751-DBB6-B559CD43874D}"/>
               </a:ext>
             </a:extLst>
           </p:cNvPr>
@@ -17629,10 +17328,10 @@
       </p:sp>
       <p:sp>
         <p:nvSpPr>
-          <p:cNvPr id="251" name="bar0-v">
-            <a:extLst>
-              <a:ext uri="{FF2B5EF4-FFF2-40B4-BE49-F238E27FC236}">
-                <a16:creationId xmlns:a16="http://schemas.microsoft.com/office/drawing/2014/main" id="{C0FD9BF6-62CF-6EE5-3CA0-4EF5578BB503}"/>
+          <p:cNvPr id="246" name="bar0-v">
+            <a:extLst>
+              <a:ext uri="{FF2B5EF4-FFF2-40B4-BE49-F238E27FC236}">
+                <a16:creationId xmlns:a16="http://schemas.microsoft.com/office/drawing/2014/main" id="{7C1F5217-EFFC-7DA3-703F-57B2E6EF8CF5}"/>
               </a:ext>
             </a:extLst>
           </p:cNvPr>
@@ -17676,10 +17375,10 @@
       </p:sp>
       <p:sp>
         <p:nvSpPr>
-          <p:cNvPr id="252" name="bar0-l">
-            <a:extLst>
-              <a:ext uri="{FF2B5EF4-FFF2-40B4-BE49-F238E27FC236}">
-                <a16:creationId xmlns:a16="http://schemas.microsoft.com/office/drawing/2014/main" id="{0E50BE8D-F8B8-B6A1-DBE0-E731D77CB3CA}"/>
+          <p:cNvPr id="247" name="bar0-l">
+            <a:extLst>
+              <a:ext uri="{FF2B5EF4-FFF2-40B4-BE49-F238E27FC236}">
+                <a16:creationId xmlns:a16="http://schemas.microsoft.com/office/drawing/2014/main" id="{6F3F573D-E89B-15C3-C057-078528EC5F8B}"/>
               </a:ext>
             </a:extLst>
           </p:cNvPr>
@@ -17717,10 +17416,10 @@
       </p:sp>
       <p:sp>
         <p:nvSpPr>
-          <p:cNvPr id="253" name="bar1">
-            <a:extLst>
-              <a:ext uri="{FF2B5EF4-FFF2-40B4-BE49-F238E27FC236}">
-                <a16:creationId xmlns:a16="http://schemas.microsoft.com/office/drawing/2014/main" id="{6435C23F-6496-F2CC-EF6E-CD3D0FBEAE97}"/>
+          <p:cNvPr id="248" name="bar1">
+            <a:extLst>
+              <a:ext uri="{FF2B5EF4-FFF2-40B4-BE49-F238E27FC236}">
+                <a16:creationId xmlns:a16="http://schemas.microsoft.com/office/drawing/2014/main" id="{18AE60AA-3F87-FE7C-10F0-05EDA8543A4E}"/>
               </a:ext>
             </a:extLst>
           </p:cNvPr>
@@ -17785,10 +17484,10 @@
       </p:sp>
       <p:sp>
         <p:nvSpPr>
-          <p:cNvPr id="254" name="bar1-v">
-            <a:extLst>
-              <a:ext uri="{FF2B5EF4-FFF2-40B4-BE49-F238E27FC236}">
-                <a16:creationId xmlns:a16="http://schemas.microsoft.com/office/drawing/2014/main" id="{287EB071-6FFD-B759-B52A-52D0B549640E}"/>
+          <p:cNvPr id="249" name="bar1-v">
+            <a:extLst>
+              <a:ext uri="{FF2B5EF4-FFF2-40B4-BE49-F238E27FC236}">
+                <a16:creationId xmlns:a16="http://schemas.microsoft.com/office/drawing/2014/main" id="{2355A9F3-930B-060C-A552-48163FEA2E12}"/>
               </a:ext>
             </a:extLst>
           </p:cNvPr>
@@ -17832,10 +17531,10 @@
       </p:sp>
       <p:sp>
         <p:nvSpPr>
-          <p:cNvPr id="255" name="bar1-l">
-            <a:extLst>
-              <a:ext uri="{FF2B5EF4-FFF2-40B4-BE49-F238E27FC236}">
-                <a16:creationId xmlns:a16="http://schemas.microsoft.com/office/drawing/2014/main" id="{ADED6814-A765-E999-868B-A15CFDD445B2}"/>
+          <p:cNvPr id="250" name="bar1-l">
+            <a:extLst>
+              <a:ext uri="{FF2B5EF4-FFF2-40B4-BE49-F238E27FC236}">
+                <a16:creationId xmlns:a16="http://schemas.microsoft.com/office/drawing/2014/main" id="{F761BCB7-176B-A2D7-CFBE-11678655E7C1}"/>
               </a:ext>
             </a:extLst>
           </p:cNvPr>
@@ -17873,10 +17572,10 @@
       </p:sp>
       <p:sp>
         <p:nvSpPr>
-          <p:cNvPr id="256" name="bar2">
-            <a:extLst>
-              <a:ext uri="{FF2B5EF4-FFF2-40B4-BE49-F238E27FC236}">
-                <a16:creationId xmlns:a16="http://schemas.microsoft.com/office/drawing/2014/main" id="{14209073-9353-7229-8B7A-58787B03F888}"/>
+          <p:cNvPr id="251" name="bar2">
+            <a:extLst>
+              <a:ext uri="{FF2B5EF4-FFF2-40B4-BE49-F238E27FC236}">
+                <a16:creationId xmlns:a16="http://schemas.microsoft.com/office/drawing/2014/main" id="{EC760EC7-5672-3D64-E671-2CB24954E55F}"/>
               </a:ext>
             </a:extLst>
           </p:cNvPr>
@@ -17941,10 +17640,10 @@
       </p:sp>
       <p:sp>
         <p:nvSpPr>
-          <p:cNvPr id="257" name="bar2-v">
-            <a:extLst>
-              <a:ext uri="{FF2B5EF4-FFF2-40B4-BE49-F238E27FC236}">
-                <a16:creationId xmlns:a16="http://schemas.microsoft.com/office/drawing/2014/main" id="{B8F49D6A-FD18-7E7B-F879-DAE45033DB7B}"/>
+          <p:cNvPr id="252" name="bar2-v">
+            <a:extLst>
+              <a:ext uri="{FF2B5EF4-FFF2-40B4-BE49-F238E27FC236}">
+                <a16:creationId xmlns:a16="http://schemas.microsoft.com/office/drawing/2014/main" id="{1B756775-22E5-5F0E-4924-2C62445EEFB4}"/>
               </a:ext>
             </a:extLst>
           </p:cNvPr>
@@ -17988,10 +17687,10 @@
       </p:sp>
       <p:sp>
         <p:nvSpPr>
-          <p:cNvPr id="258" name="bar2-l">
-            <a:extLst>
-              <a:ext uri="{FF2B5EF4-FFF2-40B4-BE49-F238E27FC236}">
-                <a16:creationId xmlns:a16="http://schemas.microsoft.com/office/drawing/2014/main" id="{6607DE1A-B125-54A5-F834-92C380113A73}"/>
+          <p:cNvPr id="253" name="bar2-l">
+            <a:extLst>
+              <a:ext uri="{FF2B5EF4-FFF2-40B4-BE49-F238E27FC236}">
+                <a16:creationId xmlns:a16="http://schemas.microsoft.com/office/drawing/2014/main" id="{DA700D9C-56AB-1BCB-23B5-0AE958379960}"/>
               </a:ext>
             </a:extLst>
           </p:cNvPr>
@@ -18029,10 +17728,10 @@
       </p:sp>
       <p:sp>
         <p:nvSpPr>
-          <p:cNvPr id="259" name="dept-an">
-            <a:extLst>
-              <a:ext uri="{FF2B5EF4-FFF2-40B4-BE49-F238E27FC236}">
-                <a16:creationId xmlns:a16="http://schemas.microsoft.com/office/drawing/2014/main" id="{034D4876-0B32-5BE0-A587-57E06EFAFC91}"/>
+          <p:cNvPr id="254" name="dept-an">
+            <a:extLst>
+              <a:ext uri="{FF2B5EF4-FFF2-40B4-BE49-F238E27FC236}">
+                <a16:creationId xmlns:a16="http://schemas.microsoft.com/office/drawing/2014/main" id="{45E7995A-CE39-287D-9E7E-6EEF5A01930F}"/>
               </a:ext>
             </a:extLst>
           </p:cNvPr>
@@ -18069,10 +17768,10 @@
       </p:sp>
       <p:sp>
         <p:nvSpPr>
-          <p:cNvPr id="260" name="biz-leg1">
-            <a:extLst>
-              <a:ext uri="{FF2B5EF4-FFF2-40B4-BE49-F238E27FC236}">
-                <a16:creationId xmlns:a16="http://schemas.microsoft.com/office/drawing/2014/main" id="{40780EBF-C993-28A6-B012-C41AB137AA98}"/>
+          <p:cNvPr id="255" name="biz-leg1">
+            <a:extLst>
+              <a:ext uri="{FF2B5EF4-FFF2-40B4-BE49-F238E27FC236}">
+                <a16:creationId xmlns:a16="http://schemas.microsoft.com/office/drawing/2014/main" id="{FA561A3C-2617-D9EF-3790-7839CA129991}"/>
               </a:ext>
             </a:extLst>
           </p:cNvPr>
@@ -18109,10 +17808,10 @@
       </p:sp>
       <p:sp>
         <p:nvSpPr>
-          <p:cNvPr id="261" name="biz-dot1">
-            <a:extLst>
-              <a:ext uri="{FF2B5EF4-FFF2-40B4-BE49-F238E27FC236}">
-                <a16:creationId xmlns:a16="http://schemas.microsoft.com/office/drawing/2014/main" id="{914F33FD-AB59-235F-E57F-A6A0FDDC3976}"/>
+          <p:cNvPr id="256" name="biz-dot1">
+            <a:extLst>
+              <a:ext uri="{FF2B5EF4-FFF2-40B4-BE49-F238E27FC236}">
+                <a16:creationId xmlns:a16="http://schemas.microsoft.com/office/drawing/2014/main" id="{BA94FF44-F4C8-4B6A-946C-E39CCB49B7AD}"/>
               </a:ext>
             </a:extLst>
           </p:cNvPr>
@@ -18177,10 +17876,10 @@
       </p:sp>
       <p:sp>
         <p:nvSpPr>
-          <p:cNvPr id="262" name="biz-leg2">
-            <a:extLst>
-              <a:ext uri="{FF2B5EF4-FFF2-40B4-BE49-F238E27FC236}">
-                <a16:creationId xmlns:a16="http://schemas.microsoft.com/office/drawing/2014/main" id="{610DD1C3-5EAC-8194-C8CC-C0B6A8EB9603}"/>
+          <p:cNvPr id="257" name="biz-leg2">
+            <a:extLst>
+              <a:ext uri="{FF2B5EF4-FFF2-40B4-BE49-F238E27FC236}">
+                <a16:creationId xmlns:a16="http://schemas.microsoft.com/office/drawing/2014/main" id="{226D372A-7088-9610-27D4-14D57F6653E9}"/>
               </a:ext>
             </a:extLst>
           </p:cNvPr>
@@ -18217,10 +17916,10 @@
       </p:sp>
       <p:sp>
         <p:nvSpPr>
-          <p:cNvPr id="263" name="biz-dot2">
-            <a:extLst>
-              <a:ext uri="{FF2B5EF4-FFF2-40B4-BE49-F238E27FC236}">
-                <a16:creationId xmlns:a16="http://schemas.microsoft.com/office/drawing/2014/main" id="{8A04BE9A-45DF-ED7D-CB5C-8F9685590654}"/>
+          <p:cNvPr id="258" name="biz-dot2">
+            <a:extLst>
+              <a:ext uri="{FF2B5EF4-FFF2-40B4-BE49-F238E27FC236}">
+                <a16:creationId xmlns:a16="http://schemas.microsoft.com/office/drawing/2014/main" id="{7F661281-CA85-5F49-8C5F-412E327A1894}"/>
               </a:ext>
             </a:extLst>
           </p:cNvPr>
@@ -18285,10 +17984,10 @@
       </p:sp>
       <p:sp>
         <p:nvSpPr>
-          <p:cNvPr id="264" name="pr0-n">
-            <a:extLst>
-              <a:ext uri="{FF2B5EF4-FFF2-40B4-BE49-F238E27FC236}">
-                <a16:creationId xmlns:a16="http://schemas.microsoft.com/office/drawing/2014/main" id="{4D9D20F2-738A-EA71-B15B-AA5B9989BCA4}"/>
+          <p:cNvPr id="259" name="pr0-n">
+            <a:extLst>
+              <a:ext uri="{FF2B5EF4-FFF2-40B4-BE49-F238E27FC236}">
+                <a16:creationId xmlns:a16="http://schemas.microsoft.com/office/drawing/2014/main" id="{1AAF4245-D56B-D851-EF09-A4F3D64CE228}"/>
               </a:ext>
             </a:extLst>
           </p:cNvPr>
@@ -18325,10 +18024,10 @@
       </p:sp>
       <p:sp>
         <p:nvSpPr>
-          <p:cNvPr id="265" name="pr0-bg">
-            <a:extLst>
-              <a:ext uri="{FF2B5EF4-FFF2-40B4-BE49-F238E27FC236}">
-                <a16:creationId xmlns:a16="http://schemas.microsoft.com/office/drawing/2014/main" id="{10E3BB97-4197-7BBD-FC05-AC9F77D851CD}"/>
+          <p:cNvPr id="260" name="pr0-bg">
+            <a:extLst>
+              <a:ext uri="{FF2B5EF4-FFF2-40B4-BE49-F238E27FC236}">
+                <a16:creationId xmlns:a16="http://schemas.microsoft.com/office/drawing/2014/main" id="{E5F1F0ED-7D6B-C17D-0DD1-F7B9AD44F085}"/>
               </a:ext>
             </a:extLst>
           </p:cNvPr>
@@ -18393,10 +18092,10 @@
       </p:sp>
       <p:sp>
         <p:nvSpPr>
-          <p:cNvPr id="266" name="pr0-a">
-            <a:extLst>
-              <a:ext uri="{FF2B5EF4-FFF2-40B4-BE49-F238E27FC236}">
-                <a16:creationId xmlns:a16="http://schemas.microsoft.com/office/drawing/2014/main" id="{A1E959D1-C6F5-7479-BE71-CBC44BD44FD4}"/>
+          <p:cNvPr id="261" name="pr0-a">
+            <a:extLst>
+              <a:ext uri="{FF2B5EF4-FFF2-40B4-BE49-F238E27FC236}">
+                <a16:creationId xmlns:a16="http://schemas.microsoft.com/office/drawing/2014/main" id="{B7F46C79-8D4E-2AA4-AAC5-E219F84CA381}"/>
               </a:ext>
             </a:extLst>
           </p:cNvPr>
@@ -18461,10 +18160,10 @@
       </p:sp>
       <p:sp>
         <p:nvSpPr>
-          <p:cNvPr id="267" name="pr0-b">
-            <a:extLst>
-              <a:ext uri="{FF2B5EF4-FFF2-40B4-BE49-F238E27FC236}">
-                <a16:creationId xmlns:a16="http://schemas.microsoft.com/office/drawing/2014/main" id="{4567771D-048A-FE69-52DD-015BEFBEAFC3}"/>
+          <p:cNvPr id="262" name="pr0-b">
+            <a:extLst>
+              <a:ext uri="{FF2B5EF4-FFF2-40B4-BE49-F238E27FC236}">
+                <a16:creationId xmlns:a16="http://schemas.microsoft.com/office/drawing/2014/main" id="{19FD69A2-BD7E-5482-5691-CBED417A822C}"/>
               </a:ext>
             </a:extLst>
           </p:cNvPr>
@@ -18529,10 +18228,10 @@
       </p:sp>
       <p:cxnSp>
         <p:nvCxnSpPr>
-          <p:cNvPr id="268" name="pr0-t">
-            <a:extLst>
-              <a:ext uri="{FF2B5EF4-FFF2-40B4-BE49-F238E27FC236}">
-                <a16:creationId xmlns:a16="http://schemas.microsoft.com/office/drawing/2014/main" id="{EA025DAC-E40D-C124-0985-76C1912D8FE9}"/>
+          <p:cNvPr id="263" name="pr0-t">
+            <a:extLst>
+              <a:ext uri="{FF2B5EF4-FFF2-40B4-BE49-F238E27FC236}">
+                <a16:creationId xmlns:a16="http://schemas.microsoft.com/office/drawing/2014/main" id="{5F457915-BB4D-9639-8177-498EDB19FEA1}"/>
               </a:ext>
             </a:extLst>
           </p:cNvPr>
@@ -18570,10 +18269,10 @@
       </p:cxnSp>
       <p:sp>
         <p:nvSpPr>
-          <p:cNvPr id="269" name="pr1-n">
-            <a:extLst>
-              <a:ext uri="{FF2B5EF4-FFF2-40B4-BE49-F238E27FC236}">
-                <a16:creationId xmlns:a16="http://schemas.microsoft.com/office/drawing/2014/main" id="{FCCC4CB2-47F0-8495-E513-90602CCF5C67}"/>
+          <p:cNvPr id="264" name="pr1-n">
+            <a:extLst>
+              <a:ext uri="{FF2B5EF4-FFF2-40B4-BE49-F238E27FC236}">
+                <a16:creationId xmlns:a16="http://schemas.microsoft.com/office/drawing/2014/main" id="{807F5A3B-EF9D-7463-4EB7-A58C40764237}"/>
               </a:ext>
             </a:extLst>
           </p:cNvPr>
@@ -18610,10 +18309,10 @@
       </p:sp>
       <p:sp>
         <p:nvSpPr>
-          <p:cNvPr id="270" name="pr1-bg">
-            <a:extLst>
-              <a:ext uri="{FF2B5EF4-FFF2-40B4-BE49-F238E27FC236}">
-                <a16:creationId xmlns:a16="http://schemas.microsoft.com/office/drawing/2014/main" id="{81B0708E-6763-5F1C-659C-D4C45CB53993}"/>
+          <p:cNvPr id="265" name="pr1-bg">
+            <a:extLst>
+              <a:ext uri="{FF2B5EF4-FFF2-40B4-BE49-F238E27FC236}">
+                <a16:creationId xmlns:a16="http://schemas.microsoft.com/office/drawing/2014/main" id="{475FC126-D2B4-0FD3-7CFB-1AF25DAAD905}"/>
               </a:ext>
             </a:extLst>
           </p:cNvPr>
@@ -18678,10 +18377,10 @@
       </p:sp>
       <p:sp>
         <p:nvSpPr>
-          <p:cNvPr id="271" name="pr1-a">
-            <a:extLst>
-              <a:ext uri="{FF2B5EF4-FFF2-40B4-BE49-F238E27FC236}">
-                <a16:creationId xmlns:a16="http://schemas.microsoft.com/office/drawing/2014/main" id="{CD3F3E7B-D186-5563-0AAF-5988F1D46A82}"/>
+          <p:cNvPr id="266" name="pr1-a">
+            <a:extLst>
+              <a:ext uri="{FF2B5EF4-FFF2-40B4-BE49-F238E27FC236}">
+                <a16:creationId xmlns:a16="http://schemas.microsoft.com/office/drawing/2014/main" id="{AD5285A6-68D4-64F0-C003-8B381B2ACE77}"/>
               </a:ext>
             </a:extLst>
           </p:cNvPr>
@@ -18746,10 +18445,10 @@
       </p:sp>
       <p:sp>
         <p:nvSpPr>
-          <p:cNvPr id="272" name="pr1-b">
-            <a:extLst>
-              <a:ext uri="{FF2B5EF4-FFF2-40B4-BE49-F238E27FC236}">
-                <a16:creationId xmlns:a16="http://schemas.microsoft.com/office/drawing/2014/main" id="{E3BC82B4-4EC4-A881-4D9B-CB3CA952709E}"/>
+          <p:cNvPr id="267" name="pr1-b">
+            <a:extLst>
+              <a:ext uri="{FF2B5EF4-FFF2-40B4-BE49-F238E27FC236}">
+                <a16:creationId xmlns:a16="http://schemas.microsoft.com/office/drawing/2014/main" id="{222634D4-BE7B-38C9-1C04-EC41614A579D}"/>
               </a:ext>
             </a:extLst>
           </p:cNvPr>
@@ -18814,10 +18513,10 @@
       </p:sp>
       <p:cxnSp>
         <p:nvCxnSpPr>
-          <p:cNvPr id="273" name="pr1-t">
-            <a:extLst>
-              <a:ext uri="{FF2B5EF4-FFF2-40B4-BE49-F238E27FC236}">
-                <a16:creationId xmlns:a16="http://schemas.microsoft.com/office/drawing/2014/main" id="{4FE62EC5-E1FB-6C90-99A7-D013025D513D}"/>
+          <p:cNvPr id="268" name="pr1-t">
+            <a:extLst>
+              <a:ext uri="{FF2B5EF4-FFF2-40B4-BE49-F238E27FC236}">
+                <a16:creationId xmlns:a16="http://schemas.microsoft.com/office/drawing/2014/main" id="{D3F88949-1070-7AFF-7970-67F4C29B9422}"/>
               </a:ext>
             </a:extLst>
           </p:cNvPr>
@@ -18855,10 +18554,10 @@
       </p:cxnSp>
       <p:sp>
         <p:nvSpPr>
-          <p:cNvPr id="274" name="pr2-n">
-            <a:extLst>
-              <a:ext uri="{FF2B5EF4-FFF2-40B4-BE49-F238E27FC236}">
-                <a16:creationId xmlns:a16="http://schemas.microsoft.com/office/drawing/2014/main" id="{0A517106-A30C-12AE-BBF6-D2372724D76B}"/>
+          <p:cNvPr id="269" name="pr2-n">
+            <a:extLst>
+              <a:ext uri="{FF2B5EF4-FFF2-40B4-BE49-F238E27FC236}">
+                <a16:creationId xmlns:a16="http://schemas.microsoft.com/office/drawing/2014/main" id="{5B11C9B9-51EB-FD6E-AF74-DDD54B13054F}"/>
               </a:ext>
             </a:extLst>
           </p:cNvPr>
@@ -18895,10 +18594,10 @@
       </p:sp>
       <p:sp>
         <p:nvSpPr>
-          <p:cNvPr id="275" name="pr2-bg">
-            <a:extLst>
-              <a:ext uri="{FF2B5EF4-FFF2-40B4-BE49-F238E27FC236}">
-                <a16:creationId xmlns:a16="http://schemas.microsoft.com/office/drawing/2014/main" id="{9FDA868F-9365-15D0-7EA0-04CA83631F19}"/>
+          <p:cNvPr id="270" name="pr2-bg">
+            <a:extLst>
+              <a:ext uri="{FF2B5EF4-FFF2-40B4-BE49-F238E27FC236}">
+                <a16:creationId xmlns:a16="http://schemas.microsoft.com/office/drawing/2014/main" id="{FE06B475-A674-3A90-20AF-B700622B7FF2}"/>
               </a:ext>
             </a:extLst>
           </p:cNvPr>
@@ -18963,10 +18662,10 @@
       </p:sp>
       <p:sp>
         <p:nvSpPr>
-          <p:cNvPr id="276" name="pr2-a">
-            <a:extLst>
-              <a:ext uri="{FF2B5EF4-FFF2-40B4-BE49-F238E27FC236}">
-                <a16:creationId xmlns:a16="http://schemas.microsoft.com/office/drawing/2014/main" id="{3EE89F02-9875-67E2-1998-1360A138F2BB}"/>
+          <p:cNvPr id="271" name="pr2-a">
+            <a:extLst>
+              <a:ext uri="{FF2B5EF4-FFF2-40B4-BE49-F238E27FC236}">
+                <a16:creationId xmlns:a16="http://schemas.microsoft.com/office/drawing/2014/main" id="{0745AABB-9311-7149-E5EE-FCDBABDEB1A1}"/>
               </a:ext>
             </a:extLst>
           </p:cNvPr>
@@ -19031,10 +18730,10 @@
       </p:sp>
       <p:sp>
         <p:nvSpPr>
-          <p:cNvPr id="277" name="pr2-b">
-            <a:extLst>
-              <a:ext uri="{FF2B5EF4-FFF2-40B4-BE49-F238E27FC236}">
-                <a16:creationId xmlns:a16="http://schemas.microsoft.com/office/drawing/2014/main" id="{210EC25D-3EA3-3075-D30A-16E6A425075B}"/>
+          <p:cNvPr id="272" name="pr2-b">
+            <a:extLst>
+              <a:ext uri="{FF2B5EF4-FFF2-40B4-BE49-F238E27FC236}">
+                <a16:creationId xmlns:a16="http://schemas.microsoft.com/office/drawing/2014/main" id="{8EC4D87F-744A-81A5-37E3-4D79CC3B2865}"/>
               </a:ext>
             </a:extLst>
           </p:cNvPr>
@@ -19099,10 +18798,10 @@
       </p:sp>
       <p:cxnSp>
         <p:nvCxnSpPr>
-          <p:cNvPr id="278" name="pr2-t">
-            <a:extLst>
-              <a:ext uri="{FF2B5EF4-FFF2-40B4-BE49-F238E27FC236}">
-                <a16:creationId xmlns:a16="http://schemas.microsoft.com/office/drawing/2014/main" id="{115A8146-4DC3-DFF8-B071-1E0EE0C0AA03}"/>
+          <p:cNvPr id="273" name="pr2-t">
+            <a:extLst>
+              <a:ext uri="{FF2B5EF4-FFF2-40B4-BE49-F238E27FC236}">
+                <a16:creationId xmlns:a16="http://schemas.microsoft.com/office/drawing/2014/main" id="{CA340A48-708C-C605-60AA-6403385ADF92}"/>
               </a:ext>
             </a:extLst>
           </p:cNvPr>
@@ -19140,10 +18839,10 @@
       </p:cxnSp>
       <p:sp>
         <p:nvSpPr>
-          <p:cNvPr id="279" name="pr3-n">
-            <a:extLst>
-              <a:ext uri="{FF2B5EF4-FFF2-40B4-BE49-F238E27FC236}">
-                <a16:creationId xmlns:a16="http://schemas.microsoft.com/office/drawing/2014/main" id="{557031DD-6F67-79BD-772A-88AA5356CA0E}"/>
+          <p:cNvPr id="274" name="pr3-n">
+            <a:extLst>
+              <a:ext uri="{FF2B5EF4-FFF2-40B4-BE49-F238E27FC236}">
+                <a16:creationId xmlns:a16="http://schemas.microsoft.com/office/drawing/2014/main" id="{50DB9480-65BB-9CBF-9C90-63FBF7CDBAD2}"/>
               </a:ext>
             </a:extLst>
           </p:cNvPr>
@@ -19186,10 +18885,10 @@
       </p:sp>
       <p:sp>
         <p:nvSpPr>
-          <p:cNvPr id="280" name="pr3-bg">
-            <a:extLst>
-              <a:ext uri="{FF2B5EF4-FFF2-40B4-BE49-F238E27FC236}">
-                <a16:creationId xmlns:a16="http://schemas.microsoft.com/office/drawing/2014/main" id="{E3C7E14A-EF34-4329-75D7-BD9F41ED180E}"/>
+          <p:cNvPr id="275" name="pr3-bg">
+            <a:extLst>
+              <a:ext uri="{FF2B5EF4-FFF2-40B4-BE49-F238E27FC236}">
+                <a16:creationId xmlns:a16="http://schemas.microsoft.com/office/drawing/2014/main" id="{74E87ACF-59B9-AB54-BE77-81B65427E2EC}"/>
               </a:ext>
             </a:extLst>
           </p:cNvPr>
@@ -19254,10 +18953,10 @@
       </p:sp>
       <p:sp>
         <p:nvSpPr>
-          <p:cNvPr id="281" name="pr3-a">
-            <a:extLst>
-              <a:ext uri="{FF2B5EF4-FFF2-40B4-BE49-F238E27FC236}">
-                <a16:creationId xmlns:a16="http://schemas.microsoft.com/office/drawing/2014/main" id="{D82221F7-01A2-CE6E-0F7B-A432CAAE8A1A}"/>
+          <p:cNvPr id="276" name="pr3-a">
+            <a:extLst>
+              <a:ext uri="{FF2B5EF4-FFF2-40B4-BE49-F238E27FC236}">
+                <a16:creationId xmlns:a16="http://schemas.microsoft.com/office/drawing/2014/main" id="{CF679C18-6F40-C03B-D630-F773206BC43D}"/>
               </a:ext>
             </a:extLst>
           </p:cNvPr>
@@ -19322,10 +19021,10 @@
       </p:sp>
       <p:sp>
         <p:nvSpPr>
-          <p:cNvPr id="282" name="pr3-b">
-            <a:extLst>
-              <a:ext uri="{FF2B5EF4-FFF2-40B4-BE49-F238E27FC236}">
-                <a16:creationId xmlns:a16="http://schemas.microsoft.com/office/drawing/2014/main" id="{1746CB6F-46DE-5119-055F-442D6A0AC988}"/>
+          <p:cNvPr id="277" name="pr3-b">
+            <a:extLst>
+              <a:ext uri="{FF2B5EF4-FFF2-40B4-BE49-F238E27FC236}">
+                <a16:creationId xmlns:a16="http://schemas.microsoft.com/office/drawing/2014/main" id="{ECF268AB-A2F6-0AD5-5DA1-88B6F6C1312C}"/>
               </a:ext>
             </a:extLst>
           </p:cNvPr>
@@ -19390,10 +19089,10 @@
       </p:sp>
       <p:cxnSp>
         <p:nvCxnSpPr>
-          <p:cNvPr id="283" name="pr3-t">
-            <a:extLst>
-              <a:ext uri="{FF2B5EF4-FFF2-40B4-BE49-F238E27FC236}">
-                <a16:creationId xmlns:a16="http://schemas.microsoft.com/office/drawing/2014/main" id="{2C4DA160-FC88-192B-871A-BC4C706EF7C4}"/>
+          <p:cNvPr id="278" name="pr3-t">
+            <a:extLst>
+              <a:ext uri="{FF2B5EF4-FFF2-40B4-BE49-F238E27FC236}">
+                <a16:creationId xmlns:a16="http://schemas.microsoft.com/office/drawing/2014/main" id="{73F08C33-62A7-B704-0D5C-320C9FD409D9}"/>
               </a:ext>
             </a:extLst>
           </p:cNvPr>
@@ -19431,10 +19130,10 @@
       </p:cxnSp>
       <p:sp>
         <p:nvSpPr>
-          <p:cNvPr id="284" name="pr4-n">
-            <a:extLst>
-              <a:ext uri="{FF2B5EF4-FFF2-40B4-BE49-F238E27FC236}">
-                <a16:creationId xmlns:a16="http://schemas.microsoft.com/office/drawing/2014/main" id="{AE515D36-0B27-FB6F-D2BB-BF951902BBC7}"/>
+          <p:cNvPr id="279" name="pr4-n">
+            <a:extLst>
+              <a:ext uri="{FF2B5EF4-FFF2-40B4-BE49-F238E27FC236}">
+                <a16:creationId xmlns:a16="http://schemas.microsoft.com/office/drawing/2014/main" id="{7F6671B3-2686-C63B-0BF8-4AABFAB73719}"/>
               </a:ext>
             </a:extLst>
           </p:cNvPr>
@@ -19471,10 +19170,10 @@
       </p:sp>
       <p:sp>
         <p:nvSpPr>
-          <p:cNvPr id="285" name="pr4-bg">
-            <a:extLst>
-              <a:ext uri="{FF2B5EF4-FFF2-40B4-BE49-F238E27FC236}">
-                <a16:creationId xmlns:a16="http://schemas.microsoft.com/office/drawing/2014/main" id="{29AC0BD5-4941-AD85-AAF8-AF20D7ED2699}"/>
+          <p:cNvPr id="280" name="pr4-bg">
+            <a:extLst>
+              <a:ext uri="{FF2B5EF4-FFF2-40B4-BE49-F238E27FC236}">
+                <a16:creationId xmlns:a16="http://schemas.microsoft.com/office/drawing/2014/main" id="{F615D44E-5DA1-7475-E9EF-9195EE22E607}"/>
               </a:ext>
             </a:extLst>
           </p:cNvPr>
@@ -19539,10 +19238,10 @@
       </p:sp>
       <p:sp>
         <p:nvSpPr>
-          <p:cNvPr id="286" name="pr4-a">
-            <a:extLst>
-              <a:ext uri="{FF2B5EF4-FFF2-40B4-BE49-F238E27FC236}">
-                <a16:creationId xmlns:a16="http://schemas.microsoft.com/office/drawing/2014/main" id="{55851CA8-F701-DA01-6A8B-5F8896CC1B7D}"/>
+          <p:cNvPr id="281" name="pr4-a">
+            <a:extLst>
+              <a:ext uri="{FF2B5EF4-FFF2-40B4-BE49-F238E27FC236}">
+                <a16:creationId xmlns:a16="http://schemas.microsoft.com/office/drawing/2014/main" id="{B944C24E-559B-8219-71DD-13395F3FD876}"/>
               </a:ext>
             </a:extLst>
           </p:cNvPr>
@@ -19607,10 +19306,10 @@
       </p:sp>
       <p:sp>
         <p:nvSpPr>
-          <p:cNvPr id="287" name="pr4-b">
-            <a:extLst>
-              <a:ext uri="{FF2B5EF4-FFF2-40B4-BE49-F238E27FC236}">
-                <a16:creationId xmlns:a16="http://schemas.microsoft.com/office/drawing/2014/main" id="{E9B38F39-CB5B-3D05-4F54-4A9983B2ACA3}"/>
+          <p:cNvPr id="282" name="pr4-b">
+            <a:extLst>
+              <a:ext uri="{FF2B5EF4-FFF2-40B4-BE49-F238E27FC236}">
+                <a16:creationId xmlns:a16="http://schemas.microsoft.com/office/drawing/2014/main" id="{6ADD8458-4AE5-1B83-17FC-A2F7C1D3405C}"/>
               </a:ext>
             </a:extLst>
           </p:cNvPr>
@@ -19675,10 +19374,10 @@
       </p:sp>
       <p:cxnSp>
         <p:nvCxnSpPr>
-          <p:cNvPr id="288" name="pr4-t">
-            <a:extLst>
-              <a:ext uri="{FF2B5EF4-FFF2-40B4-BE49-F238E27FC236}">
-                <a16:creationId xmlns:a16="http://schemas.microsoft.com/office/drawing/2014/main" id="{E4EF1B23-1EA6-609E-D9A9-AB7B75F30068}"/>
+          <p:cNvPr id="283" name="pr4-t">
+            <a:extLst>
+              <a:ext uri="{FF2B5EF4-FFF2-40B4-BE49-F238E27FC236}">
+                <a16:creationId xmlns:a16="http://schemas.microsoft.com/office/drawing/2014/main" id="{3256099C-7A74-1239-488A-63234D7FDBE0}"/>
               </a:ext>
             </a:extLst>
           </p:cNvPr>
@@ -19716,10 +19415,10 @@
       </p:cxnSp>
       <p:sp>
         <p:nvSpPr>
-          <p:cNvPr id="289" name="pr5-n">
-            <a:extLst>
-              <a:ext uri="{FF2B5EF4-FFF2-40B4-BE49-F238E27FC236}">
-                <a16:creationId xmlns:a16="http://schemas.microsoft.com/office/drawing/2014/main" id="{5A7083D8-A28E-26FF-DFFA-3036A19A925C}"/>
+          <p:cNvPr id="284" name="pr5-n">
+            <a:extLst>
+              <a:ext uri="{FF2B5EF4-FFF2-40B4-BE49-F238E27FC236}">
+                <a16:creationId xmlns:a16="http://schemas.microsoft.com/office/drawing/2014/main" id="{AE31974D-B5AE-27A5-E4B2-648D7B14CC74}"/>
               </a:ext>
             </a:extLst>
           </p:cNvPr>
@@ -19756,10 +19455,10 @@
       </p:sp>
       <p:sp>
         <p:nvSpPr>
-          <p:cNvPr id="290" name="pr5-bg">
-            <a:extLst>
-              <a:ext uri="{FF2B5EF4-FFF2-40B4-BE49-F238E27FC236}">
-                <a16:creationId xmlns:a16="http://schemas.microsoft.com/office/drawing/2014/main" id="{86CEC63F-F34D-DF69-AE69-BE003F5A1D90}"/>
+          <p:cNvPr id="285" name="pr5-bg">
+            <a:extLst>
+              <a:ext uri="{FF2B5EF4-FFF2-40B4-BE49-F238E27FC236}">
+                <a16:creationId xmlns:a16="http://schemas.microsoft.com/office/drawing/2014/main" id="{845A73A1-8ACA-F424-2B0D-2D6C579C4F4B}"/>
               </a:ext>
             </a:extLst>
           </p:cNvPr>
@@ -19824,10 +19523,10 @@
       </p:sp>
       <p:sp>
         <p:nvSpPr>
-          <p:cNvPr id="291" name="pr5-a">
-            <a:extLst>
-              <a:ext uri="{FF2B5EF4-FFF2-40B4-BE49-F238E27FC236}">
-                <a16:creationId xmlns:a16="http://schemas.microsoft.com/office/drawing/2014/main" id="{A0FC9002-12BC-6D39-69CF-2AC0B7AD9D70}"/>
+          <p:cNvPr id="286" name="pr5-a">
+            <a:extLst>
+              <a:ext uri="{FF2B5EF4-FFF2-40B4-BE49-F238E27FC236}">
+                <a16:creationId xmlns:a16="http://schemas.microsoft.com/office/drawing/2014/main" id="{7F18ACFF-2578-96A8-D6A9-F71CD8FCE6FE}"/>
               </a:ext>
             </a:extLst>
           </p:cNvPr>
@@ -19892,10 +19591,10 @@
       </p:sp>
       <p:sp>
         <p:nvSpPr>
-          <p:cNvPr id="292" name="pr5-b">
-            <a:extLst>
-              <a:ext uri="{FF2B5EF4-FFF2-40B4-BE49-F238E27FC236}">
-                <a16:creationId xmlns:a16="http://schemas.microsoft.com/office/drawing/2014/main" id="{2C0161A3-35FC-EA57-625A-F2B057460362}"/>
+          <p:cNvPr id="287" name="pr5-b">
+            <a:extLst>
+              <a:ext uri="{FF2B5EF4-FFF2-40B4-BE49-F238E27FC236}">
+                <a16:creationId xmlns:a16="http://schemas.microsoft.com/office/drawing/2014/main" id="{07E13D15-9831-B2FA-380F-F3B70E0BA1BF}"/>
               </a:ext>
             </a:extLst>
           </p:cNvPr>
@@ -19960,10 +19659,10 @@
       </p:sp>
       <p:cxnSp>
         <p:nvCxnSpPr>
-          <p:cNvPr id="293" name="pr5-t">
-            <a:extLst>
-              <a:ext uri="{FF2B5EF4-FFF2-40B4-BE49-F238E27FC236}">
-                <a16:creationId xmlns:a16="http://schemas.microsoft.com/office/drawing/2014/main" id="{B3464409-ADBD-4911-39ED-D180D8D0BA4B}"/>
+          <p:cNvPr id="288" name="pr5-t">
+            <a:extLst>
+              <a:ext uri="{FF2B5EF4-FFF2-40B4-BE49-F238E27FC236}">
+                <a16:creationId xmlns:a16="http://schemas.microsoft.com/office/drawing/2014/main" id="{E301F7B7-B35C-4390-3FBC-967CEF78E797}"/>
               </a:ext>
             </a:extLst>
           </p:cNvPr>
@@ -20001,10 +19700,10 @@
       </p:cxnSp>
       <p:sp>
         <p:nvSpPr>
-          <p:cNvPr id="294" name="biz-an">
-            <a:extLst>
-              <a:ext uri="{FF2B5EF4-FFF2-40B4-BE49-F238E27FC236}">
-                <a16:creationId xmlns:a16="http://schemas.microsoft.com/office/drawing/2014/main" id="{0FAD21A6-40BA-95B6-1883-1E4CA66B949E}"/>
+          <p:cNvPr id="289" name="biz-an">
+            <a:extLst>
+              <a:ext uri="{FF2B5EF4-FFF2-40B4-BE49-F238E27FC236}">
+                <a16:creationId xmlns:a16="http://schemas.microsoft.com/office/drawing/2014/main" id="{CFF501BE-B2B7-E40E-9FAE-43F27B5D49CC}"/>
               </a:ext>
             </a:extLst>
           </p:cNvPr>
@@ -20059,10 +19758,10 @@
       </p:sp>
       <p:cxnSp>
         <p:nvCxnSpPr>
-          <p:cNvPr id="295" name="tr-base">
-            <a:extLst>
-              <a:ext uri="{FF2B5EF4-FFF2-40B4-BE49-F238E27FC236}">
-                <a16:creationId xmlns:a16="http://schemas.microsoft.com/office/drawing/2014/main" id="{EDEB4463-27EA-7414-F9DB-D920FB78996C}"/>
+          <p:cNvPr id="290" name="tr-base">
+            <a:extLst>
+              <a:ext uri="{FF2B5EF4-FFF2-40B4-BE49-F238E27FC236}">
+                <a16:creationId xmlns:a16="http://schemas.microsoft.com/office/drawing/2014/main" id="{BF065E0D-15EE-65DD-2B62-A6344577DA24}"/>
               </a:ext>
             </a:extLst>
           </p:cNvPr>
@@ -20072,7 +19771,7 @@
         <p:spPr>
           <a:xfrm>
             <a:off x="9240520" y="5492750"/>
-            <a:ext cx="2374900" cy="0"/>
+            <a:ext cx="1790700" cy="0"/>
           </a:xfrm>
           <a:prstGeom prst="line">
             <a:avLst/>
@@ -20100,10 +19799,10 @@
       </p:cxnSp>
       <p:cxnSp>
         <p:nvCxnSpPr>
-          <p:cNvPr id="296" name="tr-tgt">
-            <a:extLst>
-              <a:ext uri="{FF2B5EF4-FFF2-40B4-BE49-F238E27FC236}">
-                <a16:creationId xmlns:a16="http://schemas.microsoft.com/office/drawing/2014/main" id="{5B955B15-AB30-4345-B3F5-5A752A353BEB}"/>
+          <p:cNvPr id="291" name="tr-tgt">
+            <a:extLst>
+              <a:ext uri="{FF2B5EF4-FFF2-40B4-BE49-F238E27FC236}">
+                <a16:creationId xmlns:a16="http://schemas.microsoft.com/office/drawing/2014/main" id="{C9140EE9-3901-1C1C-9D07-60DD85D43800}"/>
               </a:ext>
             </a:extLst>
           </p:cNvPr>
@@ -20113,7 +19812,7 @@
         <p:spPr>
           <a:xfrm>
             <a:off x="9240520" y="5003800"/>
-            <a:ext cx="2374900" cy="0"/>
+            <a:ext cx="1790700" cy="0"/>
           </a:xfrm>
           <a:prstGeom prst="line">
             <a:avLst/>
@@ -20142,10 +19841,10 @@
       </p:cxnSp>
       <p:sp>
         <p:nvSpPr>
-          <p:cNvPr id="297" name="tr-30">
-            <a:extLst>
-              <a:ext uri="{FF2B5EF4-FFF2-40B4-BE49-F238E27FC236}">
-                <a16:creationId xmlns:a16="http://schemas.microsoft.com/office/drawing/2014/main" id="{F18F3A10-FF6C-B79C-651A-DCCEE5C5B946}"/>
+          <p:cNvPr id="292" name="tr-30">
+            <a:extLst>
+              <a:ext uri="{FF2B5EF4-FFF2-40B4-BE49-F238E27FC236}">
+                <a16:creationId xmlns:a16="http://schemas.microsoft.com/office/drawing/2014/main" id="{EC9777DD-30D9-2B60-C13A-81871AE173B0}"/>
               </a:ext>
             </a:extLst>
           </p:cNvPr>
@@ -20188,10 +19887,10 @@
       </p:sp>
       <p:sp>
         <p:nvSpPr>
-          <p:cNvPr id="298" name="tr-24">
-            <a:extLst>
-              <a:ext uri="{FF2B5EF4-FFF2-40B4-BE49-F238E27FC236}">
-                <a16:creationId xmlns:a16="http://schemas.microsoft.com/office/drawing/2014/main" id="{923A5E7C-8DDF-65B0-B910-0FA739823AFB}"/>
+          <p:cNvPr id="293" name="tr-24">
+            <a:extLst>
+              <a:ext uri="{FF2B5EF4-FFF2-40B4-BE49-F238E27FC236}">
+                <a16:creationId xmlns:a16="http://schemas.microsoft.com/office/drawing/2014/main" id="{3E9609C4-E067-0482-5E42-E1410CA1BD11}"/>
               </a:ext>
             </a:extLst>
           </p:cNvPr>
@@ -20234,10 +19933,10 @@
       </p:sp>
       <p:cxnSp>
         <p:nvCxnSpPr>
-          <p:cNvPr id="299" name="tr-team-l0">
-            <a:extLst>
-              <a:ext uri="{FF2B5EF4-FFF2-40B4-BE49-F238E27FC236}">
-                <a16:creationId xmlns:a16="http://schemas.microsoft.com/office/drawing/2014/main" id="{EEC4C53E-E927-F50D-D69A-C860E33D37AF}"/>
+          <p:cNvPr id="294" name="tr-team-l0">
+            <a:extLst>
+              <a:ext uri="{FF2B5EF4-FFF2-40B4-BE49-F238E27FC236}">
+                <a16:creationId xmlns:a16="http://schemas.microsoft.com/office/drawing/2014/main" id="{37F84E47-06B0-241D-77D1-1D751B3E5CC9}"/>
               </a:ext>
             </a:extLst>
           </p:cNvPr>
@@ -20246,8 +19945,8 @@
         </p:nvCxnSpPr>
         <p:spPr>
           <a:xfrm flipV="1">
-            <a:off x="9427845" y="5281839"/>
-            <a:ext cx="674159" cy="98425"/>
+            <a:off x="9359688" y="5281839"/>
+            <a:ext cx="515126" cy="98425"/>
           </a:xfrm>
           <a:prstGeom prst="line">
             <a:avLst/>
@@ -20275,10 +19974,10 @@
       </p:cxnSp>
       <p:cxnSp>
         <p:nvCxnSpPr>
-          <p:cNvPr id="300" name="tr-team-l1">
-            <a:extLst>
-              <a:ext uri="{FF2B5EF4-FFF2-40B4-BE49-F238E27FC236}">
-                <a16:creationId xmlns:a16="http://schemas.microsoft.com/office/drawing/2014/main" id="{647F66CE-118D-989D-243F-336015B55400}"/>
+          <p:cNvPr id="295" name="tr-team-l1">
+            <a:extLst>
+              <a:ext uri="{FF2B5EF4-FFF2-40B4-BE49-F238E27FC236}">
+                <a16:creationId xmlns:a16="http://schemas.microsoft.com/office/drawing/2014/main" id="{69656CD7-98C0-8DAB-FCB7-45E3235E04AA}"/>
               </a:ext>
             </a:extLst>
           </p:cNvPr>
@@ -20287,8 +19986,8 @@
         </p:nvCxnSpPr>
         <p:spPr>
           <a:xfrm flipV="1">
-            <a:off x="10102004" y="5162323"/>
-            <a:ext cx="674158" cy="119516"/>
+            <a:off x="9874814" y="5162323"/>
+            <a:ext cx="515126" cy="119516"/>
           </a:xfrm>
           <a:prstGeom prst="line">
             <a:avLst/>
@@ -20316,10 +20015,10 @@
       </p:cxnSp>
       <p:cxnSp>
         <p:nvCxnSpPr>
-          <p:cNvPr id="301" name="tr-team-l2">
-            <a:extLst>
-              <a:ext uri="{FF2B5EF4-FFF2-40B4-BE49-F238E27FC236}">
-                <a16:creationId xmlns:a16="http://schemas.microsoft.com/office/drawing/2014/main" id="{74C4514D-81B5-0FB7-5DE0-03913183991E}"/>
+          <p:cNvPr id="296" name="tr-team-l2">
+            <a:extLst>
+              <a:ext uri="{FF2B5EF4-FFF2-40B4-BE49-F238E27FC236}">
+                <a16:creationId xmlns:a16="http://schemas.microsoft.com/office/drawing/2014/main" id="{520611AF-C349-1E31-6553-5D84EF590249}"/>
               </a:ext>
             </a:extLst>
           </p:cNvPr>
@@ -20328,8 +20027,8 @@
         </p:nvCxnSpPr>
         <p:spPr>
           <a:xfrm flipV="1">
-            <a:off x="10776162" y="5007655"/>
-            <a:ext cx="674158" cy="154668"/>
+            <a:off x="10389940" y="5007655"/>
+            <a:ext cx="515127" cy="154668"/>
           </a:xfrm>
           <a:prstGeom prst="line">
             <a:avLst/>
@@ -20357,10 +20056,10 @@
       </p:cxnSp>
       <p:sp>
         <p:nvSpPr>
-          <p:cNvPr id="302" name="tr-team-p0">
-            <a:extLst>
-              <a:ext uri="{FF2B5EF4-FFF2-40B4-BE49-F238E27FC236}">
-                <a16:creationId xmlns:a16="http://schemas.microsoft.com/office/drawing/2014/main" id="{9927F399-2EC3-03AE-559E-B53E7C5BC2B5}"/>
+          <p:cNvPr id="297" name="tr-team-p0">
+            <a:extLst>
+              <a:ext uri="{FF2B5EF4-FFF2-40B4-BE49-F238E27FC236}">
+                <a16:creationId xmlns:a16="http://schemas.microsoft.com/office/drawing/2014/main" id="{DD0969D6-FBE8-3AD6-0A14-940E146B188B}"/>
               </a:ext>
             </a:extLst>
           </p:cNvPr>
@@ -20369,8 +20068,8 @@
         </p:nvSpPr>
         <p:spPr>
           <a:xfrm>
-            <a:off x="9404985" y="5357404"/>
-            <a:ext cx="45720" cy="45720"/>
+            <a:off x="9336829" y="5357404"/>
+            <a:ext cx="45719" cy="45720"/>
           </a:xfrm>
           <a:prstGeom prst="ellipse">
             <a:avLst/>
@@ -20425,10 +20124,10 @@
       </p:sp>
       <p:sp>
         <p:nvSpPr>
-          <p:cNvPr id="303" name="tr-team-p3">
-            <a:extLst>
-              <a:ext uri="{FF2B5EF4-FFF2-40B4-BE49-F238E27FC236}">
-                <a16:creationId xmlns:a16="http://schemas.microsoft.com/office/drawing/2014/main" id="{BC63CECD-ACCA-0B49-0F7F-D8682E8A8647}"/>
+          <p:cNvPr id="298" name="tr-team-p3">
+            <a:extLst>
+              <a:ext uri="{FF2B5EF4-FFF2-40B4-BE49-F238E27FC236}">
+                <a16:creationId xmlns:a16="http://schemas.microsoft.com/office/drawing/2014/main" id="{82BEC6C0-E5D5-8BAA-206E-E33F92D27296}"/>
               </a:ext>
             </a:extLst>
           </p:cNvPr>
@@ -20437,7 +20136,7 @@
         </p:nvSpPr>
         <p:spPr>
           <a:xfrm>
-            <a:off x="11427460" y="4984795"/>
+            <a:off x="10882206" y="4984795"/>
             <a:ext cx="45720" cy="45720"/>
           </a:xfrm>
           <a:prstGeom prst="ellipse">
@@ -20493,10 +20192,10 @@
       </p:sp>
       <p:cxnSp>
         <p:nvCxnSpPr>
-          <p:cNvPr id="304" name="tr-dept-l0">
-            <a:extLst>
-              <a:ext uri="{FF2B5EF4-FFF2-40B4-BE49-F238E27FC236}">
-                <a16:creationId xmlns:a16="http://schemas.microsoft.com/office/drawing/2014/main" id="{3AB976A1-9EB8-03C8-4ED4-6FD9E15769A2}"/>
+          <p:cNvPr id="299" name="tr-dept-l0">
+            <a:extLst>
+              <a:ext uri="{FF2B5EF4-FFF2-40B4-BE49-F238E27FC236}">
+                <a16:creationId xmlns:a16="http://schemas.microsoft.com/office/drawing/2014/main" id="{31391134-CB45-F288-CBE8-A826BADECB8A}"/>
               </a:ext>
             </a:extLst>
           </p:cNvPr>
@@ -20505,8 +20204,8 @@
         </p:nvCxnSpPr>
         <p:spPr>
           <a:xfrm flipV="1">
-            <a:off x="9427845" y="5225597"/>
-            <a:ext cx="674159" cy="84364"/>
+            <a:off x="9359688" y="5225597"/>
+            <a:ext cx="515126" cy="84364"/>
           </a:xfrm>
           <a:prstGeom prst="line">
             <a:avLst/>
@@ -20534,10 +20233,10 @@
       </p:cxnSp>
       <p:cxnSp>
         <p:nvCxnSpPr>
-          <p:cNvPr id="305" name="tr-dept-l1">
-            <a:extLst>
-              <a:ext uri="{FF2B5EF4-FFF2-40B4-BE49-F238E27FC236}">
-                <a16:creationId xmlns:a16="http://schemas.microsoft.com/office/drawing/2014/main" id="{4F0155E0-0E41-2FB7-5633-5ACC6AAED998}"/>
+          <p:cNvPr id="300" name="tr-dept-l1">
+            <a:extLst>
+              <a:ext uri="{FF2B5EF4-FFF2-40B4-BE49-F238E27FC236}">
+                <a16:creationId xmlns:a16="http://schemas.microsoft.com/office/drawing/2014/main" id="{E32051F3-264F-683E-C42E-80F3EBD3854A}"/>
               </a:ext>
             </a:extLst>
           </p:cNvPr>
@@ -20546,8 +20245,8 @@
         </p:nvCxnSpPr>
         <p:spPr>
           <a:xfrm flipV="1">
-            <a:off x="10102004" y="5120141"/>
-            <a:ext cx="674158" cy="105456"/>
+            <a:off x="9874814" y="5120141"/>
+            <a:ext cx="515126" cy="105456"/>
           </a:xfrm>
           <a:prstGeom prst="line">
             <a:avLst/>
@@ -20575,10 +20274,10 @@
       </p:cxnSp>
       <p:cxnSp>
         <p:nvCxnSpPr>
-          <p:cNvPr id="306" name="tr-dept-l2">
-            <a:extLst>
-              <a:ext uri="{FF2B5EF4-FFF2-40B4-BE49-F238E27FC236}">
-                <a16:creationId xmlns:a16="http://schemas.microsoft.com/office/drawing/2014/main" id="{BF67C3AD-1456-456F-A381-C8AAA9A274CE}"/>
+          <p:cNvPr id="301" name="tr-dept-l2">
+            <a:extLst>
+              <a:ext uri="{FF2B5EF4-FFF2-40B4-BE49-F238E27FC236}">
+                <a16:creationId xmlns:a16="http://schemas.microsoft.com/office/drawing/2014/main" id="{79EE9F0E-D654-AFB2-D201-68BD8922C896}"/>
               </a:ext>
             </a:extLst>
           </p:cNvPr>
@@ -20587,8 +20286,8 @@
         </p:nvCxnSpPr>
         <p:spPr>
           <a:xfrm flipV="1">
-            <a:off x="10776162" y="4972503"/>
-            <a:ext cx="674158" cy="147638"/>
+            <a:off x="10389940" y="4972503"/>
+            <a:ext cx="515127" cy="147638"/>
           </a:xfrm>
           <a:prstGeom prst="line">
             <a:avLst/>
@@ -20616,10 +20315,10 @@
       </p:cxnSp>
       <p:sp>
         <p:nvSpPr>
-          <p:cNvPr id="307" name="tr-dept-p0">
-            <a:extLst>
-              <a:ext uri="{FF2B5EF4-FFF2-40B4-BE49-F238E27FC236}">
-                <a16:creationId xmlns:a16="http://schemas.microsoft.com/office/drawing/2014/main" id="{BC3A4B14-42AD-2473-3358-A95CFA58ECC4}"/>
+          <p:cNvPr id="302" name="tr-dept-p0">
+            <a:extLst>
+              <a:ext uri="{FF2B5EF4-FFF2-40B4-BE49-F238E27FC236}">
+                <a16:creationId xmlns:a16="http://schemas.microsoft.com/office/drawing/2014/main" id="{D291E448-2191-7E3A-3CD7-65F8AEE90F5B}"/>
               </a:ext>
             </a:extLst>
           </p:cNvPr>
@@ -20628,8 +20327,8 @@
         </p:nvSpPr>
         <p:spPr>
           <a:xfrm>
-            <a:off x="9404985" y="5287101"/>
-            <a:ext cx="45720" cy="45720"/>
+            <a:off x="9336829" y="5287101"/>
+            <a:ext cx="45719" cy="45720"/>
           </a:xfrm>
           <a:prstGeom prst="ellipse">
             <a:avLst/>
@@ -20684,10 +20383,10 @@
       </p:sp>
       <p:sp>
         <p:nvSpPr>
-          <p:cNvPr id="308" name="tr-dept-p3">
-            <a:extLst>
-              <a:ext uri="{FF2B5EF4-FFF2-40B4-BE49-F238E27FC236}">
-                <a16:creationId xmlns:a16="http://schemas.microsoft.com/office/drawing/2014/main" id="{F0C0C38E-8CBB-3F67-71E3-C57937F3820F}"/>
+          <p:cNvPr id="303" name="tr-dept-p3">
+            <a:extLst>
+              <a:ext uri="{FF2B5EF4-FFF2-40B4-BE49-F238E27FC236}">
+                <a16:creationId xmlns:a16="http://schemas.microsoft.com/office/drawing/2014/main" id="{A1462791-9869-15B8-49FC-5A9BC185C657}"/>
               </a:ext>
             </a:extLst>
           </p:cNvPr>
@@ -20696,7 +20395,7 @@
         </p:nvSpPr>
         <p:spPr>
           <a:xfrm>
-            <a:off x="11427460" y="4949644"/>
+            <a:off x="10882206" y="4949644"/>
             <a:ext cx="45720" cy="45720"/>
           </a:xfrm>
           <a:prstGeom prst="ellipse">
@@ -20752,10 +20451,10 @@
       </p:sp>
       <p:cxnSp>
         <p:nvCxnSpPr>
-          <p:cNvPr id="309" name="tr-biz-l0">
-            <a:extLst>
-              <a:ext uri="{FF2B5EF4-FFF2-40B4-BE49-F238E27FC236}">
-                <a16:creationId xmlns:a16="http://schemas.microsoft.com/office/drawing/2014/main" id="{72BD3A06-5F33-8C6E-8AC4-D26C9527F181}"/>
+          <p:cNvPr id="304" name="tr-biz-l0">
+            <a:extLst>
+              <a:ext uri="{FF2B5EF4-FFF2-40B4-BE49-F238E27FC236}">
+                <a16:creationId xmlns:a16="http://schemas.microsoft.com/office/drawing/2014/main" id="{9ADE8CD9-7376-BB25-1F31-0217506FD8A8}"/>
               </a:ext>
             </a:extLst>
           </p:cNvPr>
@@ -20764,8 +20463,8 @@
         </p:nvCxnSpPr>
         <p:spPr>
           <a:xfrm flipV="1">
-            <a:off x="9427845" y="5253718"/>
-            <a:ext cx="674159" cy="84364"/>
+            <a:off x="9359688" y="5253718"/>
+            <a:ext cx="515126" cy="84364"/>
           </a:xfrm>
           <a:prstGeom prst="line">
             <a:avLst/>
@@ -20793,10 +20492,10 @@
       </p:cxnSp>
       <p:cxnSp>
         <p:nvCxnSpPr>
-          <p:cNvPr id="310" name="tr-biz-l1">
-            <a:extLst>
-              <a:ext uri="{FF2B5EF4-FFF2-40B4-BE49-F238E27FC236}">
-                <a16:creationId xmlns:a16="http://schemas.microsoft.com/office/drawing/2014/main" id="{620CB65E-F05B-F95D-EF1C-93E48E41B790}"/>
+          <p:cNvPr id="305" name="tr-biz-l1">
+            <a:extLst>
+              <a:ext uri="{FF2B5EF4-FFF2-40B4-BE49-F238E27FC236}">
+                <a16:creationId xmlns:a16="http://schemas.microsoft.com/office/drawing/2014/main" id="{CFB5BD4B-6089-3C92-1003-ECABBD83D329}"/>
               </a:ext>
             </a:extLst>
           </p:cNvPr>
@@ -20805,8 +20504,8 @@
         </p:nvCxnSpPr>
         <p:spPr>
           <a:xfrm flipV="1">
-            <a:off x="10102004" y="5141232"/>
-            <a:ext cx="674158" cy="112486"/>
+            <a:off x="9874814" y="5141232"/>
+            <a:ext cx="515126" cy="112486"/>
           </a:xfrm>
           <a:prstGeom prst="line">
             <a:avLst/>
@@ -20834,10 +20533,10 @@
       </p:cxnSp>
       <p:cxnSp>
         <p:nvCxnSpPr>
-          <p:cNvPr id="311" name="tr-biz-l2">
-            <a:extLst>
-              <a:ext uri="{FF2B5EF4-FFF2-40B4-BE49-F238E27FC236}">
-                <a16:creationId xmlns:a16="http://schemas.microsoft.com/office/drawing/2014/main" id="{2CDB878C-7293-F507-B88B-BF02F19845B9}"/>
+          <p:cNvPr id="306" name="tr-biz-l2">
+            <a:extLst>
+              <a:ext uri="{FF2B5EF4-FFF2-40B4-BE49-F238E27FC236}">
+                <a16:creationId xmlns:a16="http://schemas.microsoft.com/office/drawing/2014/main" id="{F37A5FAF-B54E-2FBB-0DBB-7A6799D62E02}"/>
               </a:ext>
             </a:extLst>
           </p:cNvPr>
@@ -20846,8 +20545,8 @@
         </p:nvCxnSpPr>
         <p:spPr>
           <a:xfrm flipV="1">
-            <a:off x="10776162" y="5028747"/>
-            <a:ext cx="674158" cy="112485"/>
+            <a:off x="10389940" y="5028747"/>
+            <a:ext cx="515127" cy="112485"/>
           </a:xfrm>
           <a:prstGeom prst="line">
             <a:avLst/>
@@ -20875,10 +20574,10 @@
       </p:cxnSp>
       <p:sp>
         <p:nvSpPr>
-          <p:cNvPr id="312" name="tr-biz-p0">
-            <a:extLst>
-              <a:ext uri="{FF2B5EF4-FFF2-40B4-BE49-F238E27FC236}">
-                <a16:creationId xmlns:a16="http://schemas.microsoft.com/office/drawing/2014/main" id="{166A4099-B7C4-E3D3-6206-E4AEAFB8ECD7}"/>
+          <p:cNvPr id="307" name="tr-biz-p0">
+            <a:extLst>
+              <a:ext uri="{FF2B5EF4-FFF2-40B4-BE49-F238E27FC236}">
+                <a16:creationId xmlns:a16="http://schemas.microsoft.com/office/drawing/2014/main" id="{856B0F9C-CAF9-65FC-E924-8F082C88B8EE}"/>
               </a:ext>
             </a:extLst>
           </p:cNvPr>
@@ -20887,8 +20586,8 @@
         </p:nvSpPr>
         <p:spPr>
           <a:xfrm>
-            <a:off x="9404985" y="5315222"/>
-            <a:ext cx="45720" cy="45720"/>
+            <a:off x="9336829" y="5315222"/>
+            <a:ext cx="45719" cy="45720"/>
           </a:xfrm>
           <a:prstGeom prst="ellipse">
             <a:avLst/>
@@ -20943,10 +20642,10 @@
       </p:sp>
       <p:sp>
         <p:nvSpPr>
-          <p:cNvPr id="313" name="tr-biz-p3">
-            <a:extLst>
-              <a:ext uri="{FF2B5EF4-FFF2-40B4-BE49-F238E27FC236}">
-                <a16:creationId xmlns:a16="http://schemas.microsoft.com/office/drawing/2014/main" id="{CDFC7472-9FF3-A8E8-673B-58A43751D4A2}"/>
+          <p:cNvPr id="308" name="tr-biz-p3">
+            <a:extLst>
+              <a:ext uri="{FF2B5EF4-FFF2-40B4-BE49-F238E27FC236}">
+                <a16:creationId xmlns:a16="http://schemas.microsoft.com/office/drawing/2014/main" id="{29274DBD-729B-4310-6AA0-9FA4B3A1DFA8}"/>
               </a:ext>
             </a:extLst>
           </p:cNvPr>
@@ -20955,7 +20654,7 @@
         </p:nvSpPr>
         <p:spPr>
           <a:xfrm>
-            <a:off x="11427460" y="5005886"/>
+            <a:off x="10882206" y="5005886"/>
             <a:ext cx="45720" cy="45720"/>
           </a:xfrm>
           <a:prstGeom prst="ellipse">
@@ -21011,10 +20710,10 @@
       </p:sp>
       <p:sp>
         <p:nvSpPr>
-          <p:cNvPr id="314" name="tr-m0">
-            <a:extLst>
-              <a:ext uri="{FF2B5EF4-FFF2-40B4-BE49-F238E27FC236}">
-                <a16:creationId xmlns:a16="http://schemas.microsoft.com/office/drawing/2014/main" id="{934BCF41-6C32-BDFB-C9A9-E5F55409B7A4}"/>
+          <p:cNvPr id="309" name="tr-m0">
+            <a:extLst>
+              <a:ext uri="{FF2B5EF4-FFF2-40B4-BE49-F238E27FC236}">
+                <a16:creationId xmlns:a16="http://schemas.microsoft.com/office/drawing/2014/main" id="{4F9AF384-FC51-0270-7257-101B9E1E1F37}"/>
               </a:ext>
             </a:extLst>
           </p:cNvPr>
@@ -21023,7 +20722,7 @@
         </p:nvSpPr>
         <p:spPr>
           <a:xfrm>
-            <a:off x="9300845" y="5664200"/>
+            <a:off x="9232688" y="5664200"/>
             <a:ext cx="279400" cy="117981"/>
           </a:xfrm>
           <a:prstGeom prst="rect">
@@ -21061,10 +20760,10 @@
       </p:sp>
       <p:sp>
         <p:nvSpPr>
-          <p:cNvPr id="315" name="tr-m1">
-            <a:extLst>
-              <a:ext uri="{FF2B5EF4-FFF2-40B4-BE49-F238E27FC236}">
-                <a16:creationId xmlns:a16="http://schemas.microsoft.com/office/drawing/2014/main" id="{AC9F11AB-798A-D090-90B4-ADDB82124D7D}"/>
+          <p:cNvPr id="310" name="tr-m1">
+            <a:extLst>
+              <a:ext uri="{FF2B5EF4-FFF2-40B4-BE49-F238E27FC236}">
+                <a16:creationId xmlns:a16="http://schemas.microsoft.com/office/drawing/2014/main" id="{99FA3150-4EE7-AE07-7830-E219B8CF12A7}"/>
               </a:ext>
             </a:extLst>
           </p:cNvPr>
@@ -21073,7 +20772,7 @@
         </p:nvSpPr>
         <p:spPr>
           <a:xfrm>
-            <a:off x="9975004" y="5664200"/>
+            <a:off x="9747814" y="5664200"/>
             <a:ext cx="279400" cy="117981"/>
           </a:xfrm>
           <a:prstGeom prst="rect">
@@ -21111,10 +20810,10 @@
       </p:sp>
       <p:sp>
         <p:nvSpPr>
-          <p:cNvPr id="316" name="tr-m2">
-            <a:extLst>
-              <a:ext uri="{FF2B5EF4-FFF2-40B4-BE49-F238E27FC236}">
-                <a16:creationId xmlns:a16="http://schemas.microsoft.com/office/drawing/2014/main" id="{5E91086C-E87C-37EF-DB64-A2900CB86B0C}"/>
+          <p:cNvPr id="311" name="tr-m2">
+            <a:extLst>
+              <a:ext uri="{FF2B5EF4-FFF2-40B4-BE49-F238E27FC236}">
+                <a16:creationId xmlns:a16="http://schemas.microsoft.com/office/drawing/2014/main" id="{C556CEB6-953E-AAC0-991C-26AF8AE59F10}"/>
               </a:ext>
             </a:extLst>
           </p:cNvPr>
@@ -21123,7 +20822,7 @@
         </p:nvSpPr>
         <p:spPr>
           <a:xfrm>
-            <a:off x="10649162" y="5664200"/>
+            <a:off x="10262940" y="5664200"/>
             <a:ext cx="279400" cy="117981"/>
           </a:xfrm>
           <a:prstGeom prst="rect">
@@ -21161,10 +20860,10 @@
       </p:sp>
       <p:sp>
         <p:nvSpPr>
-          <p:cNvPr id="317" name="tr-m3">
-            <a:extLst>
-              <a:ext uri="{FF2B5EF4-FFF2-40B4-BE49-F238E27FC236}">
-                <a16:creationId xmlns:a16="http://schemas.microsoft.com/office/drawing/2014/main" id="{129CC1DC-70C0-9F0F-797E-B26AA40307DA}"/>
+          <p:cNvPr id="312" name="tr-m3">
+            <a:extLst>
+              <a:ext uri="{FF2B5EF4-FFF2-40B4-BE49-F238E27FC236}">
+                <a16:creationId xmlns:a16="http://schemas.microsoft.com/office/drawing/2014/main" id="{9F7BA85E-7383-1CC4-975E-2E12618EB9E0}"/>
               </a:ext>
             </a:extLst>
           </p:cNvPr>
@@ -21173,7 +20872,7 @@
         </p:nvSpPr>
         <p:spPr>
           <a:xfrm>
-            <a:off x="11323320" y="5664200"/>
+            <a:off x="10778067" y="5664200"/>
             <a:ext cx="279400" cy="117981"/>
           </a:xfrm>
           <a:prstGeom prst="rect">
@@ -21211,10 +20910,10 @@
       </p:sp>
       <p:sp>
         <p:nvSpPr>
-          <p:cNvPr id="318" name="tr-lab1">
-            <a:extLst>
-              <a:ext uri="{FF2B5EF4-FFF2-40B4-BE49-F238E27FC236}">
-                <a16:creationId xmlns:a16="http://schemas.microsoft.com/office/drawing/2014/main" id="{C8309C61-82F9-D8F6-5214-75F456DA43C0}"/>
+          <p:cNvPr id="313" name="tr-lab1">
+            <a:extLst>
+              <a:ext uri="{FF2B5EF4-FFF2-40B4-BE49-F238E27FC236}">
+                <a16:creationId xmlns:a16="http://schemas.microsoft.com/office/drawing/2014/main" id="{AA5B182B-22ED-27A9-2340-3C07D5F2651C}"/>
               </a:ext>
             </a:extLst>
           </p:cNvPr>
@@ -21223,8 +20922,8 @@
         </p:nvSpPr>
         <p:spPr>
           <a:xfrm>
-            <a:off x="11005820" y="4927600"/>
-            <a:ext cx="635000" cy="117981"/>
+            <a:off x="11094720" y="4902200"/>
+            <a:ext cx="609600" cy="117981"/>
           </a:xfrm>
           <a:prstGeom prst="rect">
             <a:avLst/>
@@ -21237,7 +20936,6 @@
           </a:bodyPr>
           <a:lstStyle/>
           <a:p>
-            <a:pPr algn="r"/>
             <a:r>
               <a:rPr lang="zh-CN" altLang="en-US" sz="600" b="1">
                 <a:solidFill>
@@ -21267,10 +20965,10 @@
       </p:sp>
       <p:sp>
         <p:nvSpPr>
-          <p:cNvPr id="319" name="tr-lab2">
-            <a:extLst>
-              <a:ext uri="{FF2B5EF4-FFF2-40B4-BE49-F238E27FC236}">
-                <a16:creationId xmlns:a16="http://schemas.microsoft.com/office/drawing/2014/main" id="{264D59A3-2327-35E1-BBBD-54E4638167B6}"/>
+          <p:cNvPr id="314" name="tr-lab2">
+            <a:extLst>
+              <a:ext uri="{FF2B5EF4-FFF2-40B4-BE49-F238E27FC236}">
+                <a16:creationId xmlns:a16="http://schemas.microsoft.com/office/drawing/2014/main" id="{70B54946-A495-3CC1-E546-828E0DFAFE0F}"/>
               </a:ext>
             </a:extLst>
           </p:cNvPr>
@@ -21279,8 +20977,8 @@
         </p:nvSpPr>
         <p:spPr>
           <a:xfrm>
-            <a:off x="11005820" y="5054600"/>
-            <a:ext cx="635000" cy="117981"/>
+            <a:off x="11094720" y="5067300"/>
+            <a:ext cx="609600" cy="117981"/>
           </a:xfrm>
           <a:prstGeom prst="rect">
             <a:avLst/>
@@ -21293,7 +20991,6 @@
           </a:bodyPr>
           <a:lstStyle/>
           <a:p>
-            <a:pPr algn="r"/>
             <a:r>
               <a:rPr lang="zh-CN" altLang="en-US" sz="600" b="1">
                 <a:solidFill>
@@ -21323,10 +21020,10 @@
       </p:sp>
       <p:sp>
         <p:nvSpPr>
-          <p:cNvPr id="320" name="tr-lab3">
-            <a:extLst>
-              <a:ext uri="{FF2B5EF4-FFF2-40B4-BE49-F238E27FC236}">
-                <a16:creationId xmlns:a16="http://schemas.microsoft.com/office/drawing/2014/main" id="{3050CFE2-A288-31B0-A50B-2A496E410512}"/>
+          <p:cNvPr id="315" name="tr-lab3">
+            <a:extLst>
+              <a:ext uri="{FF2B5EF4-FFF2-40B4-BE49-F238E27FC236}">
+                <a16:creationId xmlns:a16="http://schemas.microsoft.com/office/drawing/2014/main" id="{9E213408-CEDC-6207-B300-C99E6966424D}"/>
               </a:ext>
             </a:extLst>
           </p:cNvPr>
@@ -21335,8 +21032,8 @@
         </p:nvSpPr>
         <p:spPr>
           <a:xfrm>
-            <a:off x="11005820" y="5181600"/>
-            <a:ext cx="635000" cy="117981"/>
+            <a:off x="11094720" y="5232400"/>
+            <a:ext cx="609600" cy="117981"/>
           </a:xfrm>
           <a:prstGeom prst="rect">
             <a:avLst/>
@@ -21349,7 +21046,6 @@
           </a:bodyPr>
           <a:lstStyle/>
           <a:p>
-            <a:pPr algn="r"/>
             <a:r>
               <a:rPr lang="zh-CN" altLang="en-US" sz="600" b="1">
                 <a:solidFill>
@@ -21379,10 +21075,10 @@
       </p:sp>
       <p:sp>
         <p:nvSpPr>
-          <p:cNvPr id="321" name="adv0">
-            <a:extLst>
-              <a:ext uri="{FF2B5EF4-FFF2-40B4-BE49-F238E27FC236}">
-                <a16:creationId xmlns:a16="http://schemas.microsoft.com/office/drawing/2014/main" id="{7A6DA8BE-DB18-6FAD-830C-0D625362E011}"/>
+          <p:cNvPr id="316" name="adv0">
+            <a:extLst>
+              <a:ext uri="{FF2B5EF4-FFF2-40B4-BE49-F238E27FC236}">
+                <a16:creationId xmlns:a16="http://schemas.microsoft.com/office/drawing/2014/main" id="{5A2C6ECF-902E-2826-61B7-3CA27DB27FEC}"/>
               </a:ext>
             </a:extLst>
           </p:cNvPr>
@@ -21447,10 +21143,10 @@
       </p:sp>
       <p:sp>
         <p:nvSpPr>
-          <p:cNvPr id="322" name="adv0-b">
-            <a:extLst>
-              <a:ext uri="{FF2B5EF4-FFF2-40B4-BE49-F238E27FC236}">
-                <a16:creationId xmlns:a16="http://schemas.microsoft.com/office/drawing/2014/main" id="{0230CF10-E4A7-CD40-A5E5-1B35933F9AC5}"/>
+          <p:cNvPr id="317" name="adv0-b">
+            <a:extLst>
+              <a:ext uri="{FF2B5EF4-FFF2-40B4-BE49-F238E27FC236}">
+                <a16:creationId xmlns:a16="http://schemas.microsoft.com/office/drawing/2014/main" id="{F80EC100-A6C6-4A6F-F0AF-4E927AC8425F}"/>
               </a:ext>
             </a:extLst>
           </p:cNvPr>
@@ -21515,10 +21211,10 @@
       </p:sp>
       <p:sp>
         <p:nvSpPr>
-          <p:cNvPr id="323" name="adv0-t">
-            <a:extLst>
-              <a:ext uri="{FF2B5EF4-FFF2-40B4-BE49-F238E27FC236}">
-                <a16:creationId xmlns:a16="http://schemas.microsoft.com/office/drawing/2014/main" id="{CF7E4BDC-3F76-3C02-8C4C-6FAE1C33C0C8}"/>
+          <p:cNvPr id="318" name="adv0-t">
+            <a:extLst>
+              <a:ext uri="{FF2B5EF4-FFF2-40B4-BE49-F238E27FC236}">
+                <a16:creationId xmlns:a16="http://schemas.microsoft.com/office/drawing/2014/main" id="{6314FC26-071D-FDE4-8EA1-F2CB25FBE511}"/>
               </a:ext>
             </a:extLst>
           </p:cNvPr>
@@ -21573,10 +21269,10 @@
       </p:sp>
       <p:sp>
         <p:nvSpPr>
-          <p:cNvPr id="324" name="adv1">
-            <a:extLst>
-              <a:ext uri="{FF2B5EF4-FFF2-40B4-BE49-F238E27FC236}">
-                <a16:creationId xmlns:a16="http://schemas.microsoft.com/office/drawing/2014/main" id="{2B4231C8-211F-FF33-D56C-F9A56DA225A3}"/>
+          <p:cNvPr id="319" name="adv1">
+            <a:extLst>
+              <a:ext uri="{FF2B5EF4-FFF2-40B4-BE49-F238E27FC236}">
+                <a16:creationId xmlns:a16="http://schemas.microsoft.com/office/drawing/2014/main" id="{B48A5BEB-F18A-D625-1290-5F62472237EC}"/>
               </a:ext>
             </a:extLst>
           </p:cNvPr>
@@ -21641,10 +21337,10 @@
       </p:sp>
       <p:sp>
         <p:nvSpPr>
-          <p:cNvPr id="325" name="adv1-b">
-            <a:extLst>
-              <a:ext uri="{FF2B5EF4-FFF2-40B4-BE49-F238E27FC236}">
-                <a16:creationId xmlns:a16="http://schemas.microsoft.com/office/drawing/2014/main" id="{8EC4A36B-388A-24BF-F0D5-D53BE3BF87BB}"/>
+          <p:cNvPr id="320" name="adv1-b">
+            <a:extLst>
+              <a:ext uri="{FF2B5EF4-FFF2-40B4-BE49-F238E27FC236}">
+                <a16:creationId xmlns:a16="http://schemas.microsoft.com/office/drawing/2014/main" id="{C3842EB3-C4B6-85D9-33F6-96CDAD2FCDD1}"/>
               </a:ext>
             </a:extLst>
           </p:cNvPr>
@@ -21709,10 +21405,10 @@
       </p:sp>
       <p:sp>
         <p:nvSpPr>
-          <p:cNvPr id="326" name="adv1-t">
-            <a:extLst>
-              <a:ext uri="{FF2B5EF4-FFF2-40B4-BE49-F238E27FC236}">
-                <a16:creationId xmlns:a16="http://schemas.microsoft.com/office/drawing/2014/main" id="{A170E54C-AFCA-9C2A-043C-8CC4996D5022}"/>
+          <p:cNvPr id="321" name="adv1-t">
+            <a:extLst>
+              <a:ext uri="{FF2B5EF4-FFF2-40B4-BE49-F238E27FC236}">
+                <a16:creationId xmlns:a16="http://schemas.microsoft.com/office/drawing/2014/main" id="{8690A5C4-26A4-03F7-5824-A1D8B8BC37F8}"/>
               </a:ext>
             </a:extLst>
           </p:cNvPr>
@@ -21767,10 +21463,10 @@
       </p:sp>
       <p:sp>
         <p:nvSpPr>
-          <p:cNvPr id="327" name="adv2">
-            <a:extLst>
-              <a:ext uri="{FF2B5EF4-FFF2-40B4-BE49-F238E27FC236}">
-                <a16:creationId xmlns:a16="http://schemas.microsoft.com/office/drawing/2014/main" id="{19D49974-636B-D3AB-BD21-49E74A945E65}"/>
+          <p:cNvPr id="322" name="adv2">
+            <a:extLst>
+              <a:ext uri="{FF2B5EF4-FFF2-40B4-BE49-F238E27FC236}">
+                <a16:creationId xmlns:a16="http://schemas.microsoft.com/office/drawing/2014/main" id="{A4FBDBE8-7216-8734-AC71-39F4E3E877CE}"/>
               </a:ext>
             </a:extLst>
           </p:cNvPr>
@@ -21835,10 +21531,10 @@
       </p:sp>
       <p:sp>
         <p:nvSpPr>
-          <p:cNvPr id="328" name="adv2-b">
-            <a:extLst>
-              <a:ext uri="{FF2B5EF4-FFF2-40B4-BE49-F238E27FC236}">
-                <a16:creationId xmlns:a16="http://schemas.microsoft.com/office/drawing/2014/main" id="{4C84D369-DA01-08EA-C888-2C2B647365BB}"/>
+          <p:cNvPr id="323" name="adv2-b">
+            <a:extLst>
+              <a:ext uri="{FF2B5EF4-FFF2-40B4-BE49-F238E27FC236}">
+                <a16:creationId xmlns:a16="http://schemas.microsoft.com/office/drawing/2014/main" id="{E9DFE723-678E-0F4F-C231-9EA6FC405DCE}"/>
               </a:ext>
             </a:extLst>
           </p:cNvPr>
@@ -21903,10 +21599,10 @@
       </p:sp>
       <p:sp>
         <p:nvSpPr>
-          <p:cNvPr id="329" name="adv2-t">
-            <a:extLst>
-              <a:ext uri="{FF2B5EF4-FFF2-40B4-BE49-F238E27FC236}">
-                <a16:creationId xmlns:a16="http://schemas.microsoft.com/office/drawing/2014/main" id="{81B65C5E-1C86-7EC2-98DF-D6AAF4E61CB4}"/>
+          <p:cNvPr id="324" name="adv2-t">
+            <a:extLst>
+              <a:ext uri="{FF2B5EF4-FFF2-40B4-BE49-F238E27FC236}">
+                <a16:creationId xmlns:a16="http://schemas.microsoft.com/office/drawing/2014/main" id="{86B0A63C-7C17-BB09-AC22-F2254AF6D87E}"/>
               </a:ext>
             </a:extLst>
           </p:cNvPr>
@@ -21997,10 +21693,10 @@
       </p:sp>
       <p:sp>
         <p:nvSpPr>
-          <p:cNvPr id="330" name="risk">
-            <a:extLst>
-              <a:ext uri="{FF2B5EF4-FFF2-40B4-BE49-F238E27FC236}">
-                <a16:creationId xmlns:a16="http://schemas.microsoft.com/office/drawing/2014/main" id="{895996B4-B9CC-B212-5976-C9CF8F25B4BE}"/>
+          <p:cNvPr id="325" name="risk">
+            <a:extLst>
+              <a:ext uri="{FF2B5EF4-FFF2-40B4-BE49-F238E27FC236}">
+                <a16:creationId xmlns:a16="http://schemas.microsoft.com/office/drawing/2014/main" id="{FCBA619D-01F0-C35F-E9EB-5AB7BACFEF21}"/>
               </a:ext>
             </a:extLst>
           </p:cNvPr>
@@ -22074,7 +21770,7 @@
     </p:spTree>
     <p:extLst>
       <p:ext uri="{BB962C8B-B14F-4D97-AF65-F5344CB8AC3E}">
-        <p14:creationId xmlns:p14="http://schemas.microsoft.com/office/powerpoint/2010/main" val="3010147785"/>
+        <p14:creationId xmlns:p14="http://schemas.microsoft.com/office/powerpoint/2010/main" val="938304791"/>
       </p:ext>
     </p:extLst>
   </p:cSld>
